--- a/slides/ME344_Final_Arnold_Hambuch.pptx
+++ b/slides/ME344_Final_Arnold_Hambuch.pptx
@@ -506,72 +506,87 @@
           <a:lstStyle/>
           <a:p>
             <a:r>
-              <a:t>LEONARD  (~45 s)</a:t>
+              <a:t>LEONARD  (~50 s)</a:t>
             </a:r>
           </a:p>
           <a:p/>
           <a:p>
             <a:r>
-              <a:t>"Our workload is a LoRA fine-tune of Qwen3 on CodiEsp — a thousand real Spanish</a:t>
-            </a:r>
-          </a:p>
-          <a:p>
-            <a:r>
-              <a:t>clinical case reports annotated with ICD-10 diagnosis codes, openly licensed.</a:t>
+              <a:t>"Some context first, because it explains why we picked this workload.</a:t>
             </a:r>
           </a:p>
           <a:p/>
           <a:p>
             <a:r>
-              <a:t>But we are not claiming to build a good coding model. The rubric awards nothing</a:t>
-            </a:r>
-          </a:p>
-          <a:p>
-            <a:r>
-              <a:t>for accuracy, and rightly so. What we are studying is the infrastructure around</a:t>
-            </a:r>
-          </a:p>
-          <a:p>
-            <a:r>
-              <a:t>the model.</a:t>
+              <a:t>We run a startup called Dr. Findus. German GPs have to attach billing and ICD-10</a:t>
+            </a:r>
+          </a:p>
+          <a:p>
+            <a:r>
+              <a:t>codes to every single consultation. We read the clinical note and propose the</a:t>
+            </a:r>
+          </a:p>
+          <a:p>
+            <a:r>
+              <a:t>codes — the physician confirms each one before anything is written, which is a</a:t>
+            </a:r>
+          </a:p>
+          <a:p>
+            <a:r>
+              <a:t>legal requirement here. For us reliability is the product: over-coding is not a</a:t>
+            </a:r>
+          </a:p>
+          <a:p>
+            <a:r>
+              <a:t>bug, it is fraud exposure.</a:t>
             </a:r>
           </a:p>
           <a:p/>
           <a:p>
             <a:r>
-              <a:t>The question we instrumented for is on the right: where does the time actually</a:t>
-            </a:r>
-          </a:p>
-          <a:p>
-            <a:r>
-              <a:t>go — and what does it take to run the job at all?</a:t>
+              <a:t>Today that runs on hosted APIs. The question we could not answer was whether it</a:t>
+            </a:r>
+          </a:p>
+          <a:p>
+            <a:r>
+              <a:t>could run on our own hardware, and what that would cost. That is an</a:t>
+            </a:r>
+          </a:p>
+          <a:p>
+            <a:r>
+              <a:t>infrastructure question, not a model question — so we built the workload and</a:t>
+            </a:r>
+          </a:p>
+          <a:p>
+            <a:r>
+              <a:t>measured it instead of guessing.</a:t>
             </a:r>
           </a:p>
           <a:p/>
           <a:p>
             <a:r>
-              <a:t>That second half turned out to matter more than we expected. At the small model</a:t>
-            </a:r>
-          </a:p>
-          <a:p>
-            <a:r>
-              <a:t>size all three backends run and the comparison is clean. At four billion</a:t>
-            </a:r>
-          </a:p>
-          <a:p>
-            <a:r>
-              <a:t>parameters the CPU does not run in any configuration we tried. Not slower —</a:t>
-            </a:r>
-          </a:p>
-          <a:p>
-            <a:r>
-              <a:t>impossible."</a:t>
+              <a:t>The workload is a LoRA fine-tune of Qwen3 on CodiEsp: a thousand real Spanish</a:t>
+            </a:r>
+          </a:p>
+          <a:p>
+            <a:r>
+              <a:t>clinical case reports annotated with ICD-10 codes. Eight gigabytes of weights,</a:t>
+            </a:r>
+          </a:p>
+          <a:p>
+            <a:r>
+              <a:t>cases up to two and a half thousand tokens, three backends, one JAX program.</a:t>
             </a:r>
           </a:p>
           <a:p/>
           <a:p>
             <a:r>
-              <a:t>→ hand over after the question, or continue straight into slide 2.</a:t>
+              <a:t>And to be clear about what is being graded: accuracy earns no marks. What we are</a:t>
+            </a:r>
+          </a:p>
+          <a:p>
+            <a:r>
+              <a:t>studying is where the time goes — and what it takes to run the job at all."</a:t>
             </a:r>
           </a:p>
         </p:txBody>
@@ -641,7 +656,7 @@
           <a:lstStyle/>
           <a:p>
             <a:r>
-              <a:t>LEONARD  (~55 s)</a:t>
+              <a:t>LEONARD  (~50 s)</a:t>
             </a:r>
           </a:p>
           <a:p/>
@@ -652,12 +667,12 @@
           </a:p>
           <a:p>
             <a:r>
-              <a:t>lowers it to three different backends — no per-backend reimplementation, which</a:t>
-            </a:r>
-          </a:p>
-          <a:p>
-            <a:r>
-              <a:t>is what makes the comparison honest.</a:t>
+              <a:t>lowers it to three different backends. No per-backend reimplementation — that is</a:t>
+            </a:r>
+          </a:p>
+          <a:p>
+            <a:r>
+              <a:t>what makes the comparison honest, because all three run literally the same code.</a:t>
             </a:r>
           </a:p>
           <a:p/>
@@ -679,17 +694,17 @@
           <a:p/>
           <a:p>
             <a:r>
-              <a:t>The storage tier is where one of our two headline results comes from. The eight</a:t>
-            </a:r>
-          </a:p>
-          <a:p>
-            <a:r>
-              <a:t>gigabyte checkpoint is read from a bucket over gcsfuse, and we exposed the file</a:t>
-            </a:r>
-          </a:p>
-          <a:p>
-            <a:r>
-              <a:t>cache as a knob rather than fixing it — because that knob turned out to be the</a:t>
+              <a:t>Storage is where one of our two headline results comes from. The eight-gigabyte</a:t>
+            </a:r>
+          </a:p>
+          <a:p>
+            <a:r>
+              <a:t>checkpoint is read from a bucket over gcsfuse, and we deliberately left the file</a:t>
+            </a:r>
+          </a:p>
+          <a:p>
+            <a:r>
+              <a:t>cache as a knob instead of fixing it — because that knob turned out to be the</a:t>
             </a:r>
           </a:p>
           <a:p>
@@ -700,18 +715,23 @@
           <a:p/>
           <a:p>
             <a:r>
-              <a:t>One thing worth flagging in the bottom row: the GH200 host is ARM64, not x86.</a:t>
-            </a:r>
-          </a:p>
-          <a:p>
-            <a:r>
-              <a:t>That single fact cost us five separate blockers, and I will come back to it."</a:t>
+              <a:t>One line to flag before Luis takes over: the GH200's host processor is ARM64,</a:t>
+            </a:r>
+          </a:p>
+          <a:p>
+            <a:r>
+              <a:t>not x86. That single fact cost us five separate blockers, and I will come back</a:t>
+            </a:r>
+          </a:p>
+          <a:p>
+            <a:r>
+              <a:t>to it at the end."</a:t>
             </a:r>
           </a:p>
           <a:p/>
           <a:p>
             <a:r>
-              <a:t>→ hand over to Luis at the end of this slide.</a:t>
+              <a:t>→ hand over to Luis.</a:t>
             </a:r>
           </a:p>
         </p:txBody>
@@ -787,38 +807,38 @@
           <a:p/>
           <a:p>
             <a:r>
-              <a:t>"We did not measure total runtime and divide. Every run decomposes its own wall</a:t>
-            </a:r>
-          </a:p>
-          <a:p>
-            <a:r>
-              <a:t>clock into six phases — scheduling, image pull, checkpoint load, XLA compile,</a:t>
-            </a:r>
-          </a:p>
-          <a:p>
-            <a:r>
-              <a:t>the steady-state steps, and checkpoint write. The chart on the right is that</a:t>
-            </a:r>
-          </a:p>
-          <a:p>
-            <a:r>
-              <a:t>decomposition.</a:t>
+              <a:t>"We did not measure total runtime and divide by steps. Every run takes its own</a:t>
+            </a:r>
+          </a:p>
+          <a:p>
+            <a:r>
+              <a:t>wall clock apart into six phases — scheduling, image pull, checkpoint load, XLA</a:t>
+            </a:r>
+          </a:p>
+          <a:p>
+            <a:r>
+              <a:t>compile, the steady-state steps, and checkpoint write. The chart on the right is</a:t>
+            </a:r>
+          </a:p>
+          <a:p>
+            <a:r>
+              <a:t>that decomposition for one run.</a:t>
             </a:r>
           </a:p>
           <a:p/>
           <a:p>
             <a:r>
-              <a:t>On top of it we swept batch size and sequence length until the job died, and we</a:t>
-            </a:r>
-          </a:p>
-          <a:p>
-            <a:r>
-              <a:t>keep the failed cell rather than dropping it, because the failure boundary is</a:t>
-            </a:r>
-          </a:p>
-          <a:p>
-            <a:r>
-              <a:t>exactly what the memory chart needs.</a:t>
+              <a:t>On top of it we swept batch size and sequence length until the job died. We keep</a:t>
+            </a:r>
+          </a:p>
+          <a:p>
+            <a:r>
+              <a:t>the failed cell rather than dropping it, because the failure boundary is exactly</a:t>
+            </a:r>
+          </a:p>
+          <a:p>
+            <a:r>
+              <a:t>what a memory chart needs.</a:t>
             </a:r>
           </a:p>
           <a:p/>
@@ -829,38 +849,43 @@
           </a:p>
           <a:p>
             <a:r>
-              <a:t>in this deck reads those files and nothing else.</a:t>
+              <a:t>in this deck reads those files and nothing else. Nothing on these slides was</a:t>
+            </a:r>
+          </a:p>
+          <a:p>
+            <a:r>
+              <a:t>typed in by hand.</a:t>
             </a:r>
           </a:p>
           <a:p/>
           <a:p>
             <a:r>
-              <a:t>The bottom-left is the part I would defend hardest. One run came back reporting</a:t>
-            </a:r>
-          </a:p>
-          <a:p>
-            <a:r>
-              <a:t>ninety-three microseconds per step, eleven million tokens a second. Physically</a:t>
-            </a:r>
-          </a:p>
-          <a:p>
-            <a:r>
-              <a:t>impossible. It carried a passing status — but the telemetry module had written</a:t>
-            </a:r>
-          </a:p>
-          <a:p>
-            <a:r>
-              <a:t>into its notes field that it might have timed dispatch instead of completion.</a:t>
-            </a:r>
-          </a:p>
-          <a:p>
-            <a:r>
-              <a:t>We threw that run away and repeated it. Without that field it would have gone</a:t>
-            </a:r>
-          </a:p>
-          <a:p>
-            <a:r>
-              <a:t>straight into a bar chart."</a:t>
+              <a:t>The red box is the part I would defend hardest. One run came back reporting</a:t>
+            </a:r>
+          </a:p>
+          <a:p>
+            <a:r>
+              <a:t>ninety-three microseconds per step. Eleven million tokens a second. Physically</a:t>
+            </a:r>
+          </a:p>
+          <a:p>
+            <a:r>
+              <a:t>impossible — and it carried a passing status. What caught it was that the</a:t>
+            </a:r>
+          </a:p>
+          <a:p>
+            <a:r>
+              <a:t>telemetry module had written into its own notes field that it might have timed</a:t>
+            </a:r>
+          </a:p>
+          <a:p>
+            <a:r>
+              <a:t>dispatch instead of completion. We threw the run away and repeated it. Without</a:t>
+            </a:r>
+          </a:p>
+          <a:p>
+            <a:r>
+              <a:t>that field, that number would have gone straight into a bar chart."</a:t>
             </a:r>
           </a:p>
         </p:txBody>
@@ -936,18 +961,18 @@
           <a:p/>
           <a:p>
             <a:r>
-              <a:t>"The table is the like-for-like comparison: same model, same batch, same</a:t>
-            </a:r>
-          </a:p>
-          <a:p>
-            <a:r>
-              <a:t>sequence length, same script.</a:t>
+              <a:t>"Same model, same batch, same sequence length, same script. The only thing that</a:t>
+            </a:r>
+          </a:p>
+          <a:p>
+            <a:r>
+              <a:t>changes across these columns is the silicon.</a:t>
             </a:r>
           </a:p>
           <a:p/>
           <a:p>
             <a:r>
-              <a:t>The headline is the middle two columns. One GH200 matches an eight-chip TPU</a:t>
+              <a:t>The headline is the two accelerator columns. One GH200 matches an eight-chip TPU</a:t>
             </a:r>
           </a:p>
           <a:p>
@@ -958,59 +983,69 @@
           <a:p/>
           <a:p>
             <a:r>
-              <a:t>The reason is in the memory row. At batch one the job uses five percent of the</a:t>
-            </a:r>
-          </a:p>
-          <a:p>
-            <a:r>
-              <a:t>GPU and seven percent of the TPU. Neither accelerator is occupied. The workload</a:t>
-            </a:r>
-          </a:p>
-          <a:p>
-            <a:r>
-              <a:t>is latency-bound, so the extra seven chips have nothing to do. That is a</a:t>
-            </a:r>
-          </a:p>
-          <a:p>
-            <a:r>
-              <a:t>statement about our configuration, not about the v5e being slow.</a:t>
+              <a:t>But read the memory row before you conclude anything about TPUs. At batch one the</a:t>
+            </a:r>
+          </a:p>
+          <a:p>
+            <a:r>
+              <a:t>job uses five percent of the GPU and seven percent of the TPU. Neither accelerator</a:t>
+            </a:r>
+          </a:p>
+          <a:p>
+            <a:r>
+              <a:t>is busy. The workload is latency-bound, so the extra seven chips have nothing to</a:t>
+            </a:r>
+          </a:p>
+          <a:p>
+            <a:r>
+              <a:t>do. This is a statement about our operating point, not about the v5e being slow.</a:t>
             </a:r>
           </a:p>
           <a:p/>
           <a:p>
             <a:r>
-              <a:t>Then the mitigation, which is the result I am proudest of. We identified</a:t>
-            </a:r>
-          </a:p>
-          <a:p>
-            <a:r>
-              <a:t>checkpoint load as the largest single phase, turned on the gcsfuse file cache —</a:t>
-            </a:r>
-          </a:p>
-          <a:p>
-            <a:r>
-              <a:t>one line in the manifest — and re-ran. Load dropped from two hundred thirty-five</a:t>
-            </a:r>
-          </a:p>
-          <a:p>
-            <a:r>
-              <a:t>seconds to sixteen. Total wall clock fell by thirty-one percent.</a:t>
+              <a:t>Then the result I am proudest of, on the right. We identified checkpoint load as</a:t>
+            </a:r>
+          </a:p>
+          <a:p>
+            <a:r>
+              <a:t>the largest single phase, enabled the gcsfuse file cache — one line in the</a:t>
+            </a:r>
+          </a:p>
+          <a:p>
+            <a:r>
+              <a:t>manifest — and re-ran. Load dropped fourteen and a half times. Total wall clock</a:t>
+            </a:r>
+          </a:p>
+          <a:p>
+            <a:r>
+              <a:t>fell by thirty-one percent.</a:t>
             </a:r>
           </a:p>
           <a:p/>
           <a:p>
             <a:r>
-              <a:t>And the control is what makes it conclusive: the step time is identical to the</a:t>
-            </a:r>
-          </a:p>
-          <a:p>
-            <a:r>
-              <a:t>fourth decimal place. Nothing about the computation changed. Only the I/O moved.</a:t>
-            </a:r>
-          </a:p>
-          <a:p>
-            <a:r>
-              <a:t>That is why we can attribute the saving to the cache and not to noise."</a:t>
+              <a:t>And the control is what makes it conclusive: median step time went from 1.75122</a:t>
+            </a:r>
+          </a:p>
+          <a:p>
+            <a:r>
+              <a:t>seconds to 1.75117. Identical to the fourth decimal. The computation did not</a:t>
+            </a:r>
+          </a:p>
+          <a:p>
+            <a:r>
+              <a:t>change at all. Only I/O moved — which is why we can attribute the saving to the</a:t>
+            </a:r>
+          </a:p>
+          <a:p>
+            <a:r>
+              <a:t>cache rather than to noise. That is the difference between measuring and</a:t>
+            </a:r>
+          </a:p>
+          <a:p>
+            <a:r>
+              <a:t>demonstrating."</a:t>
             </a:r>
           </a:p>
           <a:p/>
@@ -1086,118 +1121,124 @@
           <a:lstStyle/>
           <a:p>
             <a:r>
-              <a:t>LEONARD  (~60 s)</a:t>
+              <a:t>LEONARD  (~65 s)</a:t>
             </a:r>
           </a:p>
           <a:p/>
           <a:p>
             <a:r>
-              <a:t>"Three things we take away.</a:t>
+              <a:t>"Three findings, and then what it means for us.</a:t>
             </a:r>
           </a:p>
           <a:p/>
           <a:p>
             <a:r>
-              <a:t>First, the bottleneck is not compute. Of seven hundred thirty-three seconds of</a:t>
-            </a:r>
-          </a:p>
-          <a:p>
-            <a:r>
-              <a:t>wall clock, two hundred nine — twenty-eight and a half percent — is arithmetic.</a:t>
-            </a:r>
-          </a:p>
-          <a:p>
-            <a:r>
-              <a:t>The single largest phase is reading the checkpoint. We spent most of our time</a:t>
-            </a:r>
-          </a:p>
-          <a:p>
-            <a:r>
-              <a:t>not computing.</a:t>
+              <a:t>First, the chip was never the bottleneck. Of seven hundred thirty-three seconds</a:t>
+            </a:r>
+          </a:p>
+          <a:p>
+            <a:r>
+              <a:t>of wall clock, only twenty-eight percent is arithmetic. The single largest phase</a:t>
+            </a:r>
+          </a:p>
+          <a:p>
+            <a:r>
+              <a:t>is reading the checkpoint. We spent most of our time not computing.</a:t>
             </a:r>
           </a:p>
           <a:p/>
           <a:p>
             <a:r>
-              <a:t>Second, and this is the one that surprised us: scaling the model did not scale</a:t>
-            </a:r>
-          </a:p>
-          <a:p>
-            <a:r>
-              <a:t>the cost. Going from 0.6 to 4 billion parameters, about seven times, did not</a:t>
-            </a:r>
-          </a:p>
-          <a:p>
-            <a:r>
-              <a:t>make the CPU seven times slower. It made it impossible — the compiler never</a:t>
-            </a:r>
-          </a:p>
-          <a:p>
-            <a:r>
-              <a:t>finished with rematerialisation on, and the kernel killed the process without</a:t>
-            </a:r>
-          </a:p>
-          <a:p>
-            <a:r>
-              <a:t>it. A speedup chart would have shown a bar. The truth is there is no bar.</a:t>
+              <a:t>Second, and this genuinely surprised us: scaling the model did not scale the</a:t>
+            </a:r>
+          </a:p>
+          <a:p>
+            <a:r>
+              <a:t>cost. Going from 0.6 to 4 billion parameters — under seven times — did not make</a:t>
+            </a:r>
+          </a:p>
+          <a:p>
+            <a:r>
+              <a:t>the CPU seven times slower. It made it impossible. The compiler never finished</a:t>
+            </a:r>
+          </a:p>
+          <a:p>
+            <a:r>
+              <a:t>with rematerialisation on, and the kernel killed the process without it. A</a:t>
+            </a:r>
+          </a:p>
+          <a:p>
+            <a:r>
+              <a:t>speedup chart would have drawn a bar. The truth is there is no bar.</a:t>
             </a:r>
           </a:p>
           <a:p/>
           <a:p>
             <a:r>
-              <a:t>Third — and this is where the day actually went — the wall was in the supply</a:t>
-            </a:r>
-          </a:p>
-          <a:p>
-            <a:r>
-              <a:t>chain, not the hardware. The GH200 sat idle while we worked through an ARM64</a:t>
-            </a:r>
-          </a:p>
-          <a:p>
-            <a:r>
-              <a:t>host, a segfaulting cross-build, a missing aarch64 wheel, absent credentials and</a:t>
-            </a:r>
-          </a:p>
-          <a:p>
-            <a:r>
-              <a:t>a registry rejection. Exactly one of the framework's thirty-six dependencies is</a:t>
-            </a:r>
-          </a:p>
-          <a:p>
-            <a:r>
-              <a:t>TPU-bound. Swapping that one is the entire port.</a:t>
+              <a:t>Third, and this is where the day actually went: the wall was in the supply chain.</a:t>
+            </a:r>
+          </a:p>
+          <a:p>
+            <a:r>
+              <a:t>The GH200 sat idle while we worked through an ARM64 host, a segfaulting</a:t>
+            </a:r>
+          </a:p>
+          <a:p>
+            <a:r>
+              <a:t>cross-build, a missing wheel, absent credentials and a registry rejection.</a:t>
+            </a:r>
+          </a:p>
+          <a:p>
+            <a:r>
+              <a:t>Exactly one of the framework's thirty-six dependencies is TPU-bound. Swapping</a:t>
+            </a:r>
+          </a:p>
+          <a:p>
+            <a:r>
+              <a:t>that one is the entire port.</a:t>
             </a:r>
           </a:p>
           <a:p/>
           <a:p>
             <a:r>
-              <a:t>So our recommendation is not to scale out. It is to amortise: raise the batch</a:t>
-            </a:r>
-          </a:p>
-          <a:p>
-            <a:r>
-              <a:t>only until the chip is occupied, then attack fixed cost — persistent compile</a:t>
-            </a:r>
-          </a:p>
-          <a:p>
-            <a:r>
-              <a:t>caches, warm workers instead of a pod per job, and a file cache on anything that</a:t>
-            </a:r>
-          </a:p>
-          <a:p>
-            <a:r>
-              <a:t>reads a checkpoint. For this workload, one GH200 is the better buy than eight</a:t>
-            </a:r>
-          </a:p>
-          <a:p>
-            <a:r>
-              <a:t>TPU chips."</a:t>
+              <a:t>So the recommendation is not to scale out — it is to amortise. Raise the batch</a:t>
+            </a:r>
+          </a:p>
+          <a:p>
+            <a:r>
+              <a:t>only until the chip is occupied, then attack fixed cost.</a:t>
             </a:r>
           </a:p>
           <a:p/>
           <a:p>
             <a:r>
-              <a:t>→ "Happy to take questions."</a:t>
+              <a:t>And for our startup, that is the answer we came for. Thirteen cents per thousand</a:t>
+            </a:r>
+          </a:p>
+          <a:p>
+            <a:r>
+              <a:t>steps on a single GH200, eight times cheaper than the TPU slice at the same</a:t>
+            </a:r>
+          </a:p>
+          <a:p>
+            <a:r>
+              <a:t>speed. Self-hosting is not the cost problem we assumed it was. The real cost is</a:t>
+            </a:r>
+          </a:p>
+          <a:p>
+            <a:r>
+              <a:t>fixed overhead per job — and that is an architecture decision, not a hardware</a:t>
+            </a:r>
+          </a:p>
+          <a:p>
+            <a:r>
+              <a:t>purchase.</a:t>
+            </a:r>
+          </a:p>
+          <a:p/>
+          <a:p>
+            <a:r>
+              <a:t>Happy to take questions."</a:t>
             </a:r>
           </a:p>
         </p:txBody>
@@ -4212,7 +4253,7 @@
         <p:spPr>
           <a:xfrm>
             <a:off x="0" y="0"/>
-            <a:ext cx="12191695" cy="118872"/>
+            <a:ext cx="146304" cy="6858000"/>
           </a:xfrm>
           <a:prstGeom prst="rect">
             <a:avLst/>
@@ -4255,8 +4296,8 @@
         </p:nvSpPr>
         <p:spPr>
           <a:xfrm>
-            <a:off x="548640" y="320040"/>
-            <a:ext cx="914400" cy="548640"/>
+            <a:off x="10881360" y="45720"/>
+            <a:ext cx="1188720" cy="1371600"/>
           </a:xfrm>
           <a:prstGeom prst="rect">
             <a:avLst/>
@@ -4264,20 +4305,16 @@
           <a:noFill/>
         </p:spPr>
         <p:txBody>
-          <a:bodyPr wrap="square" anchor="t">
+          <a:bodyPr wrap="none">
             <a:spAutoFit/>
           </a:bodyPr>
           <a:lstStyle/>
           <a:p>
-            <a:pPr algn="l">
-              <a:spcAft>
-                <a:spcPts val="600"/>
-              </a:spcAft>
-            </a:pPr>
-            <a:r>
-              <a:rPr sz="4000" b="1">
-                <a:solidFill>
-                  <a:srgbClr val="E8590C"/>
+            <a:pPr algn="r"/>
+            <a:r>
+              <a:rPr sz="7200" b="1">
+                <a:solidFill>
+                  <a:srgbClr val="E6E9EC"/>
                 </a:solidFill>
                 <a:latin typeface="Helvetica Neue"/>
               </a:rPr>
@@ -4294,8 +4331,8 @@
         </p:nvSpPr>
         <p:spPr>
           <a:xfrm>
-            <a:off x="1234440" y="384048"/>
-            <a:ext cx="10424160" cy="731520"/>
+            <a:off x="566928" y="365760"/>
+            <a:ext cx="9601200" cy="274320"/>
           </a:xfrm>
           <a:prstGeom prst="rect">
             <a:avLst/>
@@ -4310,17 +4347,17 @@
           <a:p>
             <a:pPr algn="l">
               <a:spcAft>
-                <a:spcPts val="600"/>
-              </a:spcAft>
-            </a:pPr>
-            <a:r>
-              <a:rPr sz="3000" b="1">
-                <a:solidFill>
-                  <a:srgbClr val="1A1A1A"/>
-                </a:solidFill>
-                <a:latin typeface="Helvetica Neue"/>
-              </a:rPr>
-              <a:t>Where does an LLM fine-tuning job spend its time?</a:t>
+                <a:spcPts val="500"/>
+              </a:spcAft>
+            </a:pPr>
+            <a:r>
+              <a:rPr sz="1200" b="1" i="0">
+                <a:solidFill>
+                  <a:srgbClr val="E8590C"/>
+                </a:solidFill>
+                <a:latin typeface="Helvetica Neue"/>
+              </a:rPr>
+              <a:t>THE PROBLEM</a:t>
             </a:r>
           </a:p>
         </p:txBody>
@@ -4333,8 +4370,8 @@
         </p:nvSpPr>
         <p:spPr>
           <a:xfrm>
-            <a:off x="1234440" y="1024128"/>
-            <a:ext cx="10424160" cy="457200"/>
+            <a:off x="566928" y="658368"/>
+            <a:ext cx="10058400" cy="822960"/>
           </a:xfrm>
           <a:prstGeom prst="rect">
             <a:avLst/>
@@ -4349,31 +4386,79 @@
           <a:p>
             <a:pPr algn="l">
               <a:spcAft>
-                <a:spcPts val="600"/>
-              </a:spcAft>
-            </a:pPr>
-            <a:r>
-              <a:rPr sz="1500" b="0">
-                <a:solidFill>
-                  <a:srgbClr val="6B7280"/>
-                </a:solidFill>
-                <a:latin typeface="Helvetica Neue"/>
-              </a:rPr>
-              <a:t>ME344 Final Project · Option 2, custom workload · Leonard Arnold &amp; Luis Hambuch</a:t>
-            </a:r>
-          </a:p>
-        </p:txBody>
-      </p:sp>
-      <p:sp>
-        <p:nvSpPr>
-          <p:cNvPr id="6" name="TextBox 5"/>
+                <a:spcPts val="500"/>
+              </a:spcAft>
+            </a:pPr>
+            <a:r>
+              <a:rPr sz="3200" b="1" i="0">
+                <a:solidFill>
+                  <a:srgbClr val="15171A"/>
+                </a:solidFill>
+                <a:latin typeface="Helvetica Neue"/>
+              </a:rPr>
+              <a:t>Can a clinic afford to run its own coding model?</a:t>
+            </a:r>
+          </a:p>
+        </p:txBody>
+      </p:sp>
+      <p:sp>
+        <p:nvSpPr>
+          <p:cNvPr id="6" name="Rounded Rectangle 5"/>
+          <p:cNvSpPr/>
+          <p:nvPr/>
+        </p:nvSpPr>
+        <p:spPr>
+          <a:xfrm>
+            <a:off x="566928" y="1691640"/>
+            <a:ext cx="5486400" cy="2148840"/>
+          </a:xfrm>
+          <a:prstGeom prst="roundRect">
+            <a:avLst>
+              <a:gd name="adj" fmla="val 4000"/>
+            </a:avLst>
+          </a:prstGeom>
+          <a:solidFill>
+            <a:srgbClr val="FEF3EA"/>
+          </a:solidFill>
+          <a:ln w="9525">
+            <a:solidFill>
+              <a:srgbClr val="E6E9EC"/>
+            </a:solidFill>
+          </a:ln>
+          <a:effectLst/>
+        </p:spPr>
+        <p:style>
+          <a:lnRef idx="1">
+            <a:schemeClr val="accent1"/>
+          </a:lnRef>
+          <a:fillRef idx="3">
+            <a:schemeClr val="accent1"/>
+          </a:fillRef>
+          <a:effectRef idx="2">
+            <a:schemeClr val="accent1"/>
+          </a:effectRef>
+          <a:fontRef idx="minor">
+            <a:schemeClr val="lt1"/>
+          </a:fontRef>
+        </p:style>
+        <p:txBody>
+          <a:bodyPr rtlCol="0" anchor="ctr"/>
+          <a:lstStyle/>
+          <a:p>
+            <a:pPr algn="ctr"/>
+          </a:p>
+        </p:txBody>
+      </p:sp>
+      <p:sp>
+        <p:nvSpPr>
+          <p:cNvPr id="7" name="TextBox 6"/>
           <p:cNvSpPr txBox="1"/>
           <p:nvPr/>
         </p:nvSpPr>
         <p:spPr>
           <a:xfrm>
-            <a:off x="548640" y="1691640"/>
-            <a:ext cx="5760720" cy="4023360"/>
+            <a:off x="841248" y="1901952"/>
+            <a:ext cx="5029200" cy="320040"/>
           </a:xfrm>
           <a:prstGeom prst="rect">
             <a:avLst/>
@@ -4388,159 +4473,31 @@
           <a:p>
             <a:pPr algn="l">
               <a:spcAft>
-                <a:spcPts val="600"/>
-              </a:spcAft>
-            </a:pPr>
-            <a:r>
-              <a:rPr sz="1500" b="0">
-                <a:solidFill>
-                  <a:srgbClr val="1A1A1A"/>
-                </a:solidFill>
-                <a:latin typeface="Helvetica Neue"/>
-              </a:rPr>
-              <a:t>The workload</a:t>
-            </a:r>
-          </a:p>
-          <a:p>
-            <a:pPr algn="l">
-              <a:spcAft>
-                <a:spcPts val="600"/>
-              </a:spcAft>
-            </a:pPr>
-            <a:r>
-              <a:rPr sz="1500" b="0">
-                <a:solidFill>
-                  <a:srgbClr val="1A1A1A"/>
-                </a:solidFill>
-                <a:latin typeface="Helvetica Neue"/>
-              </a:rPr>
-              <a:t>LoRA fine-tune of Qwen3 on CodiEsp — 1 000 Spanish clinical case</a:t>
-            </a:r>
-          </a:p>
-          <a:p>
-            <a:pPr algn="l">
-              <a:spcAft>
-                <a:spcPts val="600"/>
-              </a:spcAft>
-            </a:pPr>
-            <a:r>
-              <a:rPr sz="1500" b="0">
-                <a:solidFill>
-                  <a:srgbClr val="1A1A1A"/>
-                </a:solidFill>
-                <a:latin typeface="Helvetica Neue"/>
-              </a:rPr>
-              <a:t>reports annotated with ICD-10 diagnosis codes (CC-BY 4.0).</a:t>
-            </a:r>
-          </a:p>
-          <a:p>
-            <a:pPr algn="l">
-              <a:spcAft>
-                <a:spcPts val="600"/>
-              </a:spcAft>
-            </a:pPr>
-            <a:r>
-              <a:rPr sz="1500" b="0">
-                <a:solidFill>
-                  <a:srgbClr val="1A1A1A"/>
-                </a:solidFill>
-                <a:latin typeface="Helvetica Neue"/>
-              </a:rPr>
-              <a:t>500 train / 250 dev, ⌀ 15 codes per document, 1 811 labels.</a:t>
-            </a:r>
-          </a:p>
-          <a:p>
-            <a:pPr algn="l">
-              <a:spcAft>
-                <a:spcPts val="600"/>
-              </a:spcAft>
-            </a:pPr>
-            <a:r>
-              <a:rPr sz="1500" b="0">
-                <a:solidFill>
-                  <a:srgbClr val="1A1A1A"/>
-                </a:solidFill>
-                <a:latin typeface="Helvetica Neue"/>
-              </a:rPr>
-              <a:t/>
-            </a:r>
-          </a:p>
-          <a:p>
-            <a:pPr algn="l">
-              <a:spcAft>
-                <a:spcPts val="600"/>
-              </a:spcAft>
-            </a:pPr>
-            <a:r>
-              <a:rPr sz="1500" b="0">
-                <a:solidFill>
-                  <a:srgbClr val="1A1A1A"/>
-                </a:solidFill>
-                <a:latin typeface="Helvetica Neue"/>
-              </a:rPr>
-              <a:t>Why it is a resource problem</a:t>
-            </a:r>
-          </a:p>
-          <a:p>
-            <a:pPr algn="l">
-              <a:spcAft>
-                <a:spcPts val="600"/>
-              </a:spcAft>
-            </a:pPr>
-            <a:r>
-              <a:rPr sz="1500" b="0">
-                <a:solidFill>
-                  <a:srgbClr val="1A1A1A"/>
-                </a:solidFill>
-                <a:latin typeface="Helvetica Neue"/>
-              </a:rPr>
-              <a:t>4B parameters = 8 GB of weights before a single activation.</a:t>
-            </a:r>
-          </a:p>
-          <a:p>
-            <a:pPr algn="l">
-              <a:spcAft>
-                <a:spcPts val="600"/>
-              </a:spcAft>
-            </a:pPr>
-            <a:r>
-              <a:rPr sz="1500" b="0">
-                <a:solidFill>
-                  <a:srgbClr val="1A1A1A"/>
-                </a:solidFill>
-                <a:latin typeface="Helvetica Neue"/>
-              </a:rPr>
-              <a:t>Documents run to 2 489 tokens. Model accuracy earns no marks —</a:t>
-            </a:r>
-          </a:p>
-          <a:p>
-            <a:pPr algn="l">
-              <a:spcAft>
-                <a:spcPts val="600"/>
-              </a:spcAft>
-            </a:pPr>
-            <a:r>
-              <a:rPr sz="1500" b="0">
-                <a:solidFill>
-                  <a:srgbClr val="1A1A1A"/>
-                </a:solidFill>
-                <a:latin typeface="Helvetica Neue"/>
-              </a:rPr>
-              <a:t>the object of study is the infrastructure.</a:t>
-            </a:r>
-          </a:p>
-        </p:txBody>
-      </p:sp>
-      <p:sp>
-        <p:nvSpPr>
-          <p:cNvPr id="7" name="TextBox 6"/>
+                <a:spcPts val="500"/>
+              </a:spcAft>
+            </a:pPr>
+            <a:r>
+              <a:rPr sz="1400" b="1" i="0">
+                <a:solidFill>
+                  <a:srgbClr val="15171A"/>
+                </a:solidFill>
+                <a:latin typeface="Helvetica Neue"/>
+              </a:rPr>
+              <a:t>Dr. Findus — our startup, Berlin</a:t>
+            </a:r>
+          </a:p>
+        </p:txBody>
+      </p:sp>
+      <p:sp>
+        <p:nvSpPr>
+          <p:cNvPr id="8" name="TextBox 7"/>
           <p:cNvSpPr txBox="1"/>
           <p:nvPr/>
         </p:nvSpPr>
         <p:spPr>
           <a:xfrm>
-            <a:off x="6583680" y="1691640"/>
-            <a:ext cx="5120640" cy="1371600"/>
+            <a:off x="841248" y="2286000"/>
+            <a:ext cx="5029200" cy="1463040"/>
           </a:xfrm>
           <a:prstGeom prst="rect">
             <a:avLst/>
@@ -4555,31 +4512,95 @@
           <a:p>
             <a:pPr algn="l">
               <a:spcAft>
-                <a:spcPts val="600"/>
-              </a:spcAft>
-            </a:pPr>
-            <a:r>
-              <a:rPr sz="1500" b="1">
-                <a:solidFill>
-                  <a:srgbClr val="E8590C"/>
-                </a:solidFill>
-                <a:latin typeface="Helvetica Neue"/>
-              </a:rPr>
-              <a:t>The question</a:t>
-            </a:r>
-          </a:p>
-        </p:txBody>
-      </p:sp>
-      <p:sp>
-        <p:nvSpPr>
-          <p:cNvPr id="8" name="TextBox 7"/>
+                <a:spcPts val="300"/>
+              </a:spcAft>
+            </a:pPr>
+            <a:r>
+              <a:rPr sz="1300" b="0" i="0">
+                <a:solidFill>
+                  <a:srgbClr val="15171A"/>
+                </a:solidFill>
+                <a:latin typeface="Helvetica Neue"/>
+              </a:rPr>
+              <a:t>German GPs must code every consultation.</a:t>
+            </a:r>
+          </a:p>
+          <a:p>
+            <a:pPr algn="l">
+              <a:spcAft>
+                <a:spcPts val="300"/>
+              </a:spcAft>
+            </a:pPr>
+            <a:r>
+              <a:rPr sz="1300" b="0" i="0">
+                <a:solidFill>
+                  <a:srgbClr val="15171A"/>
+                </a:solidFill>
+                <a:latin typeface="Helvetica Neue"/>
+              </a:rPr>
+              <a:t>We read the note and propose the codes;</a:t>
+            </a:r>
+          </a:p>
+          <a:p>
+            <a:pPr algn="l">
+              <a:spcAft>
+                <a:spcPts val="300"/>
+              </a:spcAft>
+            </a:pPr>
+            <a:r>
+              <a:rPr sz="1300" b="0" i="0">
+                <a:solidFill>
+                  <a:srgbClr val="15171A"/>
+                </a:solidFill>
+                <a:latin typeface="Helvetica Neue"/>
+              </a:rPr>
+              <a:t>the physician confirms each one — a legal</a:t>
+            </a:r>
+          </a:p>
+          <a:p>
+            <a:pPr algn="l">
+              <a:spcAft>
+                <a:spcPts val="300"/>
+              </a:spcAft>
+            </a:pPr>
+            <a:r>
+              <a:rPr sz="1300" b="0" i="0">
+                <a:solidFill>
+                  <a:srgbClr val="15171A"/>
+                </a:solidFill>
+                <a:latin typeface="Helvetica Neue"/>
+              </a:rPr>
+              <a:t>requirement here. Reliability is the product:</a:t>
+            </a:r>
+          </a:p>
+          <a:p>
+            <a:pPr algn="l">
+              <a:spcAft>
+                <a:spcPts val="300"/>
+              </a:spcAft>
+            </a:pPr>
+            <a:r>
+              <a:rPr sz="1300" b="0" i="0">
+                <a:solidFill>
+                  <a:srgbClr val="15171A"/>
+                </a:solidFill>
+                <a:latin typeface="Helvetica Neue"/>
+              </a:rPr>
+              <a:t>over-coding is fraud exposure, not error.</a:t>
+            </a:r>
+          </a:p>
+        </p:txBody>
+      </p:sp>
+      <p:sp>
+        <p:nvSpPr>
+          <p:cNvPr id="9" name="TextBox 8"/>
           <p:cNvSpPr txBox="1"/>
           <p:nvPr/>
         </p:nvSpPr>
         <p:spPr>
           <a:xfrm>
-            <a:off x="6583680" y="2057400"/>
-            <a:ext cx="5120640" cy="1828800"/>
+            <a:off x="6400800" y="1783080"/>
+            <a:ext cx="5212080" cy="731520"/>
           </a:xfrm>
           <a:prstGeom prst="rect">
             <a:avLst/>
@@ -4594,63 +4615,47 @@
           <a:p>
             <a:pPr algn="l">
               <a:spcAft>
-                <a:spcPts val="600"/>
-              </a:spcAft>
-            </a:pPr>
-            <a:r>
-              <a:rPr sz="2100" b="1">
-                <a:solidFill>
-                  <a:srgbClr val="1A1A1A"/>
-                </a:solidFill>
-                <a:latin typeface="Helvetica Neue"/>
-              </a:rPr>
-              <a:t>Where does the time actually go —</a:t>
-            </a:r>
-          </a:p>
-          <a:p>
-            <a:pPr algn="l">
-              <a:spcAft>
-                <a:spcPts val="600"/>
-              </a:spcAft>
-            </a:pPr>
-            <a:r>
-              <a:rPr sz="2100" b="1">
-                <a:solidFill>
-                  <a:srgbClr val="1A1A1A"/>
-                </a:solidFill>
-                <a:latin typeface="Helvetica Neue"/>
-              </a:rPr>
-              <a:t>and what does it take to run</a:t>
-            </a:r>
-          </a:p>
-          <a:p>
-            <a:pPr algn="l">
-              <a:spcAft>
-                <a:spcPts val="600"/>
-              </a:spcAft>
-            </a:pPr>
-            <a:r>
-              <a:rPr sz="2100" b="1">
-                <a:solidFill>
-                  <a:srgbClr val="1A1A1A"/>
-                </a:solidFill>
-                <a:latin typeface="Helvetica Neue"/>
-              </a:rPr>
-              <a:t>the job at all?</a:t>
-            </a:r>
-          </a:p>
-        </p:txBody>
-      </p:sp>
-      <p:sp>
-        <p:nvSpPr>
-          <p:cNvPr id="9" name="TextBox 8"/>
+                <a:spcPts val="200"/>
+              </a:spcAft>
+            </a:pPr>
+            <a:r>
+              <a:rPr sz="1600" b="1" i="0">
+                <a:solidFill>
+                  <a:srgbClr val="15171A"/>
+                </a:solidFill>
+                <a:latin typeface="Helvetica Neue"/>
+              </a:rPr>
+              <a:t>Today that runs on hosted APIs.</a:t>
+            </a:r>
+          </a:p>
+          <a:p>
+            <a:pPr algn="l">
+              <a:spcAft>
+                <a:spcPts val="200"/>
+              </a:spcAft>
+            </a:pPr>
+            <a:r>
+              <a:rPr sz="1600" b="1" i="0">
+                <a:solidFill>
+                  <a:srgbClr val="15171A"/>
+                </a:solidFill>
+                <a:latin typeface="Helvetica Neue"/>
+              </a:rPr>
+              <a:t>Could it run on our own hardware?</a:t>
+            </a:r>
+          </a:p>
+        </p:txBody>
+      </p:sp>
+      <p:sp>
+        <p:nvSpPr>
+          <p:cNvPr id="10" name="TextBox 9"/>
           <p:cNvSpPr txBox="1"/>
           <p:nvPr/>
         </p:nvSpPr>
         <p:spPr>
           <a:xfrm>
-            <a:off x="6583680" y="3886200"/>
-            <a:ext cx="5120640" cy="2011680"/>
+            <a:off x="6400800" y="2606040"/>
+            <a:ext cx="5212080" cy="1280160"/>
           </a:xfrm>
           <a:prstGeom prst="rect">
             <a:avLst/>
@@ -4665,45 +4670,45 @@
           <a:p>
             <a:pPr algn="l">
               <a:spcAft>
-                <a:spcPts val="600"/>
-              </a:spcAft>
-            </a:pPr>
-            <a:r>
-              <a:rPr sz="1300" b="0">
-                <a:solidFill>
-                  <a:srgbClr val="6B7280"/>
-                </a:solidFill>
-                <a:latin typeface="Helvetica Neue"/>
-              </a:rPr>
-              <a:t>The second half is not decoration. At Qwen3-0.6B all three</a:t>
-            </a:r>
-          </a:p>
-          <a:p>
-            <a:pPr algn="l">
-              <a:spcAft>
-                <a:spcPts val="600"/>
-              </a:spcAft>
-            </a:pPr>
-            <a:r>
-              <a:rPr sz="1300" b="0">
-                <a:solidFill>
-                  <a:srgbClr val="6B7280"/>
-                </a:solidFill>
-                <a:latin typeface="Helvetica Neue"/>
-              </a:rPr>
-              <a:t>backends run. At 4B the CPU runs in no configuration we tried.</a:t>
-            </a:r>
-          </a:p>
-          <a:p>
-            <a:pPr algn="l">
-              <a:spcAft>
-                <a:spcPts val="600"/>
-              </a:spcAft>
-            </a:pPr>
-            <a:r>
-              <a:rPr sz="1300" b="0">
-                <a:solidFill>
-                  <a:srgbClr val="6B7280"/>
+                <a:spcPts val="300"/>
+              </a:spcAft>
+            </a:pPr>
+            <a:r>
+              <a:rPr sz="1300" b="0" i="0">
+                <a:solidFill>
+                  <a:srgbClr val="717A85"/>
+                </a:solidFill>
+                <a:latin typeface="Helvetica Neue"/>
+              </a:rPr>
+              <a:t>An infrastructure question, not a model one —</a:t>
+            </a:r>
+          </a:p>
+          <a:p>
+            <a:pPr algn="l">
+              <a:spcAft>
+                <a:spcPts val="300"/>
+              </a:spcAft>
+            </a:pPr>
+            <a:r>
+              <a:rPr sz="1300" b="0" i="0">
+                <a:solidFill>
+                  <a:srgbClr val="717A85"/>
+                </a:solidFill>
+                <a:latin typeface="Helvetica Neue"/>
+              </a:rPr>
+              <a:t>so we built the workload and measured it.</a:t>
+            </a:r>
+          </a:p>
+          <a:p>
+            <a:pPr algn="l">
+              <a:spcAft>
+                <a:spcPts val="300"/>
+              </a:spcAft>
+            </a:pPr>
+            <a:r>
+              <a:rPr sz="1300" b="0" i="0">
+                <a:solidFill>
+                  <a:srgbClr val="717A85"/>
                 </a:solidFill>
                 <a:latin typeface="Helvetica Neue"/>
               </a:rPr>
@@ -4713,33 +4718,393 @@
           <a:p>
             <a:pPr algn="l">
               <a:spcAft>
-                <a:spcPts val="600"/>
-              </a:spcAft>
-            </a:pPr>
-            <a:r>
-              <a:rPr sz="1300" b="0">
-                <a:solidFill>
-                  <a:srgbClr val="6B7280"/>
-                </a:solidFill>
-                <a:latin typeface="Helvetica Neue"/>
-              </a:rPr>
-              <a:t>Motivated by Dr. Findus, a medical billing system that maps</a:t>
-            </a:r>
-          </a:p>
-          <a:p>
-            <a:pPr algn="l">
-              <a:spcAft>
-                <a:spcPts val="600"/>
-              </a:spcAft>
-            </a:pPr>
-            <a:r>
-              <a:rPr sz="1300" b="0">
-                <a:solidFill>
-                  <a:srgbClr val="6B7280"/>
-                </a:solidFill>
-                <a:latin typeface="Helvetica Neue"/>
-              </a:rPr>
-              <a:t>clinical documentation to ICD-10. No patient data was used.</a:t>
+                <a:spcPts val="300"/>
+              </a:spcAft>
+            </a:pPr>
+            <a:r>
+              <a:rPr sz="1300" b="0" i="0">
+                <a:solidFill>
+                  <a:srgbClr val="717A85"/>
+                </a:solidFill>
+                <a:latin typeface="Helvetica Neue"/>
+              </a:rPr>
+              <a:t>Qwen3 + LoRA on CodiEsp: 1 000 clinical case</a:t>
+            </a:r>
+          </a:p>
+          <a:p>
+            <a:pPr algn="l">
+              <a:spcAft>
+                <a:spcPts val="300"/>
+              </a:spcAft>
+            </a:pPr>
+            <a:r>
+              <a:rPr sz="1300" b="0" i="0">
+                <a:solidFill>
+                  <a:srgbClr val="717A85"/>
+                </a:solidFill>
+                <a:latin typeface="Helvetica Neue"/>
+              </a:rPr>
+              <a:t>reports, ICD-10 labelled, CC-BY 4.0.</a:t>
+            </a:r>
+          </a:p>
+        </p:txBody>
+      </p:sp>
+      <p:sp>
+        <p:nvSpPr>
+          <p:cNvPr id="11" name="TextBox 10"/>
+          <p:cNvSpPr txBox="1"/>
+          <p:nvPr/>
+        </p:nvSpPr>
+        <p:spPr>
+          <a:xfrm>
+            <a:off x="566928" y="4160520"/>
+            <a:ext cx="2743200" cy="777240"/>
+          </a:xfrm>
+          <a:prstGeom prst="rect">
+            <a:avLst/>
+          </a:prstGeom>
+          <a:noFill/>
+        </p:spPr>
+        <p:txBody>
+          <a:bodyPr wrap="square" anchor="t">
+            <a:spAutoFit/>
+          </a:bodyPr>
+          <a:lstStyle/>
+          <a:p>
+            <a:pPr algn="l">
+              <a:spcAft>
+                <a:spcPts val="0"/>
+              </a:spcAft>
+            </a:pPr>
+            <a:r>
+              <a:rPr sz="4400" b="1" i="0">
+                <a:solidFill>
+                  <a:srgbClr val="E8590C"/>
+                </a:solidFill>
+                <a:latin typeface="Helvetica Neue"/>
+              </a:rPr>
+              <a:t>8 GB</a:t>
+            </a:r>
+          </a:p>
+        </p:txBody>
+      </p:sp>
+      <p:sp>
+        <p:nvSpPr>
+          <p:cNvPr id="12" name="TextBox 11"/>
+          <p:cNvSpPr txBox="1"/>
+          <p:nvPr/>
+        </p:nvSpPr>
+        <p:spPr>
+          <a:xfrm>
+            <a:off x="566928" y="4818888"/>
+            <a:ext cx="2743200" cy="822960"/>
+          </a:xfrm>
+          <a:prstGeom prst="rect">
+            <a:avLst/>
+          </a:prstGeom>
+          <a:noFill/>
+        </p:spPr>
+        <p:txBody>
+          <a:bodyPr wrap="square" anchor="t">
+            <a:spAutoFit/>
+          </a:bodyPr>
+          <a:lstStyle/>
+          <a:p>
+            <a:pPr algn="l">
+              <a:spcAft>
+                <a:spcPts val="200"/>
+              </a:spcAft>
+            </a:pPr>
+            <a:r>
+              <a:rPr sz="1200" b="0" i="0">
+                <a:solidFill>
+                  <a:srgbClr val="717A85"/>
+                </a:solidFill>
+                <a:latin typeface="Helvetica Neue"/>
+              </a:rPr>
+              <a:t>of weights at 4B, before a single</a:t>
+            </a:r>
+          </a:p>
+          <a:p>
+            <a:pPr algn="l">
+              <a:spcAft>
+                <a:spcPts val="200"/>
+              </a:spcAft>
+            </a:pPr>
+            <a:r>
+              <a:rPr sz="1200" b="0" i="0">
+                <a:solidFill>
+                  <a:srgbClr val="717A85"/>
+                </a:solidFill>
+                <a:latin typeface="Helvetica Neue"/>
+              </a:rPr>
+              <a:t>activation exists</a:t>
+            </a:r>
+          </a:p>
+        </p:txBody>
+      </p:sp>
+      <p:sp>
+        <p:nvSpPr>
+          <p:cNvPr id="13" name="TextBox 12"/>
+          <p:cNvSpPr txBox="1"/>
+          <p:nvPr/>
+        </p:nvSpPr>
+        <p:spPr>
+          <a:xfrm>
+            <a:off x="3657600" y="4160520"/>
+            <a:ext cx="2743200" cy="777240"/>
+          </a:xfrm>
+          <a:prstGeom prst="rect">
+            <a:avLst/>
+          </a:prstGeom>
+          <a:noFill/>
+        </p:spPr>
+        <p:txBody>
+          <a:bodyPr wrap="square" anchor="t">
+            <a:spAutoFit/>
+          </a:bodyPr>
+          <a:lstStyle/>
+          <a:p>
+            <a:pPr algn="l">
+              <a:spcAft>
+                <a:spcPts val="0"/>
+              </a:spcAft>
+            </a:pPr>
+            <a:r>
+              <a:rPr sz="4400" b="1" i="0">
+                <a:solidFill>
+                  <a:srgbClr val="E8590C"/>
+                </a:solidFill>
+                <a:latin typeface="Helvetica Neue"/>
+              </a:rPr>
+              <a:t>2 489</a:t>
+            </a:r>
+          </a:p>
+        </p:txBody>
+      </p:sp>
+      <p:sp>
+        <p:nvSpPr>
+          <p:cNvPr id="14" name="TextBox 13"/>
+          <p:cNvSpPr txBox="1"/>
+          <p:nvPr/>
+        </p:nvSpPr>
+        <p:spPr>
+          <a:xfrm>
+            <a:off x="3657600" y="4818888"/>
+            <a:ext cx="2743200" cy="822960"/>
+          </a:xfrm>
+          <a:prstGeom prst="rect">
+            <a:avLst/>
+          </a:prstGeom>
+          <a:noFill/>
+        </p:spPr>
+        <p:txBody>
+          <a:bodyPr wrap="square" anchor="t">
+            <a:spAutoFit/>
+          </a:bodyPr>
+          <a:lstStyle/>
+          <a:p>
+            <a:pPr algn="l">
+              <a:spcAft>
+                <a:spcPts val="200"/>
+              </a:spcAft>
+            </a:pPr>
+            <a:r>
+              <a:rPr sz="1200" b="0" i="0">
+                <a:solidFill>
+                  <a:srgbClr val="717A85"/>
+                </a:solidFill>
+                <a:latin typeface="Helvetica Neue"/>
+              </a:rPr>
+              <a:t>tokens in the longest case —</a:t>
+            </a:r>
+          </a:p>
+          <a:p>
+            <a:pPr algn="l">
+              <a:spcAft>
+                <a:spcPts val="200"/>
+              </a:spcAft>
+            </a:pPr>
+            <a:r>
+              <a:rPr sz="1200" b="0" i="0">
+                <a:solidFill>
+                  <a:srgbClr val="717A85"/>
+                </a:solidFill>
+                <a:latin typeface="Helvetica Neue"/>
+              </a:rPr>
+              <a:t>sequence length is not free</a:t>
+            </a:r>
+          </a:p>
+        </p:txBody>
+      </p:sp>
+      <p:sp>
+        <p:nvSpPr>
+          <p:cNvPr id="15" name="TextBox 14"/>
+          <p:cNvSpPr txBox="1"/>
+          <p:nvPr/>
+        </p:nvSpPr>
+        <p:spPr>
+          <a:xfrm>
+            <a:off x="6766560" y="4160520"/>
+            <a:ext cx="4846320" cy="777240"/>
+          </a:xfrm>
+          <a:prstGeom prst="rect">
+            <a:avLst/>
+          </a:prstGeom>
+          <a:noFill/>
+        </p:spPr>
+        <p:txBody>
+          <a:bodyPr wrap="square" anchor="t">
+            <a:spAutoFit/>
+          </a:bodyPr>
+          <a:lstStyle/>
+          <a:p>
+            <a:pPr algn="l">
+              <a:spcAft>
+                <a:spcPts val="0"/>
+              </a:spcAft>
+            </a:pPr>
+            <a:r>
+              <a:rPr sz="4400" b="1" i="0">
+                <a:solidFill>
+                  <a:srgbClr val="E8590C"/>
+                </a:solidFill>
+                <a:latin typeface="Helvetica Neue"/>
+              </a:rPr>
+              <a:t>3 backends</a:t>
+            </a:r>
+          </a:p>
+        </p:txBody>
+      </p:sp>
+      <p:sp>
+        <p:nvSpPr>
+          <p:cNvPr id="16" name="TextBox 15"/>
+          <p:cNvSpPr txBox="1"/>
+          <p:nvPr/>
+        </p:nvSpPr>
+        <p:spPr>
+          <a:xfrm>
+            <a:off x="6766560" y="4818888"/>
+            <a:ext cx="4846320" cy="822960"/>
+          </a:xfrm>
+          <a:prstGeom prst="rect">
+            <a:avLst/>
+          </a:prstGeom>
+          <a:noFill/>
+        </p:spPr>
+        <p:txBody>
+          <a:bodyPr wrap="square" anchor="t">
+            <a:spAutoFit/>
+          </a:bodyPr>
+          <a:lstStyle/>
+          <a:p>
+            <a:pPr algn="l">
+              <a:spcAft>
+                <a:spcPts val="200"/>
+              </a:spcAft>
+            </a:pPr>
+            <a:r>
+              <a:rPr sz="1200" b="0" i="0">
+                <a:solidFill>
+                  <a:srgbClr val="717A85"/>
+                </a:solidFill>
+                <a:latin typeface="Helvetica Neue"/>
+              </a:rPr>
+              <a:t>CPU · GPU · TPU, one JAX program,</a:t>
+            </a:r>
+          </a:p>
+          <a:p>
+            <a:pPr algn="l">
+              <a:spcAft>
+                <a:spcPts val="200"/>
+              </a:spcAft>
+            </a:pPr>
+            <a:r>
+              <a:rPr sz="1200" b="0" i="0">
+                <a:solidFill>
+                  <a:srgbClr val="717A85"/>
+                </a:solidFill>
+                <a:latin typeface="Helvetica Neue"/>
+              </a:rPr>
+              <a:t>no per-backend reimplementation</a:t>
+            </a:r>
+          </a:p>
+        </p:txBody>
+      </p:sp>
+      <p:sp>
+        <p:nvSpPr>
+          <p:cNvPr id="17" name="TextBox 16"/>
+          <p:cNvSpPr txBox="1"/>
+          <p:nvPr/>
+        </p:nvSpPr>
+        <p:spPr>
+          <a:xfrm>
+            <a:off x="566928" y="5806440"/>
+            <a:ext cx="10972800" cy="640080"/>
+          </a:xfrm>
+          <a:prstGeom prst="rect">
+            <a:avLst/>
+          </a:prstGeom>
+          <a:noFill/>
+        </p:spPr>
+        <p:txBody>
+          <a:bodyPr wrap="square" anchor="t">
+            <a:spAutoFit/>
+          </a:bodyPr>
+          <a:lstStyle/>
+          <a:p>
+            <a:pPr algn="l">
+              <a:spcAft>
+                <a:spcPts val="500"/>
+              </a:spcAft>
+            </a:pPr>
+            <a:r>
+              <a:rPr sz="1900" b="1" i="0">
+                <a:solidFill>
+                  <a:srgbClr val="E8590C"/>
+                </a:solidFill>
+                <a:latin typeface="Helvetica Neue"/>
+              </a:rPr>
+              <a:t>Where does the time actually go — and what does it take to run this at all?</a:t>
+            </a:r>
+          </a:p>
+        </p:txBody>
+      </p:sp>
+      <p:sp>
+        <p:nvSpPr>
+          <p:cNvPr id="18" name="TextBox 17"/>
+          <p:cNvSpPr txBox="1"/>
+          <p:nvPr/>
+        </p:nvSpPr>
+        <p:spPr>
+          <a:xfrm>
+            <a:off x="566928" y="6263640"/>
+            <a:ext cx="10972800" cy="365760"/>
+          </a:xfrm>
+          <a:prstGeom prst="rect">
+            <a:avLst/>
+          </a:prstGeom>
+          <a:noFill/>
+        </p:spPr>
+        <p:txBody>
+          <a:bodyPr wrap="square" anchor="t">
+            <a:spAutoFit/>
+          </a:bodyPr>
+          <a:lstStyle/>
+          <a:p>
+            <a:pPr algn="l">
+              <a:spcAft>
+                <a:spcPts val="500"/>
+              </a:spcAft>
+            </a:pPr>
+            <a:r>
+              <a:rPr sz="1100" b="0" i="1">
+                <a:solidFill>
+                  <a:srgbClr val="717A85"/>
+                </a:solidFill>
+                <a:latin typeface="Helvetica Neue"/>
+              </a:rPr>
+              <a:t>No patient data was used. Model accuracy earns no marks here — the object of study is the infrastructure.</a:t>
             </a:r>
           </a:p>
         </p:txBody>
@@ -4771,7 +5136,7 @@
         <p:spPr>
           <a:xfrm>
             <a:off x="0" y="0"/>
-            <a:ext cx="12191695" cy="118872"/>
+            <a:ext cx="146304" cy="6858000"/>
           </a:xfrm>
           <a:prstGeom prst="rect">
             <a:avLst/>
@@ -4814,8 +5179,8 @@
         </p:nvSpPr>
         <p:spPr>
           <a:xfrm>
-            <a:off x="548640" y="320040"/>
-            <a:ext cx="914400" cy="548640"/>
+            <a:off x="10881360" y="45720"/>
+            <a:ext cx="1188720" cy="1371600"/>
           </a:xfrm>
           <a:prstGeom prst="rect">
             <a:avLst/>
@@ -4823,20 +5188,16 @@
           <a:noFill/>
         </p:spPr>
         <p:txBody>
-          <a:bodyPr wrap="square" anchor="t">
+          <a:bodyPr wrap="none">
             <a:spAutoFit/>
           </a:bodyPr>
           <a:lstStyle/>
           <a:p>
-            <a:pPr algn="l">
-              <a:spcAft>
-                <a:spcPts val="600"/>
-              </a:spcAft>
-            </a:pPr>
-            <a:r>
-              <a:rPr sz="4000" b="1">
-                <a:solidFill>
-                  <a:srgbClr val="E8590C"/>
+            <a:pPr algn="r"/>
+            <a:r>
+              <a:rPr sz="7200" b="1">
+                <a:solidFill>
+                  <a:srgbClr val="E6E9EC"/>
                 </a:solidFill>
                 <a:latin typeface="Helvetica Neue"/>
               </a:rPr>
@@ -4853,8 +5214,8 @@
         </p:nvSpPr>
         <p:spPr>
           <a:xfrm>
-            <a:off x="1234440" y="384048"/>
-            <a:ext cx="10424160" cy="731520"/>
+            <a:off x="566928" y="365760"/>
+            <a:ext cx="9601200" cy="274320"/>
           </a:xfrm>
           <a:prstGeom prst="rect">
             <a:avLst/>
@@ -4869,17 +5230,17 @@
           <a:p>
             <a:pPr algn="l">
               <a:spcAft>
-                <a:spcPts val="600"/>
-              </a:spcAft>
-            </a:pPr>
-            <a:r>
-              <a:rPr sz="3000" b="1">
-                <a:solidFill>
-                  <a:srgbClr val="1A1A1A"/>
-                </a:solidFill>
-                <a:latin typeface="Helvetica Neue"/>
-              </a:rPr>
-              <a:t>One code path, three backends</a:t>
+                <a:spcPts val="500"/>
+              </a:spcAft>
+            </a:pPr>
+            <a:r>
+              <a:rPr sz="1200" b="1" i="0">
+                <a:solidFill>
+                  <a:srgbClr val="E8590C"/>
+                </a:solidFill>
+                <a:latin typeface="Helvetica Neue"/>
+              </a:rPr>
+              <a:t>APPROACH</a:t>
             </a:r>
           </a:p>
         </p:txBody>
@@ -4892,8 +5253,8 @@
         </p:nvSpPr>
         <p:spPr>
           <a:xfrm>
-            <a:off x="1234440" y="1024128"/>
-            <a:ext cx="10424160" cy="457200"/>
+            <a:off x="566928" y="658368"/>
+            <a:ext cx="10058400" cy="822960"/>
           </a:xfrm>
           <a:prstGeom prst="rect">
             <a:avLst/>
@@ -4908,31 +5269,79 @@
           <a:p>
             <a:pPr algn="l">
               <a:spcAft>
-                <a:spcPts val="600"/>
-              </a:spcAft>
-            </a:pPr>
-            <a:r>
-              <a:rPr sz="1500" b="0">
-                <a:solidFill>
-                  <a:srgbClr val="6B7280"/>
-                </a:solidFill>
-                <a:latin typeface="Helvetica Neue"/>
-              </a:rPr>
-              <a:t>Proposal, orchestration, and the compilation layer</a:t>
-            </a:r>
-          </a:p>
-        </p:txBody>
-      </p:sp>
-      <p:sp>
-        <p:nvSpPr>
-          <p:cNvPr id="6" name="TextBox 5"/>
+                <a:spcPts val="500"/>
+              </a:spcAft>
+            </a:pPr>
+            <a:r>
+              <a:rPr sz="3200" b="1" i="0">
+                <a:solidFill>
+                  <a:srgbClr val="15171A"/>
+                </a:solidFill>
+                <a:latin typeface="Helvetica Neue"/>
+              </a:rPr>
+              <a:t>One program. Three backends. All measured.</a:t>
+            </a:r>
+          </a:p>
+        </p:txBody>
+      </p:sp>
+      <p:sp>
+        <p:nvSpPr>
+          <p:cNvPr id="6" name="Rounded Rectangle 5"/>
+          <p:cNvSpPr/>
+          <p:nvPr/>
+        </p:nvSpPr>
+        <p:spPr>
+          <a:xfrm>
+            <a:off x="566928" y="1783080"/>
+            <a:ext cx="3520440" cy="2286000"/>
+          </a:xfrm>
+          <a:prstGeom prst="roundRect">
+            <a:avLst>
+              <a:gd name="adj" fmla="val 4000"/>
+            </a:avLst>
+          </a:prstGeom>
+          <a:solidFill>
+            <a:srgbClr val="FEF3EA"/>
+          </a:solidFill>
+          <a:ln w="9525">
+            <a:solidFill>
+              <a:srgbClr val="E6E9EC"/>
+            </a:solidFill>
+          </a:ln>
+          <a:effectLst/>
+        </p:spPr>
+        <p:style>
+          <a:lnRef idx="1">
+            <a:schemeClr val="accent1"/>
+          </a:lnRef>
+          <a:fillRef idx="3">
+            <a:schemeClr val="accent1"/>
+          </a:fillRef>
+          <a:effectRef idx="2">
+            <a:schemeClr val="accent1"/>
+          </a:effectRef>
+          <a:fontRef idx="minor">
+            <a:schemeClr val="lt1"/>
+          </a:fontRef>
+        </p:style>
+        <p:txBody>
+          <a:bodyPr rtlCol="0" anchor="ctr"/>
+          <a:lstStyle/>
+          <a:p>
+            <a:pPr algn="ctr"/>
+          </a:p>
+        </p:txBody>
+      </p:sp>
+      <p:sp>
+        <p:nvSpPr>
+          <p:cNvPr id="7" name="TextBox 6"/>
           <p:cNvSpPr txBox="1"/>
           <p:nvPr/>
         </p:nvSpPr>
         <p:spPr>
           <a:xfrm>
-            <a:off x="548640" y="1691640"/>
-            <a:ext cx="3657600" cy="3291840"/>
+            <a:off x="822960" y="1965960"/>
+            <a:ext cx="3017520" cy="365760"/>
           </a:xfrm>
           <a:prstGeom prst="rect">
             <a:avLst/>
@@ -4947,95 +5356,31 @@
           <a:p>
             <a:pPr algn="l">
               <a:spcAft>
-                <a:spcPts val="600"/>
-              </a:spcAft>
-            </a:pPr>
-            <a:r>
-              <a:rPr sz="1500" b="0">
-                <a:solidFill>
-                  <a:srgbClr val="1A1A1A"/>
-                </a:solidFill>
-                <a:latin typeface="Helvetica Neue"/>
-              </a:rPr>
-              <a:t>Compilation layer</a:t>
-            </a:r>
-          </a:p>
-          <a:p>
-            <a:pPr algn="l">
-              <a:spcAft>
-                <a:spcPts val="600"/>
-              </a:spcAft>
-            </a:pPr>
-            <a:r>
-              <a:rPr sz="1500" b="0">
-                <a:solidFill>
-                  <a:srgbClr val="1A1A1A"/>
-                </a:solidFill>
-                <a:latin typeface="Helvetica Neue"/>
-              </a:rPr>
-              <a:t>One JAX / Flax program.</a:t>
-            </a:r>
-          </a:p>
-          <a:p>
-            <a:pPr algn="l">
-              <a:spcAft>
-                <a:spcPts val="600"/>
-              </a:spcAft>
-            </a:pPr>
-            <a:r>
-              <a:rPr sz="1500" b="0">
-                <a:solidFill>
-                  <a:srgbClr val="1A1A1A"/>
-                </a:solidFill>
-                <a:latin typeface="Helvetica Neue"/>
-              </a:rPr>
-              <a:t>XLA lowers it to CPU, CUDA and TPU.</a:t>
-            </a:r>
-          </a:p>
-          <a:p>
-            <a:pPr algn="l">
-              <a:spcAft>
-                <a:spcPts val="600"/>
-              </a:spcAft>
-            </a:pPr>
-            <a:r>
-              <a:rPr sz="1500" b="0">
-                <a:solidFill>
-                  <a:srgbClr val="1A1A1A"/>
-                </a:solidFill>
-                <a:latin typeface="Helvetica Neue"/>
-              </a:rPr>
-              <a:t>LoRA via qwix, training via Tunix.</a:t>
-            </a:r>
-          </a:p>
-          <a:p>
-            <a:pPr algn="l">
-              <a:spcAft>
-                <a:spcPts val="600"/>
-              </a:spcAft>
-            </a:pPr>
-            <a:r>
-              <a:rPr sz="1500" b="0">
-                <a:solidFill>
-                  <a:srgbClr val="1A1A1A"/>
-                </a:solidFill>
-                <a:latin typeface="Helvetica Neue"/>
-              </a:rPr>
-              <a:t>No per-backend reimplementation.</a:t>
-            </a:r>
-          </a:p>
-        </p:txBody>
-      </p:sp>
-      <p:sp>
-        <p:nvSpPr>
-          <p:cNvPr id="7" name="TextBox 6"/>
+                <a:spcPts val="500"/>
+              </a:spcAft>
+            </a:pPr>
+            <a:r>
+              <a:rPr sz="1600" b="1" i="0">
+                <a:solidFill>
+                  <a:srgbClr val="E8590C"/>
+                </a:solidFill>
+                <a:latin typeface="Helvetica Neue"/>
+              </a:rPr>
+              <a:t>Compilation</a:t>
+            </a:r>
+          </a:p>
+        </p:txBody>
+      </p:sp>
+      <p:sp>
+        <p:nvSpPr>
+          <p:cNvPr id="8" name="TextBox 7"/>
           <p:cNvSpPr txBox="1"/>
           <p:nvPr/>
         </p:nvSpPr>
         <p:spPr>
           <a:xfrm>
-            <a:off x="4389120" y="1691640"/>
-            <a:ext cx="3657600" cy="3291840"/>
+            <a:off x="822960" y="2359152"/>
+            <a:ext cx="3063240" cy="1645920"/>
           </a:xfrm>
           <a:prstGeom prst="rect">
             <a:avLst/>
@@ -5050,95 +5395,159 @@
           <a:p>
             <a:pPr algn="l">
               <a:spcAft>
-                <a:spcPts val="600"/>
-              </a:spcAft>
-            </a:pPr>
-            <a:r>
-              <a:rPr sz="1500" b="0">
-                <a:solidFill>
-                  <a:srgbClr val="1A1A1A"/>
-                </a:solidFill>
-                <a:latin typeface="Helvetica Neue"/>
-              </a:rPr>
-              <a:t>Orchestration</a:t>
-            </a:r>
-          </a:p>
-          <a:p>
-            <a:pPr algn="l">
-              <a:spcAft>
-                <a:spcPts val="600"/>
-              </a:spcAft>
-            </a:pPr>
-            <a:r>
-              <a:rPr sz="1500" b="0">
-                <a:solidFill>
-                  <a:srgbClr val="1A1A1A"/>
-                </a:solidFill>
-                <a:latin typeface="Helvetica Neue"/>
-              </a:rPr>
-              <a:t>3 pinned Docker images.</a:t>
-            </a:r>
-          </a:p>
-          <a:p>
-            <a:pPr algn="l">
-              <a:spcAft>
-                <a:spcPts val="600"/>
-              </a:spcAft>
-            </a:pPr>
-            <a:r>
-              <a:rPr sz="1500" b="0">
-                <a:solidFill>
-                  <a:srgbClr val="1A1A1A"/>
-                </a:solidFill>
-                <a:latin typeface="Helvetica Neue"/>
-              </a:rPr>
-              <a:t>Kubernetes Jobs on two clusters.</a:t>
-            </a:r>
-          </a:p>
-          <a:p>
-            <a:pPr algn="l">
-              <a:spcAft>
-                <a:spcPts val="600"/>
-              </a:spcAft>
-            </a:pPr>
-            <a:r>
-              <a:rPr sz="1500" b="0">
-                <a:solidFill>
-                  <a:srgbClr val="1A1A1A"/>
-                </a:solidFill>
-                <a:latin typeface="Helvetica Neue"/>
-              </a:rPr>
-              <a:t>Kueue admission on the TPU pool.</a:t>
-            </a:r>
-          </a:p>
-          <a:p>
-            <a:pPr algn="l">
-              <a:spcAft>
-                <a:spcPts val="600"/>
-              </a:spcAft>
-            </a:pPr>
-            <a:r>
-              <a:rPr sz="1500" b="0">
-                <a:solidFill>
-                  <a:srgbClr val="1A1A1A"/>
-                </a:solidFill>
-                <a:latin typeface="Helvetica Neue"/>
-              </a:rPr>
-              <a:t>Explicit CPU / memory / chip limits.</a:t>
-            </a:r>
-          </a:p>
-        </p:txBody>
-      </p:sp>
-      <p:sp>
-        <p:nvSpPr>
-          <p:cNvPr id="8" name="TextBox 7"/>
+                <a:spcPts val="200"/>
+              </a:spcAft>
+            </a:pPr>
+            <a:r>
+              <a:rPr sz="1200" b="0" i="0">
+                <a:solidFill>
+                  <a:srgbClr val="15171A"/>
+                </a:solidFill>
+                <a:latin typeface="Helvetica Neue"/>
+              </a:rPr>
+              <a:t>One JAX / Flax program.</a:t>
+            </a:r>
+          </a:p>
+          <a:p>
+            <a:pPr algn="l">
+              <a:spcAft>
+                <a:spcPts val="200"/>
+              </a:spcAft>
+            </a:pPr>
+            <a:r>
+              <a:rPr sz="1200" b="0" i="0">
+                <a:solidFill>
+                  <a:srgbClr val="15171A"/>
+                </a:solidFill>
+                <a:latin typeface="Helvetica Neue"/>
+              </a:rPr>
+              <a:t>XLA lowers it to CPU, CUDA</a:t>
+            </a:r>
+          </a:p>
+          <a:p>
+            <a:pPr algn="l">
+              <a:spcAft>
+                <a:spcPts val="200"/>
+              </a:spcAft>
+            </a:pPr>
+            <a:r>
+              <a:rPr sz="1200" b="0" i="0">
+                <a:solidFill>
+                  <a:srgbClr val="15171A"/>
+                </a:solidFill>
+                <a:latin typeface="Helvetica Neue"/>
+              </a:rPr>
+              <a:t>and TPU.</a:t>
+            </a:r>
+          </a:p>
+          <a:p>
+            <a:pPr algn="l">
+              <a:spcAft>
+                <a:spcPts val="200"/>
+              </a:spcAft>
+            </a:pPr>
+            <a:r>
+              <a:rPr sz="1200" b="0" i="0">
+                <a:solidFill>
+                  <a:srgbClr val="15171A"/>
+                </a:solidFill>
+                <a:latin typeface="Helvetica Neue"/>
+              </a:rPr>
+              <a:t>LoRA via qwix, training via</a:t>
+            </a:r>
+          </a:p>
+          <a:p>
+            <a:pPr algn="l">
+              <a:spcAft>
+                <a:spcPts val="200"/>
+              </a:spcAft>
+            </a:pPr>
+            <a:r>
+              <a:rPr sz="1200" b="0" i="0">
+                <a:solidFill>
+                  <a:srgbClr val="15171A"/>
+                </a:solidFill>
+                <a:latin typeface="Helvetica Neue"/>
+              </a:rPr>
+              <a:t>Tunix — no per-backend</a:t>
+            </a:r>
+          </a:p>
+          <a:p>
+            <a:pPr algn="l">
+              <a:spcAft>
+                <a:spcPts val="200"/>
+              </a:spcAft>
+            </a:pPr>
+            <a:r>
+              <a:rPr sz="1200" b="0" i="0">
+                <a:solidFill>
+                  <a:srgbClr val="15171A"/>
+                </a:solidFill>
+                <a:latin typeface="Helvetica Neue"/>
+              </a:rPr>
+              <a:t>reimplementation.</a:t>
+            </a:r>
+          </a:p>
+        </p:txBody>
+      </p:sp>
+      <p:sp>
+        <p:nvSpPr>
+          <p:cNvPr id="9" name="Rounded Rectangle 8"/>
+          <p:cNvSpPr/>
+          <p:nvPr/>
+        </p:nvSpPr>
+        <p:spPr>
+          <a:xfrm>
+            <a:off x="4361688" y="1783080"/>
+            <a:ext cx="3520440" cy="2286000"/>
+          </a:xfrm>
+          <a:prstGeom prst="roundRect">
+            <a:avLst>
+              <a:gd name="adj" fmla="val 4000"/>
+            </a:avLst>
+          </a:prstGeom>
+          <a:solidFill>
+            <a:srgbClr val="FEF3EA"/>
+          </a:solidFill>
+          <a:ln w="9525">
+            <a:solidFill>
+              <a:srgbClr val="E6E9EC"/>
+            </a:solidFill>
+          </a:ln>
+          <a:effectLst/>
+        </p:spPr>
+        <p:style>
+          <a:lnRef idx="1">
+            <a:schemeClr val="accent1"/>
+          </a:lnRef>
+          <a:fillRef idx="3">
+            <a:schemeClr val="accent1"/>
+          </a:fillRef>
+          <a:effectRef idx="2">
+            <a:schemeClr val="accent1"/>
+          </a:effectRef>
+          <a:fontRef idx="minor">
+            <a:schemeClr val="lt1"/>
+          </a:fontRef>
+        </p:style>
+        <p:txBody>
+          <a:bodyPr rtlCol="0" anchor="ctr"/>
+          <a:lstStyle/>
+          <a:p>
+            <a:pPr algn="ctr"/>
+          </a:p>
+        </p:txBody>
+      </p:sp>
+      <p:sp>
+        <p:nvSpPr>
+          <p:cNvPr id="10" name="TextBox 9"/>
           <p:cNvSpPr txBox="1"/>
           <p:nvPr/>
         </p:nvSpPr>
         <p:spPr>
           <a:xfrm>
-            <a:off x="8229600" y="1691640"/>
-            <a:ext cx="3474720" cy="3291840"/>
+            <a:off x="4617720" y="1965960"/>
+            <a:ext cx="3017520" cy="365760"/>
           </a:xfrm>
           <a:prstGeom prst="rect">
             <a:avLst/>
@@ -5153,29 +5562,258 @@
           <a:p>
             <a:pPr algn="l">
               <a:spcAft>
-                <a:spcPts val="600"/>
-              </a:spcAft>
-            </a:pPr>
-            <a:r>
-              <a:rPr sz="1500" b="0">
-                <a:solidFill>
-                  <a:srgbClr val="1A1A1A"/>
+                <a:spcPts val="500"/>
+              </a:spcAft>
+            </a:pPr>
+            <a:r>
+              <a:rPr sz="1600" b="1" i="0">
+                <a:solidFill>
+                  <a:srgbClr val="E8590C"/>
+                </a:solidFill>
+                <a:latin typeface="Helvetica Neue"/>
+              </a:rPr>
+              <a:t>Orchestration</a:t>
+            </a:r>
+          </a:p>
+        </p:txBody>
+      </p:sp>
+      <p:sp>
+        <p:nvSpPr>
+          <p:cNvPr id="11" name="TextBox 10"/>
+          <p:cNvSpPr txBox="1"/>
+          <p:nvPr/>
+        </p:nvSpPr>
+        <p:spPr>
+          <a:xfrm>
+            <a:off x="4617720" y="2359152"/>
+            <a:ext cx="3063240" cy="1645920"/>
+          </a:xfrm>
+          <a:prstGeom prst="rect">
+            <a:avLst/>
+          </a:prstGeom>
+          <a:noFill/>
+        </p:spPr>
+        <p:txBody>
+          <a:bodyPr wrap="square" anchor="t">
+            <a:spAutoFit/>
+          </a:bodyPr>
+          <a:lstStyle/>
+          <a:p>
+            <a:pPr algn="l">
+              <a:spcAft>
+                <a:spcPts val="200"/>
+              </a:spcAft>
+            </a:pPr>
+            <a:r>
+              <a:rPr sz="1200" b="0" i="0">
+                <a:solidFill>
+                  <a:srgbClr val="15171A"/>
+                </a:solidFill>
+                <a:latin typeface="Helvetica Neue"/>
+              </a:rPr>
+              <a:t>3 pinned Docker images.</a:t>
+            </a:r>
+          </a:p>
+          <a:p>
+            <a:pPr algn="l">
+              <a:spcAft>
+                <a:spcPts val="200"/>
+              </a:spcAft>
+            </a:pPr>
+            <a:r>
+              <a:rPr sz="1200" b="0" i="0">
+                <a:solidFill>
+                  <a:srgbClr val="15171A"/>
+                </a:solidFill>
+                <a:latin typeface="Helvetica Neue"/>
+              </a:rPr>
+              <a:t>Kubernetes Jobs across two</a:t>
+            </a:r>
+          </a:p>
+          <a:p>
+            <a:pPr algn="l">
+              <a:spcAft>
+                <a:spcPts val="200"/>
+              </a:spcAft>
+            </a:pPr>
+            <a:r>
+              <a:rPr sz="1200" b="0" i="0">
+                <a:solidFill>
+                  <a:srgbClr val="15171A"/>
+                </a:solidFill>
+                <a:latin typeface="Helvetica Neue"/>
+              </a:rPr>
+              <a:t>clusters.</a:t>
+            </a:r>
+          </a:p>
+          <a:p>
+            <a:pPr algn="l">
+              <a:spcAft>
+                <a:spcPts val="200"/>
+              </a:spcAft>
+            </a:pPr>
+            <a:r>
+              <a:rPr sz="1200" b="0" i="0">
+                <a:solidFill>
+                  <a:srgbClr val="15171A"/>
+                </a:solidFill>
+                <a:latin typeface="Helvetica Neue"/>
+              </a:rPr>
+              <a:t>Kueue admission on the TPU</a:t>
+            </a:r>
+          </a:p>
+          <a:p>
+            <a:pPr algn="l">
+              <a:spcAft>
+                <a:spcPts val="200"/>
+              </a:spcAft>
+            </a:pPr>
+            <a:r>
+              <a:rPr sz="1200" b="0" i="0">
+                <a:solidFill>
+                  <a:srgbClr val="15171A"/>
+                </a:solidFill>
+                <a:latin typeface="Helvetica Neue"/>
+              </a:rPr>
+              <a:t>pool. Every manifest states</a:t>
+            </a:r>
+          </a:p>
+          <a:p>
+            <a:pPr algn="l">
+              <a:spcAft>
+                <a:spcPts val="200"/>
+              </a:spcAft>
+            </a:pPr>
+            <a:r>
+              <a:rPr sz="1200" b="0" i="0">
+                <a:solidFill>
+                  <a:srgbClr val="15171A"/>
+                </a:solidFill>
+                <a:latin typeface="Helvetica Neue"/>
+              </a:rPr>
+              <a:t>its CPU, memory and chips.</a:t>
+            </a:r>
+          </a:p>
+        </p:txBody>
+      </p:sp>
+      <p:sp>
+        <p:nvSpPr>
+          <p:cNvPr id="12" name="Rounded Rectangle 11"/>
+          <p:cNvSpPr/>
+          <p:nvPr/>
+        </p:nvSpPr>
+        <p:spPr>
+          <a:xfrm>
+            <a:off x="8156448" y="1783080"/>
+            <a:ext cx="3520440" cy="2286000"/>
+          </a:xfrm>
+          <a:prstGeom prst="roundRect">
+            <a:avLst>
+              <a:gd name="adj" fmla="val 4000"/>
+            </a:avLst>
+          </a:prstGeom>
+          <a:solidFill>
+            <a:srgbClr val="FEF3EA"/>
+          </a:solidFill>
+          <a:ln w="9525">
+            <a:solidFill>
+              <a:srgbClr val="E6E9EC"/>
+            </a:solidFill>
+          </a:ln>
+          <a:effectLst/>
+        </p:spPr>
+        <p:style>
+          <a:lnRef idx="1">
+            <a:schemeClr val="accent1"/>
+          </a:lnRef>
+          <a:fillRef idx="3">
+            <a:schemeClr val="accent1"/>
+          </a:fillRef>
+          <a:effectRef idx="2">
+            <a:schemeClr val="accent1"/>
+          </a:effectRef>
+          <a:fontRef idx="minor">
+            <a:schemeClr val="lt1"/>
+          </a:fontRef>
+        </p:style>
+        <p:txBody>
+          <a:bodyPr rtlCol="0" anchor="ctr"/>
+          <a:lstStyle/>
+          <a:p>
+            <a:pPr algn="ctr"/>
+          </a:p>
+        </p:txBody>
+      </p:sp>
+      <p:sp>
+        <p:nvSpPr>
+          <p:cNvPr id="13" name="TextBox 12"/>
+          <p:cNvSpPr txBox="1"/>
+          <p:nvPr/>
+        </p:nvSpPr>
+        <p:spPr>
+          <a:xfrm>
+            <a:off x="8412480" y="1965960"/>
+            <a:ext cx="3017520" cy="365760"/>
+          </a:xfrm>
+          <a:prstGeom prst="rect">
+            <a:avLst/>
+          </a:prstGeom>
+          <a:noFill/>
+        </p:spPr>
+        <p:txBody>
+          <a:bodyPr wrap="square" anchor="t">
+            <a:spAutoFit/>
+          </a:bodyPr>
+          <a:lstStyle/>
+          <a:p>
+            <a:pPr algn="l">
+              <a:spcAft>
+                <a:spcPts val="500"/>
+              </a:spcAft>
+            </a:pPr>
+            <a:r>
+              <a:rPr sz="1600" b="1" i="0">
+                <a:solidFill>
+                  <a:srgbClr val="E8590C"/>
                 </a:solidFill>
                 <a:latin typeface="Helvetica Neue"/>
               </a:rPr>
               <a:t>Storage</a:t>
             </a:r>
           </a:p>
-          <a:p>
-            <a:pPr algn="l">
-              <a:spcAft>
-                <a:spcPts val="600"/>
-              </a:spcAft>
-            </a:pPr>
-            <a:r>
-              <a:rPr sz="1500" b="0">
-                <a:solidFill>
-                  <a:srgbClr val="1A1A1A"/>
+        </p:txBody>
+      </p:sp>
+      <p:sp>
+        <p:nvSpPr>
+          <p:cNvPr id="14" name="TextBox 13"/>
+          <p:cNvSpPr txBox="1"/>
+          <p:nvPr/>
+        </p:nvSpPr>
+        <p:spPr>
+          <a:xfrm>
+            <a:off x="8412480" y="2359152"/>
+            <a:ext cx="3063240" cy="1645920"/>
+          </a:xfrm>
+          <a:prstGeom prst="rect">
+            <a:avLst/>
+          </a:prstGeom>
+          <a:noFill/>
+        </p:spPr>
+        <p:txBody>
+          <a:bodyPr wrap="square" anchor="t">
+            <a:spAutoFit/>
+          </a:bodyPr>
+          <a:lstStyle/>
+          <a:p>
+            <a:pPr algn="l">
+              <a:spcAft>
+                <a:spcPts val="200"/>
+              </a:spcAft>
+            </a:pPr>
+            <a:r>
+              <a:rPr sz="1200" b="0" i="0">
+                <a:solidFill>
+                  <a:srgbClr val="15171A"/>
                 </a:solidFill>
                 <a:latin typeface="Helvetica Neue"/>
               </a:rPr>
@@ -5185,64 +5823,112 @@
           <a:p>
             <a:pPr algn="l">
               <a:spcAft>
-                <a:spcPts val="600"/>
-              </a:spcAft>
-            </a:pPr>
-            <a:r>
-              <a:rPr sz="1500" b="0">
-                <a:solidFill>
-                  <a:srgbClr val="1A1A1A"/>
-                </a:solidFill>
-                <a:latin typeface="Helvetica Neue"/>
-              </a:rPr>
-              <a:t>8 GB checkpoint from a bucket.</a:t>
-            </a:r>
-          </a:p>
-          <a:p>
-            <a:pPr algn="l">
-              <a:spcAft>
-                <a:spcPts val="600"/>
-              </a:spcAft>
-            </a:pPr>
-            <a:r>
-              <a:rPr sz="1500" b="0">
-                <a:solidFill>
-                  <a:srgbClr val="1A1A1A"/>
-                </a:solidFill>
-                <a:latin typeface="Helvetica Neue"/>
-              </a:rPr>
-              <a:t>fileCacheCapacity as a knob —</a:t>
-            </a:r>
-          </a:p>
-          <a:p>
-            <a:pPr algn="l">
-              <a:spcAft>
-                <a:spcPts val="600"/>
-              </a:spcAft>
-            </a:pPr>
-            <a:r>
-              <a:rPr sz="1500" b="0">
-                <a:solidFill>
-                  <a:srgbClr val="1A1A1A"/>
-                </a:solidFill>
-                <a:latin typeface="Helvetica Neue"/>
-              </a:rPr>
-              <a:t>that knob is the experiment.</a:t>
+                <a:spcPts val="200"/>
+              </a:spcAft>
+            </a:pPr>
+            <a:r>
+              <a:rPr sz="1200" b="0" i="0">
+                <a:solidFill>
+                  <a:srgbClr val="15171A"/>
+                </a:solidFill>
+                <a:latin typeface="Helvetica Neue"/>
+              </a:rPr>
+              <a:t>An 8 GB checkpoint read</a:t>
+            </a:r>
+          </a:p>
+          <a:p>
+            <a:pPr algn="l">
+              <a:spcAft>
+                <a:spcPts val="200"/>
+              </a:spcAft>
+            </a:pPr>
+            <a:r>
+              <a:rPr sz="1200" b="0" i="0">
+                <a:solidFill>
+                  <a:srgbClr val="15171A"/>
+                </a:solidFill>
+                <a:latin typeface="Helvetica Neue"/>
+              </a:rPr>
+              <a:t>from a bucket.</a:t>
+            </a:r>
+          </a:p>
+          <a:p>
+            <a:pPr algn="l">
+              <a:spcAft>
+                <a:spcPts val="200"/>
+              </a:spcAft>
+            </a:pPr>
+            <a:r>
+              <a:rPr sz="1200" b="0" i="0">
+                <a:solidFill>
+                  <a:srgbClr val="15171A"/>
+                </a:solidFill>
+                <a:latin typeface="Helvetica Neue"/>
+              </a:rPr>
+              <a:t>The file cache was left as a</a:t>
+            </a:r>
+          </a:p>
+          <a:p>
+            <a:pPr algn="l">
+              <a:spcAft>
+                <a:spcPts val="200"/>
+              </a:spcAft>
+            </a:pPr>
+            <a:r>
+              <a:rPr sz="1200" b="0" i="0">
+                <a:solidFill>
+                  <a:srgbClr val="15171A"/>
+                </a:solidFill>
+                <a:latin typeface="Helvetica Neue"/>
+              </a:rPr>
+              <a:t>knob rather than fixed —</a:t>
+            </a:r>
+          </a:p>
+          <a:p>
+            <a:pPr algn="l">
+              <a:spcAft>
+                <a:spcPts val="200"/>
+              </a:spcAft>
+            </a:pPr>
+            <a:r>
+              <a:rPr sz="1200" b="0" i="0">
+                <a:solidFill>
+                  <a:srgbClr val="15171A"/>
+                </a:solidFill>
+                <a:latin typeface="Helvetica Neue"/>
+              </a:rPr>
+              <a:t>that knob became the</a:t>
+            </a:r>
+          </a:p>
+          <a:p>
+            <a:pPr algn="l">
+              <a:spcAft>
+                <a:spcPts val="200"/>
+              </a:spcAft>
+            </a:pPr>
+            <a:r>
+              <a:rPr sz="1200" b="0" i="0">
+                <a:solidFill>
+                  <a:srgbClr val="15171A"/>
+                </a:solidFill>
+                <a:latin typeface="Helvetica Neue"/>
+              </a:rPr>
+              <a:t>experiment.</a:t>
             </a:r>
           </a:p>
         </p:txBody>
       </p:sp>
       <p:graphicFrame>
         <p:nvGraphicFramePr>
-          <p:cNvPr id="9" name="Table 8"/>
+          <p:cNvPr id="15" name="Table 14"/>
           <p:cNvGraphicFramePr>
             <a:graphicFrameLocks noGrp="1"/>
           </p:cNvGraphicFramePr>
           <p:nvPr/>
         </p:nvGraphicFramePr>
         <p:xfrm>
-          <a:off x="548640" y="4617720"/>
-          <a:ext cx="11064240" cy="1536192"/>
+          <a:off x="566928" y="4343400"/>
+          <a:ext cx="11064238" cy="1463040"/>
         </p:xfrm>
         <a:graphic>
           <a:graphicData uri="http://schemas.openxmlformats.org/drawingml/2006/table">
@@ -5252,11 +5938,11 @@
               </a:tblPr>
               <a:tblGrid>
                 <a:gridCol w="1371600"/>
-                <a:gridCol w="3840480"/>
-                <a:gridCol w="2377440"/>
-                <a:gridCol w="3474720"/>
+                <a:gridCol w="3749039"/>
+                <a:gridCol w="2194560"/>
+                <a:gridCol w="3749039"/>
               </a:tblGrid>
-              <a:tr h="384048">
+              <a:tr h="365760">
                 <a:tc>
                   <a:txBody>
                     <a:bodyPr/>
@@ -5264,7 +5950,7 @@
                     <a:p>
                       <a:pPr algn="l"/>
                       <a:r>
-                        <a:rPr sz="1300" b="1">
+                        <a:rPr sz="1250" b="1">
                           <a:solidFill>
                             <a:srgbClr val="FFFFFF"/>
                           </a:solidFill>
@@ -5274,9 +5960,9 @@
                       </a:r>
                     </a:p>
                   </a:txBody>
-                  <a:tcPr anchor="ctr" marL="91440" marT="18288" marB="18288">
+                  <a:tcPr anchor="ctr" marL="82296" marR="82296" marT="9144" marB="9144">
                     <a:solidFill>
-                      <a:srgbClr val="E8590C"/>
+                      <a:srgbClr val="15171A"/>
                     </a:solidFill>
                   </a:tcPr>
                 </a:tc>
@@ -5285,9 +5971,9 @@
                     <a:bodyPr/>
                     <a:lstStyle/>
                     <a:p>
-                      <a:pPr algn="r"/>
+                      <a:pPr algn="l"/>
                       <a:r>
-                        <a:rPr sz="1300" b="1">
+                        <a:rPr sz="1250" b="1">
                           <a:solidFill>
                             <a:srgbClr val="FFFFFF"/>
                           </a:solidFill>
@@ -5297,9 +5983,9 @@
                       </a:r>
                     </a:p>
                   </a:txBody>
-                  <a:tcPr anchor="ctr" marL="91440" marT="18288" marB="18288">
+                  <a:tcPr anchor="ctr" marL="82296" marR="82296" marT="9144" marB="9144">
                     <a:solidFill>
-                      <a:srgbClr val="E8590C"/>
+                      <a:srgbClr val="15171A"/>
                     </a:solidFill>
                   </a:tcPr>
                 </a:tc>
@@ -5308,9 +5994,9 @@
                     <a:bodyPr/>
                     <a:lstStyle/>
                     <a:p>
-                      <a:pPr algn="r"/>
+                      <a:pPr algn="l"/>
                       <a:r>
-                        <a:rPr sz="1300" b="1">
+                        <a:rPr sz="1250" b="1">
                           <a:solidFill>
                             <a:srgbClr val="FFFFFF"/>
                           </a:solidFill>
@@ -5320,9 +6006,9 @@
                       </a:r>
                     </a:p>
                   </a:txBody>
-                  <a:tcPr anchor="ctr" marL="91440" marT="18288" marB="18288">
+                  <a:tcPr anchor="ctr" marL="82296" marR="82296" marT="9144" marB="9144">
                     <a:solidFill>
-                      <a:srgbClr val="E8590C"/>
+                      <a:srgbClr val="15171A"/>
                     </a:solidFill>
                   </a:tcPr>
                 </a:tc>
@@ -5331,26 +6017,26 @@
                     <a:bodyPr/>
                     <a:lstStyle/>
                     <a:p>
-                      <a:pPr algn="r"/>
+                      <a:pPr algn="l"/>
                       <a:r>
-                        <a:rPr sz="1300" b="1">
+                        <a:rPr sz="1250" b="1">
                           <a:solidFill>
                             <a:srgbClr val="FFFFFF"/>
                           </a:solidFill>
                           <a:latin typeface="Helvetica Neue"/>
                         </a:rPr>
-                        <a:t>Delivery</a:t>
+                        <a:t>How the code got there</a:t>
                       </a:r>
                     </a:p>
                   </a:txBody>
-                  <a:tcPr anchor="ctr" marL="91440" marT="18288" marB="18288">
+                  <a:tcPr anchor="ctr" marL="82296" marR="82296" marT="9144" marB="9144">
                     <a:solidFill>
-                      <a:srgbClr val="E8590C"/>
+                      <a:srgbClr val="15171A"/>
                     </a:solidFill>
                   </a:tcPr>
                 </a:tc>
               </a:tr>
-              <a:tr h="384048">
+              <a:tr h="365760">
                 <a:tc>
                   <a:txBody>
                     <a:bodyPr/>
@@ -5358,9 +6044,9 @@
                     <a:p>
                       <a:pPr algn="l"/>
                       <a:r>
-                        <a:rPr sz="1300">
+                        <a:rPr sz="1250">
                           <a:solidFill>
-                            <a:srgbClr val="1A1A1A"/>
+                            <a:srgbClr val="15171A"/>
                           </a:solidFill>
                           <a:latin typeface="Helvetica Neue"/>
                         </a:rPr>
@@ -5368,7 +6054,7 @@
                       </a:r>
                     </a:p>
                   </a:txBody>
-                  <a:tcPr anchor="ctr" marL="91440" marT="18288" marB="18288">
+                  <a:tcPr anchor="ctr" marL="82296" marR="82296" marT="9144" marB="9144">
                     <a:solidFill>
                       <a:srgbClr val="FFFFFF"/>
                     </a:solidFill>
@@ -5379,11 +6065,11 @@
                     <a:bodyPr/>
                     <a:lstStyle/>
                     <a:p>
-                      <a:pPr algn="r"/>
+                      <a:pPr algn="l"/>
                       <a:r>
-                        <a:rPr sz="1300">
+                        <a:rPr sz="1250">
                           <a:solidFill>
-                            <a:srgbClr val="1A1A1A"/>
+                            <a:srgbClr val="15171A"/>
                           </a:solidFill>
                           <a:latin typeface="Helvetica Neue"/>
                         </a:rPr>
@@ -5391,7 +6077,7 @@
                       </a:r>
                     </a:p>
                   </a:txBody>
-                  <a:tcPr anchor="ctr" marL="91440" marT="18288" marB="18288">
+                  <a:tcPr anchor="ctr" marL="82296" marR="82296" marT="9144" marB="9144">
                     <a:solidFill>
                       <a:srgbClr val="FFFFFF"/>
                     </a:solidFill>
@@ -5402,11 +6088,11 @@
                     <a:bodyPr/>
                     <a:lstStyle/>
                     <a:p>
-                      <a:pPr algn="r"/>
+                      <a:pPr algn="l"/>
                       <a:r>
-                        <a:rPr sz="1300">
+                        <a:rPr sz="1250">
                           <a:solidFill>
-                            <a:srgbClr val="1A1A1A"/>
+                            <a:srgbClr val="15171A"/>
                           </a:solidFill>
                           <a:latin typeface="Helvetica Neue"/>
                         </a:rPr>
@@ -5414,7 +6100,7 @@
                       </a:r>
                     </a:p>
                   </a:txBody>
-                  <a:tcPr anchor="ctr" marL="91440" marT="18288" marB="18288">
+                  <a:tcPr anchor="ctr" marL="82296" marR="82296" marT="9144" marB="9144">
                     <a:solidFill>
                       <a:srgbClr val="FFFFFF"/>
                     </a:solidFill>
@@ -5425,11 +6111,11 @@
                     <a:bodyPr/>
                     <a:lstStyle/>
                     <a:p>
-                      <a:pPr algn="r"/>
+                      <a:pPr algn="l"/>
                       <a:r>
-                        <a:rPr sz="1300">
+                        <a:rPr sz="1250">
                           <a:solidFill>
-                            <a:srgbClr val="1A1A1A"/>
+                            <a:srgbClr val="15171A"/>
                           </a:solidFill>
                           <a:latin typeface="Helvetica Neue"/>
                         </a:rPr>
@@ -5437,14 +6123,14 @@
                       </a:r>
                     </a:p>
                   </a:txBody>
-                  <a:tcPr anchor="ctr" marL="91440" marT="18288" marB="18288">
+                  <a:tcPr anchor="ctr" marL="82296" marR="82296" marT="9144" marB="9144">
                     <a:solidFill>
                       <a:srgbClr val="FFFFFF"/>
                     </a:solidFill>
                   </a:tcPr>
                 </a:tc>
               </a:tr>
-              <a:tr h="384048">
+              <a:tr h="365760">
                 <a:tc>
                   <a:txBody>
                     <a:bodyPr/>
@@ -5452,9 +6138,9 @@
                     <a:p>
                       <a:pPr algn="l"/>
                       <a:r>
-                        <a:rPr sz="1300">
+                        <a:rPr sz="1250">
                           <a:solidFill>
-                            <a:srgbClr val="1A1A1A"/>
+                            <a:srgbClr val="15171A"/>
                           </a:solidFill>
                           <a:latin typeface="Helvetica Neue"/>
                         </a:rPr>
@@ -5462,101 +6148,7 @@
                       </a:r>
                     </a:p>
                   </a:txBody>
-                  <a:tcPr anchor="ctr" marL="91440" marT="18288" marB="18288">
-                    <a:solidFill>
-                      <a:srgbClr val="FDF0E6"/>
-                    </a:solidFill>
-                  </a:tcPr>
-                </a:tc>
-                <a:tc>
-                  <a:txBody>
-                    <a:bodyPr/>
-                    <a:lstStyle/>
-                    <a:p>
-                      <a:pPr algn="r"/>
-                      <a:r>
-                        <a:rPr sz="1300">
-                          <a:solidFill>
-                            <a:srgbClr val="1A1A1A"/>
-                          </a:solidFill>
-                          <a:latin typeface="Helvetica Neue"/>
-                        </a:rPr>
-                        <a:t>NVIDIA GH200 480 GB</a:t>
-                      </a:r>
-                    </a:p>
-                  </a:txBody>
-                  <a:tcPr anchor="ctr" marL="91440" marT="18288" marB="18288">
-                    <a:solidFill>
-                      <a:srgbClr val="FDF0E6"/>
-                    </a:solidFill>
-                  </a:tcPr>
-                </a:tc>
-                <a:tc>
-                  <a:txBody>
-                    <a:bodyPr/>
-                    <a:lstStyle/>
-                    <a:p>
-                      <a:pPr algn="r"/>
-                      <a:r>
-                        <a:rPr sz="1300">
-                          <a:solidFill>
-                            <a:srgbClr val="1A1A1A"/>
-                          </a:solidFill>
-                          <a:latin typeface="Helvetica Neue"/>
-                        </a:rPr>
-                        <a:t>ARM64 Grace</a:t>
-                      </a:r>
-                    </a:p>
-                  </a:txBody>
-                  <a:tcPr anchor="ctr" marL="91440" marT="18288" marB="18288">
-                    <a:solidFill>
-                      <a:srgbClr val="FDF0E6"/>
-                    </a:solidFill>
-                  </a:tcPr>
-                </a:tc>
-                <a:tc>
-                  <a:txBody>
-                    <a:bodyPr/>
-                    <a:lstStyle/>
-                    <a:p>
-                      <a:pPr algn="r"/>
-                      <a:r>
-                        <a:rPr sz="1300">
-                          <a:solidFill>
-                            <a:srgbClr val="1A1A1A"/>
-                          </a:solidFill>
-                          <a:latin typeface="Helvetica Neue"/>
-                        </a:rPr>
-                        <a:t>public image + ConfigMap</a:t>
-                      </a:r>
-                    </a:p>
-                  </a:txBody>
-                  <a:tcPr anchor="ctr" marL="91440" marT="18288" marB="18288">
-                    <a:solidFill>
-                      <a:srgbClr val="FDF0E6"/>
-                    </a:solidFill>
-                  </a:tcPr>
-                </a:tc>
-              </a:tr>
-              <a:tr h="384048">
-                <a:tc>
-                  <a:txBody>
-                    <a:bodyPr/>
-                    <a:lstStyle/>
-                    <a:p>
-                      <a:pPr algn="l"/>
-                      <a:r>
-                        <a:rPr sz="1300">
-                          <a:solidFill>
-                            <a:srgbClr val="1A1A1A"/>
-                          </a:solidFill>
-                          <a:latin typeface="Helvetica Neue"/>
-                        </a:rPr>
-                        <a:t>TPU</a:t>
-                      </a:r>
-                    </a:p>
-                  </a:txBody>
-                  <a:tcPr anchor="ctr" marL="91440" marT="18288" marB="18288">
+                  <a:tcPr anchor="ctr" marL="82296" marR="82296" marT="9144" marB="9144">
                     <a:solidFill>
                       <a:srgbClr val="FFFFFF"/>
                     </a:solidFill>
@@ -5567,19 +6159,19 @@
                     <a:bodyPr/>
                     <a:lstStyle/>
                     <a:p>
-                      <a:pPr algn="r"/>
+                      <a:pPr algn="l"/>
                       <a:r>
-                        <a:rPr sz="1300">
+                        <a:rPr sz="1250">
                           <a:solidFill>
-                            <a:srgbClr val="1A1A1A"/>
+                            <a:srgbClr val="15171A"/>
                           </a:solidFill>
                           <a:latin typeface="Helvetica Neue"/>
                         </a:rPr>
-                        <a:t>v5e 2×4 — 8 chips</a:t>
+                        <a:t>NVIDIA GH200 480 GB</a:t>
                       </a:r>
                     </a:p>
                   </a:txBody>
-                  <a:tcPr anchor="ctr" marL="91440" marT="18288" marB="18288">
+                  <a:tcPr anchor="ctr" marL="82296" marR="82296" marT="9144" marB="9144">
                     <a:solidFill>
                       <a:srgbClr val="FFFFFF"/>
                     </a:solidFill>
@@ -5590,19 +6182,19 @@
                     <a:bodyPr/>
                     <a:lstStyle/>
                     <a:p>
-                      <a:pPr algn="r"/>
+                      <a:pPr algn="l"/>
                       <a:r>
-                        <a:rPr sz="1300">
+                        <a:rPr sz="1250">
                           <a:solidFill>
-                            <a:srgbClr val="1A1A1A"/>
+                            <a:srgbClr val="15171A"/>
                           </a:solidFill>
                           <a:latin typeface="Helvetica Neue"/>
                         </a:rPr>
-                        <a:t>x86_64</a:t>
+                        <a:t>ARM64 Grace</a:t>
                       </a:r>
                     </a:p>
                   </a:txBody>
-                  <a:tcPr anchor="ctr" marL="91440" marT="18288" marB="18288">
+                  <a:tcPr anchor="ctr" marL="82296" marR="82296" marT="9144" marB="9144">
                     <a:solidFill>
                       <a:srgbClr val="FFFFFF"/>
                     </a:solidFill>
@@ -5613,11 +6205,105 @@
                     <a:bodyPr/>
                     <a:lstStyle/>
                     <a:p>
-                      <a:pPr algn="r"/>
+                      <a:pPr algn="l"/>
                       <a:r>
-                        <a:rPr sz="1300">
+                        <a:rPr sz="1250">
                           <a:solidFill>
-                            <a:srgbClr val="1A1A1A"/>
+                            <a:srgbClr val="15171A"/>
+                          </a:solidFill>
+                          <a:latin typeface="Helvetica Neue"/>
+                        </a:rPr>
+                        <a:t>public image + ConfigMap</a:t>
+                      </a:r>
+                    </a:p>
+                  </a:txBody>
+                  <a:tcPr anchor="ctr" marL="82296" marR="82296" marT="9144" marB="9144">
+                    <a:solidFill>
+                      <a:srgbClr val="FFFFFF"/>
+                    </a:solidFill>
+                  </a:tcPr>
+                </a:tc>
+              </a:tr>
+              <a:tr h="365760">
+                <a:tc>
+                  <a:txBody>
+                    <a:bodyPr/>
+                    <a:lstStyle/>
+                    <a:p>
+                      <a:pPr algn="l"/>
+                      <a:r>
+                        <a:rPr sz="1250">
+                          <a:solidFill>
+                            <a:srgbClr val="15171A"/>
+                          </a:solidFill>
+                          <a:latin typeface="Helvetica Neue"/>
+                        </a:rPr>
+                        <a:t>TPU</a:t>
+                      </a:r>
+                    </a:p>
+                  </a:txBody>
+                  <a:tcPr anchor="ctr" marL="82296" marR="82296" marT="9144" marB="9144">
+                    <a:solidFill>
+                      <a:srgbClr val="FFFFFF"/>
+                    </a:solidFill>
+                  </a:tcPr>
+                </a:tc>
+                <a:tc>
+                  <a:txBody>
+                    <a:bodyPr/>
+                    <a:lstStyle/>
+                    <a:p>
+                      <a:pPr algn="l"/>
+                      <a:r>
+                        <a:rPr sz="1250">
+                          <a:solidFill>
+                            <a:srgbClr val="15171A"/>
+                          </a:solidFill>
+                          <a:latin typeface="Helvetica Neue"/>
+                        </a:rPr>
+                        <a:t>v5e 2×4 — 8 chips</a:t>
+                      </a:r>
+                    </a:p>
+                  </a:txBody>
+                  <a:tcPr anchor="ctr" marL="82296" marR="82296" marT="9144" marB="9144">
+                    <a:solidFill>
+                      <a:srgbClr val="FFFFFF"/>
+                    </a:solidFill>
+                  </a:tcPr>
+                </a:tc>
+                <a:tc>
+                  <a:txBody>
+                    <a:bodyPr/>
+                    <a:lstStyle/>
+                    <a:p>
+                      <a:pPr algn="l"/>
+                      <a:r>
+                        <a:rPr sz="1250">
+                          <a:solidFill>
+                            <a:srgbClr val="15171A"/>
+                          </a:solidFill>
+                          <a:latin typeface="Helvetica Neue"/>
+                        </a:rPr>
+                        <a:t>x86_64</a:t>
+                      </a:r>
+                    </a:p>
+                  </a:txBody>
+                  <a:tcPr anchor="ctr" marL="82296" marR="82296" marT="9144" marB="9144">
+                    <a:solidFill>
+                      <a:srgbClr val="FFFFFF"/>
+                    </a:solidFill>
+                  </a:tcPr>
+                </a:tc>
+                <a:tc>
+                  <a:txBody>
+                    <a:bodyPr/>
+                    <a:lstStyle/>
+                    <a:p>
+                      <a:pPr algn="l"/>
+                      <a:r>
+                        <a:rPr sz="1250">
+                          <a:solidFill>
+                            <a:srgbClr val="15171A"/>
                           </a:solidFill>
                           <a:latin typeface="Helvetica Neue"/>
                         </a:rPr>
@@ -5625,7 +6311,7 @@
                       </a:r>
                     </a:p>
                   </a:txBody>
-                  <a:tcPr anchor="ctr" marL="91440" marT="18288" marB="18288">
+                  <a:tcPr anchor="ctr" marL="82296" marR="82296" marT="9144" marB="9144">
                     <a:solidFill>
                       <a:srgbClr val="FFFFFF"/>
                     </a:solidFill>
@@ -5636,6 +6322,45 @@
           </a:graphicData>
         </a:graphic>
       </p:graphicFrame>
+      <p:sp>
+        <p:nvSpPr>
+          <p:cNvPr id="16" name="TextBox 15"/>
+          <p:cNvSpPr txBox="1"/>
+          <p:nvPr/>
+        </p:nvSpPr>
+        <p:spPr>
+          <a:xfrm>
+            <a:off x="566928" y="5989320"/>
+            <a:ext cx="10972800" cy="548640"/>
+          </a:xfrm>
+          <a:prstGeom prst="rect">
+            <a:avLst/>
+          </a:prstGeom>
+          <a:noFill/>
+        </p:spPr>
+        <p:txBody>
+          <a:bodyPr wrap="square" anchor="t">
+            <a:spAutoFit/>
+          </a:bodyPr>
+          <a:lstStyle/>
+          <a:p>
+            <a:pPr algn="l">
+              <a:spcAft>
+                <a:spcPts val="500"/>
+              </a:spcAft>
+            </a:pPr>
+            <a:r>
+              <a:rPr sz="1300" b="0" i="1">
+                <a:solidFill>
+                  <a:srgbClr val="717A85"/>
+                </a:solidFill>
+                <a:latin typeface="Helvetica Neue"/>
+              </a:rPr>
+              <a:t>Note the middle row: the GH200's host is ARM64, not x86. That single fact cost us five separate blockers.</a:t>
+            </a:r>
+          </a:p>
+        </p:txBody>
+      </p:sp>
     </p:spTree>
   </p:cSld>
   <p:clrMapOvr>
@@ -5663,7 +6388,7 @@
         <p:spPr>
           <a:xfrm>
             <a:off x="0" y="0"/>
-            <a:ext cx="12191695" cy="118872"/>
+            <a:ext cx="146304" cy="6858000"/>
           </a:xfrm>
           <a:prstGeom prst="rect">
             <a:avLst/>
@@ -5706,8 +6431,8 @@
         </p:nvSpPr>
         <p:spPr>
           <a:xfrm>
-            <a:off x="548640" y="320040"/>
-            <a:ext cx="914400" cy="548640"/>
+            <a:off x="10881360" y="45720"/>
+            <a:ext cx="1188720" cy="1371600"/>
           </a:xfrm>
           <a:prstGeom prst="rect">
             <a:avLst/>
@@ -5715,20 +6440,16 @@
           <a:noFill/>
         </p:spPr>
         <p:txBody>
-          <a:bodyPr wrap="square" anchor="t">
+          <a:bodyPr wrap="none">
             <a:spAutoFit/>
           </a:bodyPr>
           <a:lstStyle/>
           <a:p>
-            <a:pPr algn="l">
-              <a:spcAft>
-                <a:spcPts val="600"/>
-              </a:spcAft>
-            </a:pPr>
-            <a:r>
-              <a:rPr sz="4000" b="1">
-                <a:solidFill>
-                  <a:srgbClr val="E8590C"/>
+            <a:pPr algn="r"/>
+            <a:r>
+              <a:rPr sz="7200" b="1">
+                <a:solidFill>
+                  <a:srgbClr val="E6E9EC"/>
                 </a:solidFill>
                 <a:latin typeface="Helvetica Neue"/>
               </a:rPr>
@@ -5745,8 +6466,8 @@
         </p:nvSpPr>
         <p:spPr>
           <a:xfrm>
-            <a:off x="1234440" y="384048"/>
-            <a:ext cx="10424160" cy="731520"/>
+            <a:off x="566928" y="365760"/>
+            <a:ext cx="9601200" cy="274320"/>
           </a:xfrm>
           <a:prstGeom prst="rect">
             <a:avLst/>
@@ -5761,17 +6482,17 @@
           <a:p>
             <a:pPr algn="l">
               <a:spcAft>
-                <a:spcPts val="600"/>
-              </a:spcAft>
-            </a:pPr>
-            <a:r>
-              <a:rPr sz="3000" b="1">
-                <a:solidFill>
-                  <a:srgbClr val="1A1A1A"/>
-                </a:solidFill>
-                <a:latin typeface="Helvetica Neue"/>
-              </a:rPr>
-              <a:t>How we measured</a:t>
+                <a:spcPts val="500"/>
+              </a:spcAft>
+            </a:pPr>
+            <a:r>
+              <a:rPr sz="1200" b="1" i="0">
+                <a:solidFill>
+                  <a:srgbClr val="E8590C"/>
+                </a:solidFill>
+                <a:latin typeface="Helvetica Neue"/>
+              </a:rPr>
+              <a:t>MEASUREMENTS</a:t>
             </a:r>
           </a:p>
         </p:txBody>
@@ -5784,8 +6505,8 @@
         </p:nvSpPr>
         <p:spPr>
           <a:xfrm>
-            <a:off x="1234440" y="1024128"/>
-            <a:ext cx="10424160" cy="457200"/>
+            <a:off x="566928" y="658368"/>
+            <a:ext cx="10058400" cy="822960"/>
           </a:xfrm>
           <a:prstGeom prst="rect">
             <a:avLst/>
@@ -5800,17 +6521,17 @@
           <a:p>
             <a:pPr algn="l">
               <a:spcAft>
-                <a:spcPts val="600"/>
-              </a:spcAft>
-            </a:pPr>
-            <a:r>
-              <a:rPr sz="1500" b="0">
-                <a:solidFill>
-                  <a:srgbClr val="6B7280"/>
-                </a:solidFill>
-                <a:latin typeface="Helvetica Neue"/>
-              </a:rPr>
-              <a:t>Every number below is emitted by the run itself, against a fixed schema</a:t>
+                <a:spcPts val="500"/>
+              </a:spcAft>
+            </a:pPr>
+            <a:r>
+              <a:rPr sz="3200" b="1" i="0">
+                <a:solidFill>
+                  <a:srgbClr val="15171A"/>
+                </a:solidFill>
+                <a:latin typeface="Helvetica Neue"/>
+              </a:rPr>
+              <a:t>We did not time the job. We took it apart.</a:t>
             </a:r>
           </a:p>
         </p:txBody>
@@ -5823,8 +6544,8 @@
         </p:nvSpPr>
         <p:spPr>
           <a:xfrm>
-            <a:off x="548640" y="1645920"/>
-            <a:ext cx="5120640" cy="3108960"/>
+            <a:off x="566928" y="1783080"/>
+            <a:ext cx="4846320" cy="2377440"/>
           </a:xfrm>
           <a:prstGeom prst="rect">
             <a:avLst/>
@@ -5839,61 +6560,77 @@
           <a:p>
             <a:pPr algn="l">
               <a:spcAft>
-                <a:spcPts val="600"/>
-              </a:spcAft>
-            </a:pPr>
-            <a:r>
-              <a:rPr sz="1400" b="0">
-                <a:solidFill>
-                  <a:srgbClr val="1A1A1A"/>
-                </a:solidFill>
-                <a:latin typeface="Helvetica Neue"/>
-              </a:rPr>
-              <a:t>Wall-clock decomposition, six phases</a:t>
-            </a:r>
-          </a:p>
-          <a:p>
-            <a:pPr algn="l">
-              <a:spcAft>
-                <a:spcPts val="600"/>
-              </a:spcAft>
-            </a:pPr>
-            <a:r>
-              <a:rPr sz="1400" b="0">
-                <a:solidFill>
-                  <a:srgbClr val="1A1A1A"/>
-                </a:solidFill>
-                <a:latin typeface="Helvetica Neue"/>
-              </a:rPr>
-              <a:t>scheduling · image pull · checkpoint load ·</a:t>
-            </a:r>
-          </a:p>
-          <a:p>
-            <a:pPr algn="l">
-              <a:spcAft>
-                <a:spcPts val="600"/>
-              </a:spcAft>
-            </a:pPr>
-            <a:r>
-              <a:rPr sz="1400" b="0">
-                <a:solidFill>
-                  <a:srgbClr val="1A1A1A"/>
-                </a:solidFill>
-                <a:latin typeface="Helvetica Neue"/>
-              </a:rPr>
-              <a:t>XLA compile · steady-state steps · checkpoint write</a:t>
-            </a:r>
-          </a:p>
-          <a:p>
-            <a:pPr algn="l">
-              <a:spcAft>
-                <a:spcPts val="600"/>
-              </a:spcAft>
-            </a:pPr>
-            <a:r>
-              <a:rPr sz="1400" b="0">
-                <a:solidFill>
-                  <a:srgbClr val="1A1A1A"/>
+                <a:spcPts val="300"/>
+              </a:spcAft>
+            </a:pPr>
+            <a:r>
+              <a:rPr sz="1300" b="0" i="0">
+                <a:solidFill>
+                  <a:srgbClr val="15171A"/>
+                </a:solidFill>
+                <a:latin typeface="Helvetica Neue"/>
+              </a:rPr>
+              <a:t>Every run takes its own wall clock apart</a:t>
+            </a:r>
+          </a:p>
+          <a:p>
+            <a:pPr algn="l">
+              <a:spcAft>
+                <a:spcPts val="300"/>
+              </a:spcAft>
+            </a:pPr>
+            <a:r>
+              <a:rPr sz="1300" b="0" i="0">
+                <a:solidFill>
+                  <a:srgbClr val="15171A"/>
+                </a:solidFill>
+                <a:latin typeface="Helvetica Neue"/>
+              </a:rPr>
+              <a:t>into six phases — scheduling, image pull,</a:t>
+            </a:r>
+          </a:p>
+          <a:p>
+            <a:pPr algn="l">
+              <a:spcAft>
+                <a:spcPts val="300"/>
+              </a:spcAft>
+            </a:pPr>
+            <a:r>
+              <a:rPr sz="1300" b="0" i="0">
+                <a:solidFill>
+                  <a:srgbClr val="15171A"/>
+                </a:solidFill>
+                <a:latin typeface="Helvetica Neue"/>
+              </a:rPr>
+              <a:t>checkpoint load, XLA compile, the steady-</a:t>
+            </a:r>
+          </a:p>
+          <a:p>
+            <a:pPr algn="l">
+              <a:spcAft>
+                <a:spcPts val="300"/>
+              </a:spcAft>
+            </a:pPr>
+            <a:r>
+              <a:rPr sz="1300" b="0" i="0">
+                <a:solidFill>
+                  <a:srgbClr val="15171A"/>
+                </a:solidFill>
+                <a:latin typeface="Helvetica Neue"/>
+              </a:rPr>
+              <a:t>state steps, checkpoint write.</a:t>
+            </a:r>
+          </a:p>
+          <a:p>
+            <a:pPr algn="l">
+              <a:spcAft>
+                <a:spcPts val="300"/>
+              </a:spcAft>
+            </a:pPr>
+            <a:r>
+              <a:rPr sz="1300" b="0" i="0">
+                <a:solidFill>
+                  <a:srgbClr val="15171A"/>
                 </a:solidFill>
                 <a:latin typeface="Helvetica Neue"/>
               </a:rPr>
@@ -5903,77 +6640,77 @@
           <a:p>
             <a:pPr algn="l">
               <a:spcAft>
-                <a:spcPts val="600"/>
-              </a:spcAft>
-            </a:pPr>
-            <a:r>
-              <a:rPr sz="1400" b="0">
-                <a:solidFill>
-                  <a:srgbClr val="1A1A1A"/>
-                </a:solidFill>
-                <a:latin typeface="Helvetica Neue"/>
-              </a:rPr>
-              <a:t>Sweeps</a:t>
-            </a:r>
-          </a:p>
-          <a:p>
-            <a:pPr algn="l">
-              <a:spcAft>
-                <a:spcPts val="600"/>
-              </a:spcAft>
-            </a:pPr>
-            <a:r>
-              <a:rPr sz="1400" b="0">
-                <a:solidFill>
-                  <a:srgbClr val="1A1A1A"/>
-                </a:solidFill>
-                <a:latin typeface="Helvetica Neue"/>
-              </a:rPr>
-              <a:t>batch 1→32 and sequence 512→2048, walked into OOM.</a:t>
-            </a:r>
-          </a:p>
-          <a:p>
-            <a:pPr algn="l">
-              <a:spcAft>
-                <a:spcPts val="600"/>
-              </a:spcAft>
-            </a:pPr>
-            <a:r>
-              <a:rPr sz="1400" b="0">
-                <a:solidFill>
-                  <a:srgbClr val="1A1A1A"/>
-                </a:solidFill>
-                <a:latin typeface="Helvetica Neue"/>
-              </a:rPr>
-              <a:t>A failed cell is recorded, not dropped — the boundary</a:t>
-            </a:r>
-          </a:p>
-          <a:p>
-            <a:pPr algn="l">
-              <a:spcAft>
-                <a:spcPts val="600"/>
-              </a:spcAft>
-            </a:pPr>
-            <a:r>
-              <a:rPr sz="1400" b="0">
-                <a:solidFill>
-                  <a:srgbClr val="1A1A1A"/>
-                </a:solidFill>
-                <a:latin typeface="Helvetica Neue"/>
-              </a:rPr>
-              <a:t>is the chart.</a:t>
-            </a:r>
-          </a:p>
-          <a:p>
-            <a:pPr algn="l">
-              <a:spcAft>
-                <a:spcPts val="600"/>
-              </a:spcAft>
-            </a:pPr>
-            <a:r>
-              <a:rPr sz="1400" b="0">
-                <a:solidFill>
-                  <a:srgbClr val="1A1A1A"/>
+                <a:spcPts val="300"/>
+              </a:spcAft>
+            </a:pPr>
+            <a:r>
+              <a:rPr sz="1300" b="0" i="0">
+                <a:solidFill>
+                  <a:srgbClr val="15171A"/>
+                </a:solidFill>
+                <a:latin typeface="Helvetica Neue"/>
+              </a:rPr>
+              <a:t>Batch and sequence sweeps walked until</a:t>
+            </a:r>
+          </a:p>
+          <a:p>
+            <a:pPr algn="l">
+              <a:spcAft>
+                <a:spcPts val="300"/>
+              </a:spcAft>
+            </a:pPr>
+            <a:r>
+              <a:rPr sz="1300" b="0" i="0">
+                <a:solidFill>
+                  <a:srgbClr val="15171A"/>
+                </a:solidFill>
+                <a:latin typeface="Helvetica Neue"/>
+              </a:rPr>
+              <a:t>the job dies. A failed cell is recorded,</a:t>
+            </a:r>
+          </a:p>
+          <a:p>
+            <a:pPr algn="l">
+              <a:spcAft>
+                <a:spcPts val="300"/>
+              </a:spcAft>
+            </a:pPr>
+            <a:r>
+              <a:rPr sz="1300" b="0" i="0">
+                <a:solidFill>
+                  <a:srgbClr val="15171A"/>
+                </a:solidFill>
+                <a:latin typeface="Helvetica Neue"/>
+              </a:rPr>
+              <a:t>never dropped — the boundary is the</a:t>
+            </a:r>
+          </a:p>
+          <a:p>
+            <a:pPr algn="l">
+              <a:spcAft>
+                <a:spcPts val="300"/>
+              </a:spcAft>
+            </a:pPr>
+            <a:r>
+              <a:rPr sz="1300" b="0" i="0">
+                <a:solidFill>
+                  <a:srgbClr val="15171A"/>
+                </a:solidFill>
+                <a:latin typeface="Helvetica Neue"/>
+              </a:rPr>
+              <a:t>measurement.</a:t>
+            </a:r>
+          </a:p>
+          <a:p>
+            <a:pPr algn="l">
+              <a:spcAft>
+                <a:spcPts val="300"/>
+              </a:spcAft>
+            </a:pPr>
+            <a:r>
+              <a:rPr sz="1300" b="0" i="0">
+                <a:solidFill>
+                  <a:srgbClr val="15171A"/>
                 </a:solidFill>
                 <a:latin typeface="Helvetica Neue"/>
               </a:rPr>
@@ -5983,56 +6720,40 @@
           <a:p>
             <a:pPr algn="l">
               <a:spcAft>
-                <a:spcPts val="600"/>
-              </a:spcAft>
-            </a:pPr>
-            <a:r>
-              <a:rPr sz="1400" b="0">
-                <a:solidFill>
-                  <a:srgbClr val="1A1A1A"/>
-                </a:solidFill>
-                <a:latin typeface="Helvetica Neue"/>
-              </a:rPr>
-              <a:t>Contract</a:t>
-            </a:r>
-          </a:p>
-          <a:p>
-            <a:pPr algn="l">
-              <a:spcAft>
-                <a:spcPts val="600"/>
-              </a:spcAft>
-            </a:pPr>
-            <a:r>
-              <a:rPr sz="1400" b="0">
-                <a:solidFill>
-                  <a:srgbClr val="1A1A1A"/>
-                </a:solidFill>
-                <a:latin typeface="Helvetica Neue"/>
-              </a:rPr>
-              <a:t>docs/metrics-contract.md. One JSON per run.</a:t>
-            </a:r>
-          </a:p>
-          <a:p>
-            <a:pPr algn="l">
-              <a:spcAft>
-                <a:spcPts val="600"/>
-              </a:spcAft>
-            </a:pPr>
-            <a:r>
-              <a:rPr sz="1400" b="0">
-                <a:solidFill>
-                  <a:srgbClr val="1A1A1A"/>
-                </a:solidFill>
-                <a:latin typeface="Helvetica Neue"/>
-              </a:rPr>
-              <a:t>Charts read results/ and nothing else.</a:t>
+                <a:spcPts val="300"/>
+              </a:spcAft>
+            </a:pPr>
+            <a:r>
+              <a:rPr sz="1300" b="0" i="0">
+                <a:solidFill>
+                  <a:srgbClr val="15171A"/>
+                </a:solidFill>
+                <a:latin typeface="Helvetica Neue"/>
+              </a:rPr>
+              <a:t>One schema, one JSON per run. Every figure</a:t>
+            </a:r>
+          </a:p>
+          <a:p>
+            <a:pPr algn="l">
+              <a:spcAft>
+                <a:spcPts val="300"/>
+              </a:spcAft>
+            </a:pPr>
+            <a:r>
+              <a:rPr sz="1300" b="0" i="0">
+                <a:solidFill>
+                  <a:srgbClr val="15171A"/>
+                </a:solidFill>
+                <a:latin typeface="Helvetica Neue"/>
+              </a:rPr>
+              <a:t>here reads those files and nothing else.</a:t>
             </a:r>
           </a:p>
         </p:txBody>
       </p:sp>
       <p:pic>
         <p:nvPicPr>
-          <p:cNvPr id="7" name="Picture 6" descr="panel-walltime.png"/>
+          <p:cNvPr id="7" name="Picture 6" descr="slide3-walltime.png"/>
           <p:cNvPicPr>
             <a:picLocks noChangeAspect="1"/>
           </p:cNvPicPr>
@@ -6046,8 +6767,8 @@
         </p:blipFill>
         <p:spPr>
           <a:xfrm>
-            <a:off x="5943600" y="1600200"/>
-            <a:ext cx="5760720" cy="2552813"/>
+            <a:off x="5852160" y="1828800"/>
+            <a:ext cx="5760720" cy="1228350"/>
           </a:xfrm>
           <a:prstGeom prst="rect">
             <a:avLst/>
@@ -6056,14 +6777,62 @@
       </p:pic>
       <p:sp>
         <p:nvSpPr>
-          <p:cNvPr id="8" name="TextBox 7"/>
+          <p:cNvPr id="8" name="Rounded Rectangle 7"/>
+          <p:cNvSpPr/>
+          <p:nvPr/>
+        </p:nvSpPr>
+        <p:spPr>
+          <a:xfrm>
+            <a:off x="5852160" y="3520440"/>
+            <a:ext cx="5760720" cy="2148840"/>
+          </a:xfrm>
+          <a:prstGeom prst="roundRect">
+            <a:avLst>
+              <a:gd name="adj" fmla="val 4000"/>
+            </a:avLst>
+          </a:prstGeom>
+          <a:solidFill>
+            <a:srgbClr val="FEF2F2"/>
+          </a:solidFill>
+          <a:ln w="9525">
+            <a:solidFill>
+              <a:srgbClr val="E6E9EC"/>
+            </a:solidFill>
+          </a:ln>
+          <a:effectLst/>
+        </p:spPr>
+        <p:style>
+          <a:lnRef idx="1">
+            <a:schemeClr val="accent1"/>
+          </a:lnRef>
+          <a:fillRef idx="3">
+            <a:schemeClr val="accent1"/>
+          </a:fillRef>
+          <a:effectRef idx="2">
+            <a:schemeClr val="accent1"/>
+          </a:effectRef>
+          <a:fontRef idx="minor">
+            <a:schemeClr val="lt1"/>
+          </a:fontRef>
+        </p:style>
+        <p:txBody>
+          <a:bodyPr rtlCol="0" anchor="ctr"/>
+          <a:lstStyle/>
+          <a:p>
+            <a:pPr algn="ctr"/>
+          </a:p>
+        </p:txBody>
+      </p:sp>
+      <p:sp>
+        <p:nvSpPr>
+          <p:cNvPr id="9" name="TextBox 8"/>
           <p:cNvSpPr txBox="1"/>
           <p:nvPr/>
         </p:nvSpPr>
         <p:spPr>
           <a:xfrm>
-            <a:off x="548640" y="5074920"/>
-            <a:ext cx="5120640" cy="1371600"/>
+            <a:off x="6144768" y="3730752"/>
+            <a:ext cx="5212080" cy="320040"/>
           </a:xfrm>
           <a:prstGeom prst="rect">
             <a:avLst/>
@@ -6078,31 +6847,31 @@
           <a:p>
             <a:pPr algn="l">
               <a:spcAft>
-                <a:spcPts val="600"/>
-              </a:spcAft>
-            </a:pPr>
-            <a:r>
-              <a:rPr sz="1400" b="1">
-                <a:solidFill>
-                  <a:srgbClr val="E8590C"/>
-                </a:solidFill>
-                <a:latin typeface="Helvetica Neue"/>
-              </a:rPr>
-              <a:t>The schema caught a bad measurement</a:t>
-            </a:r>
-          </a:p>
-        </p:txBody>
-      </p:sp>
-      <p:sp>
-        <p:nvSpPr>
-          <p:cNvPr id="9" name="TextBox 8"/>
+                <a:spcPts val="500"/>
+              </a:spcAft>
+            </a:pPr>
+            <a:r>
+              <a:rPr sz="1500" b="1" i="0">
+                <a:solidFill>
+                  <a:srgbClr val="DC2626"/>
+                </a:solidFill>
+                <a:latin typeface="Helvetica Neue"/>
+              </a:rPr>
+              <a:t>The schema caught a lie</a:t>
+            </a:r>
+          </a:p>
+        </p:txBody>
+      </p:sp>
+      <p:sp>
+        <p:nvSpPr>
+          <p:cNvPr id="10" name="TextBox 9"/>
           <p:cNvSpPr txBox="1"/>
           <p:nvPr/>
         </p:nvSpPr>
         <p:spPr>
           <a:xfrm>
-            <a:off x="548640" y="5394960"/>
-            <a:ext cx="5120640" cy="1188720"/>
+            <a:off x="6144768" y="4114800"/>
+            <a:ext cx="5212080" cy="1463040"/>
           </a:xfrm>
           <a:prstGeom prst="rect">
             <a:avLst/>
@@ -6117,49 +6886,65 @@
           <a:p>
             <a:pPr algn="l">
               <a:spcAft>
-                <a:spcPts val="600"/>
-              </a:spcAft>
-            </a:pPr>
-            <a:r>
-              <a:rPr sz="1200" b="0">
-                <a:solidFill>
-                  <a:srgbClr val="6B7280"/>
-                </a:solidFill>
-                <a:latin typeface="Helvetica Neue"/>
-              </a:rPr>
-              <a:t>One run reported 93 µs per step and 11 M tokens/s — impossible.</a:t>
-            </a:r>
-          </a:p>
-          <a:p>
-            <a:pPr algn="l">
-              <a:spcAft>
-                <a:spcPts val="600"/>
-              </a:spcAft>
-            </a:pPr>
-            <a:r>
-              <a:rPr sz="1200" b="0">
-                <a:solidFill>
-                  <a:srgbClr val="6B7280"/>
-                </a:solidFill>
-                <a:latin typeface="Helvetica Neue"/>
-              </a:rPr>
-              <a:t>It carried status "ok", but telemetry.py had flagged in notes that it</a:t>
-            </a:r>
-          </a:p>
-          <a:p>
-            <a:pPr algn="l">
-              <a:spcAft>
-                <a:spcPts val="600"/>
-              </a:spcAft>
-            </a:pPr>
-            <a:r>
-              <a:rPr sz="1200" b="0">
-                <a:solidFill>
-                  <a:srgbClr val="6B7280"/>
-                </a:solidFill>
-                <a:latin typeface="Helvetica Neue"/>
-              </a:rPr>
-              <a:t>may have timed dispatch, not completion. Discarded and repeated.</a:t>
+                <a:spcPts val="200"/>
+              </a:spcAft>
+            </a:pPr>
+            <a:r>
+              <a:rPr sz="1200" b="0" i="0">
+                <a:solidFill>
+                  <a:srgbClr val="15171A"/>
+                </a:solidFill>
+                <a:latin typeface="Helvetica Neue"/>
+              </a:rPr>
+              <a:t>One run reported 93 µs per step and 11 M tokens/s.</a:t>
+            </a:r>
+          </a:p>
+          <a:p>
+            <a:pPr algn="l">
+              <a:spcAft>
+                <a:spcPts val="200"/>
+              </a:spcAft>
+            </a:pPr>
+            <a:r>
+              <a:rPr sz="1200" b="0" i="0">
+                <a:solidFill>
+                  <a:srgbClr val="15171A"/>
+                </a:solidFill>
+                <a:latin typeface="Helvetica Neue"/>
+              </a:rPr>
+              <a:t>Impossible — yet it carried status "ok".</a:t>
+            </a:r>
+          </a:p>
+          <a:p>
+            <a:pPr algn="l">
+              <a:spcAft>
+                <a:spcPts val="200"/>
+              </a:spcAft>
+            </a:pPr>
+            <a:r>
+              <a:rPr sz="1200" b="0" i="0">
+                <a:solidFill>
+                  <a:srgbClr val="15171A"/>
+                </a:solidFill>
+                <a:latin typeface="Helvetica Neue"/>
+              </a:rPr>
+              <a:t>Its own notes flagged that it may have timed</a:t>
+            </a:r>
+          </a:p>
+          <a:p>
+            <a:pPr algn="l">
+              <a:spcAft>
+                <a:spcPts val="200"/>
+              </a:spcAft>
+            </a:pPr>
+            <a:r>
+              <a:rPr sz="1200" b="0" i="0">
+                <a:solidFill>
+                  <a:srgbClr val="15171A"/>
+                </a:solidFill>
+                <a:latin typeface="Helvetica Neue"/>
+              </a:rPr>
+              <a:t>dispatch, not completion. Discarded, repeated.</a:t>
             </a:r>
           </a:p>
         </p:txBody>
@@ -6191,7 +6976,7 @@
         <p:spPr>
           <a:xfrm>
             <a:off x="0" y="0"/>
-            <a:ext cx="12191695" cy="118872"/>
+            <a:ext cx="146304" cy="6858000"/>
           </a:xfrm>
           <a:prstGeom prst="rect">
             <a:avLst/>
@@ -6234,8 +7019,8 @@
         </p:nvSpPr>
         <p:spPr>
           <a:xfrm>
-            <a:off x="548640" y="320040"/>
-            <a:ext cx="914400" cy="548640"/>
+            <a:off x="10881360" y="45720"/>
+            <a:ext cx="1188720" cy="1371600"/>
           </a:xfrm>
           <a:prstGeom prst="rect">
             <a:avLst/>
@@ -6243,20 +7028,16 @@
           <a:noFill/>
         </p:spPr>
         <p:txBody>
-          <a:bodyPr wrap="square" anchor="t">
+          <a:bodyPr wrap="none">
             <a:spAutoFit/>
           </a:bodyPr>
           <a:lstStyle/>
           <a:p>
-            <a:pPr algn="l">
-              <a:spcAft>
-                <a:spcPts val="600"/>
-              </a:spcAft>
-            </a:pPr>
-            <a:r>
-              <a:rPr sz="4000" b="1">
-                <a:solidFill>
-                  <a:srgbClr val="E8590C"/>
+            <a:pPr algn="r"/>
+            <a:r>
+              <a:rPr sz="7200" b="1">
+                <a:solidFill>
+                  <a:srgbClr val="E6E9EC"/>
                 </a:solidFill>
                 <a:latin typeface="Helvetica Neue"/>
               </a:rPr>
@@ -6273,8 +7054,8 @@
         </p:nvSpPr>
         <p:spPr>
           <a:xfrm>
-            <a:off x="1234440" y="384048"/>
-            <a:ext cx="10424160" cy="731520"/>
+            <a:off x="566928" y="365760"/>
+            <a:ext cx="9601200" cy="274320"/>
           </a:xfrm>
           <a:prstGeom prst="rect">
             <a:avLst/>
@@ -6289,17 +7070,17 @@
           <a:p>
             <a:pPr algn="l">
               <a:spcAft>
-                <a:spcPts val="600"/>
-              </a:spcAft>
-            </a:pPr>
-            <a:r>
-              <a:rPr sz="3000" b="1">
-                <a:solidFill>
-                  <a:srgbClr val="1A1A1A"/>
-                </a:solidFill>
-                <a:latin typeface="Helvetica Neue"/>
-              </a:rPr>
-              <a:t>Results</a:t>
+                <a:spcPts val="500"/>
+              </a:spcAft>
+            </a:pPr>
+            <a:r>
+              <a:rPr sz="1200" b="1" i="0">
+                <a:solidFill>
+                  <a:srgbClr val="E8590C"/>
+                </a:solidFill>
+                <a:latin typeface="Helvetica Neue"/>
+              </a:rPr>
+              <a:t>RESULTS</a:t>
             </a:r>
           </a:p>
         </p:txBody>
@@ -6312,8 +7093,8 @@
         </p:nvSpPr>
         <p:spPr>
           <a:xfrm>
-            <a:off x="1234440" y="1024128"/>
-            <a:ext cx="10424160" cy="457200"/>
+            <a:off x="566928" y="658368"/>
+            <a:ext cx="10058400" cy="822960"/>
           </a:xfrm>
           <a:prstGeom prst="rect">
             <a:avLst/>
@@ -6328,17 +7109,17 @@
           <a:p>
             <a:pPr algn="l">
               <a:spcAft>
-                <a:spcPts val="600"/>
-              </a:spcAft>
-            </a:pPr>
-            <a:r>
-              <a:rPr sz="1500" b="0">
-                <a:solidFill>
-                  <a:srgbClr val="6B7280"/>
-                </a:solidFill>
-                <a:latin typeface="Helvetica Neue"/>
-              </a:rPr>
-              <a:t>Qwen3-0.6B · batch 1 · sequence 1024 · bfloat16 — identical script, identical flags</a:t>
+                <a:spcPts val="500"/>
+              </a:spcAft>
+            </a:pPr>
+            <a:r>
+              <a:rPr sz="3200" b="1" i="0">
+                <a:solidFill>
+                  <a:srgbClr val="15171A"/>
+                </a:solidFill>
+                <a:latin typeface="Helvetica Neue"/>
+              </a:rPr>
+              <a:t>One Hopper chip kept up with eight TPU chips.</a:t>
             </a:r>
           </a:p>
         </p:txBody>
@@ -6352,8 +7133,8 @@
           <p:nvPr/>
         </p:nvGraphicFramePr>
         <p:xfrm>
-          <a:off x="548640" y="1600200"/>
-          <a:ext cx="7315200" cy="2779776"/>
+          <a:off x="566928" y="1664208"/>
+          <a:ext cx="6629400" cy="2112264"/>
         </p:xfrm>
         <a:graphic>
           <a:graphicData uri="http://schemas.openxmlformats.org/drawingml/2006/table">
@@ -6362,1586 +7143,12 @@
                 <a:tableStyleId>{5C22544A-7EE6-4342-B048-85BDC9FD1C3A}</a:tableStyleId>
               </a:tblPr>
               <a:tblGrid>
-                <a:gridCol w="2103120"/>
-                <a:gridCol w="1737360"/>
-                <a:gridCol w="1737360"/>
-                <a:gridCol w="1737360"/>
+                <a:gridCol w="2377440"/>
+                <a:gridCol w="1325880"/>
+                <a:gridCol w="1463040"/>
+                <a:gridCol w="1463040"/>
               </a:tblGrid>
-              <a:tr h="347472">
-                <a:tc>
-                  <a:txBody>
-                    <a:bodyPr/>
-                    <a:lstStyle/>
-                    <a:p>
-                      <a:pPr algn="l"/>
-                      <a:r>
-                        <a:rPr sz="1300" b="1">
-                          <a:solidFill>
-                            <a:srgbClr val="FFFFFF"/>
-                          </a:solidFill>
-                          <a:latin typeface="Helvetica Neue"/>
-                        </a:rPr>
-                        <a:t/>
-                      </a:r>
-                    </a:p>
-                  </a:txBody>
-                  <a:tcPr anchor="ctr" marL="91440" marT="18288" marB="18288">
-                    <a:solidFill>
-                      <a:srgbClr val="E8590C"/>
-                    </a:solidFill>
-                  </a:tcPr>
-                </a:tc>
-                <a:tc>
-                  <a:txBody>
-                    <a:bodyPr/>
-                    <a:lstStyle/>
-                    <a:p>
-                      <a:pPr algn="r"/>
-                      <a:r>
-                        <a:rPr sz="1300" b="1">
-                          <a:solidFill>
-                            <a:srgbClr val="FFFFFF"/>
-                          </a:solidFill>
-                          <a:latin typeface="Helvetica Neue"/>
-                        </a:rPr>
-                        <a:t>CPU 32-core</a:t>
-                      </a:r>
-                    </a:p>
-                  </a:txBody>
-                  <a:tcPr anchor="ctr" marL="91440" marT="18288" marB="18288">
-                    <a:solidFill>
-                      <a:srgbClr val="E8590C"/>
-                    </a:solidFill>
-                  </a:tcPr>
-                </a:tc>
-                <a:tc>
-                  <a:txBody>
-                    <a:bodyPr/>
-                    <a:lstStyle/>
-                    <a:p>
-                      <a:pPr algn="r"/>
-                      <a:r>
-                        <a:rPr sz="1300" b="1">
-                          <a:solidFill>
-                            <a:srgbClr val="FFFFFF"/>
-                          </a:solidFill>
-                          <a:latin typeface="Helvetica Neue"/>
-                        </a:rPr>
-                        <a:t>GPU GH200</a:t>
-                      </a:r>
-                    </a:p>
-                  </a:txBody>
-                  <a:tcPr anchor="ctr" marL="91440" marT="18288" marB="18288">
-                    <a:solidFill>
-                      <a:srgbClr val="E8590C"/>
-                    </a:solidFill>
-                  </a:tcPr>
-                </a:tc>
-                <a:tc>
-                  <a:txBody>
-                    <a:bodyPr/>
-                    <a:lstStyle/>
-                    <a:p>
-                      <a:pPr algn="r"/>
-                      <a:r>
-                        <a:rPr sz="1300" b="1">
-                          <a:solidFill>
-                            <a:srgbClr val="FFFFFF"/>
-                          </a:solidFill>
-                          <a:latin typeface="Helvetica Neue"/>
-                        </a:rPr>
-                        <a:t>TPU v5e 2×4</a:t>
-                      </a:r>
-                    </a:p>
-                  </a:txBody>
-                  <a:tcPr anchor="ctr" marL="91440" marT="18288" marB="18288">
-                    <a:solidFill>
-                      <a:srgbClr val="E8590C"/>
-                    </a:solidFill>
-                  </a:tcPr>
-                </a:tc>
-              </a:tr>
-              <a:tr h="347472">
-                <a:tc>
-                  <a:txBody>
-                    <a:bodyPr/>
-                    <a:lstStyle/>
-                    <a:p>
-                      <a:pPr algn="l"/>
-                      <a:r>
-                        <a:rPr sz="1300">
-                          <a:solidFill>
-                            <a:srgbClr val="1A1A1A"/>
-                          </a:solidFill>
-                          <a:latin typeface="Helvetica Neue"/>
-                        </a:rPr>
-                        <a:t/>
-                      </a:r>
-                    </a:p>
-                  </a:txBody>
-                  <a:tcPr anchor="ctr" marL="91440" marT="18288" marB="18288">
-                    <a:solidFill>
-                      <a:srgbClr val="FFFFFF"/>
-                    </a:solidFill>
-                  </a:tcPr>
-                </a:tc>
-                <a:tc>
-                  <a:txBody>
-                    <a:bodyPr/>
-                    <a:lstStyle/>
-                    <a:p>
-                      <a:pPr algn="r"/>
-                      <a:r>
-                        <a:rPr sz="1300">
-                          <a:solidFill>
-                            <a:srgbClr val="1A1A1A"/>
-                          </a:solidFill>
-                          <a:latin typeface="Helvetica Neue"/>
-                        </a:rPr>
-                        <a:t/>
-                      </a:r>
-                    </a:p>
-                  </a:txBody>
-                  <a:tcPr anchor="ctr" marL="91440" marT="18288" marB="18288">
-                    <a:solidFill>
-                      <a:srgbClr val="FFFFFF"/>
-                    </a:solidFill>
-                  </a:tcPr>
-                </a:tc>
-                <a:tc>
-                  <a:txBody>
-                    <a:bodyPr/>
-                    <a:lstStyle/>
-                    <a:p>
-                      <a:pPr algn="r"/>
-                      <a:r>
-                        <a:rPr sz="1300">
-                          <a:solidFill>
-                            <a:srgbClr val="1A1A1A"/>
-                          </a:solidFill>
-                          <a:latin typeface="Helvetica Neue"/>
-                        </a:rPr>
-                        <a:t>1 chip</a:t>
-                      </a:r>
-                    </a:p>
-                  </a:txBody>
-                  <a:tcPr anchor="ctr" marL="91440" marT="18288" marB="18288">
-                    <a:solidFill>
-                      <a:srgbClr val="FFFFFF"/>
-                    </a:solidFill>
-                  </a:tcPr>
-                </a:tc>
-                <a:tc>
-                  <a:txBody>
-                    <a:bodyPr/>
-                    <a:lstStyle/>
-                    <a:p>
-                      <a:pPr algn="r"/>
-                      <a:r>
-                        <a:rPr sz="1300">
-                          <a:solidFill>
-                            <a:srgbClr val="1A1A1A"/>
-                          </a:solidFill>
-                          <a:latin typeface="Helvetica Neue"/>
-                        </a:rPr>
-                        <a:t>8 chips</a:t>
-                      </a:r>
-                    </a:p>
-                  </a:txBody>
-                  <a:tcPr anchor="ctr" marL="91440" marT="18288" marB="18288">
-                    <a:solidFill>
-                      <a:srgbClr val="FFFFFF"/>
-                    </a:solidFill>
-                  </a:tcPr>
-                </a:tc>
-              </a:tr>
-              <a:tr h="347472">
-                <a:tc>
-                  <a:txBody>
-                    <a:bodyPr/>
-                    <a:lstStyle/>
-                    <a:p>
-                      <a:pPr algn="l"/>
-                      <a:r>
-                        <a:rPr sz="1300">
-                          <a:solidFill>
-                            <a:srgbClr val="1A1A1A"/>
-                          </a:solidFill>
-                          <a:latin typeface="Helvetica Neue"/>
-                        </a:rPr>
-                        <a:t>Median step</a:t>
-                      </a:r>
-                    </a:p>
-                  </a:txBody>
-                  <a:tcPr anchor="ctr" marL="91440" marT="18288" marB="18288">
-                    <a:solidFill>
-                      <a:srgbClr val="FDF0E6"/>
-                    </a:solidFill>
-                  </a:tcPr>
-                </a:tc>
-                <a:tc>
-                  <a:txBody>
-                    <a:bodyPr/>
-                    <a:lstStyle/>
-                    <a:p>
-                      <a:pPr algn="r"/>
-                      <a:r>
-                        <a:rPr sz="1300">
-                          <a:solidFill>
-                            <a:srgbClr val="1A1A1A"/>
-                          </a:solidFill>
-                          <a:latin typeface="Helvetica Neue"/>
-                        </a:rPr>
-                        <a:t>18.99 s</a:t>
-                      </a:r>
-                    </a:p>
-                  </a:txBody>
-                  <a:tcPr anchor="ctr" marL="91440" marT="18288" marB="18288">
-                    <a:solidFill>
-                      <a:srgbClr val="FDF0E6"/>
-                    </a:solidFill>
-                  </a:tcPr>
-                </a:tc>
-                <a:tc>
-                  <a:txBody>
-                    <a:bodyPr/>
-                    <a:lstStyle/>
-                    <a:p>
-                      <a:pPr algn="r"/>
-                      <a:r>
-                        <a:rPr sz="1300">
-                          <a:solidFill>
-                            <a:srgbClr val="1A1A1A"/>
-                          </a:solidFill>
-                          <a:latin typeface="Helvetica Neue"/>
-                        </a:rPr>
-                        <a:t>0.0798 s</a:t>
-                      </a:r>
-                    </a:p>
-                  </a:txBody>
-                  <a:tcPr anchor="ctr" marL="91440" marT="18288" marB="18288">
-                    <a:solidFill>
-                      <a:srgbClr val="FDF0E6"/>
-                    </a:solidFill>
-                  </a:tcPr>
-                </a:tc>
-                <a:tc>
-                  <a:txBody>
-                    <a:bodyPr/>
-                    <a:lstStyle/>
-                    <a:p>
-                      <a:pPr algn="r"/>
-                      <a:r>
-                        <a:rPr sz="1300">
-                          <a:solidFill>
-                            <a:srgbClr val="1A1A1A"/>
-                          </a:solidFill>
-                          <a:latin typeface="Helvetica Neue"/>
-                        </a:rPr>
-                        <a:t>0.0800 s</a:t>
-                      </a:r>
-                    </a:p>
-                  </a:txBody>
-                  <a:tcPr anchor="ctr" marL="91440" marT="18288" marB="18288">
-                    <a:solidFill>
-                      <a:srgbClr val="FDF0E6"/>
-                    </a:solidFill>
-                  </a:tcPr>
-                </a:tc>
-              </a:tr>
-              <a:tr h="347472">
-                <a:tc>
-                  <a:txBody>
-                    <a:bodyPr/>
-                    <a:lstStyle/>
-                    <a:p>
-                      <a:pPr algn="l"/>
-                      <a:r>
-                        <a:rPr sz="1300">
-                          <a:solidFill>
-                            <a:srgbClr val="1A1A1A"/>
-                          </a:solidFill>
-                          <a:latin typeface="Helvetica Neue"/>
-                        </a:rPr>
-                        <a:t>Throughput</a:t>
-                      </a:r>
-                    </a:p>
-                  </a:txBody>
-                  <a:tcPr anchor="ctr" marL="91440" marT="18288" marB="18288">
-                    <a:solidFill>
-                      <a:srgbClr val="FFFFFF"/>
-                    </a:solidFill>
-                  </a:tcPr>
-                </a:tc>
-                <a:tc>
-                  <a:txBody>
-                    <a:bodyPr/>
-                    <a:lstStyle/>
-                    <a:p>
-                      <a:pPr algn="r"/>
-                      <a:r>
-                        <a:rPr sz="1300">
-                          <a:solidFill>
-                            <a:srgbClr val="1A1A1A"/>
-                          </a:solidFill>
-                          <a:latin typeface="Helvetica Neue"/>
-                        </a:rPr>
-                        <a:t>54 tok/s</a:t>
-                      </a:r>
-                    </a:p>
-                  </a:txBody>
-                  <a:tcPr anchor="ctr" marL="91440" marT="18288" marB="18288">
-                    <a:solidFill>
-                      <a:srgbClr val="FFFFFF"/>
-                    </a:solidFill>
-                  </a:tcPr>
-                </a:tc>
-                <a:tc>
-                  <a:txBody>
-                    <a:bodyPr/>
-                    <a:lstStyle/>
-                    <a:p>
-                      <a:pPr algn="r"/>
-                      <a:r>
-                        <a:rPr sz="1300">
-                          <a:solidFill>
-                            <a:srgbClr val="1A1A1A"/>
-                          </a:solidFill>
-                          <a:latin typeface="Helvetica Neue"/>
-                        </a:rPr>
-                        <a:t>12,834 tok/s</a:t>
-                      </a:r>
-                    </a:p>
-                  </a:txBody>
-                  <a:tcPr anchor="ctr" marL="91440" marT="18288" marB="18288">
-                    <a:solidFill>
-                      <a:srgbClr val="FFFFFF"/>
-                    </a:solidFill>
-                  </a:tcPr>
-                </a:tc>
-                <a:tc>
-                  <a:txBody>
-                    <a:bodyPr/>
-                    <a:lstStyle/>
-                    <a:p>
-                      <a:pPr algn="r"/>
-                      <a:r>
-                        <a:rPr sz="1300">
-                          <a:solidFill>
-                            <a:srgbClr val="1A1A1A"/>
-                          </a:solidFill>
-                          <a:latin typeface="Helvetica Neue"/>
-                        </a:rPr>
-                        <a:t>12,804 tok/s</a:t>
-                      </a:r>
-                    </a:p>
-                  </a:txBody>
-                  <a:tcPr anchor="ctr" marL="91440" marT="18288" marB="18288">
-                    <a:solidFill>
-                      <a:srgbClr val="FFFFFF"/>
-                    </a:solidFill>
-                  </a:tcPr>
-                </a:tc>
-              </a:tr>
-              <a:tr h="347472">
-                <a:tc>
-                  <a:txBody>
-                    <a:bodyPr/>
-                    <a:lstStyle/>
-                    <a:p>
-                      <a:pPr algn="l"/>
-                      <a:r>
-                        <a:rPr sz="1300">
-                          <a:solidFill>
-                            <a:srgbClr val="1A1A1A"/>
-                          </a:solidFill>
-                          <a:latin typeface="Helvetica Neue"/>
-                        </a:rPr>
-                        <a:t>Speedup vs CPU</a:t>
-                      </a:r>
-                    </a:p>
-                  </a:txBody>
-                  <a:tcPr anchor="ctr" marL="91440" marT="18288" marB="18288">
-                    <a:solidFill>
-                      <a:srgbClr val="FDF0E6"/>
-                    </a:solidFill>
-                  </a:tcPr>
-                </a:tc>
-                <a:tc>
-                  <a:txBody>
-                    <a:bodyPr/>
-                    <a:lstStyle/>
-                    <a:p>
-                      <a:pPr algn="r"/>
-                      <a:r>
-                        <a:rPr sz="1300">
-                          <a:solidFill>
-                            <a:srgbClr val="1A1A1A"/>
-                          </a:solidFill>
-                          <a:latin typeface="Helvetica Neue"/>
-                        </a:rPr>
-                        <a:t>1.0×</a:t>
-                      </a:r>
-                    </a:p>
-                  </a:txBody>
-                  <a:tcPr anchor="ctr" marL="91440" marT="18288" marB="18288">
-                    <a:solidFill>
-                      <a:srgbClr val="FDF0E6"/>
-                    </a:solidFill>
-                  </a:tcPr>
-                </a:tc>
-                <a:tc>
-                  <a:txBody>
-                    <a:bodyPr/>
-                    <a:lstStyle/>
-                    <a:p>
-                      <a:pPr algn="r"/>
-                      <a:r>
-                        <a:rPr sz="1300">
-                          <a:solidFill>
-                            <a:srgbClr val="1A1A1A"/>
-                          </a:solidFill>
-                          <a:latin typeface="Helvetica Neue"/>
-                        </a:rPr>
-                        <a:t>238.0×</a:t>
-                      </a:r>
-                    </a:p>
-                  </a:txBody>
-                  <a:tcPr anchor="ctr" marL="91440" marT="18288" marB="18288">
-                    <a:solidFill>
-                      <a:srgbClr val="FDF0E6"/>
-                    </a:solidFill>
-                  </a:tcPr>
-                </a:tc>
-                <a:tc>
-                  <a:txBody>
-                    <a:bodyPr/>
-                    <a:lstStyle/>
-                    <a:p>
-                      <a:pPr algn="r"/>
-                      <a:r>
-                        <a:rPr sz="1300">
-                          <a:solidFill>
-                            <a:srgbClr val="1A1A1A"/>
-                          </a:solidFill>
-                          <a:latin typeface="Helvetica Neue"/>
-                        </a:rPr>
-                        <a:t>237.5×</a:t>
-                      </a:r>
-                    </a:p>
-                  </a:txBody>
-                  <a:tcPr anchor="ctr" marL="91440" marT="18288" marB="18288">
-                    <a:solidFill>
-                      <a:srgbClr val="FDF0E6"/>
-                    </a:solidFill>
-                  </a:tcPr>
-                </a:tc>
-              </a:tr>
-              <a:tr h="347472">
-                <a:tc>
-                  <a:txBody>
-                    <a:bodyPr/>
-                    <a:lstStyle/>
-                    <a:p>
-                      <a:pPr algn="l"/>
-                      <a:r>
-                        <a:rPr sz="1300">
-                          <a:solidFill>
-                            <a:srgbClr val="1A1A1A"/>
-                          </a:solidFill>
-                          <a:latin typeface="Helvetica Neue"/>
-                        </a:rPr>
-                        <a:t>Peak memory</a:t>
-                      </a:r>
-                    </a:p>
-                  </a:txBody>
-                  <a:tcPr anchor="ctr" marL="91440" marT="18288" marB="18288">
-                    <a:solidFill>
-                      <a:srgbClr val="FFFFFF"/>
-                    </a:solidFill>
-                  </a:tcPr>
-                </a:tc>
-                <a:tc>
-                  <a:txBody>
-                    <a:bodyPr/>
-                    <a:lstStyle/>
-                    <a:p>
-                      <a:pPr algn="r"/>
-                      <a:r>
-                        <a:rPr sz="1300">
-                          <a:solidFill>
-                            <a:srgbClr val="1A1A1A"/>
-                          </a:solidFill>
-                          <a:latin typeface="Helvetica Neue"/>
-                        </a:rPr>
-                        <a:t>66.1 %</a:t>
-                      </a:r>
-                    </a:p>
-                  </a:txBody>
-                  <a:tcPr anchor="ctr" marL="91440" marT="18288" marB="18288">
-                    <a:solidFill>
-                      <a:srgbClr val="FFFFFF"/>
-                    </a:solidFill>
-                  </a:tcPr>
-                </a:tc>
-                <a:tc>
-                  <a:txBody>
-                    <a:bodyPr/>
-                    <a:lstStyle/>
-                    <a:p>
-                      <a:pPr algn="r"/>
-                      <a:r>
-                        <a:rPr sz="1300">
-                          <a:solidFill>
-                            <a:srgbClr val="1A1A1A"/>
-                          </a:solidFill>
-                          <a:latin typeface="Helvetica Neue"/>
-                        </a:rPr>
-                        <a:t>5.0 %</a:t>
-                      </a:r>
-                    </a:p>
-                  </a:txBody>
-                  <a:tcPr anchor="ctr" marL="91440" marT="18288" marB="18288">
-                    <a:solidFill>
-                      <a:srgbClr val="FFFFFF"/>
-                    </a:solidFill>
-                  </a:tcPr>
-                </a:tc>
-                <a:tc>
-                  <a:txBody>
-                    <a:bodyPr/>
-                    <a:lstStyle/>
-                    <a:p>
-                      <a:pPr algn="r"/>
-                      <a:r>
-                        <a:rPr sz="1300">
-                          <a:solidFill>
-                            <a:srgbClr val="1A1A1A"/>
-                          </a:solidFill>
-                          <a:latin typeface="Helvetica Neue"/>
-                        </a:rPr>
-                        <a:t>7.3 %</a:t>
-                      </a:r>
-                    </a:p>
-                  </a:txBody>
-                  <a:tcPr anchor="ctr" marL="91440" marT="18288" marB="18288">
-                    <a:solidFill>
-                      <a:srgbClr val="FFFFFF"/>
-                    </a:solidFill>
-                  </a:tcPr>
-                </a:tc>
-              </a:tr>
-              <a:tr h="347472">
-                <a:tc>
-                  <a:txBody>
-                    <a:bodyPr/>
-                    <a:lstStyle/>
-                    <a:p>
-                      <a:pPr algn="l"/>
-                      <a:r>
-                        <a:rPr sz="1300">
-                          <a:solidFill>
-                            <a:srgbClr val="1A1A1A"/>
-                          </a:solidFill>
-                          <a:latin typeface="Helvetica Neue"/>
-                        </a:rPr>
-                        <a:t>Chip utilisation</a:t>
-                      </a:r>
-                    </a:p>
-                  </a:txBody>
-                  <a:tcPr anchor="ctr" marL="91440" marT="18288" marB="18288">
-                    <a:solidFill>
-                      <a:srgbClr val="FDF0E6"/>
-                    </a:solidFill>
-                  </a:tcPr>
-                </a:tc>
-                <a:tc>
-                  <a:txBody>
-                    <a:bodyPr/>
-                    <a:lstStyle/>
-                    <a:p>
-                      <a:pPr algn="r"/>
-                      <a:r>
-                        <a:rPr sz="1300">
-                          <a:solidFill>
-                            <a:srgbClr val="1A1A1A"/>
-                          </a:solidFill>
-                          <a:latin typeface="Helvetica Neue"/>
-                        </a:rPr>
-                        <a:t>44.3 % host</a:t>
-                      </a:r>
-                    </a:p>
-                  </a:txBody>
-                  <a:tcPr anchor="ctr" marL="91440" marT="18288" marB="18288">
-                    <a:solidFill>
-                      <a:srgbClr val="FDF0E6"/>
-                    </a:solidFill>
-                  </a:tcPr>
-                </a:tc>
-                <a:tc>
-                  <a:txBody>
-                    <a:bodyPr/>
-                    <a:lstStyle/>
-                    <a:p>
-                      <a:pPr algn="r"/>
-                      <a:r>
-                        <a:rPr sz="1300">
-                          <a:solidFill>
-                            <a:srgbClr val="1A1A1A"/>
-                          </a:solidFill>
-                          <a:latin typeface="Helvetica Neue"/>
-                        </a:rPr>
-                        <a:t>1.59 %</a:t>
-                      </a:r>
-                    </a:p>
-                  </a:txBody>
-                  <a:tcPr anchor="ctr" marL="91440" marT="18288" marB="18288">
-                    <a:solidFill>
-                      <a:srgbClr val="FDF0E6"/>
-                    </a:solidFill>
-                  </a:tcPr>
-                </a:tc>
-                <a:tc>
-                  <a:txBody>
-                    <a:bodyPr/>
-                    <a:lstStyle/>
-                    <a:p>
-                      <a:pPr algn="r"/>
-                      <a:r>
-                        <a:rPr sz="1300">
-                          <a:solidFill>
-                            <a:srgbClr val="1A1A1A"/>
-                          </a:solidFill>
-                          <a:latin typeface="Helvetica Neue"/>
-                        </a:rPr>
-                        <a:t>no counter</a:t>
-                      </a:r>
-                    </a:p>
-                  </a:txBody>
-                  <a:tcPr anchor="ctr" marL="91440" marT="18288" marB="18288">
-                    <a:solidFill>
-                      <a:srgbClr val="FDF0E6"/>
-                    </a:solidFill>
-                  </a:tcPr>
-                </a:tc>
-              </a:tr>
-              <a:tr h="347472">
-                <a:tc>
-                  <a:txBody>
-                    <a:bodyPr/>
-                    <a:lstStyle/>
-                    <a:p>
-                      <a:pPr algn="l"/>
-                      <a:r>
-                        <a:rPr sz="1300">
-                          <a:solidFill>
-                            <a:srgbClr val="1A1A1A"/>
-                          </a:solidFill>
-                          <a:latin typeface="Helvetica Neue"/>
-                        </a:rPr>
-                        <a:t>USD / 1 000 steps</a:t>
-                      </a:r>
-                    </a:p>
-                  </a:txBody>
-                  <a:tcPr anchor="ctr" marL="91440" marT="18288" marB="18288">
-                    <a:solidFill>
-                      <a:srgbClr val="FFFFFF"/>
-                    </a:solidFill>
-                  </a:tcPr>
-                </a:tc>
-                <a:tc>
-                  <a:txBody>
-                    <a:bodyPr/>
-                    <a:lstStyle/>
-                    <a:p>
-                      <a:pPr algn="r"/>
-                      <a:r>
-                        <a:rPr sz="1300">
-                          <a:solidFill>
-                            <a:srgbClr val="1A1A1A"/>
-                          </a:solidFill>
-                          <a:latin typeface="Helvetica Neue"/>
-                        </a:rPr>
-                        <a:t>$6.05</a:t>
-                      </a:r>
-                    </a:p>
-                  </a:txBody>
-                  <a:tcPr anchor="ctr" marL="91440" marT="18288" marB="18288">
-                    <a:solidFill>
-                      <a:srgbClr val="FFFFFF"/>
-                    </a:solidFill>
-                  </a:tcPr>
-                </a:tc>
-                <a:tc>
-                  <a:txBody>
-                    <a:bodyPr/>
-                    <a:lstStyle/>
-                    <a:p>
-                      <a:pPr algn="r"/>
-                      <a:r>
-                        <a:rPr sz="1300">
-                          <a:solidFill>
-                            <a:srgbClr val="1A1A1A"/>
-                          </a:solidFill>
-                          <a:latin typeface="Helvetica Neue"/>
-                        </a:rPr>
-                        <a:t>$0.131</a:t>
-                      </a:r>
-                    </a:p>
-                  </a:txBody>
-                  <a:tcPr anchor="ctr" marL="91440" marT="18288" marB="18288">
-                    <a:solidFill>
-                      <a:srgbClr val="FFFFFF"/>
-                    </a:solidFill>
-                  </a:tcPr>
-                </a:tc>
-                <a:tc>
-                  <a:txBody>
-                    <a:bodyPr/>
-                    <a:lstStyle/>
-                    <a:p>
-                      <a:pPr algn="r"/>
-                      <a:r>
-                        <a:rPr sz="1300">
-                          <a:solidFill>
-                            <a:srgbClr val="1A1A1A"/>
-                          </a:solidFill>
-                          <a:latin typeface="Helvetica Neue"/>
-                        </a:rPr>
-                        <a:t>$1.03</a:t>
-                      </a:r>
-                    </a:p>
-                  </a:txBody>
-                  <a:tcPr anchor="ctr" marL="91440" marT="18288" marB="18288">
-                    <a:solidFill>
-                      <a:srgbClr val="FFFFFF"/>
-                    </a:solidFill>
-                  </a:tcPr>
-                </a:tc>
-              </a:tr>
-            </a:tbl>
-          </a:graphicData>
-        </a:graphic>
-      </p:graphicFrame>
-      <p:sp>
-        <p:nvSpPr>
-          <p:cNvPr id="7" name="TextBox 6"/>
-          <p:cNvSpPr txBox="1"/>
-          <p:nvPr/>
-        </p:nvSpPr>
-        <p:spPr>
-          <a:xfrm>
-            <a:off x="548640" y="4343400"/>
-            <a:ext cx="6949440" cy="457200"/>
-          </a:xfrm>
-          <a:prstGeom prst="rect">
-            <a:avLst/>
-          </a:prstGeom>
-          <a:noFill/>
-        </p:spPr>
-        <p:txBody>
-          <a:bodyPr wrap="square" anchor="t">
-            <a:spAutoFit/>
-          </a:bodyPr>
-          <a:lstStyle/>
-          <a:p>
-            <a:pPr algn="l">
-              <a:spcAft>
-                <a:spcPts val="600"/>
-              </a:spcAft>
-            </a:pPr>
-            <a:r>
-              <a:rPr sz="1900" b="1">
-                <a:solidFill>
-                  <a:srgbClr val="E8590C"/>
-                </a:solidFill>
-                <a:latin typeface="Helvetica Neue"/>
-              </a:rPr>
-              <a:t>One GH200 matches an eight-chip TPU slice to within 0.23 %</a:t>
-            </a:r>
-          </a:p>
-        </p:txBody>
-      </p:sp>
-      <p:sp>
-        <p:nvSpPr>
-          <p:cNvPr id="8" name="TextBox 7"/>
-          <p:cNvSpPr txBox="1"/>
-          <p:nvPr/>
-        </p:nvSpPr>
-        <p:spPr>
-          <a:xfrm>
-            <a:off x="548640" y="4754880"/>
-            <a:ext cx="6949440" cy="1737360"/>
-          </a:xfrm>
-          <a:prstGeom prst="rect">
-            <a:avLst/>
-          </a:prstGeom>
-          <a:noFill/>
-        </p:spPr>
-        <p:txBody>
-          <a:bodyPr wrap="square" anchor="t">
-            <a:spAutoFit/>
-          </a:bodyPr>
-          <a:lstStyle/>
-          <a:p>
-            <a:pPr algn="l">
-              <a:spcAft>
-                <a:spcPts val="600"/>
-              </a:spcAft>
-            </a:pPr>
-            <a:r>
-              <a:rPr sz="1300" b="0">
-                <a:solidFill>
-                  <a:srgbClr val="1A1A1A"/>
-                </a:solidFill>
-                <a:latin typeface="Helvetica Neue"/>
-              </a:rPr>
-              <a:t>At batch 1 the job occupies neither accelerator — 5.0 % of the GH200 and 7.3 %</a:t>
-            </a:r>
-          </a:p>
-          <a:p>
-            <a:pPr algn="l">
-              <a:spcAft>
-                <a:spcPts val="600"/>
-              </a:spcAft>
-            </a:pPr>
-            <a:r>
-              <a:rPr sz="1300" b="0">
-                <a:solidFill>
-                  <a:srgbClr val="1A1A1A"/>
-                </a:solidFill>
-                <a:latin typeface="Helvetica Neue"/>
-              </a:rPr>
-              <a:t>of the TPU. It is latency-bound, so the extra seven chips buy nothing.</a:t>
-            </a:r>
-          </a:p>
-          <a:p>
-            <a:pPr algn="l">
-              <a:spcAft>
-                <a:spcPts val="600"/>
-              </a:spcAft>
-            </a:pPr>
-            <a:r>
-              <a:rPr sz="1300" b="0">
-                <a:solidFill>
-                  <a:srgbClr val="1A1A1A"/>
-                </a:solidFill>
-                <a:latin typeface="Helvetica Neue"/>
-              </a:rPr>
-              <a:t/>
-            </a:r>
-          </a:p>
-          <a:p>
-            <a:pPr algn="l">
-              <a:spcAft>
-                <a:spcPts val="600"/>
-              </a:spcAft>
-            </a:pPr>
-            <a:r>
-              <a:rPr sz="1300" b="0">
-                <a:solidFill>
-                  <a:srgbClr val="1A1A1A"/>
-                </a:solidFill>
-                <a:latin typeface="Helvetica Neue"/>
-              </a:rPr>
-              <a:t>Mitigation: one manifest line — fileCacheCapacity — cut checkpoint load</a:t>
-            </a:r>
-          </a:p>
-          <a:p>
-            <a:pPr algn="l">
-              <a:spcAft>
-                <a:spcPts val="600"/>
-              </a:spcAft>
-            </a:pPr>
-            <a:r>
-              <a:rPr sz="1300" b="0">
-                <a:solidFill>
-                  <a:srgbClr val="1A1A1A"/>
-                </a:solidFill>
-                <a:latin typeface="Helvetica Neue"/>
-              </a:rPr>
-              <a:t>235 s → 16 s (14.6×) and total wall clock by 31.4 %.</a:t>
-            </a:r>
-          </a:p>
-          <a:p>
-            <a:pPr algn="l">
-              <a:spcAft>
-                <a:spcPts val="600"/>
-              </a:spcAft>
-            </a:pPr>
-            <a:r>
-              <a:rPr sz="1300" b="0">
-                <a:solidFill>
-                  <a:srgbClr val="1A1A1A"/>
-                </a:solidFill>
-                <a:latin typeface="Helvetica Neue"/>
-              </a:rPr>
-              <a:t>Control: step time identical to the fourth decimal. Only I/O moved.</a:t>
-            </a:r>
-          </a:p>
-        </p:txBody>
-      </p:sp>
-      <p:pic>
-        <p:nvPicPr>
-          <p:cNvPr id="9" name="Picture 8" descr="panel-mitigation.png"/>
-          <p:cNvPicPr>
-            <a:picLocks noChangeAspect="1"/>
-          </p:cNvPicPr>
-          <p:nvPr/>
-        </p:nvPicPr>
-        <p:blipFill>
-          <a:blip r:embed="rId2"/>
-          <a:stretch>
-            <a:fillRect/>
-          </a:stretch>
-        </p:blipFill>
-        <p:spPr>
-          <a:xfrm>
-            <a:off x="7772400" y="1737360"/>
-            <a:ext cx="3931920" cy="2735835"/>
-          </a:xfrm>
-          <a:prstGeom prst="rect">
-            <a:avLst/>
-          </a:prstGeom>
-        </p:spPr>
-      </p:pic>
-    </p:spTree>
-  </p:cSld>
-  <p:clrMapOvr>
-    <a:masterClrMapping/>
-  </p:clrMapOvr>
-</p:sld>
-</file>
-
-<file path=ppt/slides/slide5.xml><?xml version="1.0" encoding="utf-8"?>
-<p:sld xmlns:a="http://schemas.openxmlformats.org/drawingml/2006/main" xmlns:p="http://schemas.openxmlformats.org/presentationml/2006/main" xmlns:r="http://schemas.openxmlformats.org/officeDocument/2006/relationships">
-  <p:cSld>
-    <p:spTree>
-      <p:nvGrpSpPr>
-        <p:cNvPr id="1" name=""/>
-        <p:cNvGrpSpPr/>
-        <p:nvPr/>
-      </p:nvGrpSpPr>
-      <p:grpSpPr/>
-      <p:sp>
-        <p:nvSpPr>
-          <p:cNvPr id="2" name="Rectangle 1"/>
-          <p:cNvSpPr/>
-          <p:nvPr/>
-        </p:nvSpPr>
-        <p:spPr>
-          <a:xfrm>
-            <a:off x="0" y="0"/>
-            <a:ext cx="12191695" cy="118872"/>
-          </a:xfrm>
-          <a:prstGeom prst="rect">
-            <a:avLst/>
-          </a:prstGeom>
-          <a:solidFill>
-            <a:srgbClr val="E8590C"/>
-          </a:solidFill>
-          <a:ln>
-            <a:noFill/>
-          </a:ln>
-          <a:effectLst/>
-        </p:spPr>
-        <p:style>
-          <a:lnRef idx="1">
-            <a:schemeClr val="accent1"/>
-          </a:lnRef>
-          <a:fillRef idx="3">
-            <a:schemeClr val="accent1"/>
-          </a:fillRef>
-          <a:effectRef idx="2">
-            <a:schemeClr val="accent1"/>
-          </a:effectRef>
-          <a:fontRef idx="minor">
-            <a:schemeClr val="lt1"/>
-          </a:fontRef>
-        </p:style>
-        <p:txBody>
-          <a:bodyPr rtlCol="0" anchor="ctr"/>
-          <a:lstStyle/>
-          <a:p>
-            <a:pPr algn="ctr"/>
-          </a:p>
-        </p:txBody>
-      </p:sp>
-      <p:sp>
-        <p:nvSpPr>
-          <p:cNvPr id="3" name="TextBox 2"/>
-          <p:cNvSpPr txBox="1"/>
-          <p:nvPr/>
-        </p:nvSpPr>
-        <p:spPr>
-          <a:xfrm>
-            <a:off x="548640" y="320040"/>
-            <a:ext cx="914400" cy="548640"/>
-          </a:xfrm>
-          <a:prstGeom prst="rect">
-            <a:avLst/>
-          </a:prstGeom>
-          <a:noFill/>
-        </p:spPr>
-        <p:txBody>
-          <a:bodyPr wrap="square" anchor="t">
-            <a:spAutoFit/>
-          </a:bodyPr>
-          <a:lstStyle/>
-          <a:p>
-            <a:pPr algn="l">
-              <a:spcAft>
-                <a:spcPts val="600"/>
-              </a:spcAft>
-            </a:pPr>
-            <a:r>
-              <a:rPr sz="4000" b="1">
-                <a:solidFill>
-                  <a:srgbClr val="E8590C"/>
-                </a:solidFill>
-                <a:latin typeface="Helvetica Neue"/>
-              </a:rPr>
-              <a:t>5</a:t>
-            </a:r>
-          </a:p>
-        </p:txBody>
-      </p:sp>
-      <p:sp>
-        <p:nvSpPr>
-          <p:cNvPr id="4" name="TextBox 3"/>
-          <p:cNvSpPr txBox="1"/>
-          <p:nvPr/>
-        </p:nvSpPr>
-        <p:spPr>
-          <a:xfrm>
-            <a:off x="1234440" y="384048"/>
-            <a:ext cx="10424160" cy="731520"/>
-          </a:xfrm>
-          <a:prstGeom prst="rect">
-            <a:avLst/>
-          </a:prstGeom>
-          <a:noFill/>
-        </p:spPr>
-        <p:txBody>
-          <a:bodyPr wrap="square" anchor="t">
-            <a:spAutoFit/>
-          </a:bodyPr>
-          <a:lstStyle/>
-          <a:p>
-            <a:pPr algn="l">
-              <a:spcAft>
-                <a:spcPts val="600"/>
-              </a:spcAft>
-            </a:pPr>
-            <a:r>
-              <a:rPr sz="3000" b="1">
-                <a:solidFill>
-                  <a:srgbClr val="1A1A1A"/>
-                </a:solidFill>
-                <a:latin typeface="Helvetica Neue"/>
-              </a:rPr>
-              <a:t>What we learned</a:t>
-            </a:r>
-          </a:p>
-        </p:txBody>
-      </p:sp>
-      <p:sp>
-        <p:nvSpPr>
-          <p:cNvPr id="5" name="TextBox 4"/>
-          <p:cNvSpPr txBox="1"/>
-          <p:nvPr/>
-        </p:nvSpPr>
-        <p:spPr>
-          <a:xfrm>
-            <a:off x="1234440" y="1024128"/>
-            <a:ext cx="10424160" cy="457200"/>
-          </a:xfrm>
-          <a:prstGeom prst="rect">
-            <a:avLst/>
-          </a:prstGeom>
-          <a:noFill/>
-        </p:spPr>
-        <p:txBody>
-          <a:bodyPr wrap="square" anchor="t">
-            <a:spAutoFit/>
-          </a:bodyPr>
-          <a:lstStyle/>
-          <a:p>
-            <a:pPr algn="l">
-              <a:spcAft>
-                <a:spcPts val="600"/>
-              </a:spcAft>
-            </a:pPr>
-            <a:r>
-              <a:rPr sz="1500" b="0">
-                <a:solidFill>
-                  <a:srgbClr val="6B7280"/>
-                </a:solidFill>
-                <a:latin typeface="Helvetica Neue"/>
-              </a:rPr>
-              <a:t>Bottleneck, mitigation, and the recommendation</a:t>
-            </a:r>
-          </a:p>
-        </p:txBody>
-      </p:sp>
-      <p:sp>
-        <p:nvSpPr>
-          <p:cNvPr id="6" name="TextBox 5"/>
-          <p:cNvSpPr txBox="1"/>
-          <p:nvPr/>
-        </p:nvSpPr>
-        <p:spPr>
-          <a:xfrm>
-            <a:off x="548640" y="1645920"/>
-            <a:ext cx="5486400" cy="411480"/>
-          </a:xfrm>
-          <a:prstGeom prst="rect">
-            <a:avLst/>
-          </a:prstGeom>
-          <a:noFill/>
-        </p:spPr>
-        <p:txBody>
-          <a:bodyPr wrap="square" anchor="t">
-            <a:spAutoFit/>
-          </a:bodyPr>
-          <a:lstStyle/>
-          <a:p>
-            <a:pPr algn="l">
-              <a:spcAft>
-                <a:spcPts val="600"/>
-              </a:spcAft>
-            </a:pPr>
-            <a:r>
-              <a:rPr sz="1700" b="1">
-                <a:solidFill>
-                  <a:srgbClr val="E8590C"/>
-                </a:solidFill>
-                <a:latin typeface="Helvetica Neue"/>
-              </a:rPr>
-              <a:t>The bottleneck is not compute</a:t>
-            </a:r>
-          </a:p>
-        </p:txBody>
-      </p:sp>
-      <p:sp>
-        <p:nvSpPr>
-          <p:cNvPr id="7" name="TextBox 6"/>
-          <p:cNvSpPr txBox="1"/>
-          <p:nvPr/>
-        </p:nvSpPr>
-        <p:spPr>
-          <a:xfrm>
-            <a:off x="548640" y="2011680"/>
-            <a:ext cx="5486400" cy="1371600"/>
-          </a:xfrm>
-          <a:prstGeom prst="rect">
-            <a:avLst/>
-          </a:prstGeom>
-          <a:noFill/>
-        </p:spPr>
-        <p:txBody>
-          <a:bodyPr wrap="square" anchor="t">
-            <a:spAutoFit/>
-          </a:bodyPr>
-          <a:lstStyle/>
-          <a:p>
-            <a:pPr algn="l">
-              <a:spcAft>
-                <a:spcPts val="600"/>
-              </a:spcAft>
-            </a:pPr>
-            <a:r>
-              <a:rPr sz="1400" b="0">
-                <a:solidFill>
-                  <a:srgbClr val="1A1A1A"/>
-                </a:solidFill>
-                <a:latin typeface="Helvetica Neue"/>
-              </a:rPr>
-              <a:t>Of 733 s of wall clock, only 209 s — 28.5 % — is arithmetic.</a:t>
-            </a:r>
-          </a:p>
-          <a:p>
-            <a:pPr algn="l">
-              <a:spcAft>
-                <a:spcPts val="600"/>
-              </a:spcAft>
-            </a:pPr>
-            <a:r>
-              <a:rPr sz="1400" b="0">
-                <a:solidFill>
-                  <a:srgbClr val="1A1A1A"/>
-                </a:solidFill>
-                <a:latin typeface="Helvetica Neue"/>
-              </a:rPr>
-              <a:t>The largest single phase is reading the checkpoint: 32.1 %.</a:t>
-            </a:r>
-          </a:p>
-          <a:p>
-            <a:pPr algn="l">
-              <a:spcAft>
-                <a:spcPts val="600"/>
-              </a:spcAft>
-            </a:pPr>
-            <a:r>
-              <a:rPr sz="1400" b="0">
-                <a:solidFill>
-                  <a:srgbClr val="1A1A1A"/>
-                </a:solidFill>
-                <a:latin typeface="Helvetica Neue"/>
-              </a:rPr>
-              <a:t>Scheduling and XLA compilation take most of the rest.</a:t>
-            </a:r>
-          </a:p>
-        </p:txBody>
-      </p:sp>
-      <p:sp>
-        <p:nvSpPr>
-          <p:cNvPr id="8" name="TextBox 7"/>
-          <p:cNvSpPr txBox="1"/>
-          <p:nvPr/>
-        </p:nvSpPr>
-        <p:spPr>
-          <a:xfrm>
-            <a:off x="548640" y="3291840"/>
-            <a:ext cx="5486400" cy="411480"/>
-          </a:xfrm>
-          <a:prstGeom prst="rect">
-            <a:avLst/>
-          </a:prstGeom>
-          <a:noFill/>
-        </p:spPr>
-        <p:txBody>
-          <a:bodyPr wrap="square" anchor="t">
-            <a:spAutoFit/>
-          </a:bodyPr>
-          <a:lstStyle/>
-          <a:p>
-            <a:pPr algn="l">
-              <a:spcAft>
-                <a:spcPts val="600"/>
-              </a:spcAft>
-            </a:pPr>
-            <a:r>
-              <a:rPr sz="1700" b="1">
-                <a:solidFill>
-                  <a:srgbClr val="E8590C"/>
-                </a:solidFill>
-                <a:latin typeface="Helvetica Neue"/>
-              </a:rPr>
-              <a:t>Scaling the model did not scale the cost</a:t>
-            </a:r>
-          </a:p>
-        </p:txBody>
-      </p:sp>
-      <p:sp>
-        <p:nvSpPr>
-          <p:cNvPr id="9" name="TextBox 8"/>
-          <p:cNvSpPr txBox="1"/>
-          <p:nvPr/>
-        </p:nvSpPr>
-        <p:spPr>
-          <a:xfrm>
-            <a:off x="548640" y="3657600"/>
-            <a:ext cx="5486400" cy="1463040"/>
-          </a:xfrm>
-          <a:prstGeom prst="rect">
-            <a:avLst/>
-          </a:prstGeom>
-          <a:noFill/>
-        </p:spPr>
-        <p:txBody>
-          <a:bodyPr wrap="square" anchor="t">
-            <a:spAutoFit/>
-          </a:bodyPr>
-          <a:lstStyle/>
-          <a:p>
-            <a:pPr algn="l">
-              <a:spcAft>
-                <a:spcPts val="600"/>
-              </a:spcAft>
-            </a:pPr>
-            <a:r>
-              <a:rPr sz="1400" b="0">
-                <a:solidFill>
-                  <a:srgbClr val="1A1A1A"/>
-                </a:solidFill>
-                <a:latin typeface="Helvetica Neue"/>
-              </a:rPr>
-              <a:t>Growing Qwen3 from 0.6B to 4B — about 6.7× — did not make the CPU</a:t>
-            </a:r>
-          </a:p>
-          <a:p>
-            <a:pPr algn="l">
-              <a:spcAft>
-                <a:spcPts val="600"/>
-              </a:spcAft>
-            </a:pPr>
-            <a:r>
-              <a:rPr sz="1400" b="0">
-                <a:solidFill>
-                  <a:srgbClr val="1A1A1A"/>
-                </a:solidFill>
-                <a:latin typeface="Helvetica Neue"/>
-              </a:rPr>
-              <a:t>6.7× slower. It made the CPU impossible: XLA did not finish compiling</a:t>
-            </a:r>
-          </a:p>
-          <a:p>
-            <a:pPr algn="l">
-              <a:spcAft>
-                <a:spcPts val="600"/>
-              </a:spcAft>
-            </a:pPr>
-            <a:r>
-              <a:rPr sz="1400" b="0">
-                <a:solidFill>
-                  <a:srgbClr val="1A1A1A"/>
-                </a:solidFill>
-                <a:latin typeface="Helvetica Neue"/>
-              </a:rPr>
-              <a:t>in over an hour with remat, and the kernel killed the process at</a:t>
-            </a:r>
-          </a:p>
-          <a:p>
-            <a:pPr algn="l">
-              <a:spcAft>
-                <a:spcPts val="600"/>
-              </a:spcAft>
-            </a:pPr>
-            <a:r>
-              <a:rPr sz="1400" b="0">
-                <a:solidFill>
-                  <a:srgbClr val="1A1A1A"/>
-                </a:solidFill>
-                <a:latin typeface="Helvetica Neue"/>
-              </a:rPr>
-              <a:t>31.5 GB without it. A speedup chart alone hides that discontinuity.</a:t>
-            </a:r>
-          </a:p>
-        </p:txBody>
-      </p:sp>
-      <p:sp>
-        <p:nvSpPr>
-          <p:cNvPr id="10" name="TextBox 9"/>
-          <p:cNvSpPr txBox="1"/>
-          <p:nvPr/>
-        </p:nvSpPr>
-        <p:spPr>
-          <a:xfrm>
-            <a:off x="6309360" y="1645920"/>
-            <a:ext cx="5394960" cy="411480"/>
-          </a:xfrm>
-          <a:prstGeom prst="rect">
-            <a:avLst/>
-          </a:prstGeom>
-          <a:noFill/>
-        </p:spPr>
-        <p:txBody>
-          <a:bodyPr wrap="square" anchor="t">
-            <a:spAutoFit/>
-          </a:bodyPr>
-          <a:lstStyle/>
-          <a:p>
-            <a:pPr algn="l">
-              <a:spcAft>
-                <a:spcPts val="600"/>
-              </a:spcAft>
-            </a:pPr>
-            <a:r>
-              <a:rPr sz="1700" b="1">
-                <a:solidFill>
-                  <a:srgbClr val="E8590C"/>
-                </a:solidFill>
-                <a:latin typeface="Helvetica Neue"/>
-              </a:rPr>
-              <a:t>The wall was in the supply chain</a:t>
-            </a:r>
-          </a:p>
-        </p:txBody>
-      </p:sp>
-      <p:sp>
-        <p:nvSpPr>
-          <p:cNvPr id="11" name="TextBox 10"/>
-          <p:cNvSpPr txBox="1"/>
-          <p:nvPr/>
-        </p:nvSpPr>
-        <p:spPr>
-          <a:xfrm>
-            <a:off x="6309360" y="2011680"/>
-            <a:ext cx="5394960" cy="1737360"/>
-          </a:xfrm>
-          <a:prstGeom prst="rect">
-            <a:avLst/>
-          </a:prstGeom>
-          <a:noFill/>
-        </p:spPr>
-        <p:txBody>
-          <a:bodyPr wrap="square" anchor="t">
-            <a:spAutoFit/>
-          </a:bodyPr>
-          <a:lstStyle/>
-          <a:p>
-            <a:pPr algn="l">
-              <a:spcAft>
-                <a:spcPts val="600"/>
-              </a:spcAft>
-            </a:pPr>
-            <a:r>
-              <a:rPr sz="1400" b="0">
-                <a:solidFill>
-                  <a:srgbClr val="1A1A1A"/>
-                </a:solidFill>
-                <a:latin typeface="Helvetica Neue"/>
-              </a:rPr>
-              <a:t>The GH200 sat idle for a day — not for want of hardware or code.</a:t>
-            </a:r>
-          </a:p>
-          <a:p>
-            <a:pPr algn="l">
-              <a:spcAft>
-                <a:spcPts val="600"/>
-              </a:spcAft>
-            </a:pPr>
-            <a:r>
-              <a:rPr sz="1400" b="0">
-                <a:solidFill>
-                  <a:srgbClr val="1A1A1A"/>
-                </a:solidFill>
-                <a:latin typeface="Helvetica Neue"/>
-              </a:rPr>
-              <a:t>ARM64 host · QEMU cross-build segfault · libtpu has no aarch64 wheel ·</a:t>
-            </a:r>
-          </a:p>
-          <a:p>
-            <a:pPr algn="l">
-              <a:spcAft>
-                <a:spcPts val="600"/>
-              </a:spcAft>
-            </a:pPr>
-            <a:r>
-              <a:rPr sz="1400" b="0">
-                <a:solidFill>
-                  <a:srgbClr val="1A1A1A"/>
-                </a:solidFill>
-                <a:latin typeface="Helvetica Neue"/>
-              </a:rPr>
-              <a:t>no cluster credentials · registry 403.</a:t>
-            </a:r>
-          </a:p>
-          <a:p>
-            <a:pPr algn="l">
-              <a:spcAft>
-                <a:spcPts val="600"/>
-              </a:spcAft>
-            </a:pPr>
-            <a:r>
-              <a:rPr sz="1400" b="0">
-                <a:solidFill>
-                  <a:srgbClr val="1A1A1A"/>
-                </a:solidFill>
-                <a:latin typeface="Helvetica Neue"/>
-              </a:rPr>
-              <a:t/>
-            </a:r>
-          </a:p>
-          <a:p>
-            <a:pPr algn="l">
-              <a:spcAft>
-                <a:spcPts val="600"/>
-              </a:spcAft>
-            </a:pPr>
-            <a:r>
-              <a:rPr sz="1400" b="0">
-                <a:solidFill>
-                  <a:srgbClr val="1A1A1A"/>
-                </a:solidFill>
-                <a:latin typeface="Helvetica Neue"/>
-              </a:rPr>
-              <a:t>Exactly one of Tunix's 36 declared dependencies is TPU-bound.</a:t>
-            </a:r>
-          </a:p>
-          <a:p>
-            <a:pPr algn="l">
-              <a:spcAft>
-                <a:spcPts val="600"/>
-              </a:spcAft>
-            </a:pPr>
-            <a:r>
-              <a:rPr sz="1400" b="0">
-                <a:solidFill>
-                  <a:srgbClr val="1A1A1A"/>
-                </a:solidFill>
-                <a:latin typeface="Helvetica Neue"/>
-              </a:rPr>
-              <a:t>Swapping it is the whole port.</a:t>
-            </a:r>
-          </a:p>
-        </p:txBody>
-      </p:sp>
-      <p:sp>
-        <p:nvSpPr>
-          <p:cNvPr id="12" name="TextBox 11"/>
-          <p:cNvSpPr txBox="1"/>
-          <p:nvPr/>
-        </p:nvSpPr>
-        <p:spPr>
-          <a:xfrm>
-            <a:off x="6309360" y="3931920"/>
-            <a:ext cx="5394960" cy="411480"/>
-          </a:xfrm>
-          <a:prstGeom prst="rect">
-            <a:avLst/>
-          </a:prstGeom>
-          <a:noFill/>
-        </p:spPr>
-        <p:txBody>
-          <a:bodyPr wrap="square" anchor="t">
-            <a:spAutoFit/>
-          </a:bodyPr>
-          <a:lstStyle/>
-          <a:p>
-            <a:pPr algn="l">
-              <a:spcAft>
-                <a:spcPts val="600"/>
-              </a:spcAft>
-            </a:pPr>
-            <a:r>
-              <a:rPr sz="1700" b="1">
-                <a:solidFill>
-                  <a:srgbClr val="E8590C"/>
-                </a:solidFill>
-                <a:latin typeface="Helvetica Neue"/>
-              </a:rPr>
-              <a:t>Cost, and the recommendation</a:t>
-            </a:r>
-          </a:p>
-        </p:txBody>
-      </p:sp>
-      <p:graphicFrame>
-        <p:nvGraphicFramePr>
-          <p:cNvPr id="13" name="Table 12"/>
-          <p:cNvGraphicFramePr>
-            <a:graphicFrameLocks noGrp="1"/>
-          </p:cNvGraphicFramePr>
-          <p:nvPr/>
-        </p:nvGraphicFramePr>
-        <p:xfrm>
-          <a:off x="6309360" y="4315968"/>
-          <a:ext cx="5394960" cy="658368"/>
-        </p:xfrm>
-        <a:graphic>
-          <a:graphicData uri="http://schemas.openxmlformats.org/drawingml/2006/table">
-            <a:tbl>
-              <a:tblPr firstRow="1" bandRow="1">
-                <a:tableStyleId>{5C22544A-7EE6-4342-B048-85BDC9FD1C3A}</a:tableStyleId>
-              </a:tblPr>
-              <a:tblGrid>
-                <a:gridCol w="2651760"/>
-                <a:gridCol w="914400"/>
-                <a:gridCol w="914400"/>
-                <a:gridCol w="914400"/>
-              </a:tblGrid>
-              <a:tr h="329184">
+              <a:tr h="301752">
                 <a:tc>
                   <a:txBody>
                     <a:bodyPr/>
@@ -7955,13 +7162,13 @@
                           </a:solidFill>
                           <a:latin typeface="Helvetica Neue"/>
                         </a:rPr>
-                        <a:t>USD per 1 000 steps</a:t>
+                        <a:t>Qwen3-0.6B · bs 1 · seq 1024</a:t>
                       </a:r>
                     </a:p>
                   </a:txBody>
-                  <a:tcPr anchor="ctr" marL="91440" marT="18288" marB="18288">
+                  <a:tcPr anchor="ctr" marL="82296" marR="82296" marT="9144" marB="9144">
                     <a:solidFill>
-                      <a:srgbClr val="E8590C"/>
+                      <a:srgbClr val="15171A"/>
                     </a:solidFill>
                   </a:tcPr>
                 </a:tc>
@@ -7982,9 +7189,9 @@
                       </a:r>
                     </a:p>
                   </a:txBody>
-                  <a:tcPr anchor="ctr" marL="91440" marT="18288" marB="18288">
+                  <a:tcPr anchor="ctr" marL="82296" marR="82296" marT="9144" marB="9144">
                     <a:solidFill>
-                      <a:srgbClr val="E8590C"/>
+                      <a:srgbClr val="15171A"/>
                     </a:solidFill>
                   </a:tcPr>
                 </a:tc>
@@ -8001,13 +7208,13 @@
                           </a:solidFill>
                           <a:latin typeface="Helvetica Neue"/>
                         </a:rPr>
-                        <a:t>TPU 8×</a:t>
+                        <a:t>GPU GH200</a:t>
                       </a:r>
                     </a:p>
                   </a:txBody>
-                  <a:tcPr anchor="ctr" marL="91440" marT="18288" marB="18288">
+                  <a:tcPr anchor="ctr" marL="82296" marR="82296" marT="9144" marB="9144">
                     <a:solidFill>
-                      <a:srgbClr val="E8590C"/>
+                      <a:srgbClr val="15171A"/>
                     </a:solidFill>
                   </a:tcPr>
                 </a:tc>
@@ -8024,18 +7231,18 @@
                           </a:solidFill>
                           <a:latin typeface="Helvetica Neue"/>
                         </a:rPr>
-                        <a:t>GH200</a:t>
+                        <a:t>TPU v5e 2×4</a:t>
                       </a:r>
                     </a:p>
                   </a:txBody>
-                  <a:tcPr anchor="ctr" marL="91440" marT="18288" marB="18288">
+                  <a:tcPr anchor="ctr" marL="82296" marR="82296" marT="9144" marB="9144">
                     <a:solidFill>
-                      <a:srgbClr val="E8590C"/>
+                      <a:srgbClr val="15171A"/>
                     </a:solidFill>
                   </a:tcPr>
                 </a:tc>
               </a:tr>
-              <a:tr h="329184">
+              <a:tr h="301752">
                 <a:tc>
                   <a:txBody>
                     <a:bodyPr/>
@@ -8045,15 +7252,15 @@
                       <a:r>
                         <a:rPr sz="1200">
                           <a:solidFill>
-                            <a:srgbClr val="1A1A1A"/>
+                            <a:srgbClr val="15171A"/>
                           </a:solidFill>
                           <a:latin typeface="Helvetica Neue"/>
                         </a:rPr>
-                        <a:t>same workload, list prices</a:t>
+                        <a:t>chips</a:t>
                       </a:r>
                     </a:p>
                   </a:txBody>
-                  <a:tcPr anchor="ctr" marL="91440" marT="18288" marB="18288">
+                  <a:tcPr anchor="ctr" marL="82296" marR="82296" marT="9144" marB="9144">
                     <a:solidFill>
                       <a:srgbClr val="FFFFFF"/>
                     </a:solidFill>
@@ -8068,15 +7275,86 @@
                       <a:r>
                         <a:rPr sz="1200">
                           <a:solidFill>
-                            <a:srgbClr val="1A1A1A"/>
+                            <a:srgbClr val="15171A"/>
                           </a:solidFill>
                           <a:latin typeface="Helvetica Neue"/>
                         </a:rPr>
-                        <a:t>$6.05</a:t>
+                        <a:t>—</a:t>
                       </a:r>
                     </a:p>
                   </a:txBody>
-                  <a:tcPr anchor="ctr" marL="91440" marT="18288" marB="18288">
+                  <a:tcPr anchor="ctr" marL="82296" marR="82296" marT="9144" marB="9144">
+                    <a:solidFill>
+                      <a:srgbClr val="FFFFFF"/>
+                    </a:solidFill>
+                  </a:tcPr>
+                </a:tc>
+                <a:tc>
+                  <a:txBody>
+                    <a:bodyPr/>
+                    <a:lstStyle/>
+                    <a:p>
+                      <a:pPr algn="r"/>
+                      <a:r>
+                        <a:rPr sz="1200" b="1">
+                          <a:solidFill>
+                            <a:srgbClr val="E8590C"/>
+                          </a:solidFill>
+                          <a:latin typeface="Helvetica Neue"/>
+                        </a:rPr>
+                        <a:t>1</a:t>
+                      </a:r>
+                    </a:p>
+                  </a:txBody>
+                  <a:tcPr anchor="ctr" marL="82296" marR="82296" marT="9144" marB="9144">
+                    <a:solidFill>
+                      <a:srgbClr val="FEF3EA"/>
+                    </a:solidFill>
+                  </a:tcPr>
+                </a:tc>
+                <a:tc>
+                  <a:txBody>
+                    <a:bodyPr/>
+                    <a:lstStyle/>
+                    <a:p>
+                      <a:pPr algn="r"/>
+                      <a:r>
+                        <a:rPr sz="1200">
+                          <a:solidFill>
+                            <a:srgbClr val="15171A"/>
+                          </a:solidFill>
+                          <a:latin typeface="Helvetica Neue"/>
+                        </a:rPr>
+                        <a:t>8</a:t>
+                      </a:r>
+                    </a:p>
+                  </a:txBody>
+                  <a:tcPr anchor="ctr" marL="82296" marR="82296" marT="9144" marB="9144">
+                    <a:solidFill>
+                      <a:srgbClr val="FFFFFF"/>
+                    </a:solidFill>
+                  </a:tcPr>
+                </a:tc>
+              </a:tr>
+              <a:tr h="301752">
+                <a:tc>
+                  <a:txBody>
+                    <a:bodyPr/>
+                    <a:lstStyle/>
+                    <a:p>
+                      <a:pPr algn="l"/>
+                      <a:r>
+                        <a:rPr sz="1200">
+                          <a:solidFill>
+                            <a:srgbClr val="15171A"/>
+                          </a:solidFill>
+                          <a:latin typeface="Helvetica Neue"/>
+                        </a:rPr>
+                        <a:t>median step</a:t>
+                      </a:r>
+                    </a:p>
+                  </a:txBody>
+                  <a:tcPr anchor="ctr" marL="82296" marR="82296" marT="9144" marB="9144">
                     <a:solidFill>
                       <a:srgbClr val="FFFFFF"/>
                     </a:solidFill>
@@ -8091,15 +7369,86 @@
                       <a:r>
                         <a:rPr sz="1200">
                           <a:solidFill>
-                            <a:srgbClr val="1A1A1A"/>
+                            <a:srgbClr val="15171A"/>
                           </a:solidFill>
                           <a:latin typeface="Helvetica Neue"/>
                         </a:rPr>
-                        <a:t>$1.03</a:t>
+                        <a:t>18.99 s</a:t>
                       </a:r>
                     </a:p>
                   </a:txBody>
-                  <a:tcPr anchor="ctr" marL="91440" marT="18288" marB="18288">
+                  <a:tcPr anchor="ctr" marL="82296" marR="82296" marT="9144" marB="9144">
+                    <a:solidFill>
+                      <a:srgbClr val="FFFFFF"/>
+                    </a:solidFill>
+                  </a:tcPr>
+                </a:tc>
+                <a:tc>
+                  <a:txBody>
+                    <a:bodyPr/>
+                    <a:lstStyle/>
+                    <a:p>
+                      <a:pPr algn="r"/>
+                      <a:r>
+                        <a:rPr sz="1200" b="1">
+                          <a:solidFill>
+                            <a:srgbClr val="E8590C"/>
+                          </a:solidFill>
+                          <a:latin typeface="Helvetica Neue"/>
+                        </a:rPr>
+                        <a:t>0.0798 s</a:t>
+                      </a:r>
+                    </a:p>
+                  </a:txBody>
+                  <a:tcPr anchor="ctr" marL="82296" marR="82296" marT="9144" marB="9144">
+                    <a:solidFill>
+                      <a:srgbClr val="FEF3EA"/>
+                    </a:solidFill>
+                  </a:tcPr>
+                </a:tc>
+                <a:tc>
+                  <a:txBody>
+                    <a:bodyPr/>
+                    <a:lstStyle/>
+                    <a:p>
+                      <a:pPr algn="r"/>
+                      <a:r>
+                        <a:rPr sz="1200">
+                          <a:solidFill>
+                            <a:srgbClr val="15171A"/>
+                          </a:solidFill>
+                          <a:latin typeface="Helvetica Neue"/>
+                        </a:rPr>
+                        <a:t>0.0800 s</a:t>
+                      </a:r>
+                    </a:p>
+                  </a:txBody>
+                  <a:tcPr anchor="ctr" marL="82296" marR="82296" marT="9144" marB="9144">
+                    <a:solidFill>
+                      <a:srgbClr val="FFFFFF"/>
+                    </a:solidFill>
+                  </a:tcPr>
+                </a:tc>
+              </a:tr>
+              <a:tr h="301752">
+                <a:tc>
+                  <a:txBody>
+                    <a:bodyPr/>
+                    <a:lstStyle/>
+                    <a:p>
+                      <a:pPr algn="l"/>
+                      <a:r>
+                        <a:rPr sz="1200">
+                          <a:solidFill>
+                            <a:srgbClr val="15171A"/>
+                          </a:solidFill>
+                          <a:latin typeface="Helvetica Neue"/>
+                        </a:rPr>
+                        <a:t>throughput</a:t>
+                      </a:r>
+                    </a:p>
+                  </a:txBody>
+                  <a:tcPr anchor="ctr" marL="82296" marR="82296" marT="9144" marB="9144">
                     <a:solidFill>
                       <a:srgbClr val="FFFFFF"/>
                     </a:solidFill>
@@ -8114,7 +7463,312 @@
                       <a:r>
                         <a:rPr sz="1200">
                           <a:solidFill>
-                            <a:srgbClr val="1A1A1A"/>
+                            <a:srgbClr val="15171A"/>
+                          </a:solidFill>
+                          <a:latin typeface="Helvetica Neue"/>
+                        </a:rPr>
+                        <a:t>54</a:t>
+                      </a:r>
+                    </a:p>
+                  </a:txBody>
+                  <a:tcPr anchor="ctr" marL="82296" marR="82296" marT="9144" marB="9144">
+                    <a:solidFill>
+                      <a:srgbClr val="FFFFFF"/>
+                    </a:solidFill>
+                  </a:tcPr>
+                </a:tc>
+                <a:tc>
+                  <a:txBody>
+                    <a:bodyPr/>
+                    <a:lstStyle/>
+                    <a:p>
+                      <a:pPr algn="r"/>
+                      <a:r>
+                        <a:rPr sz="1200" b="1">
+                          <a:solidFill>
+                            <a:srgbClr val="E8590C"/>
+                          </a:solidFill>
+                          <a:latin typeface="Helvetica Neue"/>
+                        </a:rPr>
+                        <a:t>12,834</a:t>
+                      </a:r>
+                    </a:p>
+                  </a:txBody>
+                  <a:tcPr anchor="ctr" marL="82296" marR="82296" marT="9144" marB="9144">
+                    <a:solidFill>
+                      <a:srgbClr val="FEF3EA"/>
+                    </a:solidFill>
+                  </a:tcPr>
+                </a:tc>
+                <a:tc>
+                  <a:txBody>
+                    <a:bodyPr/>
+                    <a:lstStyle/>
+                    <a:p>
+                      <a:pPr algn="r"/>
+                      <a:r>
+                        <a:rPr sz="1200">
+                          <a:solidFill>
+                            <a:srgbClr val="15171A"/>
+                          </a:solidFill>
+                          <a:latin typeface="Helvetica Neue"/>
+                        </a:rPr>
+                        <a:t>12,804</a:t>
+                      </a:r>
+                    </a:p>
+                  </a:txBody>
+                  <a:tcPr anchor="ctr" marL="82296" marR="82296" marT="9144" marB="9144">
+                    <a:solidFill>
+                      <a:srgbClr val="FFFFFF"/>
+                    </a:solidFill>
+                  </a:tcPr>
+                </a:tc>
+              </a:tr>
+              <a:tr h="301752">
+                <a:tc>
+                  <a:txBody>
+                    <a:bodyPr/>
+                    <a:lstStyle/>
+                    <a:p>
+                      <a:pPr algn="l"/>
+                      <a:r>
+                        <a:rPr sz="1200">
+                          <a:solidFill>
+                            <a:srgbClr val="15171A"/>
+                          </a:solidFill>
+                          <a:latin typeface="Helvetica Neue"/>
+                        </a:rPr>
+                        <a:t>speedup vs CPU</a:t>
+                      </a:r>
+                    </a:p>
+                  </a:txBody>
+                  <a:tcPr anchor="ctr" marL="82296" marR="82296" marT="9144" marB="9144">
+                    <a:solidFill>
+                      <a:srgbClr val="FFFFFF"/>
+                    </a:solidFill>
+                  </a:tcPr>
+                </a:tc>
+                <a:tc>
+                  <a:txBody>
+                    <a:bodyPr/>
+                    <a:lstStyle/>
+                    <a:p>
+                      <a:pPr algn="r"/>
+                      <a:r>
+                        <a:rPr sz="1200">
+                          <a:solidFill>
+                            <a:srgbClr val="15171A"/>
+                          </a:solidFill>
+                          <a:latin typeface="Helvetica Neue"/>
+                        </a:rPr>
+                        <a:t>1.0×</a:t>
+                      </a:r>
+                    </a:p>
+                  </a:txBody>
+                  <a:tcPr anchor="ctr" marL="82296" marR="82296" marT="9144" marB="9144">
+                    <a:solidFill>
+                      <a:srgbClr val="FFFFFF"/>
+                    </a:solidFill>
+                  </a:tcPr>
+                </a:tc>
+                <a:tc>
+                  <a:txBody>
+                    <a:bodyPr/>
+                    <a:lstStyle/>
+                    <a:p>
+                      <a:pPr algn="r"/>
+                      <a:r>
+                        <a:rPr sz="1200" b="1">
+                          <a:solidFill>
+                            <a:srgbClr val="E8590C"/>
+                          </a:solidFill>
+                          <a:latin typeface="Helvetica Neue"/>
+                        </a:rPr>
+                        <a:t>238×</a:t>
+                      </a:r>
+                    </a:p>
+                  </a:txBody>
+                  <a:tcPr anchor="ctr" marL="82296" marR="82296" marT="9144" marB="9144">
+                    <a:solidFill>
+                      <a:srgbClr val="FEF3EA"/>
+                    </a:solidFill>
+                  </a:tcPr>
+                </a:tc>
+                <a:tc>
+                  <a:txBody>
+                    <a:bodyPr/>
+                    <a:lstStyle/>
+                    <a:p>
+                      <a:pPr algn="r"/>
+                      <a:r>
+                        <a:rPr sz="1200">
+                          <a:solidFill>
+                            <a:srgbClr val="15171A"/>
+                          </a:solidFill>
+                          <a:latin typeface="Helvetica Neue"/>
+                        </a:rPr>
+                        <a:t>237×</a:t>
+                      </a:r>
+                    </a:p>
+                  </a:txBody>
+                  <a:tcPr anchor="ctr" marL="82296" marR="82296" marT="9144" marB="9144">
+                    <a:solidFill>
+                      <a:srgbClr val="FFFFFF"/>
+                    </a:solidFill>
+                  </a:tcPr>
+                </a:tc>
+              </a:tr>
+              <a:tr h="301752">
+                <a:tc>
+                  <a:txBody>
+                    <a:bodyPr/>
+                    <a:lstStyle/>
+                    <a:p>
+                      <a:pPr algn="l"/>
+                      <a:r>
+                        <a:rPr sz="1200">
+                          <a:solidFill>
+                            <a:srgbClr val="15171A"/>
+                          </a:solidFill>
+                          <a:latin typeface="Helvetica Neue"/>
+                        </a:rPr>
+                        <a:t>peak memory</a:t>
+                      </a:r>
+                    </a:p>
+                  </a:txBody>
+                  <a:tcPr anchor="ctr" marL="82296" marR="82296" marT="9144" marB="9144">
+                    <a:solidFill>
+                      <a:srgbClr val="FFFFFF"/>
+                    </a:solidFill>
+                  </a:tcPr>
+                </a:tc>
+                <a:tc>
+                  <a:txBody>
+                    <a:bodyPr/>
+                    <a:lstStyle/>
+                    <a:p>
+                      <a:pPr algn="r"/>
+                      <a:r>
+                        <a:rPr sz="1200">
+                          <a:solidFill>
+                            <a:srgbClr val="15171A"/>
+                          </a:solidFill>
+                          <a:latin typeface="Helvetica Neue"/>
+                        </a:rPr>
+                        <a:t>66 %</a:t>
+                      </a:r>
+                    </a:p>
+                  </a:txBody>
+                  <a:tcPr anchor="ctr" marL="82296" marR="82296" marT="9144" marB="9144">
+                    <a:solidFill>
+                      <a:srgbClr val="FFFFFF"/>
+                    </a:solidFill>
+                  </a:tcPr>
+                </a:tc>
+                <a:tc>
+                  <a:txBody>
+                    <a:bodyPr/>
+                    <a:lstStyle/>
+                    <a:p>
+                      <a:pPr algn="r"/>
+                      <a:r>
+                        <a:rPr sz="1200" b="1">
+                          <a:solidFill>
+                            <a:srgbClr val="E8590C"/>
+                          </a:solidFill>
+                          <a:latin typeface="Helvetica Neue"/>
+                        </a:rPr>
+                        <a:t>5.0 %</a:t>
+                      </a:r>
+                    </a:p>
+                  </a:txBody>
+                  <a:tcPr anchor="ctr" marL="82296" marR="82296" marT="9144" marB="9144">
+                    <a:solidFill>
+                      <a:srgbClr val="FEF3EA"/>
+                    </a:solidFill>
+                  </a:tcPr>
+                </a:tc>
+                <a:tc>
+                  <a:txBody>
+                    <a:bodyPr/>
+                    <a:lstStyle/>
+                    <a:p>
+                      <a:pPr algn="r"/>
+                      <a:r>
+                        <a:rPr sz="1200">
+                          <a:solidFill>
+                            <a:srgbClr val="15171A"/>
+                          </a:solidFill>
+                          <a:latin typeface="Helvetica Neue"/>
+                        </a:rPr>
+                        <a:t>7.3 %</a:t>
+                      </a:r>
+                    </a:p>
+                  </a:txBody>
+                  <a:tcPr anchor="ctr" marL="82296" marR="82296" marT="9144" marB="9144">
+                    <a:solidFill>
+                      <a:srgbClr val="FFFFFF"/>
+                    </a:solidFill>
+                  </a:tcPr>
+                </a:tc>
+              </a:tr>
+              <a:tr h="301752">
+                <a:tc>
+                  <a:txBody>
+                    <a:bodyPr/>
+                    <a:lstStyle/>
+                    <a:p>
+                      <a:pPr algn="l"/>
+                      <a:r>
+                        <a:rPr sz="1200">
+                          <a:solidFill>
+                            <a:srgbClr val="15171A"/>
+                          </a:solidFill>
+                          <a:latin typeface="Helvetica Neue"/>
+                        </a:rPr>
+                        <a:t>USD / 1 000 steps</a:t>
+                      </a:r>
+                    </a:p>
+                  </a:txBody>
+                  <a:tcPr anchor="ctr" marL="82296" marR="82296" marT="9144" marB="9144">
+                    <a:solidFill>
+                      <a:srgbClr val="FFFFFF"/>
+                    </a:solidFill>
+                  </a:tcPr>
+                </a:tc>
+                <a:tc>
+                  <a:txBody>
+                    <a:bodyPr/>
+                    <a:lstStyle/>
+                    <a:p>
+                      <a:pPr algn="r"/>
+                      <a:r>
+                        <a:rPr sz="1200">
+                          <a:solidFill>
+                            <a:srgbClr val="15171A"/>
+                          </a:solidFill>
+                          <a:latin typeface="Helvetica Neue"/>
+                        </a:rPr>
+                        <a:t>$6.05</a:t>
+                      </a:r>
+                    </a:p>
+                  </a:txBody>
+                  <a:tcPr anchor="ctr" marL="82296" marR="82296" marT="9144" marB="9144">
+                    <a:solidFill>
+                      <a:srgbClr val="FFFFFF"/>
+                    </a:solidFill>
+                  </a:tcPr>
+                </a:tc>
+                <a:tc>
+                  <a:txBody>
+                    <a:bodyPr/>
+                    <a:lstStyle/>
+                    <a:p>
+                      <a:pPr algn="r"/>
+                      <a:r>
+                        <a:rPr sz="1200" b="1">
+                          <a:solidFill>
+                            <a:srgbClr val="E8590C"/>
                           </a:solidFill>
                           <a:latin typeface="Helvetica Neue"/>
                         </a:rPr>
@@ -8122,7 +7776,30 @@
                       </a:r>
                     </a:p>
                   </a:txBody>
-                  <a:tcPr anchor="ctr" marL="91440" marT="18288" marB="18288">
+                  <a:tcPr anchor="ctr" marL="82296" marR="82296" marT="9144" marB="9144">
+                    <a:solidFill>
+                      <a:srgbClr val="FEF3EA"/>
+                    </a:solidFill>
+                  </a:tcPr>
+                </a:tc>
+                <a:tc>
+                  <a:txBody>
+                    <a:bodyPr/>
+                    <a:lstStyle/>
+                    <a:p>
+                      <a:pPr algn="r"/>
+                      <a:r>
+                        <a:rPr sz="1200">
+                          <a:solidFill>
+                            <a:srgbClr val="15171A"/>
+                          </a:solidFill>
+                          <a:latin typeface="Helvetica Neue"/>
+                        </a:rPr>
+                        <a:t>$1.03</a:t>
+                      </a:r>
+                    </a:p>
+                  </a:txBody>
+                  <a:tcPr anchor="ctr" marL="82296" marR="82296" marT="9144" marB="9144">
                     <a:solidFill>
                       <a:srgbClr val="FFFFFF"/>
                     </a:solidFill>
@@ -8135,14 +7812,14 @@
       </p:graphicFrame>
       <p:sp>
         <p:nvSpPr>
-          <p:cNvPr id="14" name="TextBox 13"/>
+          <p:cNvPr id="7" name="TextBox 6"/>
           <p:cNvSpPr txBox="1"/>
           <p:nvPr/>
         </p:nvSpPr>
         <p:spPr>
           <a:xfrm>
-            <a:off x="6309360" y="5074920"/>
-            <a:ext cx="5394960" cy="1371600"/>
+            <a:off x="7955279" y="1691640"/>
+            <a:ext cx="3657600" cy="777240"/>
           </a:xfrm>
           <a:prstGeom prst="rect">
             <a:avLst/>
@@ -8157,79 +7834,31 @@
           <a:p>
             <a:pPr algn="l">
               <a:spcAft>
-                <a:spcPts val="600"/>
-              </a:spcAft>
-            </a:pPr>
-            <a:r>
-              <a:rPr sz="1300" b="0">
-                <a:solidFill>
-                  <a:srgbClr val="1A1A1A"/>
-                </a:solidFill>
-                <a:latin typeface="Helvetica Neue"/>
-              </a:rPr>
-              <a:t>Identical step time, 7.9× the price: eight v5e chips against one</a:t>
-            </a:r>
-          </a:p>
-          <a:p>
-            <a:pPr algn="l">
-              <a:spcAft>
-                <a:spcPts val="600"/>
-              </a:spcAft>
-            </a:pPr>
-            <a:r>
-              <a:rPr sz="1300" b="0">
-                <a:solidFill>
-                  <a:srgbClr val="1A1A1A"/>
-                </a:solidFill>
-                <a:latin typeface="Helvetica Neue"/>
-              </a:rPr>
-              <a:t>Hopper. Do not scale out — amortise. Raise batch only until the chip is</a:t>
-            </a:r>
-          </a:p>
-          <a:p>
-            <a:pPr algn="l">
-              <a:spcAft>
-                <a:spcPts val="600"/>
-              </a:spcAft>
-            </a:pPr>
-            <a:r>
-              <a:rPr sz="1300" b="0">
-                <a:solidFill>
-                  <a:srgbClr val="1A1A1A"/>
-                </a:solidFill>
-                <a:latin typeface="Helvetica Neue"/>
-              </a:rPr>
-              <a:t>occupied, then attack fixed cost: persistent compile cache, warm workers</a:t>
-            </a:r>
-          </a:p>
-          <a:p>
-            <a:pPr algn="l">
-              <a:spcAft>
-                <a:spcPts val="600"/>
-              </a:spcAft>
-            </a:pPr>
-            <a:r>
-              <a:rPr sz="1300" b="0">
-                <a:solidFill>
-                  <a:srgbClr val="1A1A1A"/>
-                </a:solidFill>
-                <a:latin typeface="Helvetica Neue"/>
-              </a:rPr>
-              <a:t>instead of a pod per job, file cache on anything reading a checkpoint.</a:t>
-            </a:r>
-          </a:p>
-        </p:txBody>
-      </p:sp>
-      <p:sp>
-        <p:nvSpPr>
-          <p:cNvPr id="15" name="TextBox 14"/>
+                <a:spcPts val="0"/>
+              </a:spcAft>
+            </a:pPr>
+            <a:r>
+              <a:rPr sz="4000" b="1" i="0">
+                <a:solidFill>
+                  <a:srgbClr val="E8590C"/>
+                </a:solidFill>
+                <a:latin typeface="Helvetica Neue"/>
+              </a:rPr>
+              <a:t>0.23 %</a:t>
+            </a:r>
+          </a:p>
+        </p:txBody>
+      </p:sp>
+      <p:sp>
+        <p:nvSpPr>
+          <p:cNvPr id="8" name="TextBox 7"/>
           <p:cNvSpPr txBox="1"/>
           <p:nvPr/>
         </p:nvSpPr>
         <p:spPr>
           <a:xfrm>
-            <a:off x="548640" y="5989320"/>
-            <a:ext cx="11155680" cy="457200"/>
+            <a:off x="7955279" y="2350008"/>
+            <a:ext cx="3657600" cy="822960"/>
           </a:xfrm>
           <a:prstGeom prst="rect">
             <a:avLst/>
@@ -8242,15 +7871,1556 @@
           </a:bodyPr>
           <a:lstStyle/>
           <a:p>
+            <a:pPr algn="l">
+              <a:spcAft>
+                <a:spcPts val="200"/>
+              </a:spcAft>
+            </a:pPr>
+            <a:r>
+              <a:rPr sz="1200" b="0" i="0">
+                <a:solidFill>
+                  <a:srgbClr val="717A85"/>
+                </a:solidFill>
+                <a:latin typeface="Helvetica Neue"/>
+              </a:rPr>
+              <a:t>difference in step time between</a:t>
+            </a:r>
+          </a:p>
+          <a:p>
+            <a:pPr algn="l">
+              <a:spcAft>
+                <a:spcPts val="200"/>
+              </a:spcAft>
+            </a:pPr>
+            <a:r>
+              <a:rPr sz="1200" b="0" i="0">
+                <a:solidFill>
+                  <a:srgbClr val="717A85"/>
+                </a:solidFill>
+                <a:latin typeface="Helvetica Neue"/>
+              </a:rPr>
+              <a:t>one GH200 and eight v5e chips</a:t>
+            </a:r>
+          </a:p>
+        </p:txBody>
+      </p:sp>
+      <p:sp>
+        <p:nvSpPr>
+          <p:cNvPr id="9" name="TextBox 8"/>
+          <p:cNvSpPr txBox="1"/>
+          <p:nvPr/>
+        </p:nvSpPr>
+        <p:spPr>
+          <a:xfrm>
+            <a:off x="7955279" y="2880360"/>
+            <a:ext cx="3657600" cy="777240"/>
+          </a:xfrm>
+          <a:prstGeom prst="rect">
+            <a:avLst/>
+          </a:prstGeom>
+          <a:noFill/>
+        </p:spPr>
+        <p:txBody>
+          <a:bodyPr wrap="square" anchor="t">
+            <a:spAutoFit/>
+          </a:bodyPr>
+          <a:lstStyle/>
+          <a:p>
+            <a:pPr algn="l">
+              <a:spcAft>
+                <a:spcPts val="0"/>
+              </a:spcAft>
+            </a:pPr>
+            <a:r>
+              <a:rPr sz="4000" b="1" i="0">
+                <a:solidFill>
+                  <a:srgbClr val="E8590C"/>
+                </a:solidFill>
+                <a:latin typeface="Helvetica Neue"/>
+              </a:rPr>
+              <a:t>14.6×</a:t>
+            </a:r>
+          </a:p>
+        </p:txBody>
+      </p:sp>
+      <p:sp>
+        <p:nvSpPr>
+          <p:cNvPr id="10" name="TextBox 9"/>
+          <p:cNvSpPr txBox="1"/>
+          <p:nvPr/>
+        </p:nvSpPr>
+        <p:spPr>
+          <a:xfrm>
+            <a:off x="7955279" y="3538728"/>
+            <a:ext cx="3657600" cy="822960"/>
+          </a:xfrm>
+          <a:prstGeom prst="rect">
+            <a:avLst/>
+          </a:prstGeom>
+          <a:noFill/>
+        </p:spPr>
+        <p:txBody>
+          <a:bodyPr wrap="square" anchor="t">
+            <a:spAutoFit/>
+          </a:bodyPr>
+          <a:lstStyle/>
+          <a:p>
+            <a:pPr algn="l">
+              <a:spcAft>
+                <a:spcPts val="200"/>
+              </a:spcAft>
+            </a:pPr>
+            <a:r>
+              <a:rPr sz="1200" b="0" i="0">
+                <a:solidFill>
+                  <a:srgbClr val="717A85"/>
+                </a:solidFill>
+                <a:latin typeface="Helvetica Neue"/>
+              </a:rPr>
+              <a:t>faster checkpoint load from one</a:t>
+            </a:r>
+          </a:p>
+          <a:p>
+            <a:pPr algn="l">
+              <a:spcAft>
+                <a:spcPts val="200"/>
+              </a:spcAft>
+            </a:pPr>
+            <a:r>
+              <a:rPr sz="1200" b="0" i="0">
+                <a:solidFill>
+                  <a:srgbClr val="717A85"/>
+                </a:solidFill>
+                <a:latin typeface="Helvetica Neue"/>
+              </a:rPr>
+              <a:t>manifest line — 31 % off wall clock</a:t>
+            </a:r>
+          </a:p>
+        </p:txBody>
+      </p:sp>
+      <p:pic>
+        <p:nvPicPr>
+          <p:cNvPr id="11" name="Picture 10" descr="slide4-comparison.png"/>
+          <p:cNvPicPr>
+            <a:picLocks noChangeAspect="1"/>
+          </p:cNvPicPr>
+          <p:nvPr/>
+        </p:nvPicPr>
+        <p:blipFill>
+          <a:blip r:embed="rId2"/>
+          <a:stretch>
+            <a:fillRect/>
+          </a:stretch>
+        </p:blipFill>
+        <p:spPr>
+          <a:xfrm>
+            <a:off x="566928" y="3913632"/>
+            <a:ext cx="6766560" cy="2829483"/>
+          </a:xfrm>
+          <a:prstGeom prst="rect">
+            <a:avLst/>
+          </a:prstGeom>
+        </p:spPr>
+      </p:pic>
+      <p:sp>
+        <p:nvSpPr>
+          <p:cNvPr id="12" name="Rounded Rectangle 11"/>
+          <p:cNvSpPr/>
+          <p:nvPr/>
+        </p:nvSpPr>
+        <p:spPr>
+          <a:xfrm>
+            <a:off x="7955279" y="4160520"/>
+            <a:ext cx="3657600" cy="2011680"/>
+          </a:xfrm>
+          <a:prstGeom prst="roundRect">
+            <a:avLst>
+              <a:gd name="adj" fmla="val 4000"/>
+            </a:avLst>
+          </a:prstGeom>
+          <a:solidFill>
+            <a:srgbClr val="FEF3EA"/>
+          </a:solidFill>
+          <a:ln w="9525">
+            <a:solidFill>
+              <a:srgbClr val="E6E9EC"/>
+            </a:solidFill>
+          </a:ln>
+          <a:effectLst/>
+        </p:spPr>
+        <p:style>
+          <a:lnRef idx="1">
+            <a:schemeClr val="accent1"/>
+          </a:lnRef>
+          <a:fillRef idx="3">
+            <a:schemeClr val="accent1"/>
+          </a:fillRef>
+          <a:effectRef idx="2">
+            <a:schemeClr val="accent1"/>
+          </a:effectRef>
+          <a:fontRef idx="minor">
+            <a:schemeClr val="lt1"/>
+          </a:fontRef>
+        </p:style>
+        <p:txBody>
+          <a:bodyPr rtlCol="0" anchor="ctr"/>
+          <a:lstStyle/>
+          <a:p>
+            <a:pPr algn="ctr"/>
+          </a:p>
+        </p:txBody>
+      </p:sp>
+      <p:sp>
+        <p:nvSpPr>
+          <p:cNvPr id="13" name="TextBox 12"/>
+          <p:cNvSpPr txBox="1"/>
+          <p:nvPr/>
+        </p:nvSpPr>
+        <p:spPr>
+          <a:xfrm>
+            <a:off x="8229600" y="4343400"/>
+            <a:ext cx="3200400" cy="274320"/>
+          </a:xfrm>
+          <a:prstGeom prst="rect">
+            <a:avLst/>
+          </a:prstGeom>
+          <a:noFill/>
+        </p:spPr>
+        <p:txBody>
+          <a:bodyPr wrap="square" anchor="t">
+            <a:spAutoFit/>
+          </a:bodyPr>
+          <a:lstStyle/>
+          <a:p>
+            <a:pPr algn="l">
+              <a:spcAft>
+                <a:spcPts val="500"/>
+              </a:spcAft>
+            </a:pPr>
+            <a:r>
+              <a:rPr sz="1300" b="1" i="0">
+                <a:solidFill>
+                  <a:srgbClr val="E8590C"/>
+                </a:solidFill>
+                <a:latin typeface="Helvetica Neue"/>
+              </a:rPr>
+              <a:t>The control</a:t>
+            </a:r>
+          </a:p>
+        </p:txBody>
+      </p:sp>
+      <p:sp>
+        <p:nvSpPr>
+          <p:cNvPr id="14" name="TextBox 13"/>
+          <p:cNvSpPr txBox="1"/>
+          <p:nvPr/>
+        </p:nvSpPr>
+        <p:spPr>
+          <a:xfrm>
+            <a:off x="8229600" y="4681728"/>
+            <a:ext cx="3200400" cy="1463040"/>
+          </a:xfrm>
+          <a:prstGeom prst="rect">
+            <a:avLst/>
+          </a:prstGeom>
+          <a:noFill/>
+        </p:spPr>
+        <p:txBody>
+          <a:bodyPr wrap="square" anchor="t">
+            <a:spAutoFit/>
+          </a:bodyPr>
+          <a:lstStyle/>
+          <a:p>
+            <a:pPr algn="l">
+              <a:spcAft>
+                <a:spcPts val="200"/>
+              </a:spcAft>
+            </a:pPr>
+            <a:r>
+              <a:rPr sz="1150" b="0" i="0">
+                <a:solidFill>
+                  <a:srgbClr val="15171A"/>
+                </a:solidFill>
+                <a:latin typeface="Helvetica Neue"/>
+              </a:rPr>
+              <a:t>Median step time before and</a:t>
+            </a:r>
+          </a:p>
+          <a:p>
+            <a:pPr algn="l">
+              <a:spcAft>
+                <a:spcPts val="200"/>
+              </a:spcAft>
+            </a:pPr>
+            <a:r>
+              <a:rPr sz="1150" b="0" i="0">
+                <a:solidFill>
+                  <a:srgbClr val="15171A"/>
+                </a:solidFill>
+                <a:latin typeface="Helvetica Neue"/>
+              </a:rPr>
+              <a:t>after the cache:</a:t>
+            </a:r>
+          </a:p>
+          <a:p>
+            <a:pPr algn="l">
+              <a:spcAft>
+                <a:spcPts val="200"/>
+              </a:spcAft>
+            </a:pPr>
+            <a:r>
+              <a:rPr sz="1150" b="0" i="0">
+                <a:solidFill>
+                  <a:srgbClr val="15171A"/>
+                </a:solidFill>
+                <a:latin typeface="Helvetica Neue"/>
+              </a:rPr>
+              <a:t/>
+            </a:r>
+          </a:p>
+          <a:p>
+            <a:pPr algn="l">
+              <a:spcAft>
+                <a:spcPts val="200"/>
+              </a:spcAft>
+            </a:pPr>
+            <a:r>
+              <a:rPr sz="1150" b="0" i="0">
+                <a:solidFill>
+                  <a:srgbClr val="15171A"/>
+                </a:solidFill>
+                <a:latin typeface="Helvetica Neue"/>
+              </a:rPr>
+              <a:t>1.75122 s  →  1.75117 s</a:t>
+            </a:r>
+          </a:p>
+          <a:p>
+            <a:pPr algn="l">
+              <a:spcAft>
+                <a:spcPts val="200"/>
+              </a:spcAft>
+            </a:pPr>
+            <a:r>
+              <a:rPr sz="1150" b="0" i="0">
+                <a:solidFill>
+                  <a:srgbClr val="15171A"/>
+                </a:solidFill>
+                <a:latin typeface="Helvetica Neue"/>
+              </a:rPr>
+              <a:t/>
+            </a:r>
+          </a:p>
+          <a:p>
+            <a:pPr algn="l">
+              <a:spcAft>
+                <a:spcPts val="200"/>
+              </a:spcAft>
+            </a:pPr>
+            <a:r>
+              <a:rPr sz="1150" b="0" i="0">
+                <a:solidFill>
+                  <a:srgbClr val="15171A"/>
+                </a:solidFill>
+                <a:latin typeface="Helvetica Neue"/>
+              </a:rPr>
+              <a:t>The computation did not move.</a:t>
+            </a:r>
+          </a:p>
+          <a:p>
+            <a:pPr algn="l">
+              <a:spcAft>
+                <a:spcPts val="200"/>
+              </a:spcAft>
+            </a:pPr>
+            <a:r>
+              <a:rPr sz="1150" b="0" i="0">
+                <a:solidFill>
+                  <a:srgbClr val="15171A"/>
+                </a:solidFill>
+                <a:latin typeface="Helvetica Neue"/>
+              </a:rPr>
+              <a:t>Only I/O did — so the saving is</a:t>
+            </a:r>
+          </a:p>
+          <a:p>
+            <a:pPr algn="l">
+              <a:spcAft>
+                <a:spcPts val="200"/>
+              </a:spcAft>
+            </a:pPr>
+            <a:r>
+              <a:rPr sz="1150" b="0" i="0">
+                <a:solidFill>
+                  <a:srgbClr val="15171A"/>
+                </a:solidFill>
+                <a:latin typeface="Helvetica Neue"/>
+              </a:rPr>
+              <a:t>attributable, not noise.</a:t>
+            </a:r>
+          </a:p>
+        </p:txBody>
+      </p:sp>
+    </p:spTree>
+  </p:cSld>
+  <p:clrMapOvr>
+    <a:masterClrMapping/>
+  </p:clrMapOvr>
+</p:sld>
+</file>
+
+<file path=ppt/slides/slide5.xml><?xml version="1.0" encoding="utf-8"?>
+<p:sld xmlns:a="http://schemas.openxmlformats.org/drawingml/2006/main" xmlns:p="http://schemas.openxmlformats.org/presentationml/2006/main" xmlns:r="http://schemas.openxmlformats.org/officeDocument/2006/relationships">
+  <p:cSld>
+    <p:spTree>
+      <p:nvGrpSpPr>
+        <p:cNvPr id="1" name=""/>
+        <p:cNvGrpSpPr/>
+        <p:nvPr/>
+      </p:nvGrpSpPr>
+      <p:grpSpPr/>
+      <p:sp>
+        <p:nvSpPr>
+          <p:cNvPr id="2" name="Rectangle 1"/>
+          <p:cNvSpPr/>
+          <p:nvPr/>
+        </p:nvSpPr>
+        <p:spPr>
+          <a:xfrm>
+            <a:off x="0" y="0"/>
+            <a:ext cx="146304" cy="6858000"/>
+          </a:xfrm>
+          <a:prstGeom prst="rect">
+            <a:avLst/>
+          </a:prstGeom>
+          <a:solidFill>
+            <a:srgbClr val="E8590C"/>
+          </a:solidFill>
+          <a:ln>
+            <a:noFill/>
+          </a:ln>
+          <a:effectLst/>
+        </p:spPr>
+        <p:style>
+          <a:lnRef idx="1">
+            <a:schemeClr val="accent1"/>
+          </a:lnRef>
+          <a:fillRef idx="3">
+            <a:schemeClr val="accent1"/>
+          </a:fillRef>
+          <a:effectRef idx="2">
+            <a:schemeClr val="accent1"/>
+          </a:effectRef>
+          <a:fontRef idx="minor">
+            <a:schemeClr val="lt1"/>
+          </a:fontRef>
+        </p:style>
+        <p:txBody>
+          <a:bodyPr rtlCol="0" anchor="ctr"/>
+          <a:lstStyle/>
+          <a:p>
+            <a:pPr algn="ctr"/>
+          </a:p>
+        </p:txBody>
+      </p:sp>
+      <p:sp>
+        <p:nvSpPr>
+          <p:cNvPr id="3" name="TextBox 2"/>
+          <p:cNvSpPr txBox="1"/>
+          <p:nvPr/>
+        </p:nvSpPr>
+        <p:spPr>
+          <a:xfrm>
+            <a:off x="10881360" y="45720"/>
+            <a:ext cx="1188720" cy="1371600"/>
+          </a:xfrm>
+          <a:prstGeom prst="rect">
+            <a:avLst/>
+          </a:prstGeom>
+          <a:noFill/>
+        </p:spPr>
+        <p:txBody>
+          <a:bodyPr wrap="none">
+            <a:spAutoFit/>
+          </a:bodyPr>
+          <a:lstStyle/>
+          <a:p>
+            <a:pPr algn="r"/>
+            <a:r>
+              <a:rPr sz="7200" b="1">
+                <a:solidFill>
+                  <a:srgbClr val="E6E9EC"/>
+                </a:solidFill>
+                <a:latin typeface="Helvetica Neue"/>
+              </a:rPr>
+              <a:t>5</a:t>
+            </a:r>
+          </a:p>
+        </p:txBody>
+      </p:sp>
+      <p:sp>
+        <p:nvSpPr>
+          <p:cNvPr id="4" name="TextBox 3"/>
+          <p:cNvSpPr txBox="1"/>
+          <p:nvPr/>
+        </p:nvSpPr>
+        <p:spPr>
+          <a:xfrm>
+            <a:off x="566928" y="365760"/>
+            <a:ext cx="9601200" cy="274320"/>
+          </a:xfrm>
+          <a:prstGeom prst="rect">
+            <a:avLst/>
+          </a:prstGeom>
+          <a:noFill/>
+        </p:spPr>
+        <p:txBody>
+          <a:bodyPr wrap="square" anchor="t">
+            <a:spAutoFit/>
+          </a:bodyPr>
+          <a:lstStyle/>
+          <a:p>
+            <a:pPr algn="l">
+              <a:spcAft>
+                <a:spcPts val="500"/>
+              </a:spcAft>
+            </a:pPr>
+            <a:r>
+              <a:rPr sz="1200" b="1" i="0">
+                <a:solidFill>
+                  <a:srgbClr val="E8590C"/>
+                </a:solidFill>
+                <a:latin typeface="Helvetica Neue"/>
+              </a:rPr>
+              <a:t>CONCLUSION</a:t>
+            </a:r>
+          </a:p>
+        </p:txBody>
+      </p:sp>
+      <p:sp>
+        <p:nvSpPr>
+          <p:cNvPr id="5" name="TextBox 4"/>
+          <p:cNvSpPr txBox="1"/>
+          <p:nvPr/>
+        </p:nvSpPr>
+        <p:spPr>
+          <a:xfrm>
+            <a:off x="566928" y="658368"/>
+            <a:ext cx="10058400" cy="822960"/>
+          </a:xfrm>
+          <a:prstGeom prst="rect">
+            <a:avLst/>
+          </a:prstGeom>
+          <a:noFill/>
+        </p:spPr>
+        <p:txBody>
+          <a:bodyPr wrap="square" anchor="t">
+            <a:spAutoFit/>
+          </a:bodyPr>
+          <a:lstStyle/>
+          <a:p>
+            <a:pPr algn="l">
+              <a:spcAft>
+                <a:spcPts val="500"/>
+              </a:spcAft>
+            </a:pPr>
+            <a:r>
+              <a:rPr sz="3200" b="1" i="0">
+                <a:solidFill>
+                  <a:srgbClr val="15171A"/>
+                </a:solidFill>
+                <a:latin typeface="Helvetica Neue"/>
+              </a:rPr>
+              <a:t>The chip was never the bottleneck.</a:t>
+            </a:r>
+          </a:p>
+        </p:txBody>
+      </p:sp>
+      <p:sp>
+        <p:nvSpPr>
+          <p:cNvPr id="6" name="Rounded Rectangle 5"/>
+          <p:cNvSpPr/>
+          <p:nvPr/>
+        </p:nvSpPr>
+        <p:spPr>
+          <a:xfrm>
+            <a:off x="566928" y="1737360"/>
+            <a:ext cx="3520440" cy="2423160"/>
+          </a:xfrm>
+          <a:prstGeom prst="roundRect">
+            <a:avLst>
+              <a:gd name="adj" fmla="val 4000"/>
+            </a:avLst>
+          </a:prstGeom>
+          <a:solidFill>
+            <a:srgbClr val="FEF3EA"/>
+          </a:solidFill>
+          <a:ln w="9525">
+            <a:solidFill>
+              <a:srgbClr val="E6E9EC"/>
+            </a:solidFill>
+          </a:ln>
+          <a:effectLst/>
+        </p:spPr>
+        <p:style>
+          <a:lnRef idx="1">
+            <a:schemeClr val="accent1"/>
+          </a:lnRef>
+          <a:fillRef idx="3">
+            <a:schemeClr val="accent1"/>
+          </a:fillRef>
+          <a:effectRef idx="2">
+            <a:schemeClr val="accent1"/>
+          </a:effectRef>
+          <a:fontRef idx="minor">
+            <a:schemeClr val="lt1"/>
+          </a:fontRef>
+        </p:style>
+        <p:txBody>
+          <a:bodyPr rtlCol="0" anchor="ctr"/>
+          <a:lstStyle/>
+          <a:p>
+            <a:pPr algn="ctr"/>
+          </a:p>
+        </p:txBody>
+      </p:sp>
+      <p:sp>
+        <p:nvSpPr>
+          <p:cNvPr id="7" name="TextBox 6"/>
+          <p:cNvSpPr txBox="1"/>
+          <p:nvPr/>
+        </p:nvSpPr>
+        <p:spPr>
+          <a:xfrm>
+            <a:off x="822960" y="1874519"/>
+            <a:ext cx="3017520" cy="640080"/>
+          </a:xfrm>
+          <a:prstGeom prst="rect">
+            <a:avLst/>
+          </a:prstGeom>
+          <a:noFill/>
+        </p:spPr>
+        <p:txBody>
+          <a:bodyPr wrap="square" anchor="t">
+            <a:spAutoFit/>
+          </a:bodyPr>
+          <a:lstStyle/>
+          <a:p>
+            <a:pPr algn="l">
+              <a:spcAft>
+                <a:spcPts val="0"/>
+              </a:spcAft>
+            </a:pPr>
+            <a:r>
+              <a:rPr sz="3400" b="1" i="0">
+                <a:solidFill>
+                  <a:srgbClr val="E8590C"/>
+                </a:solidFill>
+                <a:latin typeface="Helvetica Neue"/>
+              </a:rPr>
+              <a:t>28 %</a:t>
+            </a:r>
+          </a:p>
+        </p:txBody>
+      </p:sp>
+      <p:sp>
+        <p:nvSpPr>
+          <p:cNvPr id="8" name="TextBox 7"/>
+          <p:cNvSpPr txBox="1"/>
+          <p:nvPr/>
+        </p:nvSpPr>
+        <p:spPr>
+          <a:xfrm>
+            <a:off x="822960" y="2450592"/>
+            <a:ext cx="3063240" cy="411480"/>
+          </a:xfrm>
+          <a:prstGeom prst="rect">
+            <a:avLst/>
+          </a:prstGeom>
+          <a:noFill/>
+        </p:spPr>
+        <p:txBody>
+          <a:bodyPr wrap="square" anchor="t">
+            <a:spAutoFit/>
+          </a:bodyPr>
+          <a:lstStyle/>
+          <a:p>
+            <a:pPr algn="l">
+              <a:spcAft>
+                <a:spcPts val="200"/>
+              </a:spcAft>
+            </a:pPr>
+            <a:r>
+              <a:rPr sz="1200" b="1" i="0">
+                <a:solidFill>
+                  <a:srgbClr val="15171A"/>
+                </a:solidFill>
+                <a:latin typeface="Helvetica Neue"/>
+              </a:rPr>
+              <a:t>of wall clock is arithmetic</a:t>
+            </a:r>
+          </a:p>
+        </p:txBody>
+      </p:sp>
+      <p:sp>
+        <p:nvSpPr>
+          <p:cNvPr id="9" name="TextBox 8"/>
+          <p:cNvSpPr txBox="1"/>
+          <p:nvPr/>
+        </p:nvSpPr>
+        <p:spPr>
+          <a:xfrm>
+            <a:off x="822960" y="2880360"/>
+            <a:ext cx="3063240" cy="1188720"/>
+          </a:xfrm>
+          <a:prstGeom prst="rect">
+            <a:avLst/>
+          </a:prstGeom>
+          <a:noFill/>
+        </p:spPr>
+        <p:txBody>
+          <a:bodyPr wrap="square" anchor="t">
+            <a:spAutoFit/>
+          </a:bodyPr>
+          <a:lstStyle/>
+          <a:p>
+            <a:pPr algn="l">
+              <a:spcAft>
+                <a:spcPts val="200"/>
+              </a:spcAft>
+            </a:pPr>
+            <a:r>
+              <a:rPr sz="1150" b="0" i="0">
+                <a:solidFill>
+                  <a:srgbClr val="717A85"/>
+                </a:solidFill>
+                <a:latin typeface="Helvetica Neue"/>
+              </a:rPr>
+              <a:t>Of 733 s, only 209 s computes.</a:t>
+            </a:r>
+          </a:p>
+          <a:p>
+            <a:pPr algn="l">
+              <a:spcAft>
+                <a:spcPts val="200"/>
+              </a:spcAft>
+            </a:pPr>
+            <a:r>
+              <a:rPr sz="1150" b="0" i="0">
+                <a:solidFill>
+                  <a:srgbClr val="717A85"/>
+                </a:solidFill>
+                <a:latin typeface="Helvetica Neue"/>
+              </a:rPr>
+              <a:t>The biggest single phase is</a:t>
+            </a:r>
+          </a:p>
+          <a:p>
+            <a:pPr algn="l">
+              <a:spcAft>
+                <a:spcPts val="200"/>
+              </a:spcAft>
+            </a:pPr>
+            <a:r>
+              <a:rPr sz="1150" b="0" i="0">
+                <a:solidFill>
+                  <a:srgbClr val="717A85"/>
+                </a:solidFill>
+                <a:latin typeface="Helvetica Neue"/>
+              </a:rPr>
+              <a:t>reading the checkpoint.</a:t>
+            </a:r>
+          </a:p>
+        </p:txBody>
+      </p:sp>
+      <p:sp>
+        <p:nvSpPr>
+          <p:cNvPr id="10" name="Rounded Rectangle 9"/>
+          <p:cNvSpPr/>
+          <p:nvPr/>
+        </p:nvSpPr>
+        <p:spPr>
+          <a:xfrm>
+            <a:off x="4361688" y="1737360"/>
+            <a:ext cx="3520440" cy="2423160"/>
+          </a:xfrm>
+          <a:prstGeom prst="roundRect">
+            <a:avLst>
+              <a:gd name="adj" fmla="val 4000"/>
+            </a:avLst>
+          </a:prstGeom>
+          <a:solidFill>
+            <a:srgbClr val="FEF3EA"/>
+          </a:solidFill>
+          <a:ln w="9525">
+            <a:solidFill>
+              <a:srgbClr val="E6E9EC"/>
+            </a:solidFill>
+          </a:ln>
+          <a:effectLst/>
+        </p:spPr>
+        <p:style>
+          <a:lnRef idx="1">
+            <a:schemeClr val="accent1"/>
+          </a:lnRef>
+          <a:fillRef idx="3">
+            <a:schemeClr val="accent1"/>
+          </a:fillRef>
+          <a:effectRef idx="2">
+            <a:schemeClr val="accent1"/>
+          </a:effectRef>
+          <a:fontRef idx="minor">
+            <a:schemeClr val="lt1"/>
+          </a:fontRef>
+        </p:style>
+        <p:txBody>
+          <a:bodyPr rtlCol="0" anchor="ctr"/>
+          <a:lstStyle/>
+          <a:p>
+            <a:pPr algn="ctr"/>
+          </a:p>
+        </p:txBody>
+      </p:sp>
+      <p:sp>
+        <p:nvSpPr>
+          <p:cNvPr id="11" name="TextBox 10"/>
+          <p:cNvSpPr txBox="1"/>
+          <p:nvPr/>
+        </p:nvSpPr>
+        <p:spPr>
+          <a:xfrm>
+            <a:off x="4617720" y="1874519"/>
+            <a:ext cx="3017520" cy="640080"/>
+          </a:xfrm>
+          <a:prstGeom prst="rect">
+            <a:avLst/>
+          </a:prstGeom>
+          <a:noFill/>
+        </p:spPr>
+        <p:txBody>
+          <a:bodyPr wrap="square" anchor="t">
+            <a:spAutoFit/>
+          </a:bodyPr>
+          <a:lstStyle/>
+          <a:p>
+            <a:pPr algn="l">
+              <a:spcAft>
+                <a:spcPts val="0"/>
+              </a:spcAft>
+            </a:pPr>
+            <a:r>
+              <a:rPr sz="3400" b="1" i="0">
+                <a:solidFill>
+                  <a:srgbClr val="E8590C"/>
+                </a:solidFill>
+                <a:latin typeface="Helvetica Neue"/>
+              </a:rPr>
+              <a:t>6.7×</a:t>
+            </a:r>
+          </a:p>
+        </p:txBody>
+      </p:sp>
+      <p:sp>
+        <p:nvSpPr>
+          <p:cNvPr id="12" name="TextBox 11"/>
+          <p:cNvSpPr txBox="1"/>
+          <p:nvPr/>
+        </p:nvSpPr>
+        <p:spPr>
+          <a:xfrm>
+            <a:off x="4617720" y="2450592"/>
+            <a:ext cx="3063240" cy="411480"/>
+          </a:xfrm>
+          <a:prstGeom prst="rect">
+            <a:avLst/>
+          </a:prstGeom>
+          <a:noFill/>
+        </p:spPr>
+        <p:txBody>
+          <a:bodyPr wrap="square" anchor="t">
+            <a:spAutoFit/>
+          </a:bodyPr>
+          <a:lstStyle/>
+          <a:p>
+            <a:pPr algn="l">
+              <a:spcAft>
+                <a:spcPts val="200"/>
+              </a:spcAft>
+            </a:pPr>
+            <a:r>
+              <a:rPr sz="1200" b="1" i="0">
+                <a:solidFill>
+                  <a:srgbClr val="15171A"/>
+                </a:solidFill>
+                <a:latin typeface="Helvetica Neue"/>
+              </a:rPr>
+              <a:t>more parameters — CPU stopped</a:t>
+            </a:r>
+          </a:p>
+        </p:txBody>
+      </p:sp>
+      <p:sp>
+        <p:nvSpPr>
+          <p:cNvPr id="13" name="TextBox 12"/>
+          <p:cNvSpPr txBox="1"/>
+          <p:nvPr/>
+        </p:nvSpPr>
+        <p:spPr>
+          <a:xfrm>
+            <a:off x="4617720" y="2880360"/>
+            <a:ext cx="3063240" cy="1188720"/>
+          </a:xfrm>
+          <a:prstGeom prst="rect">
+            <a:avLst/>
+          </a:prstGeom>
+          <a:noFill/>
+        </p:spPr>
+        <p:txBody>
+          <a:bodyPr wrap="square" anchor="t">
+            <a:spAutoFit/>
+          </a:bodyPr>
+          <a:lstStyle/>
+          <a:p>
+            <a:pPr algn="l">
+              <a:spcAft>
+                <a:spcPts val="200"/>
+              </a:spcAft>
+            </a:pPr>
+            <a:r>
+              <a:rPr sz="1150" b="0" i="0">
+                <a:solidFill>
+                  <a:srgbClr val="717A85"/>
+                </a:solidFill>
+                <a:latin typeface="Helvetica Neue"/>
+              </a:rPr>
+              <a:t>0.6B → 4B did not make the CPU</a:t>
+            </a:r>
+          </a:p>
+          <a:p>
+            <a:pPr algn="l">
+              <a:spcAft>
+                <a:spcPts val="200"/>
+              </a:spcAft>
+            </a:pPr>
+            <a:r>
+              <a:rPr sz="1150" b="0" i="0">
+                <a:solidFill>
+                  <a:srgbClr val="717A85"/>
+                </a:solidFill>
+                <a:latin typeface="Helvetica Neue"/>
+              </a:rPr>
+              <a:t>6.7× slower. XLA never finished</a:t>
+            </a:r>
+          </a:p>
+          <a:p>
+            <a:pPr algn="l">
+              <a:spcAft>
+                <a:spcPts val="200"/>
+              </a:spcAft>
+            </a:pPr>
+            <a:r>
+              <a:rPr sz="1150" b="0" i="0">
+                <a:solidFill>
+                  <a:srgbClr val="717A85"/>
+                </a:solidFill>
+                <a:latin typeface="Helvetica Neue"/>
+              </a:rPr>
+              <a:t>compiling; the kernel killed it</a:t>
+            </a:r>
+          </a:p>
+          <a:p>
+            <a:pPr algn="l">
+              <a:spcAft>
+                <a:spcPts val="200"/>
+              </a:spcAft>
+            </a:pPr>
+            <a:r>
+              <a:rPr sz="1150" b="0" i="0">
+                <a:solidFill>
+                  <a:srgbClr val="717A85"/>
+                </a:solidFill>
+                <a:latin typeface="Helvetica Neue"/>
+              </a:rPr>
+              <a:t>at 31.5 GB.</a:t>
+            </a:r>
+          </a:p>
+        </p:txBody>
+      </p:sp>
+      <p:sp>
+        <p:nvSpPr>
+          <p:cNvPr id="14" name="Rounded Rectangle 13"/>
+          <p:cNvSpPr/>
+          <p:nvPr/>
+        </p:nvSpPr>
+        <p:spPr>
+          <a:xfrm>
+            <a:off x="8156448" y="1737360"/>
+            <a:ext cx="3520440" cy="2423160"/>
+          </a:xfrm>
+          <a:prstGeom prst="roundRect">
+            <a:avLst>
+              <a:gd name="adj" fmla="val 4000"/>
+            </a:avLst>
+          </a:prstGeom>
+          <a:solidFill>
+            <a:srgbClr val="FEF3EA"/>
+          </a:solidFill>
+          <a:ln w="9525">
+            <a:solidFill>
+              <a:srgbClr val="E6E9EC"/>
+            </a:solidFill>
+          </a:ln>
+          <a:effectLst/>
+        </p:spPr>
+        <p:style>
+          <a:lnRef idx="1">
+            <a:schemeClr val="accent1"/>
+          </a:lnRef>
+          <a:fillRef idx="3">
+            <a:schemeClr val="accent1"/>
+          </a:fillRef>
+          <a:effectRef idx="2">
+            <a:schemeClr val="accent1"/>
+          </a:effectRef>
+          <a:fontRef idx="minor">
+            <a:schemeClr val="lt1"/>
+          </a:fontRef>
+        </p:style>
+        <p:txBody>
+          <a:bodyPr rtlCol="0" anchor="ctr"/>
+          <a:lstStyle/>
+          <a:p>
+            <a:pPr algn="ctr"/>
+          </a:p>
+        </p:txBody>
+      </p:sp>
+      <p:sp>
+        <p:nvSpPr>
+          <p:cNvPr id="15" name="TextBox 14"/>
+          <p:cNvSpPr txBox="1"/>
+          <p:nvPr/>
+        </p:nvSpPr>
+        <p:spPr>
+          <a:xfrm>
+            <a:off x="8412480" y="1874519"/>
+            <a:ext cx="3017520" cy="640080"/>
+          </a:xfrm>
+          <a:prstGeom prst="rect">
+            <a:avLst/>
+          </a:prstGeom>
+          <a:noFill/>
+        </p:spPr>
+        <p:txBody>
+          <a:bodyPr wrap="square" anchor="t">
+            <a:spAutoFit/>
+          </a:bodyPr>
+          <a:lstStyle/>
+          <a:p>
+            <a:pPr algn="l">
+              <a:spcAft>
+                <a:spcPts val="0"/>
+              </a:spcAft>
+            </a:pPr>
+            <a:r>
+              <a:rPr sz="3400" b="1" i="0">
+                <a:solidFill>
+                  <a:srgbClr val="E8590C"/>
+                </a:solidFill>
+                <a:latin typeface="Helvetica Neue"/>
+              </a:rPr>
+              <a:t>1 of 36</a:t>
+            </a:r>
+          </a:p>
+        </p:txBody>
+      </p:sp>
+      <p:sp>
+        <p:nvSpPr>
+          <p:cNvPr id="16" name="TextBox 15"/>
+          <p:cNvSpPr txBox="1"/>
+          <p:nvPr/>
+        </p:nvSpPr>
+        <p:spPr>
+          <a:xfrm>
+            <a:off x="8412480" y="2450592"/>
+            <a:ext cx="3063240" cy="411480"/>
+          </a:xfrm>
+          <a:prstGeom prst="rect">
+            <a:avLst/>
+          </a:prstGeom>
+          <a:noFill/>
+        </p:spPr>
+        <p:txBody>
+          <a:bodyPr wrap="square" anchor="t">
+            <a:spAutoFit/>
+          </a:bodyPr>
+          <a:lstStyle/>
+          <a:p>
+            <a:pPr algn="l">
+              <a:spcAft>
+                <a:spcPts val="200"/>
+              </a:spcAft>
+            </a:pPr>
+            <a:r>
+              <a:rPr sz="1200" b="1" i="0">
+                <a:solidFill>
+                  <a:srgbClr val="15171A"/>
+                </a:solidFill>
+                <a:latin typeface="Helvetica Neue"/>
+              </a:rPr>
+              <a:t>dependencies were TPU-bound</a:t>
+            </a:r>
+          </a:p>
+        </p:txBody>
+      </p:sp>
+      <p:sp>
+        <p:nvSpPr>
+          <p:cNvPr id="17" name="TextBox 16"/>
+          <p:cNvSpPr txBox="1"/>
+          <p:nvPr/>
+        </p:nvSpPr>
+        <p:spPr>
+          <a:xfrm>
+            <a:off x="8412480" y="2880360"/>
+            <a:ext cx="3063240" cy="1188720"/>
+          </a:xfrm>
+          <a:prstGeom prst="rect">
+            <a:avLst/>
+          </a:prstGeom>
+          <a:noFill/>
+        </p:spPr>
+        <p:txBody>
+          <a:bodyPr wrap="square" anchor="t">
+            <a:spAutoFit/>
+          </a:bodyPr>
+          <a:lstStyle/>
+          <a:p>
+            <a:pPr algn="l">
+              <a:spcAft>
+                <a:spcPts val="200"/>
+              </a:spcAft>
+            </a:pPr>
+            <a:r>
+              <a:rPr sz="1150" b="0" i="0">
+                <a:solidFill>
+                  <a:srgbClr val="717A85"/>
+                </a:solidFill>
+                <a:latin typeface="Helvetica Neue"/>
+              </a:rPr>
+              <a:t>The GH200 sat idle behind an</a:t>
+            </a:r>
+          </a:p>
+          <a:p>
+            <a:pPr algn="l">
+              <a:spcAft>
+                <a:spcPts val="200"/>
+              </a:spcAft>
+            </a:pPr>
+            <a:r>
+              <a:rPr sz="1150" b="0" i="0">
+                <a:solidFill>
+                  <a:srgbClr val="717A85"/>
+                </a:solidFill>
+                <a:latin typeface="Helvetica Neue"/>
+              </a:rPr>
+              <a:t>ARM64 host, a QEMU segfault</a:t>
+            </a:r>
+          </a:p>
+          <a:p>
+            <a:pPr algn="l">
+              <a:spcAft>
+                <a:spcPts val="200"/>
+              </a:spcAft>
+            </a:pPr>
+            <a:r>
+              <a:rPr sz="1150" b="0" i="0">
+                <a:solidFill>
+                  <a:srgbClr val="717A85"/>
+                </a:solidFill>
+                <a:latin typeface="Helvetica Neue"/>
+              </a:rPr>
+              <a:t>and a registry 403. Swapping</a:t>
+            </a:r>
+          </a:p>
+          <a:p>
+            <a:pPr algn="l">
+              <a:spcAft>
+                <a:spcPts val="200"/>
+              </a:spcAft>
+            </a:pPr>
+            <a:r>
+              <a:rPr sz="1150" b="0" i="0">
+                <a:solidFill>
+                  <a:srgbClr val="717A85"/>
+                </a:solidFill>
+                <a:latin typeface="Helvetica Neue"/>
+              </a:rPr>
+              <a:t>one pin is the whole port.</a:t>
+            </a:r>
+          </a:p>
+        </p:txBody>
+      </p:sp>
+      <p:sp>
+        <p:nvSpPr>
+          <p:cNvPr id="18" name="TextBox 17"/>
+          <p:cNvSpPr txBox="1"/>
+          <p:nvPr/>
+        </p:nvSpPr>
+        <p:spPr>
+          <a:xfrm>
+            <a:off x="566928" y="4389120"/>
+            <a:ext cx="5394960" cy="320040"/>
+          </a:xfrm>
+          <a:prstGeom prst="rect">
+            <a:avLst/>
+          </a:prstGeom>
+          <a:noFill/>
+        </p:spPr>
+        <p:txBody>
+          <a:bodyPr wrap="square" anchor="t">
+            <a:spAutoFit/>
+          </a:bodyPr>
+          <a:lstStyle/>
+          <a:p>
+            <a:pPr algn="l">
+              <a:spcAft>
+                <a:spcPts val="500"/>
+              </a:spcAft>
+            </a:pPr>
+            <a:r>
+              <a:rPr sz="1500" b="1" i="0">
+                <a:solidFill>
+                  <a:srgbClr val="E8590C"/>
+                </a:solidFill>
+                <a:latin typeface="Helvetica Neue"/>
+              </a:rPr>
+              <a:t>Scaling recommendation</a:t>
+            </a:r>
+          </a:p>
+        </p:txBody>
+      </p:sp>
+      <p:sp>
+        <p:nvSpPr>
+          <p:cNvPr id="19" name="TextBox 18"/>
+          <p:cNvSpPr txBox="1"/>
+          <p:nvPr/>
+        </p:nvSpPr>
+        <p:spPr>
+          <a:xfrm>
+            <a:off x="566928" y="4736592"/>
+            <a:ext cx="5394960" cy="1280160"/>
+          </a:xfrm>
+          <a:prstGeom prst="rect">
+            <a:avLst/>
+          </a:prstGeom>
+          <a:noFill/>
+        </p:spPr>
+        <p:txBody>
+          <a:bodyPr wrap="square" anchor="t">
+            <a:spAutoFit/>
+          </a:bodyPr>
+          <a:lstStyle/>
+          <a:p>
+            <a:pPr algn="l">
+              <a:spcAft>
+                <a:spcPts val="200"/>
+              </a:spcAft>
+            </a:pPr>
+            <a:r>
+              <a:rPr sz="1300" b="0" i="0">
+                <a:solidFill>
+                  <a:srgbClr val="15171A"/>
+                </a:solidFill>
+                <a:latin typeface="Helvetica Neue"/>
+              </a:rPr>
+              <a:t>Do not scale out — amortise. Raise batch only until</a:t>
+            </a:r>
+          </a:p>
+          <a:p>
+            <a:pPr algn="l">
+              <a:spcAft>
+                <a:spcPts val="200"/>
+              </a:spcAft>
+            </a:pPr>
+            <a:r>
+              <a:rPr sz="1300" b="0" i="0">
+                <a:solidFill>
+                  <a:srgbClr val="15171A"/>
+                </a:solidFill>
+                <a:latin typeface="Helvetica Neue"/>
+              </a:rPr>
+              <a:t>the chip is occupied, then attack fixed cost:</a:t>
+            </a:r>
+          </a:p>
+          <a:p>
+            <a:pPr algn="l">
+              <a:spcAft>
+                <a:spcPts val="200"/>
+              </a:spcAft>
+            </a:pPr>
+            <a:r>
+              <a:rPr sz="1300" b="0" i="0">
+                <a:solidFill>
+                  <a:srgbClr val="15171A"/>
+                </a:solidFill>
+                <a:latin typeface="Helvetica Neue"/>
+              </a:rPr>
+              <a:t>persistent compile caches, warm workers instead of</a:t>
+            </a:r>
+          </a:p>
+          <a:p>
+            <a:pPr algn="l">
+              <a:spcAft>
+                <a:spcPts val="200"/>
+              </a:spcAft>
+            </a:pPr>
+            <a:r>
+              <a:rPr sz="1300" b="0" i="0">
+                <a:solidFill>
+                  <a:srgbClr val="15171A"/>
+                </a:solidFill>
+                <a:latin typeface="Helvetica Neue"/>
+              </a:rPr>
+              <a:t>a pod per job, file cache on anything reading a</a:t>
+            </a:r>
+          </a:p>
+          <a:p>
+            <a:pPr algn="l">
+              <a:spcAft>
+                <a:spcPts val="200"/>
+              </a:spcAft>
+            </a:pPr>
+            <a:r>
+              <a:rPr sz="1300" b="0" i="0">
+                <a:solidFill>
+                  <a:srgbClr val="15171A"/>
+                </a:solidFill>
+                <a:latin typeface="Helvetica Neue"/>
+              </a:rPr>
+              <a:t>checkpoint.</a:t>
+            </a:r>
+          </a:p>
+        </p:txBody>
+      </p:sp>
+      <p:sp>
+        <p:nvSpPr>
+          <p:cNvPr id="20" name="Rounded Rectangle 19"/>
+          <p:cNvSpPr/>
+          <p:nvPr/>
+        </p:nvSpPr>
+        <p:spPr>
+          <a:xfrm>
+            <a:off x="6217920" y="4315968"/>
+            <a:ext cx="5394960" cy="1691640"/>
+          </a:xfrm>
+          <a:prstGeom prst="roundRect">
+            <a:avLst>
+              <a:gd name="adj" fmla="val 4000"/>
+            </a:avLst>
+          </a:prstGeom>
+          <a:solidFill>
+            <a:srgbClr val="FEF3EA"/>
+          </a:solidFill>
+          <a:ln w="9525">
+            <a:solidFill>
+              <a:srgbClr val="E6E9EC"/>
+            </a:solidFill>
+          </a:ln>
+          <a:effectLst/>
+        </p:spPr>
+        <p:style>
+          <a:lnRef idx="1">
+            <a:schemeClr val="accent1"/>
+          </a:lnRef>
+          <a:fillRef idx="3">
+            <a:schemeClr val="accent1"/>
+          </a:fillRef>
+          <a:effectRef idx="2">
+            <a:schemeClr val="accent1"/>
+          </a:effectRef>
+          <a:fontRef idx="minor">
+            <a:schemeClr val="lt1"/>
+          </a:fontRef>
+        </p:style>
+        <p:txBody>
+          <a:bodyPr rtlCol="0" anchor="ctr"/>
+          <a:lstStyle/>
+          <a:p>
+            <a:pPr algn="ctr"/>
+          </a:p>
+        </p:txBody>
+      </p:sp>
+      <p:sp>
+        <p:nvSpPr>
+          <p:cNvPr id="21" name="TextBox 20"/>
+          <p:cNvSpPr txBox="1"/>
+          <p:nvPr/>
+        </p:nvSpPr>
+        <p:spPr>
+          <a:xfrm>
+            <a:off x="6492240" y="4480560"/>
+            <a:ext cx="4937760" cy="320040"/>
+          </a:xfrm>
+          <a:prstGeom prst="rect">
+            <a:avLst/>
+          </a:prstGeom>
+          <a:noFill/>
+        </p:spPr>
+        <p:txBody>
+          <a:bodyPr wrap="square" anchor="t">
+            <a:spAutoFit/>
+          </a:bodyPr>
+          <a:lstStyle/>
+          <a:p>
+            <a:pPr algn="l">
+              <a:spcAft>
+                <a:spcPts val="500"/>
+              </a:spcAft>
+            </a:pPr>
+            <a:r>
+              <a:rPr sz="1500" b="1" i="0">
+                <a:solidFill>
+                  <a:srgbClr val="E8590C"/>
+                </a:solidFill>
+                <a:latin typeface="Helvetica Neue"/>
+              </a:rPr>
+              <a:t>What this means for Dr. Findus</a:t>
+            </a:r>
+          </a:p>
+        </p:txBody>
+      </p:sp>
+      <p:sp>
+        <p:nvSpPr>
+          <p:cNvPr id="22" name="TextBox 21"/>
+          <p:cNvSpPr txBox="1"/>
+          <p:nvPr/>
+        </p:nvSpPr>
+        <p:spPr>
+          <a:xfrm>
+            <a:off x="6492240" y="4828032"/>
+            <a:ext cx="4937760" cy="1097280"/>
+          </a:xfrm>
+          <a:prstGeom prst="rect">
+            <a:avLst/>
+          </a:prstGeom>
+          <a:noFill/>
+        </p:spPr>
+        <p:txBody>
+          <a:bodyPr wrap="square" anchor="t">
+            <a:spAutoFit/>
+          </a:bodyPr>
+          <a:lstStyle/>
+          <a:p>
+            <a:pPr algn="l">
+              <a:spcAft>
+                <a:spcPts val="200"/>
+              </a:spcAft>
+            </a:pPr>
+            <a:r>
+              <a:rPr sz="1250" b="0" i="0">
+                <a:solidFill>
+                  <a:srgbClr val="15171A"/>
+                </a:solidFill>
+                <a:latin typeface="Helvetica Neue"/>
+              </a:rPr>
+              <a:t>At $0.131 per 1 000 steps on one GH200 —</a:t>
+            </a:r>
+          </a:p>
+          <a:p>
+            <a:pPr algn="l">
+              <a:spcAft>
+                <a:spcPts val="200"/>
+              </a:spcAft>
+            </a:pPr>
+            <a:r>
+              <a:rPr sz="1250" b="0" i="0">
+                <a:solidFill>
+                  <a:srgbClr val="15171A"/>
+                </a:solidFill>
+                <a:latin typeface="Helvetica Neue"/>
+              </a:rPr>
+              <a:t>8× cheaper than eight TPU chips at the same</a:t>
+            </a:r>
+          </a:p>
+          <a:p>
+            <a:pPr algn="l">
+              <a:spcAft>
+                <a:spcPts val="200"/>
+              </a:spcAft>
+            </a:pPr>
+            <a:r>
+              <a:rPr sz="1250" b="0" i="0">
+                <a:solidFill>
+                  <a:srgbClr val="15171A"/>
+                </a:solidFill>
+                <a:latin typeface="Helvetica Neue"/>
+              </a:rPr>
+              <a:t>speed — self-hosting is not the cost problem we</a:t>
+            </a:r>
+          </a:p>
+          <a:p>
+            <a:pPr algn="l">
+              <a:spcAft>
+                <a:spcPts val="200"/>
+              </a:spcAft>
+            </a:pPr>
+            <a:r>
+              <a:rPr sz="1250" b="0" i="0">
+                <a:solidFill>
+                  <a:srgbClr val="15171A"/>
+                </a:solidFill>
+                <a:latin typeface="Helvetica Neue"/>
+              </a:rPr>
+              <a:t>assumed. The real cost is fixed overhead per job:</a:t>
+            </a:r>
+          </a:p>
+          <a:p>
+            <a:pPr algn="l">
+              <a:spcAft>
+                <a:spcPts val="200"/>
+              </a:spcAft>
+            </a:pPr>
+            <a:r>
+              <a:rPr sz="1250" b="0" i="0">
+                <a:solidFill>
+                  <a:srgbClr val="15171A"/>
+                </a:solidFill>
+                <a:latin typeface="Helvetica Neue"/>
+              </a:rPr>
+              <a:t>an architecture decision, not a hardware purchase.</a:t>
+            </a:r>
+          </a:p>
+        </p:txBody>
+      </p:sp>
+      <p:sp>
+        <p:nvSpPr>
+          <p:cNvPr id="23" name="TextBox 22"/>
+          <p:cNvSpPr txBox="1"/>
+          <p:nvPr/>
+        </p:nvSpPr>
+        <p:spPr>
+          <a:xfrm>
+            <a:off x="566928" y="6172200"/>
+            <a:ext cx="11064240" cy="365760"/>
+          </a:xfrm>
+          <a:prstGeom prst="rect">
+            <a:avLst/>
+          </a:prstGeom>
+          <a:noFill/>
+        </p:spPr>
+        <p:txBody>
+          <a:bodyPr wrap="square" anchor="t">
+            <a:spAutoFit/>
+          </a:bodyPr>
+          <a:lstStyle/>
+          <a:p>
             <a:pPr algn="ctr">
               <a:spcAft>
-                <a:spcPts val="600"/>
-              </a:spcAft>
-            </a:pPr>
-            <a:r>
-              <a:rPr sz="1200" b="0">
-                <a:solidFill>
-                  <a:srgbClr val="6B7280"/>
+                <a:spcPts val="500"/>
+              </a:spcAft>
+            </a:pPr>
+            <a:r>
+              <a:rPr sz="1100" b="0" i="0">
+                <a:solidFill>
+                  <a:srgbClr val="717A85"/>
                 </a:solidFill>
                 <a:latin typeface="Helvetica Neue"/>
               </a:rPr>

--- a/slides/ME344_Final_Arnold_Hambuch.pptx
+++ b/slides/ME344_Final_Arnold_Hambuch.pptx
@@ -528,7 +528,7 @@
           </a:p>
           <a:p>
             <a:r>
-              <a:t>codes — the physician confirms each one before anything is written, which is a</a:t>
+              <a:t>codes, the physician confirms each one before anything is written, which is a</a:t>
             </a:r>
           </a:p>
           <a:p>
@@ -554,7 +554,7 @@
           </a:p>
           <a:p>
             <a:r>
-              <a:t>infrastructure question, not a model question — so we built the workload and</a:t>
+              <a:t>infrastructure question, not a model question, so we built the workload and</a:t>
             </a:r>
           </a:p>
           <a:p>
@@ -586,7 +586,7 @@
           </a:p>
           <a:p>
             <a:r>
-              <a:t>studying is where the time goes — and what it takes to run the job at all."</a:t>
+              <a:t>studying is where the time goes, and what it takes to run the job at all."</a:t>
             </a:r>
           </a:p>
         </p:txBody>
@@ -667,7 +667,7 @@
           </a:p>
           <a:p>
             <a:r>
-              <a:t>lowers it to three different backends. No per-backend reimplementation — that is</a:t>
+              <a:t>lowers it to three different backends. No per-backend reimplementation, that is</a:t>
             </a:r>
           </a:p>
           <a:p>
@@ -704,7 +704,7 @@
           </a:p>
           <a:p>
             <a:r>
-              <a:t>cache as a knob instead of fixing it — because that knob turned out to be the</a:t>
+              <a:t>cache as a knob instead of fixing it, because that knob turned out to be the</a:t>
             </a:r>
           </a:p>
           <a:p>
@@ -812,7 +812,7 @@
           </a:p>
           <a:p>
             <a:r>
-              <a:t>wall clock apart into six phases — scheduling, image pull, checkpoint load, XLA</a:t>
+              <a:t>wall clock apart into six phases: scheduling, image pull, checkpoint load, XLA</a:t>
             </a:r>
           </a:p>
           <a:p>
@@ -844,7 +844,7 @@
           <a:p/>
           <a:p>
             <a:r>
-              <a:t>All of it writes against one fixed schema — one JSON per run — and every figure</a:t>
+              <a:t>All of it writes against one fixed schema, one JSON per run, and every figure</a:t>
             </a:r>
           </a:p>
           <a:p>
@@ -870,7 +870,7 @@
           </a:p>
           <a:p>
             <a:r>
-              <a:t>impossible — and it carried a passing status. What caught it was that the</a:t>
+              <a:t>impossible, and it carried a passing status. What caught it was that the</a:t>
             </a:r>
           </a:p>
           <a:p>
@@ -955,7 +955,7 @@
           <a:lstStyle/>
           <a:p>
             <a:r>
-              <a:t>LUIS  (~85 s — this is the slide to spend time on)</a:t>
+              <a:t>LUIS  (~85 s, the slide to spend time on)</a:t>
             </a:r>
           </a:p>
           <a:p/>
@@ -977,7 +977,7 @@
           </a:p>
           <a:p>
             <a:r>
-              <a:t>slice to within a quarter of a percent. Not eight times slower — the same.</a:t>
+              <a:t>slice to within a quarter of a percent. Not eight times slower, the same.</a:t>
             </a:r>
           </a:p>
           <a:p/>
@@ -1009,12 +1009,12 @@
           </a:p>
           <a:p>
             <a:r>
-              <a:t>the largest single phase, enabled the gcsfuse file cache — one line in the</a:t>
-            </a:r>
-          </a:p>
-          <a:p>
-            <a:r>
-              <a:t>manifest — and re-ran. Load dropped fourteen and a half times. Total wall clock</a:t>
+              <a:t>the largest single phase, enabled the gcsfuse file cache, one line in the</a:t>
+            </a:r>
+          </a:p>
+          <a:p>
+            <a:r>
+              <a:t>manifest, and re-ran. Load dropped fourteen and a half times. Total wall clock</a:t>
             </a:r>
           </a:p>
           <a:p>
@@ -1035,7 +1035,7 @@
           </a:p>
           <a:p>
             <a:r>
-              <a:t>change at all. Only I/O moved — which is why we can attribute the saving to the</a:t>
+              <a:t>change at all. Only I/O moved, which is why we can attribute the saving to the</a:t>
             </a:r>
           </a:p>
           <a:p>
@@ -1154,7 +1154,7 @@
           </a:p>
           <a:p>
             <a:r>
-              <a:t>cost. Going from 0.6 to 4 billion parameters — under seven times — did not make</a:t>
+              <a:t>cost. Going from 0.6 to 4 billion parameters, under seven times, did not make</a:t>
             </a:r>
           </a:p>
           <a:p>
@@ -1201,7 +1201,7 @@
           <a:p/>
           <a:p>
             <a:r>
-              <a:t>So the recommendation is not to scale out — it is to amortise. Raise the batch</a:t>
+              <a:t>So the recommendation is not to scale out, it is to amortise. Raise the batch</a:t>
             </a:r>
           </a:p>
           <a:p>
@@ -1227,7 +1227,7 @@
           </a:p>
           <a:p>
             <a:r>
-              <a:t>fixed overhead per job — and that is an architecture decision, not a hardware</a:t>
+              <a:t>fixed overhead per job, and that is an architecture decision, not a hardware</a:t>
             </a:r>
           </a:p>
           <a:p>
@@ -4483,7 +4483,7 @@
                 </a:solidFill>
                 <a:latin typeface="Helvetica Neue"/>
               </a:rPr>
-              <a:t>Dr. Findus — our startup, Berlin</a:t>
+              <a:t>Dr. Findus, our startup in Berlin</a:t>
             </a:r>
           </a:p>
         </p:txBody>
@@ -4554,7 +4554,7 @@
                 </a:solidFill>
                 <a:latin typeface="Helvetica Neue"/>
               </a:rPr>
-              <a:t>the physician confirms each one — a legal</a:t>
+              <a:t>the physician confirms each one. A legal</a:t>
             </a:r>
           </a:p>
           <a:p>
@@ -4680,7 +4680,7 @@
                 </a:solidFill>
                 <a:latin typeface="Helvetica Neue"/>
               </a:rPr>
-              <a:t>An infrastructure question, not a model one —</a:t>
+              <a:t>An infrastructure question, not a model one.</a:t>
             </a:r>
           </a:p>
           <a:p>
@@ -4916,7 +4916,7 @@
                 </a:solidFill>
                 <a:latin typeface="Helvetica Neue"/>
               </a:rPr>
-              <a:t>tokens in the longest case —</a:t>
+              <a:t>tokens in the longest case.</a:t>
             </a:r>
           </a:p>
           <a:p>
@@ -4932,7 +4932,7 @@
                 </a:solidFill>
                 <a:latin typeface="Helvetica Neue"/>
               </a:rPr>
-              <a:t>sequence length is not free</a:t>
+              <a:t>Sequence length is not free</a:t>
             </a:r>
           </a:p>
         </p:txBody>
@@ -5065,7 +5065,7 @@
                 </a:solidFill>
                 <a:latin typeface="Helvetica Neue"/>
               </a:rPr>
-              <a:t>Where does the time actually go — and what does it take to run this at all?</a:t>
+              <a:t>Where does the time actually go, and what does it take to run this at all?</a:t>
             </a:r>
           </a:p>
         </p:txBody>
@@ -5104,7 +5104,7 @@
                 </a:solidFill>
                 <a:latin typeface="Helvetica Neue"/>
               </a:rPr>
-              <a:t>No patient data was used. Model accuracy earns no marks here — the object of study is the infrastructure.</a:t>
+              <a:t>No patient data was used. Model accuracy earns no marks here. The object of study is the infrastructure.</a:t>
             </a:r>
           </a:p>
         </p:txBody>
@@ -5469,7 +5469,7 @@
                 </a:solidFill>
                 <a:latin typeface="Helvetica Neue"/>
               </a:rPr>
-              <a:t>Tunix — no per-backend</a:t>
+              <a:t>Tunix, no per-backend</a:t>
             </a:r>
           </a:p>
           <a:p>
@@ -5881,7 +5881,7 @@
                 </a:solidFill>
                 <a:latin typeface="Helvetica Neue"/>
               </a:rPr>
-              <a:t>knob rather than fixed —</a:t>
+              <a:t>knob rather than fixed -</a:t>
             </a:r>
           </a:p>
           <a:p>
@@ -6261,7 +6261,7 @@
                           </a:solidFill>
                           <a:latin typeface="Helvetica Neue"/>
                         </a:rPr>
-                        <a:t>v5e 2×4 — 8 chips</a:t>
+                        <a:t>v5e 2×4, 8 chips</a:t>
                       </a:r>
                     </a:p>
                   </a:txBody>
@@ -6586,7 +6586,7 @@
                 </a:solidFill>
                 <a:latin typeface="Helvetica Neue"/>
               </a:rPr>
-              <a:t>into six phases — scheduling, image pull,</a:t>
+              <a:t>into six phases: scheduling, image pull,</a:t>
             </a:r>
           </a:p>
           <a:p>
@@ -6682,7 +6682,7 @@
                 </a:solidFill>
                 <a:latin typeface="Helvetica Neue"/>
               </a:rPr>
-              <a:t>never dropped — the boundary is the</a:t>
+              <a:t>never dropped. The boundary is the</a:t>
             </a:r>
           </a:p>
           <a:p>
@@ -6912,7 +6912,7 @@
                 </a:solidFill>
                 <a:latin typeface="Helvetica Neue"/>
               </a:rPr>
-              <a:t>Impossible — yet it carried status "ok".</a:t>
+              <a:t>Impossible, yet it carried status "ok".</a:t>
             </a:r>
           </a:p>
           <a:p>
@@ -7279,7 +7279,7 @@
                           </a:solidFill>
                           <a:latin typeface="Helvetica Neue"/>
                         </a:rPr>
-                        <a:t>—</a:t>
+                        <a:t>-</a:t>
                       </a:r>
                     </a:p>
                   </a:txBody>
@@ -7993,7 +7993,7 @@
                 </a:solidFill>
                 <a:latin typeface="Helvetica Neue"/>
               </a:rPr>
-              <a:t>manifest line — 31 % off wall clock</a:t>
+              <a:t>manifest line, 31 % off wall clock</a:t>
             </a:r>
           </a:p>
         </p:txBody>
@@ -8191,7 +8191,7 @@
                 </a:solidFill>
                 <a:latin typeface="Helvetica Neue"/>
               </a:rPr>
-              <a:t>1.75122 s  →  1.75117 s</a:t>
+              <a:t>1.75122 s  to  1.75117 s</a:t>
             </a:r>
           </a:p>
           <a:p>
@@ -8239,7 +8239,7 @@
                 </a:solidFill>
                 <a:latin typeface="Helvetica Neue"/>
               </a:rPr>
-              <a:t>Only I/O did — so the saving is</a:t>
+              <a:t>Only I/O did, so the saving is</a:t>
             </a:r>
           </a:p>
           <a:p>
@@ -8753,7 +8753,7 @@
                 </a:solidFill>
                 <a:latin typeface="Helvetica Neue"/>
               </a:rPr>
-              <a:t>more parameters — CPU stopped</a:t>
+              <a:t>more parameters, CPU stopped</a:t>
             </a:r>
           </a:p>
         </p:txBody>
@@ -8792,7 +8792,7 @@
                 </a:solidFill>
                 <a:latin typeface="Helvetica Neue"/>
               </a:rPr>
-              <a:t>0.6B → 4B did not make the CPU</a:t>
+              <a:t>0.6B to 4B did not make the CPU</a:t>
             </a:r>
           </a:p>
           <a:p>
@@ -9131,7 +9131,7 @@
                 </a:solidFill>
                 <a:latin typeface="Helvetica Neue"/>
               </a:rPr>
-              <a:t>Do not scale out — amortise. Raise batch only until</a:t>
+              <a:t>Do not scale out. Amortise: raise batch only until</a:t>
             </a:r>
           </a:p>
           <a:p>
@@ -9321,7 +9321,7 @@
                 </a:solidFill>
                 <a:latin typeface="Helvetica Neue"/>
               </a:rPr>
-              <a:t>At $0.131 per 1 000 steps on one GH200 —</a:t>
+              <a:t>At $0.131 per 1 000 steps on one GH200,</a:t>
             </a:r>
           </a:p>
           <a:p>
@@ -9353,7 +9353,7 @@
                 </a:solidFill>
                 <a:latin typeface="Helvetica Neue"/>
               </a:rPr>
-              <a:t>speed — self-hosting is not the cost problem we</a:t>
+              <a:t>speed, self-hosting is not the cost problem we</a:t>
             </a:r>
           </a:p>
           <a:p>

--- a/slides/ME344_Final_Arnold_Hambuch.pptx
+++ b/slides/ME344_Final_Arnold_Hambuch.pptx
@@ -961,97 +961,97 @@
           <a:p/>
           <a:p>
             <a:r>
-              <a:t>"Same model, same batch, same sequence length, same script. The only thing that</a:t>
-            </a:r>
-          </a:p>
-          <a:p>
-            <a:r>
-              <a:t>changes across these columns is the silicon.</a:t>
+              <a:t>"This is the comparison at the model size the project is actually about, four</a:t>
+            </a:r>
+          </a:p>
+          <a:p>
+            <a:r>
+              <a:t>billion parameters, and at batch sizes where both chips have work to do.</a:t>
             </a:r>
           </a:p>
           <a:p/>
           <a:p>
             <a:r>
-              <a:t>The headline is the two accelerator columns. One GH200 matches an eight-chip TPU</a:t>
-            </a:r>
-          </a:p>
-          <a:p>
-            <a:r>
-              <a:t>slice to within a quarter of a percent. Not eight times slower, the same.</a:t>
+              <a:t>One GH200 delivers roughly two and a half times the throughput of an eight-chip</a:t>
+            </a:r>
+          </a:p>
+          <a:p>
+            <a:r>
+              <a:t>v5e slice. Not per chip. In total.</a:t>
             </a:r>
           </a:p>
           <a:p/>
           <a:p>
             <a:r>
-              <a:t>But read the memory row before you conclude anything about TPUs. At batch one the</a:t>
-            </a:r>
-          </a:p>
-          <a:p>
-            <a:r>
-              <a:t>job uses five percent of the GPU and seven percent of the TPU. Neither accelerator</a:t>
-            </a:r>
-          </a:p>
-          <a:p>
-            <a:r>
-              <a:t>is busy. The workload is latency-bound, so the extra seven chips have nothing to</a:t>
-            </a:r>
-          </a:p>
-          <a:p>
-            <a:r>
-              <a:t>do. This is a statement about our operating point, not about the v5e being slow.</a:t>
+              <a:t>Now, we first measured this at batch one, and there the two tied to within a</a:t>
+            </a:r>
+          </a:p>
+          <a:p>
+            <a:r>
+              <a:t>quarter of a percent. That looked like a headline. It was an artefact: at batch</a:t>
+            </a:r>
+          </a:p>
+          <a:p>
+            <a:r>
+              <a:t>one neither accelerator is occupied, so what we were comparing was launch</a:t>
+            </a:r>
+          </a:p>
+          <a:p>
+            <a:r>
+              <a:t>latency, not compute. Sweeping until they broke is what exposed it.</a:t>
             </a:r>
           </a:p>
           <a:p/>
           <a:p>
             <a:r>
-              <a:t>Then the result I am proudest of, on the right. We identified checkpoint load as</a:t>
-            </a:r>
-          </a:p>
-          <a:p>
-            <a:r>
-              <a:t>the largest single phase, enabled the gcsfuse file cache, one line in the</a:t>
-            </a:r>
-          </a:p>
-          <a:p>
-            <a:r>
-              <a:t>manifest, and re-ran. Load dropped fourteen and a half times. Total wall clock</a:t>
-            </a:r>
-          </a:p>
-          <a:p>
-            <a:r>
-              <a:t>fell by thirty-one percent.</a:t>
+              <a:t>Look at how the two behave as the batch grows. The Hopper climbs from eleven and</a:t>
+            </a:r>
+          </a:p>
+          <a:p>
+            <a:r>
+              <a:t>a half to thirteen thousand tokens a second. The slice is flat around four and a</a:t>
+            </a:r>
+          </a:p>
+          <a:p>
+            <a:r>
+              <a:t>half thousand, which means it saturated at batch eight and the extra work bought</a:t>
+            </a:r>
+          </a:p>
+          <a:p>
+            <a:r>
+              <a:t>nothing. It also runs out of memory a step earlier than the GPU does.</a:t>
             </a:r>
           </a:p>
           <a:p/>
           <a:p>
             <a:r>
-              <a:t>And the control is what makes it conclusive: median step time went from 1.75122</a:t>
-            </a:r>
-          </a:p>
-          <a:p>
-            <a:r>
-              <a:t>seconds to 1.75117. Identical to the fourth decimal. The computation did not</a:t>
-            </a:r>
-          </a:p>
-          <a:p>
-            <a:r>
-              <a:t>change at all. Only I/O moved, which is why we can attribute the saving to the</a:t>
-            </a:r>
-          </a:p>
-          <a:p>
-            <a:r>
-              <a:t>cache rather than to noise. That is the difference between measuring and</a:t>
-            </a:r>
-          </a:p>
-          <a:p>
-            <a:r>
-              <a:t>demonstrating."</a:t>
+              <a:t>The bottom right is the other result. We identified checkpoint load as the</a:t>
+            </a:r>
+          </a:p>
+          <a:p>
+            <a:r>
+              <a:t>largest phase, enabled the gcsfuse file cache, and re-ran. Load got fourteen and</a:t>
+            </a:r>
+          </a:p>
+          <a:p>
+            <a:r>
+              <a:t>a half times faster and total wall clock fell by thirty-one percent. The control</a:t>
+            </a:r>
+          </a:p>
+          <a:p>
+            <a:r>
+              <a:t>is that median step time stayed identical to the fourth decimal, so nothing</a:t>
+            </a:r>
+          </a:p>
+          <a:p>
+            <a:r>
+              <a:t>about the computation changed. Only I/O moved."</a:t>
             </a:r>
           </a:p>
           <a:p/>
           <a:p>
             <a:r>
-              <a:t>→ hand back to Leonard.</a:t>
+              <a:t>Hand back to Leonard.</a:t>
             </a:r>
           </a:p>
         </p:txBody>
@@ -4409,8 +4409,8 @@
         </p:nvSpPr>
         <p:spPr>
           <a:xfrm>
-            <a:off x="566928" y="1691640"/>
-            <a:ext cx="5486400" cy="2148840"/>
+            <a:off x="566928" y="1645920"/>
+            <a:ext cx="5394960" cy="2103120"/>
           </a:xfrm>
           <a:prstGeom prst="roundRect">
             <a:avLst>
@@ -4457,8 +4457,8 @@
         </p:nvSpPr>
         <p:spPr>
           <a:xfrm>
-            <a:off x="841248" y="1901952"/>
-            <a:ext cx="5029200" cy="320040"/>
+            <a:off x="868680" y="1874519"/>
+            <a:ext cx="4846320" cy="320040"/>
           </a:xfrm>
           <a:prstGeom prst="rect">
             <a:avLst/>
@@ -4477,7 +4477,7 @@
               </a:spcAft>
             </a:pPr>
             <a:r>
-              <a:rPr sz="1400" b="1" i="0">
+              <a:rPr sz="1500" b="1" i="0">
                 <a:solidFill>
                   <a:srgbClr val="15171A"/>
                 </a:solidFill>
@@ -4496,8 +4496,150 @@
         </p:nvSpPr>
         <p:spPr>
           <a:xfrm>
-            <a:off x="841248" y="2286000"/>
-            <a:ext cx="5029200" cy="1463040"/>
+            <a:off x="868680" y="2304288"/>
+            <a:ext cx="4846320" cy="1371600"/>
+          </a:xfrm>
+          <a:prstGeom prst="rect">
+            <a:avLst/>
+          </a:prstGeom>
+          <a:noFill/>
+        </p:spPr>
+        <p:txBody>
+          <a:bodyPr wrap="square" anchor="t">
+            <a:spAutoFit/>
+          </a:bodyPr>
+          <a:lstStyle/>
+          <a:p>
+            <a:pPr algn="l">
+              <a:spcAft>
+                <a:spcPts val="600"/>
+              </a:spcAft>
+            </a:pPr>
+            <a:r>
+              <a:rPr sz="1400" b="0" i="0">
+                <a:solidFill>
+                  <a:srgbClr val="15171A"/>
+                </a:solidFill>
+                <a:latin typeface="Helvetica Neue"/>
+              </a:rPr>
+              <a:t>German GPs code every consultation.</a:t>
+            </a:r>
+          </a:p>
+          <a:p>
+            <a:pPr algn="l">
+              <a:spcAft>
+                <a:spcPts val="600"/>
+              </a:spcAft>
+            </a:pPr>
+            <a:r>
+              <a:rPr sz="1400" b="0" i="0">
+                <a:solidFill>
+                  <a:srgbClr val="15171A"/>
+                </a:solidFill>
+                <a:latin typeface="Helvetica Neue"/>
+              </a:rPr>
+              <a:t>We propose, the physician confirms.</a:t>
+            </a:r>
+          </a:p>
+          <a:p>
+            <a:pPr algn="l">
+              <a:spcAft>
+                <a:spcPts val="600"/>
+              </a:spcAft>
+            </a:pPr>
+            <a:r>
+              <a:rPr sz="1400" b="0" i="0">
+                <a:solidFill>
+                  <a:srgbClr val="15171A"/>
+                </a:solidFill>
+                <a:latin typeface="Helvetica Neue"/>
+              </a:rPr>
+              <a:t>Reliability is the product.</a:t>
+            </a:r>
+          </a:p>
+          <a:p>
+            <a:pPr algn="l">
+              <a:spcAft>
+                <a:spcPts val="600"/>
+              </a:spcAft>
+            </a:pPr>
+            <a:r>
+              <a:rPr sz="1400" b="0" i="0">
+                <a:solidFill>
+                  <a:srgbClr val="15171A"/>
+                </a:solidFill>
+                <a:latin typeface="Helvetica Neue"/>
+              </a:rPr>
+              <a:t>Today it runs on hosted APIs.</a:t>
+            </a:r>
+          </a:p>
+        </p:txBody>
+      </p:sp>
+      <p:sp>
+        <p:nvSpPr>
+          <p:cNvPr id="9" name="TextBox 8"/>
+          <p:cNvSpPr txBox="1"/>
+          <p:nvPr/>
+        </p:nvSpPr>
+        <p:spPr>
+          <a:xfrm>
+            <a:off x="6400800" y="1874519"/>
+            <a:ext cx="5212080" cy="914400"/>
+          </a:xfrm>
+          <a:prstGeom prst="rect">
+            <a:avLst/>
+          </a:prstGeom>
+          <a:noFill/>
+        </p:spPr>
+        <p:txBody>
+          <a:bodyPr wrap="square" anchor="t">
+            <a:spAutoFit/>
+          </a:bodyPr>
+          <a:lstStyle/>
+          <a:p>
+            <a:pPr algn="l">
+              <a:spcAft>
+                <a:spcPts val="200"/>
+              </a:spcAft>
+            </a:pPr>
+            <a:r>
+              <a:rPr sz="2400" b="1" i="0">
+                <a:solidFill>
+                  <a:srgbClr val="E8590C"/>
+                </a:solidFill>
+                <a:latin typeface="Helvetica Neue"/>
+              </a:rPr>
+              <a:t>Could it run on</a:t>
+            </a:r>
+          </a:p>
+          <a:p>
+            <a:pPr algn="l">
+              <a:spcAft>
+                <a:spcPts val="200"/>
+              </a:spcAft>
+            </a:pPr>
+            <a:r>
+              <a:rPr sz="2400" b="1" i="0">
+                <a:solidFill>
+                  <a:srgbClr val="E8590C"/>
+                </a:solidFill>
+                <a:latin typeface="Helvetica Neue"/>
+              </a:rPr>
+              <a:t>our own hardware?</a:t>
+            </a:r>
+          </a:p>
+        </p:txBody>
+      </p:sp>
+      <p:sp>
+        <p:nvSpPr>
+          <p:cNvPr id="10" name="TextBox 9"/>
+          <p:cNvSpPr txBox="1"/>
+          <p:nvPr/>
+        </p:nvSpPr>
+        <p:spPr>
+          <a:xfrm>
+            <a:off x="6400800" y="3063240"/>
+            <a:ext cx="5212080" cy="731520"/>
           </a:xfrm>
           <a:prstGeom prst="rect">
             <a:avLst/>
@@ -4518,11 +4660,11 @@
             <a:r>
               <a:rPr sz="1300" b="0" i="0">
                 <a:solidFill>
-                  <a:srgbClr val="15171A"/>
+                  <a:srgbClr val="717A85"/>
                 </a:solidFill>
                 <a:latin typeface="Helvetica Neue"/>
               </a:rPr>
-              <a:t>German GPs must code every consultation.</a:t>
+              <a:t>Qwen3 + LoRA on CodiEsp.</a:t>
             </a:r>
           </a:p>
           <a:p>
@@ -4534,217 +4676,11 @@
             <a:r>
               <a:rPr sz="1300" b="0" i="0">
                 <a:solidFill>
-                  <a:srgbClr val="15171A"/>
+                  <a:srgbClr val="717A85"/>
                 </a:solidFill>
                 <a:latin typeface="Helvetica Neue"/>
               </a:rPr>
-              <a:t>We read the note and propose the codes;</a:t>
-            </a:r>
-          </a:p>
-          <a:p>
-            <a:pPr algn="l">
-              <a:spcAft>
-                <a:spcPts val="300"/>
-              </a:spcAft>
-            </a:pPr>
-            <a:r>
-              <a:rPr sz="1300" b="0" i="0">
-                <a:solidFill>
-                  <a:srgbClr val="15171A"/>
-                </a:solidFill>
-                <a:latin typeface="Helvetica Neue"/>
-              </a:rPr>
-              <a:t>the physician confirms each one. A legal</a:t>
-            </a:r>
-          </a:p>
-          <a:p>
-            <a:pPr algn="l">
-              <a:spcAft>
-                <a:spcPts val="300"/>
-              </a:spcAft>
-            </a:pPr>
-            <a:r>
-              <a:rPr sz="1300" b="0" i="0">
-                <a:solidFill>
-                  <a:srgbClr val="15171A"/>
-                </a:solidFill>
-                <a:latin typeface="Helvetica Neue"/>
-              </a:rPr>
-              <a:t>requirement here. Reliability is the product:</a:t>
-            </a:r>
-          </a:p>
-          <a:p>
-            <a:pPr algn="l">
-              <a:spcAft>
-                <a:spcPts val="300"/>
-              </a:spcAft>
-            </a:pPr>
-            <a:r>
-              <a:rPr sz="1300" b="0" i="0">
-                <a:solidFill>
-                  <a:srgbClr val="15171A"/>
-                </a:solidFill>
-                <a:latin typeface="Helvetica Neue"/>
-              </a:rPr>
-              <a:t>over-coding is fraud exposure, not error.</a:t>
-            </a:r>
-          </a:p>
-        </p:txBody>
-      </p:sp>
-      <p:sp>
-        <p:nvSpPr>
-          <p:cNvPr id="9" name="TextBox 8"/>
-          <p:cNvSpPr txBox="1"/>
-          <p:nvPr/>
-        </p:nvSpPr>
-        <p:spPr>
-          <a:xfrm>
-            <a:off x="6400800" y="1783080"/>
-            <a:ext cx="5212080" cy="731520"/>
-          </a:xfrm>
-          <a:prstGeom prst="rect">
-            <a:avLst/>
-          </a:prstGeom>
-          <a:noFill/>
-        </p:spPr>
-        <p:txBody>
-          <a:bodyPr wrap="square" anchor="t">
-            <a:spAutoFit/>
-          </a:bodyPr>
-          <a:lstStyle/>
-          <a:p>
-            <a:pPr algn="l">
-              <a:spcAft>
-                <a:spcPts val="200"/>
-              </a:spcAft>
-            </a:pPr>
-            <a:r>
-              <a:rPr sz="1600" b="1" i="0">
-                <a:solidFill>
-                  <a:srgbClr val="15171A"/>
-                </a:solidFill>
-                <a:latin typeface="Helvetica Neue"/>
-              </a:rPr>
-              <a:t>Today that runs on hosted APIs.</a:t>
-            </a:r>
-          </a:p>
-          <a:p>
-            <a:pPr algn="l">
-              <a:spcAft>
-                <a:spcPts val="200"/>
-              </a:spcAft>
-            </a:pPr>
-            <a:r>
-              <a:rPr sz="1600" b="1" i="0">
-                <a:solidFill>
-                  <a:srgbClr val="15171A"/>
-                </a:solidFill>
-                <a:latin typeface="Helvetica Neue"/>
-              </a:rPr>
-              <a:t>Could it run on our own hardware?</a:t>
-            </a:r>
-          </a:p>
-        </p:txBody>
-      </p:sp>
-      <p:sp>
-        <p:nvSpPr>
-          <p:cNvPr id="10" name="TextBox 9"/>
-          <p:cNvSpPr txBox="1"/>
-          <p:nvPr/>
-        </p:nvSpPr>
-        <p:spPr>
-          <a:xfrm>
-            <a:off x="6400800" y="2606040"/>
-            <a:ext cx="5212080" cy="1280160"/>
-          </a:xfrm>
-          <a:prstGeom prst="rect">
-            <a:avLst/>
-          </a:prstGeom>
-          <a:noFill/>
-        </p:spPr>
-        <p:txBody>
-          <a:bodyPr wrap="square" anchor="t">
-            <a:spAutoFit/>
-          </a:bodyPr>
-          <a:lstStyle/>
-          <a:p>
-            <a:pPr algn="l">
-              <a:spcAft>
-                <a:spcPts val="300"/>
-              </a:spcAft>
-            </a:pPr>
-            <a:r>
-              <a:rPr sz="1300" b="0" i="0">
-                <a:solidFill>
-                  <a:srgbClr val="717A85"/>
-                </a:solidFill>
-                <a:latin typeface="Helvetica Neue"/>
-              </a:rPr>
-              <a:t>An infrastructure question, not a model one.</a:t>
-            </a:r>
-          </a:p>
-          <a:p>
-            <a:pPr algn="l">
-              <a:spcAft>
-                <a:spcPts val="300"/>
-              </a:spcAft>
-            </a:pPr>
-            <a:r>
-              <a:rPr sz="1300" b="0" i="0">
-                <a:solidFill>
-                  <a:srgbClr val="717A85"/>
-                </a:solidFill>
-                <a:latin typeface="Helvetica Neue"/>
-              </a:rPr>
-              <a:t>so we built the workload and measured it.</a:t>
-            </a:r>
-          </a:p>
-          <a:p>
-            <a:pPr algn="l">
-              <a:spcAft>
-                <a:spcPts val="300"/>
-              </a:spcAft>
-            </a:pPr>
-            <a:r>
-              <a:rPr sz="1300" b="0" i="0">
-                <a:solidFill>
-                  <a:srgbClr val="717A85"/>
-                </a:solidFill>
-                <a:latin typeface="Helvetica Neue"/>
-              </a:rPr>
-              <a:t/>
-            </a:r>
-          </a:p>
-          <a:p>
-            <a:pPr algn="l">
-              <a:spcAft>
-                <a:spcPts val="300"/>
-              </a:spcAft>
-            </a:pPr>
-            <a:r>
-              <a:rPr sz="1300" b="0" i="0">
-                <a:solidFill>
-                  <a:srgbClr val="717A85"/>
-                </a:solidFill>
-                <a:latin typeface="Helvetica Neue"/>
-              </a:rPr>
-              <a:t>Qwen3 + LoRA on CodiEsp: 1 000 clinical case</a:t>
-            </a:r>
-          </a:p>
-          <a:p>
-            <a:pPr algn="l">
-              <a:spcAft>
-                <a:spcPts val="300"/>
-              </a:spcAft>
-            </a:pPr>
-            <a:r>
-              <a:rPr sz="1300" b="0" i="0">
-                <a:solidFill>
-                  <a:srgbClr val="717A85"/>
-                </a:solidFill>
-                <a:latin typeface="Helvetica Neue"/>
-              </a:rPr>
-              <a:t>reports, ICD-10 labelled, CC-BY 4.0.</a:t>
+              <a:t>1 000 clinical case reports, ICD-10, CC-BY 4.0.</a:t>
             </a:r>
           </a:p>
         </p:txBody>
@@ -4758,289 +4694,7 @@
         <p:spPr>
           <a:xfrm>
             <a:off x="566928" y="4160520"/>
-            <a:ext cx="2743200" cy="777240"/>
-          </a:xfrm>
-          <a:prstGeom prst="rect">
-            <a:avLst/>
-          </a:prstGeom>
-          <a:noFill/>
-        </p:spPr>
-        <p:txBody>
-          <a:bodyPr wrap="square" anchor="t">
-            <a:spAutoFit/>
-          </a:bodyPr>
-          <a:lstStyle/>
-          <a:p>
-            <a:pPr algn="l">
-              <a:spcAft>
-                <a:spcPts val="0"/>
-              </a:spcAft>
-            </a:pPr>
-            <a:r>
-              <a:rPr sz="4400" b="1" i="0">
-                <a:solidFill>
-                  <a:srgbClr val="E8590C"/>
-                </a:solidFill>
-                <a:latin typeface="Helvetica Neue"/>
-              </a:rPr>
-              <a:t>8 GB</a:t>
-            </a:r>
-          </a:p>
-        </p:txBody>
-      </p:sp>
-      <p:sp>
-        <p:nvSpPr>
-          <p:cNvPr id="12" name="TextBox 11"/>
-          <p:cNvSpPr txBox="1"/>
-          <p:nvPr/>
-        </p:nvSpPr>
-        <p:spPr>
-          <a:xfrm>
-            <a:off x="566928" y="4818888"/>
-            <a:ext cx="2743200" cy="822960"/>
-          </a:xfrm>
-          <a:prstGeom prst="rect">
-            <a:avLst/>
-          </a:prstGeom>
-          <a:noFill/>
-        </p:spPr>
-        <p:txBody>
-          <a:bodyPr wrap="square" anchor="t">
-            <a:spAutoFit/>
-          </a:bodyPr>
-          <a:lstStyle/>
-          <a:p>
-            <a:pPr algn="l">
-              <a:spcAft>
-                <a:spcPts val="200"/>
-              </a:spcAft>
-            </a:pPr>
-            <a:r>
-              <a:rPr sz="1200" b="0" i="0">
-                <a:solidFill>
-                  <a:srgbClr val="717A85"/>
-                </a:solidFill>
-                <a:latin typeface="Helvetica Neue"/>
-              </a:rPr>
-              <a:t>of weights at 4B, before a single</a:t>
-            </a:r>
-          </a:p>
-          <a:p>
-            <a:pPr algn="l">
-              <a:spcAft>
-                <a:spcPts val="200"/>
-              </a:spcAft>
-            </a:pPr>
-            <a:r>
-              <a:rPr sz="1200" b="0" i="0">
-                <a:solidFill>
-                  <a:srgbClr val="717A85"/>
-                </a:solidFill>
-                <a:latin typeface="Helvetica Neue"/>
-              </a:rPr>
-              <a:t>activation exists</a:t>
-            </a:r>
-          </a:p>
-        </p:txBody>
-      </p:sp>
-      <p:sp>
-        <p:nvSpPr>
-          <p:cNvPr id="13" name="TextBox 12"/>
-          <p:cNvSpPr txBox="1"/>
-          <p:nvPr/>
-        </p:nvSpPr>
-        <p:spPr>
-          <a:xfrm>
-            <a:off x="3657600" y="4160520"/>
-            <a:ext cx="2743200" cy="777240"/>
-          </a:xfrm>
-          <a:prstGeom prst="rect">
-            <a:avLst/>
-          </a:prstGeom>
-          <a:noFill/>
-        </p:spPr>
-        <p:txBody>
-          <a:bodyPr wrap="square" anchor="t">
-            <a:spAutoFit/>
-          </a:bodyPr>
-          <a:lstStyle/>
-          <a:p>
-            <a:pPr algn="l">
-              <a:spcAft>
-                <a:spcPts val="0"/>
-              </a:spcAft>
-            </a:pPr>
-            <a:r>
-              <a:rPr sz="4400" b="1" i="0">
-                <a:solidFill>
-                  <a:srgbClr val="E8590C"/>
-                </a:solidFill>
-                <a:latin typeface="Helvetica Neue"/>
-              </a:rPr>
-              <a:t>2 489</a:t>
-            </a:r>
-          </a:p>
-        </p:txBody>
-      </p:sp>
-      <p:sp>
-        <p:nvSpPr>
-          <p:cNvPr id="14" name="TextBox 13"/>
-          <p:cNvSpPr txBox="1"/>
-          <p:nvPr/>
-        </p:nvSpPr>
-        <p:spPr>
-          <a:xfrm>
-            <a:off x="3657600" y="4818888"/>
-            <a:ext cx="2743200" cy="822960"/>
-          </a:xfrm>
-          <a:prstGeom prst="rect">
-            <a:avLst/>
-          </a:prstGeom>
-          <a:noFill/>
-        </p:spPr>
-        <p:txBody>
-          <a:bodyPr wrap="square" anchor="t">
-            <a:spAutoFit/>
-          </a:bodyPr>
-          <a:lstStyle/>
-          <a:p>
-            <a:pPr algn="l">
-              <a:spcAft>
-                <a:spcPts val="200"/>
-              </a:spcAft>
-            </a:pPr>
-            <a:r>
-              <a:rPr sz="1200" b="0" i="0">
-                <a:solidFill>
-                  <a:srgbClr val="717A85"/>
-                </a:solidFill>
-                <a:latin typeface="Helvetica Neue"/>
-              </a:rPr>
-              <a:t>tokens in the longest case.</a:t>
-            </a:r>
-          </a:p>
-          <a:p>
-            <a:pPr algn="l">
-              <a:spcAft>
-                <a:spcPts val="200"/>
-              </a:spcAft>
-            </a:pPr>
-            <a:r>
-              <a:rPr sz="1200" b="0" i="0">
-                <a:solidFill>
-                  <a:srgbClr val="717A85"/>
-                </a:solidFill>
-                <a:latin typeface="Helvetica Neue"/>
-              </a:rPr>
-              <a:t>Sequence length is not free</a:t>
-            </a:r>
-          </a:p>
-        </p:txBody>
-      </p:sp>
-      <p:sp>
-        <p:nvSpPr>
-          <p:cNvPr id="15" name="TextBox 14"/>
-          <p:cNvSpPr txBox="1"/>
-          <p:nvPr/>
-        </p:nvSpPr>
-        <p:spPr>
-          <a:xfrm>
-            <a:off x="6766560" y="4160520"/>
-            <a:ext cx="4846320" cy="777240"/>
-          </a:xfrm>
-          <a:prstGeom prst="rect">
-            <a:avLst/>
-          </a:prstGeom>
-          <a:noFill/>
-        </p:spPr>
-        <p:txBody>
-          <a:bodyPr wrap="square" anchor="t">
-            <a:spAutoFit/>
-          </a:bodyPr>
-          <a:lstStyle/>
-          <a:p>
-            <a:pPr algn="l">
-              <a:spcAft>
-                <a:spcPts val="0"/>
-              </a:spcAft>
-            </a:pPr>
-            <a:r>
-              <a:rPr sz="4400" b="1" i="0">
-                <a:solidFill>
-                  <a:srgbClr val="E8590C"/>
-                </a:solidFill>
-                <a:latin typeface="Helvetica Neue"/>
-              </a:rPr>
-              <a:t>3 backends</a:t>
-            </a:r>
-          </a:p>
-        </p:txBody>
-      </p:sp>
-      <p:sp>
-        <p:nvSpPr>
-          <p:cNvPr id="16" name="TextBox 15"/>
-          <p:cNvSpPr txBox="1"/>
-          <p:nvPr/>
-        </p:nvSpPr>
-        <p:spPr>
-          <a:xfrm>
-            <a:off x="6766560" y="4818888"/>
-            <a:ext cx="4846320" cy="822960"/>
-          </a:xfrm>
-          <a:prstGeom prst="rect">
-            <a:avLst/>
-          </a:prstGeom>
-          <a:noFill/>
-        </p:spPr>
-        <p:txBody>
-          <a:bodyPr wrap="square" anchor="t">
-            <a:spAutoFit/>
-          </a:bodyPr>
-          <a:lstStyle/>
-          <a:p>
-            <a:pPr algn="l">
-              <a:spcAft>
-                <a:spcPts val="200"/>
-              </a:spcAft>
-            </a:pPr>
-            <a:r>
-              <a:rPr sz="1200" b="0" i="0">
-                <a:solidFill>
-                  <a:srgbClr val="717A85"/>
-                </a:solidFill>
-                <a:latin typeface="Helvetica Neue"/>
-              </a:rPr>
-              <a:t>CPU · GPU · TPU, one JAX program,</a:t>
-            </a:r>
-          </a:p>
-          <a:p>
-            <a:pPr algn="l">
-              <a:spcAft>
-                <a:spcPts val="200"/>
-              </a:spcAft>
-            </a:pPr>
-            <a:r>
-              <a:rPr sz="1200" b="0" i="0">
-                <a:solidFill>
-                  <a:srgbClr val="717A85"/>
-                </a:solidFill>
-                <a:latin typeface="Helvetica Neue"/>
-              </a:rPr>
-              <a:t>no per-backend reimplementation</a:t>
-            </a:r>
-          </a:p>
-        </p:txBody>
-      </p:sp>
-      <p:sp>
-        <p:nvSpPr>
-          <p:cNvPr id="17" name="TextBox 16"/>
-          <p:cNvSpPr txBox="1"/>
-          <p:nvPr/>
-        </p:nvSpPr>
-        <p:spPr>
-          <a:xfrm>
-            <a:off x="566928" y="5806440"/>
-            <a:ext cx="10972800" cy="640080"/>
+            <a:ext cx="10972800" cy="320040"/>
           </a:xfrm>
           <a:prstGeom prst="rect">
             <a:avLst/>
@@ -5059,27 +4713,82 @@
               </a:spcAft>
             </a:pPr>
             <a:r>
-              <a:rPr sz="1900" b="1" i="0">
+              <a:rPr sz="1400" b="1" i="0">
                 <a:solidFill>
                   <a:srgbClr val="E8590C"/>
                 </a:solidFill>
                 <a:latin typeface="Helvetica Neue"/>
               </a:rPr>
-              <a:t>Where does the time actually go, and what does it take to run this at all?</a:t>
-            </a:r>
-          </a:p>
-        </p:txBody>
-      </p:sp>
-      <p:sp>
-        <p:nvSpPr>
-          <p:cNvPr id="18" name="TextBox 17"/>
+              <a:t>The resource problem</a:t>
+            </a:r>
+          </a:p>
+        </p:txBody>
+      </p:sp>
+      <p:sp>
+        <p:nvSpPr>
+          <p:cNvPr id="12" name="TextBox 11"/>
           <p:cNvSpPr txBox="1"/>
           <p:nvPr/>
         </p:nvSpPr>
         <p:spPr>
           <a:xfrm>
-            <a:off x="566928" y="6263640"/>
-            <a:ext cx="10972800" cy="365760"/>
+            <a:off x="566928" y="4526280"/>
+            <a:ext cx="10972800" cy="1005840"/>
+          </a:xfrm>
+          <a:prstGeom prst="rect">
+            <a:avLst/>
+          </a:prstGeom>
+          <a:noFill/>
+        </p:spPr>
+        <p:txBody>
+          <a:bodyPr wrap="square" anchor="t">
+            <a:spAutoFit/>
+          </a:bodyPr>
+          <a:lstStyle/>
+          <a:p>
+            <a:pPr algn="l">
+              <a:spcAft>
+                <a:spcPts val="800"/>
+              </a:spcAft>
+            </a:pPr>
+            <a:r>
+              <a:rPr sz="1700" b="0" i="0">
+                <a:solidFill>
+                  <a:srgbClr val="15171A"/>
+                </a:solidFill>
+                <a:latin typeface="Helvetica Neue"/>
+              </a:rPr>
+              <a:t>8 GB of weights at 4B before a single activation.  Cases up to 2 489 tokens.</a:t>
+            </a:r>
+          </a:p>
+          <a:p>
+            <a:pPr algn="l">
+              <a:spcAft>
+                <a:spcPts val="800"/>
+              </a:spcAft>
+            </a:pPr>
+            <a:r>
+              <a:rPr sz="1700" b="0" i="0">
+                <a:solidFill>
+                  <a:srgbClr val="15171A"/>
+                </a:solidFill>
+                <a:latin typeface="Helvetica Neue"/>
+              </a:rPr>
+              <a:t>One JAX program, lowered by XLA to CPU, GPU and TPU.</a:t>
+            </a:r>
+          </a:p>
+        </p:txBody>
+      </p:sp>
+      <p:sp>
+        <p:nvSpPr>
+          <p:cNvPr id="13" name="TextBox 12"/>
+          <p:cNvSpPr txBox="1"/>
+          <p:nvPr/>
+        </p:nvSpPr>
+        <p:spPr>
+          <a:xfrm>
+            <a:off x="566928" y="5897880"/>
+            <a:ext cx="10972800" cy="640080"/>
           </a:xfrm>
           <a:prstGeom prst="rect">
             <a:avLst/>
@@ -5098,13 +4807,13 @@
               </a:spcAft>
             </a:pPr>
             <a:r>
-              <a:rPr sz="1100" b="0" i="1">
-                <a:solidFill>
-                  <a:srgbClr val="717A85"/>
+              <a:rPr sz="2200" b="1" i="0">
+                <a:solidFill>
+                  <a:srgbClr val="15171A"/>
                 </a:solidFill>
                 <a:latin typeface="Helvetica Neue"/>
               </a:rPr>
-              <a:t>No patient data was used. Model accuracy earns no marks here. The object of study is the infrastructure.</a:t>
+              <a:t>Where does the time go, and what does it take to run this at all?</a:t>
             </a:r>
           </a:p>
         </p:txBody>
@@ -5293,7 +5002,7 @@
         <p:spPr>
           <a:xfrm>
             <a:off x="566928" y="1783080"/>
-            <a:ext cx="3520440" cy="2286000"/>
+            <a:ext cx="3520440" cy="1691640"/>
           </a:xfrm>
           <a:prstGeom prst="roundRect">
             <a:avLst>
@@ -5379,8 +5088,8 @@
         </p:nvSpPr>
         <p:spPr>
           <a:xfrm>
-            <a:off x="822960" y="2359152"/>
-            <a:ext cx="3063240" cy="1645920"/>
+            <a:off x="822960" y="2377440"/>
+            <a:ext cx="3108960" cy="1097280"/>
           </a:xfrm>
           <a:prstGeom prst="rect">
             <a:avLst/>
@@ -5395,97 +5104,49 @@
           <a:p>
             <a:pPr algn="l">
               <a:spcAft>
-                <a:spcPts val="200"/>
+                <a:spcPts val="700"/>
               </a:spcAft>
             </a:pPr>
             <a:r>
-              <a:rPr sz="1200" b="0" i="0">
+              <a:rPr sz="1300" b="0" i="0">
                 <a:solidFill>
                   <a:srgbClr val="15171A"/>
                 </a:solidFill>
                 <a:latin typeface="Helvetica Neue"/>
               </a:rPr>
-              <a:t>One JAX / Flax program.</a:t>
+              <a:t>One JAX program</a:t>
             </a:r>
           </a:p>
           <a:p>
             <a:pPr algn="l">
               <a:spcAft>
-                <a:spcPts val="200"/>
+                <a:spcPts val="700"/>
               </a:spcAft>
             </a:pPr>
             <a:r>
-              <a:rPr sz="1200" b="0" i="0">
+              <a:rPr sz="1300" b="0" i="0">
                 <a:solidFill>
                   <a:srgbClr val="15171A"/>
                 </a:solidFill>
                 <a:latin typeface="Helvetica Neue"/>
               </a:rPr>
-              <a:t>XLA lowers it to CPU, CUDA</a:t>
+              <a:t>XLA lowers it to all three</a:t>
             </a:r>
           </a:p>
           <a:p>
             <a:pPr algn="l">
               <a:spcAft>
-                <a:spcPts val="200"/>
+                <a:spcPts val="700"/>
               </a:spcAft>
             </a:pPr>
             <a:r>
-              <a:rPr sz="1200" b="0" i="0">
+              <a:rPr sz="1300" b="0" i="0">
                 <a:solidFill>
                   <a:srgbClr val="15171A"/>
                 </a:solidFill>
                 <a:latin typeface="Helvetica Neue"/>
               </a:rPr>
-              <a:t>and TPU.</a:t>
-            </a:r>
-          </a:p>
-          <a:p>
-            <a:pPr algn="l">
-              <a:spcAft>
-                <a:spcPts val="200"/>
-              </a:spcAft>
-            </a:pPr>
-            <a:r>
-              <a:rPr sz="1200" b="0" i="0">
-                <a:solidFill>
-                  <a:srgbClr val="15171A"/>
-                </a:solidFill>
-                <a:latin typeface="Helvetica Neue"/>
-              </a:rPr>
-              <a:t>LoRA via qwix, training via</a:t>
-            </a:r>
-          </a:p>
-          <a:p>
-            <a:pPr algn="l">
-              <a:spcAft>
-                <a:spcPts val="200"/>
-              </a:spcAft>
-            </a:pPr>
-            <a:r>
-              <a:rPr sz="1200" b="0" i="0">
-                <a:solidFill>
-                  <a:srgbClr val="15171A"/>
-                </a:solidFill>
-                <a:latin typeface="Helvetica Neue"/>
-              </a:rPr>
-              <a:t>Tunix, no per-backend</a:t>
-            </a:r>
-          </a:p>
-          <a:p>
-            <a:pPr algn="l">
-              <a:spcAft>
-                <a:spcPts val="200"/>
-              </a:spcAft>
-            </a:pPr>
-            <a:r>
-              <a:rPr sz="1200" b="0" i="0">
-                <a:solidFill>
-                  <a:srgbClr val="15171A"/>
-                </a:solidFill>
-                <a:latin typeface="Helvetica Neue"/>
-              </a:rPr>
-              <a:t>reimplementation.</a:t>
+              <a:t>LoRA via qwix, Tunix trainer</a:t>
             </a:r>
           </a:p>
         </p:txBody>
@@ -5499,7 +5160,7 @@
         <p:spPr>
           <a:xfrm>
             <a:off x="4361688" y="1783080"/>
-            <a:ext cx="3520440" cy="2286000"/>
+            <a:ext cx="3520440" cy="1691640"/>
           </a:xfrm>
           <a:prstGeom prst="roundRect">
             <a:avLst>
@@ -5585,8 +5246,8 @@
         </p:nvSpPr>
         <p:spPr>
           <a:xfrm>
-            <a:off x="4617720" y="2359152"/>
-            <a:ext cx="3063240" cy="1645920"/>
+            <a:off x="4617720" y="2377440"/>
+            <a:ext cx="3108960" cy="1097280"/>
           </a:xfrm>
           <a:prstGeom prst="rect">
             <a:avLst/>
@@ -5601,97 +5262,49 @@
           <a:p>
             <a:pPr algn="l">
               <a:spcAft>
-                <a:spcPts val="200"/>
+                <a:spcPts val="700"/>
               </a:spcAft>
             </a:pPr>
             <a:r>
-              <a:rPr sz="1200" b="0" i="0">
+              <a:rPr sz="1300" b="0" i="0">
                 <a:solidFill>
                   <a:srgbClr val="15171A"/>
                 </a:solidFill>
                 <a:latin typeface="Helvetica Neue"/>
               </a:rPr>
-              <a:t>3 pinned Docker images.</a:t>
+              <a:t>3 pinned Docker images</a:t>
             </a:r>
           </a:p>
           <a:p>
             <a:pPr algn="l">
               <a:spcAft>
-                <a:spcPts val="200"/>
+                <a:spcPts val="700"/>
               </a:spcAft>
             </a:pPr>
             <a:r>
-              <a:rPr sz="1200" b="0" i="0">
+              <a:rPr sz="1300" b="0" i="0">
                 <a:solidFill>
                   <a:srgbClr val="15171A"/>
                 </a:solidFill>
                 <a:latin typeface="Helvetica Neue"/>
               </a:rPr>
-              <a:t>Kubernetes Jobs across two</a:t>
+              <a:t>Kubernetes across 2 clusters</a:t>
             </a:r>
           </a:p>
           <a:p>
             <a:pPr algn="l">
               <a:spcAft>
-                <a:spcPts val="200"/>
+                <a:spcPts val="700"/>
               </a:spcAft>
             </a:pPr>
             <a:r>
-              <a:rPr sz="1200" b="0" i="0">
+              <a:rPr sz="1300" b="0" i="0">
                 <a:solidFill>
                   <a:srgbClr val="15171A"/>
                 </a:solidFill>
                 <a:latin typeface="Helvetica Neue"/>
               </a:rPr>
-              <a:t>clusters.</a:t>
-            </a:r>
-          </a:p>
-          <a:p>
-            <a:pPr algn="l">
-              <a:spcAft>
-                <a:spcPts val="200"/>
-              </a:spcAft>
-            </a:pPr>
-            <a:r>
-              <a:rPr sz="1200" b="0" i="0">
-                <a:solidFill>
-                  <a:srgbClr val="15171A"/>
-                </a:solidFill>
-                <a:latin typeface="Helvetica Neue"/>
-              </a:rPr>
-              <a:t>Kueue admission on the TPU</a:t>
-            </a:r>
-          </a:p>
-          <a:p>
-            <a:pPr algn="l">
-              <a:spcAft>
-                <a:spcPts val="200"/>
-              </a:spcAft>
-            </a:pPr>
-            <a:r>
-              <a:rPr sz="1200" b="0" i="0">
-                <a:solidFill>
-                  <a:srgbClr val="15171A"/>
-                </a:solidFill>
-                <a:latin typeface="Helvetica Neue"/>
-              </a:rPr>
-              <a:t>pool. Every manifest states</a:t>
-            </a:r>
-          </a:p>
-          <a:p>
-            <a:pPr algn="l">
-              <a:spcAft>
-                <a:spcPts val="200"/>
-              </a:spcAft>
-            </a:pPr>
-            <a:r>
-              <a:rPr sz="1200" b="0" i="0">
-                <a:solidFill>
-                  <a:srgbClr val="15171A"/>
-                </a:solidFill>
-                <a:latin typeface="Helvetica Neue"/>
-              </a:rPr>
-              <a:t>its CPU, memory and chips.</a:t>
+              <a:t>Kueue admission, explicit limits</a:t>
             </a:r>
           </a:p>
         </p:txBody>
@@ -5705,7 +5318,7 @@
         <p:spPr>
           <a:xfrm>
             <a:off x="8156448" y="1783080"/>
-            <a:ext cx="3520440" cy="2286000"/>
+            <a:ext cx="3520440" cy="1691640"/>
           </a:xfrm>
           <a:prstGeom prst="roundRect">
             <a:avLst>
@@ -5791,8 +5404,8 @@
         </p:nvSpPr>
         <p:spPr>
           <a:xfrm>
-            <a:off x="8412480" y="2359152"/>
-            <a:ext cx="3063240" cy="1645920"/>
+            <a:off x="8412480" y="2377440"/>
+            <a:ext cx="3108960" cy="1097280"/>
           </a:xfrm>
           <a:prstGeom prst="rect">
             <a:avLst/>
@@ -5807,113 +5420,49 @@
           <a:p>
             <a:pPr algn="l">
               <a:spcAft>
-                <a:spcPts val="200"/>
+                <a:spcPts val="700"/>
               </a:spcAft>
             </a:pPr>
             <a:r>
-              <a:rPr sz="1200" b="0" i="0">
+              <a:rPr sz="1300" b="0" i="0">
                 <a:solidFill>
                   <a:srgbClr val="15171A"/>
                 </a:solidFill>
                 <a:latin typeface="Helvetica Neue"/>
               </a:rPr>
-              <a:t>gcsfuse CSI, implicit-dirs.</a:t>
+              <a:t>gcsfuse CSI, implicit-dirs</a:t>
             </a:r>
           </a:p>
           <a:p>
             <a:pPr algn="l">
               <a:spcAft>
-                <a:spcPts val="200"/>
+                <a:spcPts val="700"/>
               </a:spcAft>
             </a:pPr>
             <a:r>
-              <a:rPr sz="1200" b="0" i="0">
+              <a:rPr sz="1300" b="0" i="0">
                 <a:solidFill>
                   <a:srgbClr val="15171A"/>
                 </a:solidFill>
                 <a:latin typeface="Helvetica Neue"/>
               </a:rPr>
-              <a:t>An 8 GB checkpoint read</a:t>
+              <a:t>8 GB checkpoint from a bucket</a:t>
             </a:r>
           </a:p>
           <a:p>
             <a:pPr algn="l">
               <a:spcAft>
-                <a:spcPts val="200"/>
+                <a:spcPts val="700"/>
               </a:spcAft>
             </a:pPr>
             <a:r>
-              <a:rPr sz="1200" b="0" i="0">
+              <a:rPr sz="1300" b="0" i="0">
                 <a:solidFill>
                   <a:srgbClr val="15171A"/>
                 </a:solidFill>
                 <a:latin typeface="Helvetica Neue"/>
               </a:rPr>
-              <a:t>from a bucket.</a:t>
-            </a:r>
-          </a:p>
-          <a:p>
-            <a:pPr algn="l">
-              <a:spcAft>
-                <a:spcPts val="200"/>
-              </a:spcAft>
-            </a:pPr>
-            <a:r>
-              <a:rPr sz="1200" b="0" i="0">
-                <a:solidFill>
-                  <a:srgbClr val="15171A"/>
-                </a:solidFill>
-                <a:latin typeface="Helvetica Neue"/>
-              </a:rPr>
-              <a:t>The file cache was left as a</a:t>
-            </a:r>
-          </a:p>
-          <a:p>
-            <a:pPr algn="l">
-              <a:spcAft>
-                <a:spcPts val="200"/>
-              </a:spcAft>
-            </a:pPr>
-            <a:r>
-              <a:rPr sz="1200" b="0" i="0">
-                <a:solidFill>
-                  <a:srgbClr val="15171A"/>
-                </a:solidFill>
-                <a:latin typeface="Helvetica Neue"/>
-              </a:rPr>
-              <a:t>knob rather than fixed -</a:t>
-            </a:r>
-          </a:p>
-          <a:p>
-            <a:pPr algn="l">
-              <a:spcAft>
-                <a:spcPts val="200"/>
-              </a:spcAft>
-            </a:pPr>
-            <a:r>
-              <a:rPr sz="1200" b="0" i="0">
-                <a:solidFill>
-                  <a:srgbClr val="15171A"/>
-                </a:solidFill>
-                <a:latin typeface="Helvetica Neue"/>
-              </a:rPr>
-              <a:t>that knob became the</a:t>
-            </a:r>
-          </a:p>
-          <a:p>
-            <a:pPr algn="l">
-              <a:spcAft>
-                <a:spcPts val="200"/>
-              </a:spcAft>
-            </a:pPr>
-            <a:r>
-              <a:rPr sz="1200" b="0" i="0">
-                <a:solidFill>
-                  <a:srgbClr val="15171A"/>
-                </a:solidFill>
-                <a:latin typeface="Helvetica Neue"/>
-              </a:rPr>
-              <a:t>experiment.</a:t>
+              <a:t>File cache left as a knob</a:t>
             </a:r>
           </a:p>
         </p:txBody>
@@ -5927,7 +5476,7 @@
           <p:nvPr/>
         </p:nvGraphicFramePr>
         <p:xfrm>
-          <a:off x="566928" y="4343400"/>
+          <a:off x="566928" y="3977639"/>
           <a:ext cx="11064238" cy="1463040"/>
         </p:xfrm>
         <a:graphic>
@@ -6330,8 +5879,8 @@
         </p:nvSpPr>
         <p:spPr>
           <a:xfrm>
-            <a:off x="566928" y="5989320"/>
-            <a:ext cx="10972800" cy="548640"/>
+            <a:off x="566928" y="5623560"/>
+            <a:ext cx="10972800" cy="457200"/>
           </a:xfrm>
           <a:prstGeom prst="rect">
             <a:avLst/>
@@ -6350,13 +5899,13 @@
               </a:spcAft>
             </a:pPr>
             <a:r>
-              <a:rPr sz="1300" b="0" i="1">
-                <a:solidFill>
-                  <a:srgbClr val="717A85"/>
+              <a:rPr sz="1500" b="1" i="0">
+                <a:solidFill>
+                  <a:srgbClr val="E8590C"/>
                 </a:solidFill>
                 <a:latin typeface="Helvetica Neue"/>
               </a:rPr>
-              <a:t>Note the middle row: the GH200's host is ARM64, not x86. That single fact cost us five separate blockers.</a:t>
+              <a:t>The GH200 host is ARM64. That one fact cost five separate blockers.</a:t>
             </a:r>
           </a:p>
         </p:txBody>
@@ -6544,8 +6093,8 @@
         </p:nvSpPr>
         <p:spPr>
           <a:xfrm>
-            <a:off x="566928" y="1783080"/>
-            <a:ext cx="4846320" cy="2377440"/>
+            <a:off x="566928" y="1874519"/>
+            <a:ext cx="4937760" cy="2194560"/>
           </a:xfrm>
           <a:prstGeom prst="rect">
             <a:avLst/>
@@ -6560,193 +6109,65 @@
           <a:p>
             <a:pPr algn="l">
               <a:spcAft>
-                <a:spcPts val="300"/>
+                <a:spcPts val="1800"/>
               </a:spcAft>
             </a:pPr>
             <a:r>
-              <a:rPr sz="1300" b="0" i="0">
+              <a:rPr sz="1600" b="0" i="0">
                 <a:solidFill>
                   <a:srgbClr val="15171A"/>
                 </a:solidFill>
                 <a:latin typeface="Helvetica Neue"/>
               </a:rPr>
-              <a:t>Every run takes its own wall clock apart</a:t>
+              <a:t>Six phases per run, not one total</a:t>
             </a:r>
           </a:p>
           <a:p>
             <a:pPr algn="l">
               <a:spcAft>
-                <a:spcPts val="300"/>
+                <a:spcPts val="1800"/>
               </a:spcAft>
             </a:pPr>
             <a:r>
-              <a:rPr sz="1300" b="0" i="0">
+              <a:rPr sz="1600" b="0" i="0">
                 <a:solidFill>
                   <a:srgbClr val="15171A"/>
                 </a:solidFill>
                 <a:latin typeface="Helvetica Neue"/>
               </a:rPr>
-              <a:t>into six phases: scheduling, image pull,</a:t>
+              <a:t>Sweeps walked into OOM, failed cells kept</a:t>
             </a:r>
           </a:p>
           <a:p>
             <a:pPr algn="l">
               <a:spcAft>
-                <a:spcPts val="300"/>
+                <a:spcPts val="1800"/>
               </a:spcAft>
             </a:pPr>
             <a:r>
-              <a:rPr sz="1300" b="0" i="0">
+              <a:rPr sz="1600" b="0" i="0">
                 <a:solidFill>
                   <a:srgbClr val="15171A"/>
                 </a:solidFill>
                 <a:latin typeface="Helvetica Neue"/>
               </a:rPr>
-              <a:t>checkpoint load, XLA compile, the steady-</a:t>
+              <a:t>One schema, one JSON per run</a:t>
             </a:r>
           </a:p>
           <a:p>
             <a:pPr algn="l">
               <a:spcAft>
-                <a:spcPts val="300"/>
+                <a:spcPts val="1800"/>
               </a:spcAft>
             </a:pPr>
             <a:r>
-              <a:rPr sz="1300" b="0" i="0">
+              <a:rPr sz="1600" b="0" i="0">
                 <a:solidFill>
                   <a:srgbClr val="15171A"/>
                 </a:solidFill>
                 <a:latin typeface="Helvetica Neue"/>
               </a:rPr>
-              <a:t>state steps, checkpoint write.</a:t>
-            </a:r>
-          </a:p>
-          <a:p>
-            <a:pPr algn="l">
-              <a:spcAft>
-                <a:spcPts val="300"/>
-              </a:spcAft>
-            </a:pPr>
-            <a:r>
-              <a:rPr sz="1300" b="0" i="0">
-                <a:solidFill>
-                  <a:srgbClr val="15171A"/>
-                </a:solidFill>
-                <a:latin typeface="Helvetica Neue"/>
-              </a:rPr>
-              <a:t/>
-            </a:r>
-          </a:p>
-          <a:p>
-            <a:pPr algn="l">
-              <a:spcAft>
-                <a:spcPts val="300"/>
-              </a:spcAft>
-            </a:pPr>
-            <a:r>
-              <a:rPr sz="1300" b="0" i="0">
-                <a:solidFill>
-                  <a:srgbClr val="15171A"/>
-                </a:solidFill>
-                <a:latin typeface="Helvetica Neue"/>
-              </a:rPr>
-              <a:t>Batch and sequence sweeps walked until</a:t>
-            </a:r>
-          </a:p>
-          <a:p>
-            <a:pPr algn="l">
-              <a:spcAft>
-                <a:spcPts val="300"/>
-              </a:spcAft>
-            </a:pPr>
-            <a:r>
-              <a:rPr sz="1300" b="0" i="0">
-                <a:solidFill>
-                  <a:srgbClr val="15171A"/>
-                </a:solidFill>
-                <a:latin typeface="Helvetica Neue"/>
-              </a:rPr>
-              <a:t>the job dies. A failed cell is recorded,</a:t>
-            </a:r>
-          </a:p>
-          <a:p>
-            <a:pPr algn="l">
-              <a:spcAft>
-                <a:spcPts val="300"/>
-              </a:spcAft>
-            </a:pPr>
-            <a:r>
-              <a:rPr sz="1300" b="0" i="0">
-                <a:solidFill>
-                  <a:srgbClr val="15171A"/>
-                </a:solidFill>
-                <a:latin typeface="Helvetica Neue"/>
-              </a:rPr>
-              <a:t>never dropped. The boundary is the</a:t>
-            </a:r>
-          </a:p>
-          <a:p>
-            <a:pPr algn="l">
-              <a:spcAft>
-                <a:spcPts val="300"/>
-              </a:spcAft>
-            </a:pPr>
-            <a:r>
-              <a:rPr sz="1300" b="0" i="0">
-                <a:solidFill>
-                  <a:srgbClr val="15171A"/>
-                </a:solidFill>
-                <a:latin typeface="Helvetica Neue"/>
-              </a:rPr>
-              <a:t>measurement.</a:t>
-            </a:r>
-          </a:p>
-          <a:p>
-            <a:pPr algn="l">
-              <a:spcAft>
-                <a:spcPts val="300"/>
-              </a:spcAft>
-            </a:pPr>
-            <a:r>
-              <a:rPr sz="1300" b="0" i="0">
-                <a:solidFill>
-                  <a:srgbClr val="15171A"/>
-                </a:solidFill>
-                <a:latin typeface="Helvetica Neue"/>
-              </a:rPr>
-              <a:t/>
-            </a:r>
-          </a:p>
-          <a:p>
-            <a:pPr algn="l">
-              <a:spcAft>
-                <a:spcPts val="300"/>
-              </a:spcAft>
-            </a:pPr>
-            <a:r>
-              <a:rPr sz="1300" b="0" i="0">
-                <a:solidFill>
-                  <a:srgbClr val="15171A"/>
-                </a:solidFill>
-                <a:latin typeface="Helvetica Neue"/>
-              </a:rPr>
-              <a:t>One schema, one JSON per run. Every figure</a:t>
-            </a:r>
-          </a:p>
-          <a:p>
-            <a:pPr algn="l">
-              <a:spcAft>
-                <a:spcPts val="300"/>
-              </a:spcAft>
-            </a:pPr>
-            <a:r>
-              <a:rPr sz="1300" b="0" i="0">
-                <a:solidFill>
-                  <a:srgbClr val="15171A"/>
-                </a:solidFill>
-                <a:latin typeface="Helvetica Neue"/>
-              </a:rPr>
-              <a:t>here reads those files and nothing else.</a:t>
+              <a:t>Every figure reads only those files</a:t>
             </a:r>
           </a:p>
         </p:txBody>
@@ -6886,65 +6307,81 @@
           <a:p>
             <a:pPr algn="l">
               <a:spcAft>
-                <a:spcPts val="200"/>
+                <a:spcPts val="400"/>
               </a:spcAft>
             </a:pPr>
             <a:r>
-              <a:rPr sz="1200" b="0" i="0">
+              <a:rPr sz="1300" b="0" i="0">
                 <a:solidFill>
                   <a:srgbClr val="15171A"/>
                 </a:solidFill>
                 <a:latin typeface="Helvetica Neue"/>
               </a:rPr>
-              <a:t>One run reported 93 µs per step and 11 M tokens/s.</a:t>
+              <a:t>93 µs per step. 11 M tokens/s. Impossible,</a:t>
             </a:r>
           </a:p>
           <a:p>
             <a:pPr algn="l">
               <a:spcAft>
-                <a:spcPts val="200"/>
+                <a:spcPts val="400"/>
               </a:spcAft>
             </a:pPr>
             <a:r>
-              <a:rPr sz="1200" b="0" i="0">
+              <a:rPr sz="1300" b="0" i="0">
                 <a:solidFill>
                   <a:srgbClr val="15171A"/>
                 </a:solidFill>
                 <a:latin typeface="Helvetica Neue"/>
               </a:rPr>
-              <a:t>Impossible, yet it carried status "ok".</a:t>
+              <a:t>yet it carried status "ok".</a:t>
             </a:r>
           </a:p>
           <a:p>
             <a:pPr algn="l">
               <a:spcAft>
-                <a:spcPts val="200"/>
+                <a:spcPts val="400"/>
               </a:spcAft>
             </a:pPr>
             <a:r>
-              <a:rPr sz="1200" b="0" i="0">
+              <a:rPr sz="1300" b="0" i="0">
                 <a:solidFill>
                   <a:srgbClr val="15171A"/>
                 </a:solidFill>
                 <a:latin typeface="Helvetica Neue"/>
               </a:rPr>
-              <a:t>Its own notes flagged that it may have timed</a:t>
+              <a:t/>
             </a:r>
           </a:p>
           <a:p>
             <a:pPr algn="l">
               <a:spcAft>
-                <a:spcPts val="200"/>
+                <a:spcPts val="400"/>
               </a:spcAft>
             </a:pPr>
             <a:r>
-              <a:rPr sz="1200" b="0" i="0">
+              <a:rPr sz="1300" b="0" i="0">
                 <a:solidFill>
                   <a:srgbClr val="15171A"/>
                 </a:solidFill>
                 <a:latin typeface="Helvetica Neue"/>
               </a:rPr>
-              <a:t>dispatch, not completion. Discarded, repeated.</a:t>
+              <a:t>Its own notes admitted it may have timed</a:t>
+            </a:r>
+          </a:p>
+          <a:p>
+            <a:pPr algn="l">
+              <a:spcAft>
+                <a:spcPts val="400"/>
+              </a:spcAft>
+            </a:pPr>
+            <a:r>
+              <a:rPr sz="1300" b="0" i="0">
+                <a:solidFill>
+                  <a:srgbClr val="15171A"/>
+                </a:solidFill>
+                <a:latin typeface="Helvetica Neue"/>
+              </a:rPr>
+              <a:t>dispatch, not completion. Discarded.</a:t>
             </a:r>
           </a:p>
         </p:txBody>
@@ -7119,7 +6556,7 @@
                 </a:solidFill>
                 <a:latin typeface="Helvetica Neue"/>
               </a:rPr>
-              <a:t>One Hopper chip kept up with eight TPU chips.</a:t>
+              <a:t>Under load, one GH200 beats eight TPU chips.</a:t>
             </a:r>
           </a:p>
         </p:txBody>
@@ -7133,8 +6570,8 @@
           <p:nvPr/>
         </p:nvGraphicFramePr>
         <p:xfrm>
-          <a:off x="566928" y="1664208"/>
-          <a:ext cx="6629400" cy="2112264"/>
+          <a:off x="566928" y="1691640"/>
+          <a:ext cx="7040880" cy="1920240"/>
         </p:xfrm>
         <a:graphic>
           <a:graphicData uri="http://schemas.openxmlformats.org/drawingml/2006/table">
@@ -7143,12 +6580,12 @@
                 <a:tableStyleId>{5C22544A-7EE6-4342-B048-85BDC9FD1C3A}</a:tableStyleId>
               </a:tblPr>
               <a:tblGrid>
-                <a:gridCol w="2377440"/>
-                <a:gridCol w="1325880"/>
-                <a:gridCol w="1463040"/>
-                <a:gridCol w="1463040"/>
+                <a:gridCol w="2286000"/>
+                <a:gridCol w="1828800"/>
+                <a:gridCol w="1828800"/>
+                <a:gridCol w="1097280"/>
               </a:tblGrid>
-              <a:tr h="301752">
+              <a:tr h="384048">
                 <a:tc>
                   <a:txBody>
                     <a:bodyPr/>
@@ -7156,13 +6593,13 @@
                     <a:p>
                       <a:pPr algn="l"/>
                       <a:r>
-                        <a:rPr sz="1200" b="1">
+                        <a:rPr sz="1300" b="1">
                           <a:solidFill>
                             <a:srgbClr val="FFFFFF"/>
                           </a:solidFill>
                           <a:latin typeface="Helvetica Neue"/>
                         </a:rPr>
-                        <a:t>Qwen3-0.6B · bs 1 · seq 1024</a:t>
+                        <a:t>Qwen3-4B, seq 1024</a:t>
                       </a:r>
                     </a:p>
                   </a:txBody>
@@ -7179,13 +6616,13 @@
                     <a:p>
                       <a:pPr algn="r"/>
                       <a:r>
-                        <a:rPr sz="1200" b="1">
+                        <a:rPr sz="1300" b="1">
                           <a:solidFill>
                             <a:srgbClr val="FFFFFF"/>
                           </a:solidFill>
                           <a:latin typeface="Helvetica Neue"/>
                         </a:rPr>
-                        <a:t>CPU</a:t>
+                        <a:t>GH200  1 chip</a:t>
                       </a:r>
                     </a:p>
                   </a:txBody>
@@ -7202,13 +6639,13 @@
                     <a:p>
                       <a:pPr algn="r"/>
                       <a:r>
-                        <a:rPr sz="1200" b="1">
+                        <a:rPr sz="1300" b="1">
                           <a:solidFill>
                             <a:srgbClr val="FFFFFF"/>
                           </a:solidFill>
                           <a:latin typeface="Helvetica Neue"/>
                         </a:rPr>
-                        <a:t>GPU GH200</a:t>
+                        <a:t>v5e  8 chips</a:t>
                       </a:r>
                     </a:p>
                   </a:txBody>
@@ -7225,13 +6662,13 @@
                     <a:p>
                       <a:pPr algn="r"/>
                       <a:r>
-                        <a:rPr sz="1200" b="1">
+                        <a:rPr sz="1300" b="1">
                           <a:solidFill>
                             <a:srgbClr val="FFFFFF"/>
                           </a:solidFill>
                           <a:latin typeface="Helvetica Neue"/>
                         </a:rPr>
-                        <a:t>TPU v5e 2×4</a:t>
+                        <a:t>ratio</a:t>
                       </a:r>
                     </a:p>
                   </a:txBody>
@@ -7242,7 +6679,7 @@
                   </a:tcPr>
                 </a:tc>
               </a:tr>
-              <a:tr h="301752">
+              <a:tr h="384048">
                 <a:tc>
                   <a:txBody>
                     <a:bodyPr/>
@@ -7250,13 +6687,13 @@
                     <a:p>
                       <a:pPr algn="l"/>
                       <a:r>
-                        <a:rPr sz="1200">
+                        <a:rPr sz="1300">
                           <a:solidFill>
                             <a:srgbClr val="15171A"/>
                           </a:solidFill>
                           <a:latin typeface="Helvetica Neue"/>
                         </a:rPr>
-                        <a:t>chips</a:t>
+                        <a:t>batch 8</a:t>
                       </a:r>
                     </a:p>
                   </a:txBody>
@@ -7273,13 +6710,36 @@
                     <a:p>
                       <a:pPr algn="r"/>
                       <a:r>
-                        <a:rPr sz="1200">
+                        <a:rPr sz="1300" b="1">
+                          <a:solidFill>
+                            <a:srgbClr val="E8590C"/>
+                          </a:solidFill>
+                          <a:latin typeface="Helvetica Neue"/>
+                        </a:rPr>
+                        <a:t>11,557 tok/s</a:t>
+                      </a:r>
+                    </a:p>
+                  </a:txBody>
+                  <a:tcPr anchor="ctr" marL="82296" marR="82296" marT="9144" marB="9144">
+                    <a:solidFill>
+                      <a:srgbClr val="FEF3EA"/>
+                    </a:solidFill>
+                  </a:tcPr>
+                </a:tc>
+                <a:tc>
+                  <a:txBody>
+                    <a:bodyPr/>
+                    <a:lstStyle/>
+                    <a:p>
+                      <a:pPr algn="r"/>
+                      <a:r>
+                        <a:rPr sz="1300">
                           <a:solidFill>
                             <a:srgbClr val="15171A"/>
                           </a:solidFill>
                           <a:latin typeface="Helvetica Neue"/>
                         </a:rPr>
-                        <a:t>-</a:t>
+                        <a:t>4,678 tok/s</a:t>
                       </a:r>
                     </a:p>
                   </a:txBody>
@@ -7296,13 +6756,61 @@
                     <a:p>
                       <a:pPr algn="r"/>
                       <a:r>
-                        <a:rPr sz="1200" b="1">
+                        <a:rPr sz="1300">
+                          <a:solidFill>
+                            <a:srgbClr val="15171A"/>
+                          </a:solidFill>
+                          <a:latin typeface="Helvetica Neue"/>
+                        </a:rPr>
+                        <a:t>2.5x</a:t>
+                      </a:r>
+                    </a:p>
+                  </a:txBody>
+                  <a:tcPr anchor="ctr" marL="82296" marR="82296" marT="9144" marB="9144">
+                    <a:solidFill>
+                      <a:srgbClr val="FFFFFF"/>
+                    </a:solidFill>
+                  </a:tcPr>
+                </a:tc>
+              </a:tr>
+              <a:tr h="384048">
+                <a:tc>
+                  <a:txBody>
+                    <a:bodyPr/>
+                    <a:lstStyle/>
+                    <a:p>
+                      <a:pPr algn="l"/>
+                      <a:r>
+                        <a:rPr sz="1300">
+                          <a:solidFill>
+                            <a:srgbClr val="15171A"/>
+                          </a:solidFill>
+                          <a:latin typeface="Helvetica Neue"/>
+                        </a:rPr>
+                        <a:t>batch 16</a:t>
+                      </a:r>
+                    </a:p>
+                  </a:txBody>
+                  <a:tcPr anchor="ctr" marL="82296" marR="82296" marT="9144" marB="9144">
+                    <a:solidFill>
+                      <a:srgbClr val="FFFFFF"/>
+                    </a:solidFill>
+                  </a:tcPr>
+                </a:tc>
+                <a:tc>
+                  <a:txBody>
+                    <a:bodyPr/>
+                    <a:lstStyle/>
+                    <a:p>
+                      <a:pPr algn="r"/>
+                      <a:r>
+                        <a:rPr sz="1300" b="1">
                           <a:solidFill>
                             <a:srgbClr val="E8590C"/>
                           </a:solidFill>
                           <a:latin typeface="Helvetica Neue"/>
                         </a:rPr>
-                        <a:t>1</a:t>
+                        <a:t>12,504 tok/s</a:t>
                       </a:r>
                     </a:p>
                   </a:txBody>
@@ -7319,38 +6827,13 @@
                     <a:p>
                       <a:pPr algn="r"/>
                       <a:r>
-                        <a:rPr sz="1200">
+                        <a:rPr sz="1300">
                           <a:solidFill>
                             <a:srgbClr val="15171A"/>
                           </a:solidFill>
                           <a:latin typeface="Helvetica Neue"/>
                         </a:rPr>
-                        <a:t>8</a:t>
-                      </a:r>
-                    </a:p>
-                  </a:txBody>
-                  <a:tcPr anchor="ctr" marL="82296" marR="82296" marT="9144" marB="9144">
-                    <a:solidFill>
-                      <a:srgbClr val="FFFFFF"/>
-                    </a:solidFill>
-                  </a:tcPr>
-                </a:tc>
-              </a:tr>
-              <a:tr h="301752">
-                <a:tc>
-                  <a:txBody>
-                    <a:bodyPr/>
-                    <a:lstStyle/>
-                    <a:p>
-                      <a:pPr algn="l"/>
-                      <a:r>
-                        <a:rPr sz="1200">
-                          <a:solidFill>
-                            <a:srgbClr val="15171A"/>
-                          </a:solidFill>
-                          <a:latin typeface="Helvetica Neue"/>
-                        </a:rPr>
-                        <a:t>median step</a:t>
+                        <a:t>4,596 tok/s</a:t>
                       </a:r>
                     </a:p>
                   </a:txBody>
@@ -7367,13 +6850,38 @@
                     <a:p>
                       <a:pPr algn="r"/>
                       <a:r>
-                        <a:rPr sz="1200">
+                        <a:rPr sz="1300">
                           <a:solidFill>
                             <a:srgbClr val="15171A"/>
                           </a:solidFill>
                           <a:latin typeface="Helvetica Neue"/>
                         </a:rPr>
-                        <a:t>18.99 s</a:t>
+                        <a:t>2.7x</a:t>
+                      </a:r>
+                    </a:p>
+                  </a:txBody>
+                  <a:tcPr anchor="ctr" marL="82296" marR="82296" marT="9144" marB="9144">
+                    <a:solidFill>
+                      <a:srgbClr val="FFFFFF"/>
+                    </a:solidFill>
+                  </a:tcPr>
+                </a:tc>
+              </a:tr>
+              <a:tr h="384048">
+                <a:tc>
+                  <a:txBody>
+                    <a:bodyPr/>
+                    <a:lstStyle/>
+                    <a:p>
+                      <a:pPr algn="l"/>
+                      <a:r>
+                        <a:rPr sz="1300">
+                          <a:solidFill>
+                            <a:srgbClr val="15171A"/>
+                          </a:solidFill>
+                          <a:latin typeface="Helvetica Neue"/>
+                        </a:rPr>
+                        <a:t>batch 32</a:t>
                       </a:r>
                     </a:p>
                   </a:txBody>
@@ -7390,13 +6898,13 @@
                     <a:p>
                       <a:pPr algn="r"/>
                       <a:r>
-                        <a:rPr sz="1200" b="1">
+                        <a:rPr sz="1300" b="1">
                           <a:solidFill>
                             <a:srgbClr val="E8590C"/>
                           </a:solidFill>
                           <a:latin typeface="Helvetica Neue"/>
                         </a:rPr>
-                        <a:t>0.0798 s</a:t>
+                        <a:t>13,218 tok/s</a:t>
                       </a:r>
                     </a:p>
                   </a:txBody>
@@ -7413,38 +6921,13 @@
                     <a:p>
                       <a:pPr algn="r"/>
                       <a:r>
-                        <a:rPr sz="1200">
+                        <a:rPr sz="1300">
                           <a:solidFill>
                             <a:srgbClr val="15171A"/>
                           </a:solidFill>
                           <a:latin typeface="Helvetica Neue"/>
                         </a:rPr>
-                        <a:t>0.0800 s</a:t>
-                      </a:r>
-                    </a:p>
-                  </a:txBody>
-                  <a:tcPr anchor="ctr" marL="82296" marR="82296" marT="9144" marB="9144">
-                    <a:solidFill>
-                      <a:srgbClr val="FFFFFF"/>
-                    </a:solidFill>
-                  </a:tcPr>
-                </a:tc>
-              </a:tr>
-              <a:tr h="301752">
-                <a:tc>
-                  <a:txBody>
-                    <a:bodyPr/>
-                    <a:lstStyle/>
-                    <a:p>
-                      <a:pPr algn="l"/>
-                      <a:r>
-                        <a:rPr sz="1200">
-                          <a:solidFill>
-                            <a:srgbClr val="15171A"/>
-                          </a:solidFill>
-                          <a:latin typeface="Helvetica Neue"/>
-                        </a:rPr>
-                        <a:t>throughput</a:t>
+                        <a:t>out of memory</a:t>
                       </a:r>
                     </a:p>
                   </a:txBody>
@@ -7461,13 +6944,38 @@
                     <a:p>
                       <a:pPr algn="r"/>
                       <a:r>
-                        <a:rPr sz="1200">
+                        <a:rPr sz="1300">
                           <a:solidFill>
                             <a:srgbClr val="15171A"/>
                           </a:solidFill>
                           <a:latin typeface="Helvetica Neue"/>
                         </a:rPr>
-                        <a:t>54</a:t>
+                        <a:t/>
+                      </a:r>
+                    </a:p>
+                  </a:txBody>
+                  <a:tcPr anchor="ctr" marL="82296" marR="82296" marT="9144" marB="9144">
+                    <a:solidFill>
+                      <a:srgbClr val="FFFFFF"/>
+                    </a:solidFill>
+                  </a:tcPr>
+                </a:tc>
+              </a:tr>
+              <a:tr h="384048">
+                <a:tc>
+                  <a:txBody>
+                    <a:bodyPr/>
+                    <a:lstStyle/>
+                    <a:p>
+                      <a:pPr algn="l"/>
+                      <a:r>
+                        <a:rPr sz="1300">
+                          <a:solidFill>
+                            <a:srgbClr val="15171A"/>
+                          </a:solidFill>
+                          <a:latin typeface="Helvetica Neue"/>
+                        </a:rPr>
+                        <a:t>batch 64</a:t>
                       </a:r>
                     </a:p>
                   </a:txBody>
@@ -7484,13 +6992,13 @@
                     <a:p>
                       <a:pPr algn="r"/>
                       <a:r>
-                        <a:rPr sz="1200" b="1">
+                        <a:rPr sz="1300" b="1">
                           <a:solidFill>
                             <a:srgbClr val="E8590C"/>
                           </a:solidFill>
                           <a:latin typeface="Helvetica Neue"/>
                         </a:rPr>
-                        <a:t>12,834</a:t>
+                        <a:t>out of memory</a:t>
                       </a:r>
                     </a:p>
                   </a:txBody>
@@ -7507,38 +7015,13 @@
                     <a:p>
                       <a:pPr algn="r"/>
                       <a:r>
-                        <a:rPr sz="1200">
+                        <a:rPr sz="1300">
                           <a:solidFill>
                             <a:srgbClr val="15171A"/>
                           </a:solidFill>
                           <a:latin typeface="Helvetica Neue"/>
                         </a:rPr>
-                        <a:t>12,804</a:t>
-                      </a:r>
-                    </a:p>
-                  </a:txBody>
-                  <a:tcPr anchor="ctr" marL="82296" marR="82296" marT="9144" marB="9144">
-                    <a:solidFill>
-                      <a:srgbClr val="FFFFFF"/>
-                    </a:solidFill>
-                  </a:tcPr>
-                </a:tc>
-              </a:tr>
-              <a:tr h="301752">
-                <a:tc>
-                  <a:txBody>
-                    <a:bodyPr/>
-                    <a:lstStyle/>
-                    <a:p>
-                      <a:pPr algn="l"/>
-                      <a:r>
-                        <a:rPr sz="1200">
-                          <a:solidFill>
-                            <a:srgbClr val="15171A"/>
-                          </a:solidFill>
-                          <a:latin typeface="Helvetica Neue"/>
-                        </a:rPr>
-                        <a:t>speedup vs CPU</a:t>
+                        <a:t/>
                       </a:r>
                     </a:p>
                   </a:txBody>
@@ -7555,247 +7038,13 @@
                     <a:p>
                       <a:pPr algn="r"/>
                       <a:r>
-                        <a:rPr sz="1200">
+                        <a:rPr sz="1300">
                           <a:solidFill>
                             <a:srgbClr val="15171A"/>
                           </a:solidFill>
                           <a:latin typeface="Helvetica Neue"/>
                         </a:rPr>
-                        <a:t>1.0×</a:t>
-                      </a:r>
-                    </a:p>
-                  </a:txBody>
-                  <a:tcPr anchor="ctr" marL="82296" marR="82296" marT="9144" marB="9144">
-                    <a:solidFill>
-                      <a:srgbClr val="FFFFFF"/>
-                    </a:solidFill>
-                  </a:tcPr>
-                </a:tc>
-                <a:tc>
-                  <a:txBody>
-                    <a:bodyPr/>
-                    <a:lstStyle/>
-                    <a:p>
-                      <a:pPr algn="r"/>
-                      <a:r>
-                        <a:rPr sz="1200" b="1">
-                          <a:solidFill>
-                            <a:srgbClr val="E8590C"/>
-                          </a:solidFill>
-                          <a:latin typeface="Helvetica Neue"/>
-                        </a:rPr>
-                        <a:t>238×</a:t>
-                      </a:r>
-                    </a:p>
-                  </a:txBody>
-                  <a:tcPr anchor="ctr" marL="82296" marR="82296" marT="9144" marB="9144">
-                    <a:solidFill>
-                      <a:srgbClr val="FEF3EA"/>
-                    </a:solidFill>
-                  </a:tcPr>
-                </a:tc>
-                <a:tc>
-                  <a:txBody>
-                    <a:bodyPr/>
-                    <a:lstStyle/>
-                    <a:p>
-                      <a:pPr algn="r"/>
-                      <a:r>
-                        <a:rPr sz="1200">
-                          <a:solidFill>
-                            <a:srgbClr val="15171A"/>
-                          </a:solidFill>
-                          <a:latin typeface="Helvetica Neue"/>
-                        </a:rPr>
-                        <a:t>237×</a:t>
-                      </a:r>
-                    </a:p>
-                  </a:txBody>
-                  <a:tcPr anchor="ctr" marL="82296" marR="82296" marT="9144" marB="9144">
-                    <a:solidFill>
-                      <a:srgbClr val="FFFFFF"/>
-                    </a:solidFill>
-                  </a:tcPr>
-                </a:tc>
-              </a:tr>
-              <a:tr h="301752">
-                <a:tc>
-                  <a:txBody>
-                    <a:bodyPr/>
-                    <a:lstStyle/>
-                    <a:p>
-                      <a:pPr algn="l"/>
-                      <a:r>
-                        <a:rPr sz="1200">
-                          <a:solidFill>
-                            <a:srgbClr val="15171A"/>
-                          </a:solidFill>
-                          <a:latin typeface="Helvetica Neue"/>
-                        </a:rPr>
-                        <a:t>peak memory</a:t>
-                      </a:r>
-                    </a:p>
-                  </a:txBody>
-                  <a:tcPr anchor="ctr" marL="82296" marR="82296" marT="9144" marB="9144">
-                    <a:solidFill>
-                      <a:srgbClr val="FFFFFF"/>
-                    </a:solidFill>
-                  </a:tcPr>
-                </a:tc>
-                <a:tc>
-                  <a:txBody>
-                    <a:bodyPr/>
-                    <a:lstStyle/>
-                    <a:p>
-                      <a:pPr algn="r"/>
-                      <a:r>
-                        <a:rPr sz="1200">
-                          <a:solidFill>
-                            <a:srgbClr val="15171A"/>
-                          </a:solidFill>
-                          <a:latin typeface="Helvetica Neue"/>
-                        </a:rPr>
-                        <a:t>66 %</a:t>
-                      </a:r>
-                    </a:p>
-                  </a:txBody>
-                  <a:tcPr anchor="ctr" marL="82296" marR="82296" marT="9144" marB="9144">
-                    <a:solidFill>
-                      <a:srgbClr val="FFFFFF"/>
-                    </a:solidFill>
-                  </a:tcPr>
-                </a:tc>
-                <a:tc>
-                  <a:txBody>
-                    <a:bodyPr/>
-                    <a:lstStyle/>
-                    <a:p>
-                      <a:pPr algn="r"/>
-                      <a:r>
-                        <a:rPr sz="1200" b="1">
-                          <a:solidFill>
-                            <a:srgbClr val="E8590C"/>
-                          </a:solidFill>
-                          <a:latin typeface="Helvetica Neue"/>
-                        </a:rPr>
-                        <a:t>5.0 %</a:t>
-                      </a:r>
-                    </a:p>
-                  </a:txBody>
-                  <a:tcPr anchor="ctr" marL="82296" marR="82296" marT="9144" marB="9144">
-                    <a:solidFill>
-                      <a:srgbClr val="FEF3EA"/>
-                    </a:solidFill>
-                  </a:tcPr>
-                </a:tc>
-                <a:tc>
-                  <a:txBody>
-                    <a:bodyPr/>
-                    <a:lstStyle/>
-                    <a:p>
-                      <a:pPr algn="r"/>
-                      <a:r>
-                        <a:rPr sz="1200">
-                          <a:solidFill>
-                            <a:srgbClr val="15171A"/>
-                          </a:solidFill>
-                          <a:latin typeface="Helvetica Neue"/>
-                        </a:rPr>
-                        <a:t>7.3 %</a:t>
-                      </a:r>
-                    </a:p>
-                  </a:txBody>
-                  <a:tcPr anchor="ctr" marL="82296" marR="82296" marT="9144" marB="9144">
-                    <a:solidFill>
-                      <a:srgbClr val="FFFFFF"/>
-                    </a:solidFill>
-                  </a:tcPr>
-                </a:tc>
-              </a:tr>
-              <a:tr h="301752">
-                <a:tc>
-                  <a:txBody>
-                    <a:bodyPr/>
-                    <a:lstStyle/>
-                    <a:p>
-                      <a:pPr algn="l"/>
-                      <a:r>
-                        <a:rPr sz="1200">
-                          <a:solidFill>
-                            <a:srgbClr val="15171A"/>
-                          </a:solidFill>
-                          <a:latin typeface="Helvetica Neue"/>
-                        </a:rPr>
-                        <a:t>USD / 1 000 steps</a:t>
-                      </a:r>
-                    </a:p>
-                  </a:txBody>
-                  <a:tcPr anchor="ctr" marL="82296" marR="82296" marT="9144" marB="9144">
-                    <a:solidFill>
-                      <a:srgbClr val="FFFFFF"/>
-                    </a:solidFill>
-                  </a:tcPr>
-                </a:tc>
-                <a:tc>
-                  <a:txBody>
-                    <a:bodyPr/>
-                    <a:lstStyle/>
-                    <a:p>
-                      <a:pPr algn="r"/>
-                      <a:r>
-                        <a:rPr sz="1200">
-                          <a:solidFill>
-                            <a:srgbClr val="15171A"/>
-                          </a:solidFill>
-                          <a:latin typeface="Helvetica Neue"/>
-                        </a:rPr>
-                        <a:t>$6.05</a:t>
-                      </a:r>
-                    </a:p>
-                  </a:txBody>
-                  <a:tcPr anchor="ctr" marL="82296" marR="82296" marT="9144" marB="9144">
-                    <a:solidFill>
-                      <a:srgbClr val="FFFFFF"/>
-                    </a:solidFill>
-                  </a:tcPr>
-                </a:tc>
-                <a:tc>
-                  <a:txBody>
-                    <a:bodyPr/>
-                    <a:lstStyle/>
-                    <a:p>
-                      <a:pPr algn="r"/>
-                      <a:r>
-                        <a:rPr sz="1200" b="1">
-                          <a:solidFill>
-                            <a:srgbClr val="E8590C"/>
-                          </a:solidFill>
-                          <a:latin typeface="Helvetica Neue"/>
-                        </a:rPr>
-                        <a:t>$0.131</a:t>
-                      </a:r>
-                    </a:p>
-                  </a:txBody>
-                  <a:tcPr anchor="ctr" marL="82296" marR="82296" marT="9144" marB="9144">
-                    <a:solidFill>
-                      <a:srgbClr val="FEF3EA"/>
-                    </a:solidFill>
-                  </a:tcPr>
-                </a:tc>
-                <a:tc>
-                  <a:txBody>
-                    <a:bodyPr/>
-                    <a:lstStyle/>
-                    <a:p>
-                      <a:pPr algn="r"/>
-                      <a:r>
-                        <a:rPr sz="1200">
-                          <a:solidFill>
-                            <a:srgbClr val="15171A"/>
-                          </a:solidFill>
-                          <a:latin typeface="Helvetica Neue"/>
-                        </a:rPr>
-                        <a:t>$1.03</a:t>
+                        <a:t/>
                       </a:r>
                     </a:p>
                   </a:txBody>
@@ -7818,8 +7067,8 @@
         </p:nvSpPr>
         <p:spPr>
           <a:xfrm>
-            <a:off x="7955279" y="1691640"/>
-            <a:ext cx="3657600" cy="777240"/>
+            <a:off x="566928" y="3794760"/>
+            <a:ext cx="6858000" cy="685800"/>
           </a:xfrm>
           <a:prstGeom prst="rect">
             <a:avLst/>
@@ -7834,173 +7083,24 @@
           <a:p>
             <a:pPr algn="l">
               <a:spcAft>
-                <a:spcPts val="0"/>
+                <a:spcPts val="300"/>
               </a:spcAft>
             </a:pPr>
             <a:r>
-              <a:rPr sz="4000" b="1" i="0">
-                <a:solidFill>
-                  <a:srgbClr val="E8590C"/>
+              <a:rPr sz="1500" b="1" i="0">
+                <a:solidFill>
+                  <a:srgbClr val="15171A"/>
                 </a:solidFill>
                 <a:latin typeface="Helvetica Neue"/>
               </a:rPr>
-              <a:t>0.23 %</a:t>
-            </a:r>
-          </a:p>
-        </p:txBody>
-      </p:sp>
-      <p:sp>
-        <p:nvSpPr>
-          <p:cNvPr id="8" name="TextBox 7"/>
-          <p:cNvSpPr txBox="1"/>
-          <p:nvPr/>
-        </p:nvSpPr>
-        <p:spPr>
-          <a:xfrm>
-            <a:off x="7955279" y="2350008"/>
-            <a:ext cx="3657600" cy="822960"/>
-          </a:xfrm>
-          <a:prstGeom prst="rect">
-            <a:avLst/>
-          </a:prstGeom>
-          <a:noFill/>
-        </p:spPr>
-        <p:txBody>
-          <a:bodyPr wrap="square" anchor="t">
-            <a:spAutoFit/>
-          </a:bodyPr>
-          <a:lstStyle/>
-          <a:p>
-            <a:pPr algn="l">
-              <a:spcAft>
-                <a:spcPts val="200"/>
-              </a:spcAft>
-            </a:pPr>
-            <a:r>
-              <a:rPr sz="1200" b="0" i="0">
-                <a:solidFill>
-                  <a:srgbClr val="717A85"/>
-                </a:solidFill>
-                <a:latin typeface="Helvetica Neue"/>
-              </a:rPr>
-              <a:t>difference in step time between</a:t>
-            </a:r>
-          </a:p>
-          <a:p>
-            <a:pPr algn="l">
-              <a:spcAft>
-                <a:spcPts val="200"/>
-              </a:spcAft>
-            </a:pPr>
-            <a:r>
-              <a:rPr sz="1200" b="0" i="0">
-                <a:solidFill>
-                  <a:srgbClr val="717A85"/>
-                </a:solidFill>
-                <a:latin typeface="Helvetica Neue"/>
-              </a:rPr>
-              <a:t>one GH200 and eight v5e chips</a:t>
-            </a:r>
-          </a:p>
-        </p:txBody>
-      </p:sp>
-      <p:sp>
-        <p:nvSpPr>
-          <p:cNvPr id="9" name="TextBox 8"/>
-          <p:cNvSpPr txBox="1"/>
-          <p:nvPr/>
-        </p:nvSpPr>
-        <p:spPr>
-          <a:xfrm>
-            <a:off x="7955279" y="2880360"/>
-            <a:ext cx="3657600" cy="777240"/>
-          </a:xfrm>
-          <a:prstGeom prst="rect">
-            <a:avLst/>
-          </a:prstGeom>
-          <a:noFill/>
-        </p:spPr>
-        <p:txBody>
-          <a:bodyPr wrap="square" anchor="t">
-            <a:spAutoFit/>
-          </a:bodyPr>
-          <a:lstStyle/>
-          <a:p>
-            <a:pPr algn="l">
-              <a:spcAft>
-                <a:spcPts val="0"/>
-              </a:spcAft>
-            </a:pPr>
-            <a:r>
-              <a:rPr sz="4000" b="1" i="0">
-                <a:solidFill>
-                  <a:srgbClr val="E8590C"/>
-                </a:solidFill>
-                <a:latin typeface="Helvetica Neue"/>
-              </a:rPr>
-              <a:t>14.6×</a:t>
-            </a:r>
-          </a:p>
-        </p:txBody>
-      </p:sp>
-      <p:sp>
-        <p:nvSpPr>
-          <p:cNvPr id="10" name="TextBox 9"/>
-          <p:cNvSpPr txBox="1"/>
-          <p:nvPr/>
-        </p:nvSpPr>
-        <p:spPr>
-          <a:xfrm>
-            <a:off x="7955279" y="3538728"/>
-            <a:ext cx="3657600" cy="822960"/>
-          </a:xfrm>
-          <a:prstGeom prst="rect">
-            <a:avLst/>
-          </a:prstGeom>
-          <a:noFill/>
-        </p:spPr>
-        <p:txBody>
-          <a:bodyPr wrap="square" anchor="t">
-            <a:spAutoFit/>
-          </a:bodyPr>
-          <a:lstStyle/>
-          <a:p>
-            <a:pPr algn="l">
-              <a:spcAft>
-                <a:spcPts val="200"/>
-              </a:spcAft>
-            </a:pPr>
-            <a:r>
-              <a:rPr sz="1200" b="0" i="0">
-                <a:solidFill>
-                  <a:srgbClr val="717A85"/>
-                </a:solidFill>
-                <a:latin typeface="Helvetica Neue"/>
-              </a:rPr>
-              <a:t>faster checkpoint load from one</a:t>
-            </a:r>
-          </a:p>
-          <a:p>
-            <a:pPr algn="l">
-              <a:spcAft>
-                <a:spcPts val="200"/>
-              </a:spcAft>
-            </a:pPr>
-            <a:r>
-              <a:rPr sz="1200" b="0" i="0">
-                <a:solidFill>
-                  <a:srgbClr val="717A85"/>
-                </a:solidFill>
-                <a:latin typeface="Helvetica Neue"/>
-              </a:rPr>
-              <a:t>manifest line, 31 % off wall clock</a:t>
+              <a:t>At batch 1 both chips idle and tie to within 0.23 %. That tie was an artefact.</a:t>
             </a:r>
           </a:p>
         </p:txBody>
       </p:sp>
       <p:pic>
         <p:nvPicPr>
-          <p:cNvPr id="11" name="Picture 10" descr="slide4-comparison.png"/>
+          <p:cNvPr id="8" name="Picture 7" descr="slide4-sweep.png"/>
           <p:cNvPicPr>
             <a:picLocks noChangeAspect="1"/>
           </p:cNvPicPr>
@@ -8014,8 +7114,8 @@
         </p:blipFill>
         <p:spPr>
           <a:xfrm>
-            <a:off x="566928" y="3913632"/>
-            <a:ext cx="6766560" cy="2829483"/>
+            <a:off x="566928" y="4526280"/>
+            <a:ext cx="6858000" cy="1769806"/>
           </a:xfrm>
           <a:prstGeom prst="rect">
             <a:avLst/>
@@ -8024,14 +7124,108 @@
       </p:pic>
       <p:sp>
         <p:nvSpPr>
-          <p:cNvPr id="12" name="Rounded Rectangle 11"/>
+          <p:cNvPr id="9" name="TextBox 8"/>
+          <p:cNvSpPr txBox="1"/>
+          <p:nvPr/>
+        </p:nvSpPr>
+        <p:spPr>
+          <a:xfrm>
+            <a:off x="7955279" y="1691640"/>
+            <a:ext cx="3657600" cy="777240"/>
+          </a:xfrm>
+          <a:prstGeom prst="rect">
+            <a:avLst/>
+          </a:prstGeom>
+          <a:noFill/>
+        </p:spPr>
+        <p:txBody>
+          <a:bodyPr wrap="square" anchor="t">
+            <a:spAutoFit/>
+          </a:bodyPr>
+          <a:lstStyle/>
+          <a:p>
+            <a:pPr algn="l">
+              <a:spcAft>
+                <a:spcPts val="0"/>
+              </a:spcAft>
+            </a:pPr>
+            <a:r>
+              <a:rPr sz="5200" b="1" i="0">
+                <a:solidFill>
+                  <a:srgbClr val="E8590C"/>
+                </a:solidFill>
+                <a:latin typeface="Helvetica Neue"/>
+              </a:rPr>
+              <a:t>2.7x</a:t>
+            </a:r>
+          </a:p>
+        </p:txBody>
+      </p:sp>
+      <p:sp>
+        <p:nvSpPr>
+          <p:cNvPr id="10" name="TextBox 9"/>
+          <p:cNvSpPr txBox="1"/>
+          <p:nvPr/>
+        </p:nvSpPr>
+        <p:spPr>
+          <a:xfrm>
+            <a:off x="7955279" y="2350008"/>
+            <a:ext cx="3657600" cy="822960"/>
+          </a:xfrm>
+          <a:prstGeom prst="rect">
+            <a:avLst/>
+          </a:prstGeom>
+          <a:noFill/>
+        </p:spPr>
+        <p:txBody>
+          <a:bodyPr wrap="square" anchor="t">
+            <a:spAutoFit/>
+          </a:bodyPr>
+          <a:lstStyle/>
+          <a:p>
+            <a:pPr algn="l">
+              <a:spcAft>
+                <a:spcPts val="200"/>
+              </a:spcAft>
+            </a:pPr>
+            <a:r>
+              <a:rPr sz="1200" b="0" i="0">
+                <a:solidFill>
+                  <a:srgbClr val="717A85"/>
+                </a:solidFill>
+                <a:latin typeface="Helvetica Neue"/>
+              </a:rPr>
+              <a:t>the throughput of an eight-chip v5e</a:t>
+            </a:r>
+          </a:p>
+          <a:p>
+            <a:pPr algn="l">
+              <a:spcAft>
+                <a:spcPts val="200"/>
+              </a:spcAft>
+            </a:pPr>
+            <a:r>
+              <a:rPr sz="1200" b="0" i="0">
+                <a:solidFill>
+                  <a:srgbClr val="717A85"/>
+                </a:solidFill>
+                <a:latin typeface="Helvetica Neue"/>
+              </a:rPr>
+              <a:t>slice, from a single Hopper chip</a:t>
+            </a:r>
+          </a:p>
+        </p:txBody>
+      </p:sp>
+      <p:sp>
+        <p:nvSpPr>
+          <p:cNvPr id="11" name="Rounded Rectangle 10"/>
           <p:cNvSpPr/>
           <p:nvPr/>
         </p:nvSpPr>
         <p:spPr>
           <a:xfrm>
-            <a:off x="7955279" y="4160520"/>
-            <a:ext cx="3657600" cy="2011680"/>
+            <a:off x="7955279" y="3291840"/>
+            <a:ext cx="3657600" cy="1371600"/>
           </a:xfrm>
           <a:prstGeom prst="roundRect">
             <a:avLst>
@@ -8072,13 +7266,13 @@
       </p:sp>
       <p:sp>
         <p:nvSpPr>
-          <p:cNvPr id="13" name="TextBox 12"/>
+          <p:cNvPr id="12" name="TextBox 11"/>
           <p:cNvSpPr txBox="1"/>
           <p:nvPr/>
         </p:nvSpPr>
         <p:spPr>
           <a:xfrm>
-            <a:off x="8229600" y="4343400"/>
+            <a:off x="8229600" y="3474720"/>
             <a:ext cx="3200400" cy="274320"/>
           </a:xfrm>
           <a:prstGeom prst="rect">
@@ -8098,27 +7292,27 @@
               </a:spcAft>
             </a:pPr>
             <a:r>
-              <a:rPr sz="1300" b="1" i="0">
+              <a:rPr sz="1400" b="1" i="0">
                 <a:solidFill>
                   <a:srgbClr val="E8590C"/>
                 </a:solidFill>
                 <a:latin typeface="Helvetica Neue"/>
               </a:rPr>
-              <a:t>The control</a:t>
-            </a:r>
-          </a:p>
-        </p:txBody>
-      </p:sp>
-      <p:sp>
-        <p:nvSpPr>
-          <p:cNvPr id="14" name="TextBox 13"/>
+              <a:t>Memory boundary</a:t>
+            </a:r>
+          </a:p>
+        </p:txBody>
+      </p:sp>
+      <p:sp>
+        <p:nvSpPr>
+          <p:cNvPr id="13" name="TextBox 12"/>
           <p:cNvSpPr txBox="1"/>
           <p:nvPr/>
         </p:nvSpPr>
         <p:spPr>
           <a:xfrm>
-            <a:off x="8229600" y="4681728"/>
-            <a:ext cx="3200400" cy="1463040"/>
+            <a:off x="8229600" y="3794760"/>
+            <a:ext cx="3200400" cy="822960"/>
           </a:xfrm>
           <a:prstGeom prst="rect">
             <a:avLst/>
@@ -8133,129 +7327,207 @@
           <a:p>
             <a:pPr algn="l">
               <a:spcAft>
-                <a:spcPts val="200"/>
+                <a:spcPts val="400"/>
               </a:spcAft>
             </a:pPr>
             <a:r>
-              <a:rPr sz="1150" b="0" i="0">
+              <a:rPr sz="1400" b="0" i="0">
                 <a:solidFill>
                   <a:srgbClr val="15171A"/>
                 </a:solidFill>
                 <a:latin typeface="Helvetica Neue"/>
               </a:rPr>
-              <a:t>Median step time before and</a:t>
+              <a:t>GH200 fails between 32 and 64</a:t>
             </a:r>
           </a:p>
           <a:p>
             <a:pPr algn="l">
               <a:spcAft>
-                <a:spcPts val="200"/>
+                <a:spcPts val="400"/>
               </a:spcAft>
             </a:pPr>
             <a:r>
-              <a:rPr sz="1150" b="0" i="0">
+              <a:rPr sz="1400" b="0" i="0">
                 <a:solidFill>
                   <a:srgbClr val="15171A"/>
                 </a:solidFill>
                 <a:latin typeface="Helvetica Neue"/>
               </a:rPr>
-              <a:t>after the cache:</a:t>
-            </a:r>
-          </a:p>
+              <a:t>v5e fails between 16 and 32</a:t>
+            </a:r>
+          </a:p>
+        </p:txBody>
+      </p:sp>
+      <p:sp>
+        <p:nvSpPr>
+          <p:cNvPr id="14" name="Rounded Rectangle 13"/>
+          <p:cNvSpPr/>
+          <p:nvPr/>
+        </p:nvSpPr>
+        <p:spPr>
+          <a:xfrm>
+            <a:off x="7955279" y="4846320"/>
+            <a:ext cx="3657600" cy="1417320"/>
+          </a:xfrm>
+          <a:prstGeom prst="roundRect">
+            <a:avLst>
+              <a:gd name="adj" fmla="val 4000"/>
+            </a:avLst>
+          </a:prstGeom>
+          <a:solidFill>
+            <a:srgbClr val="FEF3EA"/>
+          </a:solidFill>
+          <a:ln w="9525">
+            <a:solidFill>
+              <a:srgbClr val="E6E9EC"/>
+            </a:solidFill>
+          </a:ln>
+          <a:effectLst/>
+        </p:spPr>
+        <p:style>
+          <a:lnRef idx="1">
+            <a:schemeClr val="accent1"/>
+          </a:lnRef>
+          <a:fillRef idx="3">
+            <a:schemeClr val="accent1"/>
+          </a:fillRef>
+          <a:effectRef idx="2">
+            <a:schemeClr val="accent1"/>
+          </a:effectRef>
+          <a:fontRef idx="minor">
+            <a:schemeClr val="lt1"/>
+          </a:fontRef>
+        </p:style>
+        <p:txBody>
+          <a:bodyPr rtlCol="0" anchor="ctr"/>
+          <a:lstStyle/>
+          <a:p>
+            <a:pPr algn="ctr"/>
+          </a:p>
+        </p:txBody>
+      </p:sp>
+      <p:sp>
+        <p:nvSpPr>
+          <p:cNvPr id="15" name="TextBox 14"/>
+          <p:cNvSpPr txBox="1"/>
+          <p:nvPr/>
+        </p:nvSpPr>
+        <p:spPr>
+          <a:xfrm>
+            <a:off x="8229600" y="5029200"/>
+            <a:ext cx="3200400" cy="274320"/>
+          </a:xfrm>
+          <a:prstGeom prst="rect">
+            <a:avLst/>
+          </a:prstGeom>
+          <a:noFill/>
+        </p:spPr>
+        <p:txBody>
+          <a:bodyPr wrap="square" anchor="t">
+            <a:spAutoFit/>
+          </a:bodyPr>
+          <a:lstStyle/>
           <a:p>
             <a:pPr algn="l">
               <a:spcAft>
-                <a:spcPts val="200"/>
+                <a:spcPts val="500"/>
               </a:spcAft>
             </a:pPr>
             <a:r>
-              <a:rPr sz="1150" b="0" i="0">
-                <a:solidFill>
-                  <a:srgbClr val="15171A"/>
+              <a:rPr sz="1400" b="1" i="0">
+                <a:solidFill>
+                  <a:srgbClr val="E8590C"/>
                 </a:solidFill>
                 <a:latin typeface="Helvetica Neue"/>
               </a:rPr>
-              <a:t/>
-            </a:r>
-          </a:p>
+              <a:t>The mitigation, controlled</a:t>
+            </a:r>
+          </a:p>
+        </p:txBody>
+      </p:sp>
+      <p:sp>
+        <p:nvSpPr>
+          <p:cNvPr id="16" name="TextBox 15"/>
+          <p:cNvSpPr txBox="1"/>
+          <p:nvPr/>
+        </p:nvSpPr>
+        <p:spPr>
+          <a:xfrm>
+            <a:off x="8229600" y="5349240"/>
+            <a:ext cx="3200400" cy="914400"/>
+          </a:xfrm>
+          <a:prstGeom prst="rect">
+            <a:avLst/>
+          </a:prstGeom>
+          <a:noFill/>
+        </p:spPr>
+        <p:txBody>
+          <a:bodyPr wrap="square" anchor="t">
+            <a:spAutoFit/>
+          </a:bodyPr>
+          <a:lstStyle/>
           <a:p>
             <a:pPr algn="l">
               <a:spcAft>
-                <a:spcPts val="200"/>
+                <a:spcPts val="300"/>
               </a:spcAft>
             </a:pPr>
             <a:r>
-              <a:rPr sz="1150" b="0" i="0">
+              <a:rPr sz="1300" b="0" i="0">
                 <a:solidFill>
                   <a:srgbClr val="15171A"/>
                 </a:solidFill>
                 <a:latin typeface="Helvetica Neue"/>
               </a:rPr>
-              <a:t>1.75122 s  to  1.75117 s</a:t>
+              <a:t>File cache: load 14.6x faster,</a:t>
             </a:r>
           </a:p>
           <a:p>
             <a:pPr algn="l">
               <a:spcAft>
-                <a:spcPts val="200"/>
+                <a:spcPts val="300"/>
               </a:spcAft>
             </a:pPr>
             <a:r>
-              <a:rPr sz="1150" b="0" i="0">
+              <a:rPr sz="1300" b="0" i="0">
                 <a:solidFill>
                   <a:srgbClr val="15171A"/>
                 </a:solidFill>
                 <a:latin typeface="Helvetica Neue"/>
               </a:rPr>
-              <a:t/>
+              <a:t>31 % off wall clock.</a:t>
             </a:r>
           </a:p>
           <a:p>
             <a:pPr algn="l">
               <a:spcAft>
-                <a:spcPts val="200"/>
+                <a:spcPts val="300"/>
               </a:spcAft>
             </a:pPr>
             <a:r>
-              <a:rPr sz="1150" b="0" i="0">
+              <a:rPr sz="1300" b="0" i="0">
                 <a:solidFill>
                   <a:srgbClr val="15171A"/>
                 </a:solidFill>
                 <a:latin typeface="Helvetica Neue"/>
               </a:rPr>
-              <a:t>The computation did not move.</a:t>
+              <a:t>Step time unchanged to the</a:t>
             </a:r>
           </a:p>
           <a:p>
             <a:pPr algn="l">
               <a:spcAft>
-                <a:spcPts val="200"/>
+                <a:spcPts val="300"/>
               </a:spcAft>
             </a:pPr>
             <a:r>
-              <a:rPr sz="1150" b="0" i="0">
+              <a:rPr sz="1300" b="0" i="0">
                 <a:solidFill>
                   <a:srgbClr val="15171A"/>
                 </a:solidFill>
                 <a:latin typeface="Helvetica Neue"/>
               </a:rPr>
-              <a:t>Only I/O did, so the saving is</a:t>
-            </a:r>
-          </a:p>
-          <a:p>
-            <a:pPr algn="l">
-              <a:spcAft>
-                <a:spcPts val="200"/>
-              </a:spcAft>
-            </a:pPr>
-            <a:r>
-              <a:rPr sz="1150" b="0" i="0">
-                <a:solidFill>
-                  <a:srgbClr val="15171A"/>
-                </a:solidFill>
-                <a:latin typeface="Helvetica Neue"/>
-              </a:rPr>
-              <a:t>attributable, not noise.</a:t>
+              <a:t>fourth decimal.</a:t>
             </a:r>
           </a:p>
         </p:txBody>
@@ -8708,9 +7980,9 @@
               </a:spcAft>
             </a:pPr>
             <a:r>
-              <a:rPr sz="3400" b="1" i="0">
-                <a:solidFill>
-                  <a:srgbClr val="E8590C"/>
+              <a:rPr sz="2600" b="1" i="0">
+                <a:solidFill>
+                  <a:srgbClr val="15171A"/>
                 </a:solidFill>
                 <a:latin typeface="Helvetica Neue"/>
               </a:rPr>
@@ -8921,9 +8193,9 @@
               </a:spcAft>
             </a:pPr>
             <a:r>
-              <a:rPr sz="3400" b="1" i="0">
-                <a:solidFill>
-                  <a:srgbClr val="E8590C"/>
+              <a:rPr sz="2600" b="1" i="0">
+                <a:solidFill>
+                  <a:srgbClr val="15171A"/>
                 </a:solidFill>
                 <a:latin typeface="Helvetica Neue"/>
               </a:rPr>
@@ -9208,8 +8480,8 @@
         </p:nvSpPr>
         <p:spPr>
           <a:xfrm>
-            <a:off x="6217920" y="4315968"/>
-            <a:ext cx="5394960" cy="1691640"/>
+            <a:off x="6217920" y="4261104"/>
+            <a:ext cx="5394960" cy="1874519"/>
           </a:xfrm>
           <a:prstGeom prst="roundRect">
             <a:avLst>
@@ -9256,7 +8528,7 @@
         </p:nvSpPr>
         <p:spPr>
           <a:xfrm>
-            <a:off x="6492240" y="4480560"/>
+            <a:off x="6492240" y="4425696"/>
             <a:ext cx="4937760" cy="320040"/>
           </a:xfrm>
           <a:prstGeom prst="rect">
@@ -9295,8 +8567,8 @@
         </p:nvSpPr>
         <p:spPr>
           <a:xfrm>
-            <a:off x="6492240" y="4828032"/>
-            <a:ext cx="4937760" cy="1097280"/>
+            <a:off x="6492240" y="4773168"/>
+            <a:ext cx="4937760" cy="1280160"/>
           </a:xfrm>
           <a:prstGeom prst="rect">
             <a:avLst/>
@@ -9321,7 +8593,7 @@
                 </a:solidFill>
                 <a:latin typeface="Helvetica Neue"/>
               </a:rPr>
-              <a:t>At $0.131 per 1 000 steps on one GH200,</a:t>
+              <a:t>On the real 4B workload one GH200 runs 2.7x faster</a:t>
             </a:r>
           </a:p>
           <a:p>
@@ -9337,7 +8609,7 @@
                 </a:solidFill>
                 <a:latin typeface="Helvetica Neue"/>
               </a:rPr>
-              <a:t>8× cheaper than eight TPU chips at the same</a:t>
+              <a:t>than eight TPU chips and costs 10x less:</a:t>
             </a:r>
           </a:p>
           <a:p>
@@ -9353,7 +8625,7 @@
                 </a:solidFill>
                 <a:latin typeface="Helvetica Neue"/>
               </a:rPr>
-              <a:t>speed, self-hosting is not the cost problem we</a:t>
+              <a:t>$0.56 against $5.72 per 1 000 steps.</a:t>
             </a:r>
           </a:p>
           <a:p>
@@ -9369,7 +8641,7 @@
                 </a:solidFill>
                 <a:latin typeface="Helvetica Neue"/>
               </a:rPr>
-              <a:t>assumed. The real cost is fixed overhead per job:</a:t>
+              <a:t/>
             </a:r>
           </a:p>
           <a:p>
@@ -9385,7 +8657,23 @@
                 </a:solidFill>
                 <a:latin typeface="Helvetica Neue"/>
               </a:rPr>
-              <a:t>an architecture decision, not a hardware purchase.</a:t>
+              <a:t>Self-hosting is not the cost problem we assumed.</a:t>
+            </a:r>
+          </a:p>
+          <a:p>
+            <a:pPr algn="l">
+              <a:spcAft>
+                <a:spcPts val="200"/>
+              </a:spcAft>
+            </a:pPr>
+            <a:r>
+              <a:rPr sz="1250" b="0" i="0">
+                <a:solidFill>
+                  <a:srgbClr val="15171A"/>
+                </a:solidFill>
+                <a:latin typeface="Helvetica Neue"/>
+              </a:rPr>
+              <a:t>The real cost is fixed overhead per job.</a:t>
             </a:r>
           </a:p>
         </p:txBody>
@@ -9424,7 +8712,7 @@
                 </a:solidFill>
                 <a:latin typeface="Helvetica Neue"/>
               </a:rPr>
-              <a:t>9 measured runs · 15 commits · github.com/RN0L/me344-qwen3-icd10-profiling</a:t>
+              <a:t>13 measured runs  ·  github.com/RN0L/me344-qwen3-icd10-profiling</a:t>
             </a:r>
           </a:p>
         </p:txBody>

--- a/slides/ME344_Final_Arnold_Hambuch.pptx
+++ b/slides/ME344_Final_Arnold_Hambuch.pptx
@@ -506,7 +506,7 @@
           <a:lstStyle/>
           <a:p>
             <a:r>
-              <a:t>LEONARD  (~50 s)</a:t>
+              <a:t>LEONARD  ~2:15   ·   full deck runs ~12 min; the [cut] blocks take it to ~8</a:t>
             </a:r>
           </a:p>
           <a:p/>
@@ -538,7 +538,7 @@
           </a:p>
           <a:p>
             <a:r>
-              <a:t>bug, it is fraud exposure.</a:t>
+              <a:t>bug, it is fraud exposure. [cut]</a:t>
             </a:r>
           </a:p>
           <a:p/>
@@ -565,28 +565,89 @@
           <a:p/>
           <a:p>
             <a:r>
-              <a:t>The workload is a LoRA fine-tune of Qwen3 on CodiEsp: a thousand real Spanish</a:t>
-            </a:r>
-          </a:p>
-          <a:p>
-            <a:r>
-              <a:t>clinical case reports annotated with ICD-10 codes. Eight gigabytes of weights,</a:t>
-            </a:r>
-          </a:p>
-          <a:p>
-            <a:r>
-              <a:t>cases up to two and a half thousand tokens, three backends, one JAX program.</a:t>
+              <a:t>[point at the left card, then the grey line on the right]</a:t>
+            </a:r>
+          </a:p>
+          <a:p>
+            <a:r>
+              <a:t>The workload is a LoRA fine-tune of Qwen3-4B on CodiEsp: 500 training and</a:t>
+            </a:r>
+          </a:p>
+          <a:p>
+            <a:r>
+              <a:t>250 development case reports, real Spanish clinical text with ICD-10 codes</a:t>
+            </a:r>
+          </a:p>
+          <a:p>
+            <a:r>
+              <a:t>attached. Eight gigabytes of weights before a single activation.</a:t>
             </a:r>
           </a:p>
           <a:p/>
           <a:p>
             <a:r>
-              <a:t>And to be clear about what is being graded: accuracy earns no marks. What we are</a:t>
-            </a:r>
-          </a:p>
-          <a:p>
-            <a:r>
-              <a:t>studying is where the time goes, and what it takes to run the job at all."</a:t>
+              <a:t>[point at the bar chart, bottom right]</a:t>
+            </a:r>
+          </a:p>
+          <a:p>
+            <a:r>
+              <a:t>And this is the first infrastructure decision the data forces on us. The bars are</a:t>
+            </a:r>
+          </a:p>
+          <a:p>
+            <a:r>
+              <a:t>how much of the corpus survives uncut at each context window. At 512 tokens only</a:t>
+            </a:r>
+          </a:p>
+          <a:p>
+            <a:r>
+              <a:t>15 percent of cases fit, so most of</a:t>
+            </a:r>
+          </a:p>
+          <a:p>
+            <a:r>
+              <a:t>the labels are simply cut off. At 2048 almost everything fits. We benchmark at</a:t>
+            </a:r>
+          </a:p>
+          <a:p>
+            <a:r>
+              <a:t>1024, the orange bar, where about</a:t>
+            </a:r>
+          </a:p>
+          <a:p>
+            <a:r>
+              <a:t>73 percent fits, because that is the</a:t>
+            </a:r>
+          </a:p>
+          <a:p>
+            <a:r>
+              <a:t>honest middle: 27 percent of cases still get truncated, and doubling</a:t>
+            </a:r>
+          </a:p>
+          <a:p>
+            <a:r>
+              <a:t>the window to fix it is exactly the kind of choice that costs memory and time.</a:t>
+            </a:r>
+          </a:p>
+          <a:p>
+            <a:r>
+              <a:t>Slide four shows what it costs.</a:t>
+            </a:r>
+          </a:p>
+          <a:p/>
+          <a:p>
+            <a:r>
+              <a:t>To be clear about what is being graded: accuracy earns no marks and we report</a:t>
+            </a:r>
+          </a:p>
+          <a:p>
+            <a:r>
+              <a:t>none. What we studied is where the time goes, and what it takes to run the job at</a:t>
+            </a:r>
+          </a:p>
+          <a:p>
+            <a:r>
+              <a:t>all."</a:t>
             </a:r>
           </a:p>
         </p:txBody>
@@ -656,7 +717,7 @@
           <a:lstStyle/>
           <a:p>
             <a:r>
-              <a:t>LEONARD  (~50 s)</a:t>
+              <a:t>LEONARD  ~1:45</a:t>
             </a:r>
           </a:p>
           <a:p/>
@@ -667,7 +728,7 @@
           </a:p>
           <a:p>
             <a:r>
-              <a:t>lowers it to three different backends. No per-backend reimplementation, that is</a:t>
+              <a:t>lowers it to three different backends. No per-backend reimplementation, which is</a:t>
             </a:r>
           </a:p>
           <a:p>
@@ -678,54 +739,89 @@
           <a:p/>
           <a:p>
             <a:r>
-              <a:t>Around it: three pinned Docker images, Kubernetes Jobs across two clusters, and</a:t>
-            </a:r>
-          </a:p>
-          <a:p>
-            <a:r>
-              <a:t>Kueue for admission on the TPU pool. Every manifest states its CPU, memory and</a:t>
-            </a:r>
-          </a:p>
-          <a:p>
-            <a:r>
-              <a:t>accelerator limits explicitly.</a:t>
+              <a:t>[walk the three cards left to right]</a:t>
+            </a:r>
+          </a:p>
+          <a:p>
+            <a:r>
+              <a:t>[cut] Compilation: one program, LoRA applied with qwix, trained through Tunix.</a:t>
+            </a:r>
+          </a:p>
+          <a:p>
+            <a:r>
+              <a:t>Orchestration: three pinned Docker images, Kubernetes Jobs across two clusters,</a:t>
+            </a:r>
+          </a:p>
+          <a:p>
+            <a:r>
+              <a:t>and Kueue for admission on the TPU pool. Every manifest states its CPU, memory</a:t>
+            </a:r>
+          </a:p>
+          <a:p>
+            <a:r>
+              <a:t>and accelerator limits explicitly, so nothing gets scheduled by accident.</a:t>
             </a:r>
           </a:p>
           <a:p/>
           <a:p>
             <a:r>
-              <a:t>Storage is where one of our two headline results comes from. The eight-gigabyte</a:t>
-            </a:r>
-          </a:p>
-          <a:p>
-            <a:r>
-              <a:t>checkpoint is read from a bucket over gcsfuse, and we deliberately left the file</a:t>
-            </a:r>
-          </a:p>
-          <a:p>
-            <a:r>
-              <a:t>cache as a knob instead of fixing it, because that knob turned out to be the</a:t>
-            </a:r>
-          </a:p>
-          <a:p>
-            <a:r>
-              <a:t>experiment.</a:t>
+              <a:t>[point at the orange strip across the middle]</a:t>
+            </a:r>
+          </a:p>
+          <a:p>
+            <a:r>
+              <a:t>This strip is the data path, and it is where one of our two headline results</a:t>
+            </a:r>
+          </a:p>
+          <a:p>
+            <a:r>
+              <a:t>comes from. The eight-gigabyte checkpoint lives in a bucket in the same region,</a:t>
+            </a:r>
+          </a:p>
+          <a:p>
+            <a:r>
+              <a:t>gets mounted into the pod by the gcsfuse CSI driver, and is read from /gcs at</a:t>
+            </a:r>
+          </a:p>
+          <a:p>
+            <a:r>
+              <a:t>startup. We deliberately left the file cache on that mount as a knob instead of</a:t>
+            </a:r>
+          </a:p>
+          <a:p>
+            <a:r>
+              <a:t>fixing it, because that knob turned out to be the experiment. Luis comes back to</a:t>
+            </a:r>
+          </a:p>
+          <a:p>
+            <a:r>
+              <a:t>it on slide four.</a:t>
             </a:r>
           </a:p>
           <a:p/>
           <a:p>
             <a:r>
-              <a:t>One line to flag before Luis takes over: the GH200's host processor is ARM64,</a:t>
-            </a:r>
-          </a:p>
-          <a:p>
-            <a:r>
-              <a:t>not x86. That single fact cost us five separate blockers, and I will come back</a:t>
-            </a:r>
-          </a:p>
-          <a:p>
-            <a:r>
-              <a:t>to it at the end."</a:t>
+              <a:t>[point at the table, GPU row]</a:t>
+            </a:r>
+          </a:p>
+          <a:p>
+            <a:r>
+              <a:t>One line to flag before I hand over. The GH200's host processor is ARM64, not</a:t>
+            </a:r>
+          </a:p>
+          <a:p>
+            <a:r>
+              <a:t>x86. That single fact cost us five separate blockers, and it is why the GPU row</a:t>
+            </a:r>
+          </a:p>
+          <a:p>
+            <a:r>
+              <a:t>reads 'public image plus ConfigMap' where the TPU row reads 'private registry'.</a:t>
+            </a:r>
+          </a:p>
+          <a:p>
+            <a:r>
+              <a:t>I will come back to it at the end."</a:t>
             </a:r>
           </a:p>
           <a:p/>
@@ -801,91 +897,177 @@
           <a:lstStyle/>
           <a:p>
             <a:r>
-              <a:t>LUIS  (~55 s)</a:t>
+              <a:t>LUIS  ~2:30</a:t>
             </a:r>
           </a:p>
           <a:p/>
           <a:p>
             <a:r>
-              <a:t>"We did not measure total runtime and divide by steps. Every run takes its own</a:t>
-            </a:r>
-          </a:p>
-          <a:p>
-            <a:r>
-              <a:t>wall clock apart into six phases: scheduling, image pull, checkpoint load, XLA</a:t>
-            </a:r>
-          </a:p>
-          <a:p>
-            <a:r>
-              <a:t>compile, the steady-state steps, and checkpoint write. The chart on the right is</a:t>
-            </a:r>
-          </a:p>
-          <a:p>
-            <a:r>
-              <a:t>that decomposition for one run.</a:t>
+              <a:t>"We did not measure total runtime and divide by steps.</a:t>
             </a:r>
           </a:p>
           <a:p/>
           <a:p>
             <a:r>
-              <a:t>On top of it we swept batch size and sequence length until the job died. We keep</a:t>
-            </a:r>
-          </a:p>
-          <a:p>
-            <a:r>
-              <a:t>the failed cell rather than dropping it, because the failure boundary is exactly</a:t>
-            </a:r>
-          </a:p>
-          <a:p>
-            <a:r>
-              <a:t>what a memory chart needs.</a:t>
+              <a:t>[point at the left table, top to bottom]</a:t>
+            </a:r>
+          </a:p>
+          <a:p>
+            <a:r>
+              <a:t>Four quantities, each with a named instrument. Chip utilisation is sampled from</a:t>
+            </a:r>
+          </a:p>
+          <a:p>
+            <a:r>
+              <a:t>nvidia-smi inside the pod once a second, 111 samples on the run you are</a:t>
+            </a:r>
+          </a:p>
+          <a:p>
+            <a:r>
+              <a:t>looking at, and from psutil on the CPU node. Peak memory comes from JAX's own</a:t>
+            </a:r>
+          </a:p>
+          <a:p>
+            <a:r>
+              <a:t>memory_stats on the accelerators and from peak resident set size on the CPU. The</a:t>
+            </a:r>
+          </a:p>
+          <a:p>
+            <a:r>
+              <a:t>TPU is the honest gap here: JAX gives us its memory statistics but exposes no core</a:t>
+            </a:r>
+          </a:p>
+          <a:p>
+            <a:r>
+              <a:t>utilisation counter at all, which is why that cell on the next slide says so</a:t>
+            </a:r>
+          </a:p>
+          <a:p>
+            <a:r>
+              <a:t>instead of showing a number that would mean something else.</a:t>
+            </a:r>
+          </a:p>
+          <a:p>
+            <a:r>
+              <a:t>[cut] Step times are reported as median, p10 and p90</a:t>
+            </a:r>
+          </a:p>
+          <a:p>
+            <a:r>
+              <a:t>with the warmup steps excluded, 10 of them on this run, never as a mean,</a:t>
+            </a:r>
+          </a:p>
+          <a:p>
+            <a:r>
+              <a:t>because the first step carries the compile and would poison the average. And the</a:t>
+            </a:r>
+          </a:p>
+          <a:p>
+            <a:r>
+              <a:t>wall clock is decomposed into six phases that are required to sum</a:t>
+            </a:r>
+          </a:p>
+          <a:p>
+            <a:r>
+              <a:t>back to the total; whatever is left over is written to a field called 'other'</a:t>
+            </a:r>
+          </a:p>
+          <a:p>
+            <a:r>
+              <a:t>rather than quietly dropped.</a:t>
             </a:r>
           </a:p>
           <a:p/>
           <a:p>
             <a:r>
-              <a:t>All of it writes against one fixed schema, one JSON per run, and every figure</a:t>
-            </a:r>
-          </a:p>
-          <a:p>
-            <a:r>
-              <a:t>in this deck reads those files and nothing else. Nothing on these slides was</a:t>
-            </a:r>
-          </a:p>
-          <a:p>
-            <a:r>
-              <a:t>typed in by hand.</a:t>
+              <a:t>[point at the bar at the top right]</a:t>
+            </a:r>
+          </a:p>
+          <a:p>
+            <a:r>
+              <a:t>That decomposition is this bar, for one real run: 733 seconds</a:t>
+            </a:r>
+          </a:p>
+          <a:p>
+            <a:r>
+              <a:t>of wall clock, left to right. Scheduling, then the big grey block, which is</a:t>
+            </a:r>
+          </a:p>
+          <a:p>
+            <a:r>
+              <a:t>32 percent of the run just reading the checkpoint. Then XLA compile</a:t>
+            </a:r>
+          </a:p>
+          <a:p>
+            <a:r>
+              <a:t>above the bar. The orange block, 28 percent, is the only part that</a:t>
+            </a:r>
+          </a:p>
+          <a:p>
+            <a:r>
+              <a:t>is arithmetic. That single picture is the whole finding of this project.</a:t>
             </a:r>
           </a:p>
           <a:p/>
           <a:p>
             <a:r>
-              <a:t>The red box is the part I would defend hardest. One run came back reporting</a:t>
-            </a:r>
-          </a:p>
-          <a:p>
-            <a:r>
-              <a:t>ninety-three microseconds per step. Eleven million tokens a second. Physically</a:t>
-            </a:r>
-          </a:p>
-          <a:p>
-            <a:r>
-              <a:t>impossible, and it carried a passing status. What caught it was that the</a:t>
-            </a:r>
-          </a:p>
-          <a:p>
-            <a:r>
-              <a:t>telemetry module had written into its own notes field that it might have timed</a:t>
-            </a:r>
-          </a:p>
-          <a:p>
-            <a:r>
-              <a:t>dispatch instead of completion. We threw the run away and repeated it. Without</a:t>
-            </a:r>
-          </a:p>
-          <a:p>
-            <a:r>
-              <a:t>that field, that number would have gone straight into a bar chart."</a:t>
+              <a:t>[point at the table underneath]</a:t>
+            </a:r>
+          </a:p>
+          <a:p>
+            <a:r>
+              <a:t>Memory: for each backend, the largest configuration that fitted and the one that</a:t>
+            </a:r>
+          </a:p>
+          <a:p>
+            <a:r>
+              <a:t>did not. Two thirds occupancy on all three, and one batch step later, all three</a:t>
+            </a:r>
+          </a:p>
+          <a:p>
+            <a:r>
+              <a:t>are dead. We keep those failed cells rather than dropping them, because the</a:t>
+            </a:r>
+          </a:p>
+          <a:p>
+            <a:r>
+              <a:t>failure boundary is exactly what a memory chart needs.</a:t>
+            </a:r>
+          </a:p>
+          <a:p/>
+          <a:p>
+            <a:r>
+              <a:t>[point at the red box, left]</a:t>
+            </a:r>
+          </a:p>
+          <a:p>
+            <a:r>
+              <a:t>Last, the part I would defend hardest. One run came back at ninety-three</a:t>
+            </a:r>
+          </a:p>
+          <a:p>
+            <a:r>
+              <a:t>microseconds per step, eleven million tokens a second. Physically impossible, and</a:t>
+            </a:r>
+          </a:p>
+          <a:p>
+            <a:r>
+              <a:t>it carried a passing status. What caught it was that the telemetry module had</a:t>
+            </a:r>
+          </a:p>
+          <a:p>
+            <a:r>
+              <a:t>written into its own notes field that it might have timed dispatch instead of</a:t>
+            </a:r>
+          </a:p>
+          <a:p>
+            <a:r>
+              <a:t>completion. We threw the run away and repeated it. A passing status is not</a:t>
+            </a:r>
+          </a:p>
+          <a:p>
+            <a:r>
+              <a:t>sufficient to trust a record."</a:t>
             </a:r>
           </a:p>
         </p:txBody>
@@ -955,97 +1137,163 @@
           <a:lstStyle/>
           <a:p>
             <a:r>
-              <a:t>LUIS  (~85 s, the slide to spend time on)</a:t>
+              <a:t>LUIS  ~2:40   ·   the slide to spend time on, do not cut here</a:t>
             </a:r>
           </a:p>
           <a:p/>
           <a:p>
             <a:r>
-              <a:t>"This is the comparison at the model size the project is actually about, four</a:t>
-            </a:r>
-          </a:p>
-          <a:p>
-            <a:r>
-              <a:t>billion parameters, and at batch sizes where both chips have work to do.</a:t>
+              <a:t>"Two comparisons here, and the second one contradicts the first. That is the</a:t>
+            </a:r>
+          </a:p>
+          <a:p>
+            <a:r>
+              <a:t>point of the slide.</a:t>
             </a:r>
           </a:p>
           <a:p/>
           <a:p>
             <a:r>
-              <a:t>One GH200 delivers roughly two and a half times the throughput of an eight-chip</a:t>
-            </a:r>
-          </a:p>
-          <a:p>
-            <a:r>
-              <a:t>v5e slice. Not per chip. In total.</a:t>
+              <a:t>[point at the top table, row by row]</a:t>
+            </a:r>
+          </a:p>
+          <a:p>
+            <a:r>
+              <a:t>The table is all three backends on identical code, identical model, identical</a:t>
+            </a:r>
+          </a:p>
+          <a:p>
+            <a:r>
+              <a:t>batch. Median step time: nineteen seconds on the CPU, eighty milliseconds on each</a:t>
+            </a:r>
+          </a:p>
+          <a:p>
+            <a:r>
+              <a:t>accelerator. That is 238 times on the GPU and 237 times on the TPU</a:t>
+            </a:r>
+          </a:p>
+          <a:p>
+            <a:r>
+              <a:t>slice, third row. Now look at the fourth row, because that is the row that</a:t>
+            </a:r>
+          </a:p>
+          <a:p>
+            <a:r>
+              <a:t>actually matters. Mean chip utilisation: 1.6 percent on the GH200. The</a:t>
+            </a:r>
+          </a:p>
+          <a:p>
+            <a:r>
+              <a:t>accelerator is idle for essentially the whole run. Peak memory, bottom row, is</a:t>
+            </a:r>
+          </a:p>
+          <a:p>
+            <a:r>
+              <a:t>5 and 7 percent. Neither chip is doing anything.</a:t>
             </a:r>
           </a:p>
           <a:p/>
           <a:p>
             <a:r>
-              <a:t>Now, we first measured this at batch one, and there the two tied to within a</a:t>
-            </a:r>
-          </a:p>
-          <a:p>
-            <a:r>
-              <a:t>quarter of a percent. That looked like a headline. It was an artefact: at batch</a:t>
-            </a:r>
-          </a:p>
-          <a:p>
-            <a:r>
-              <a:t>one neither accelerator is occupied, so what we were comparing was launch</a:t>
-            </a:r>
-          </a:p>
-          <a:p>
-            <a:r>
-              <a:t>latency, not compute. Sweeping until they broke is what exposed it.</a:t>
+              <a:t>[point at the bold line under the table]</a:t>
+            </a:r>
+          </a:p>
+          <a:p>
+            <a:r>
+              <a:t>So the two accelerators tie to within a quarter of a percent, and for a while we</a:t>
+            </a:r>
+          </a:p>
+          <a:p>
+            <a:r>
+              <a:t>thought that tie was the headline. It was an artefact. At batch one what we were</a:t>
+            </a:r>
+          </a:p>
+          <a:p>
+            <a:r>
+              <a:t>comparing was launch latency, not compute.</a:t>
             </a:r>
           </a:p>
           <a:p/>
           <a:p>
             <a:r>
-              <a:t>Look at how the two behave as the batch grows. The Hopper climbs from eleven and</a:t>
-            </a:r>
-          </a:p>
-          <a:p>
-            <a:r>
-              <a:t>a half to thirteen thousand tokens a second. The slice is flat around four and a</a:t>
-            </a:r>
-          </a:p>
-          <a:p>
-            <a:r>
-              <a:t>half thousand, which means it saturated at batch eight and the extra work bought</a:t>
-            </a:r>
-          </a:p>
-          <a:p>
-            <a:r>
-              <a:t>nothing. It also runs out of memory a step earlier than the GPU does.</a:t>
+              <a:t>[point at the chart]</a:t>
+            </a:r>
+          </a:p>
+          <a:p>
+            <a:r>
+              <a:t>This is the same two chips at four billion parameters, with the batch size swept</a:t>
+            </a:r>
+          </a:p>
+          <a:p>
+            <a:r>
+              <a:t>until they died. Orange is one GH200, blue is eight TPU chips. The Hopper climbs</a:t>
+            </a:r>
+          </a:p>
+          <a:p>
+            <a:r>
+              <a:t>from 11,557 to 13,218 tokens a second. The blue line is flat at about</a:t>
+            </a:r>
+          </a:p>
+          <a:p>
+            <a:r>
+              <a:t>4,678, which means the slice saturated at batch eight and the extra work</a:t>
+            </a:r>
+          </a:p>
+          <a:p>
+            <a:r>
+              <a:t>bought nothing at all. At batch 32 the blue line stops, because the slice runs out</a:t>
+            </a:r>
+          </a:p>
+          <a:p>
+            <a:r>
+              <a:t>of memory a full step before the GPU does.</a:t>
             </a:r>
           </a:p>
           <a:p/>
           <a:p>
             <a:r>
-              <a:t>The bottom right is the other result. We identified checkpoint load as the</a:t>
-            </a:r>
-          </a:p>
-          <a:p>
-            <a:r>
-              <a:t>largest phase, enabled the gcsfuse file cache, and re-ran. Load got fourteen and</a:t>
-            </a:r>
-          </a:p>
-          <a:p>
-            <a:r>
-              <a:t>a half times faster and total wall clock fell by thirty-one percent. The control</a:t>
-            </a:r>
-          </a:p>
-          <a:p>
-            <a:r>
-              <a:t>is that median step time stayed identical to the fourth decimal, so nothing</a:t>
-            </a:r>
-          </a:p>
-          <a:p>
-            <a:r>
-              <a:t>about the computation changed. Only I/O moved."</a:t>
+              <a:t>So: 2.7 times the throughput of eight TPU chips, from one Hopper chip,</a:t>
+            </a:r>
+          </a:p>
+          <a:p>
+            <a:r>
+              <a:t>big number top right. The batch-one tie was not wrong, it was measured at an</a:t>
+            </a:r>
+          </a:p>
+          <a:p>
+            <a:r>
+              <a:t>operating point where the answer is meaningless.</a:t>
+            </a:r>
+          </a:p>
+          <a:p/>
+          <a:p>
+            <a:r>
+              <a:t>[point at the bottom right card]</a:t>
+            </a:r>
+          </a:p>
+          <a:p>
+            <a:r>
+              <a:t>And the controlled experiment. We had identified checkpoint load as the largest</a:t>
+            </a:r>
+          </a:p>
+          <a:p>
+            <a:r>
+              <a:t>phase, so we turned on the gcsfuse file cache and re-ran the identical job. Load</a:t>
+            </a:r>
+          </a:p>
+          <a:p>
+            <a:r>
+              <a:t>got 14.6 times faster, total wall clock fell 31 percent. The</a:t>
+            </a:r>
+          </a:p>
+          <a:p>
+            <a:r>
+              <a:t>control is the last line: median step time is unchanged to the fourth decimal.</a:t>
+            </a:r>
+          </a:p>
+          <a:p>
+            <a:r>
+              <a:t>Nothing about the computation moved. Only I/O did."</a:t>
             </a:r>
           </a:p>
           <a:p/>
@@ -1121,7 +1369,7 @@
           <a:lstStyle/>
           <a:p>
             <a:r>
-              <a:t>LEONARD  (~65 s)</a:t>
+              <a:t>LEONARD  ~2:50</a:t>
             </a:r>
           </a:p>
           <a:p/>
@@ -1133,106 +1381,182 @@
           <a:p/>
           <a:p>
             <a:r>
-              <a:t>First, the chip was never the bottleneck. Of seven hundred thirty-three seconds</a:t>
-            </a:r>
-          </a:p>
-          <a:p>
-            <a:r>
-              <a:t>of wall clock, only twenty-eight percent is arithmetic. The single largest phase</a:t>
-            </a:r>
-          </a:p>
-          <a:p>
-            <a:r>
-              <a:t>is reading the checkpoint. We spent most of our time not computing.</a:t>
+              <a:t>[point at the first card]</a:t>
+            </a:r>
+          </a:p>
+          <a:p>
+            <a:r>
+              <a:t>First, the chip was never the bottleneck. Of 733 seconds of</a:t>
+            </a:r>
+          </a:p>
+          <a:p>
+            <a:r>
+              <a:t>wall clock, only 28 percent is arithmetic, and the single largest</a:t>
+            </a:r>
+          </a:p>
+          <a:p>
+            <a:r>
+              <a:t>phase, 32 percent, is reading the checkpoint. We spent most of our</a:t>
+            </a:r>
+          </a:p>
+          <a:p>
+            <a:r>
+              <a:t>time not computing.</a:t>
             </a:r>
           </a:p>
           <a:p/>
           <a:p>
             <a:r>
+              <a:t>[second card]</a:t>
+            </a:r>
+          </a:p>
+          <a:p>
+            <a:r>
               <a:t>Second, and this genuinely surprised us: scaling the model did not scale the</a:t>
             </a:r>
           </a:p>
           <a:p>
             <a:r>
-              <a:t>cost. Going from 0.6 to 4 billion parameters, under seven times, did not make</a:t>
-            </a:r>
-          </a:p>
-          <a:p>
-            <a:r>
-              <a:t>the CPU seven times slower. It made it impossible. The compiler never finished</a:t>
-            </a:r>
-          </a:p>
-          <a:p>
-            <a:r>
-              <a:t>with rematerialisation on, and the kernel killed the process without it. A</a:t>
-            </a:r>
-          </a:p>
-          <a:p>
-            <a:r>
-              <a:t>speedup chart would have drawn a bar. The truth is there is no bar.</a:t>
+              <a:t>cost. Going from 0.6 to 4 billion parameters, under seven times, did not make the</a:t>
+            </a:r>
+          </a:p>
+          <a:p>
+            <a:r>
+              <a:t>CPU seven times slower. It made it impossible. The compiler never finished with</a:t>
+            </a:r>
+          </a:p>
+          <a:p>
+            <a:r>
+              <a:t>rematerialisation on, and the kernel killed the process without it, at 31.5</a:t>
+            </a:r>
+          </a:p>
+          <a:p>
+            <a:r>
+              <a:t>gigabytes against a 31 gibibyte machine. A speedup chart would have drawn a bar</a:t>
+            </a:r>
+          </a:p>
+          <a:p>
+            <a:r>
+              <a:t>there. The truth is there is no bar, and that discontinuity is the result.</a:t>
             </a:r>
           </a:p>
           <a:p/>
           <a:p>
             <a:r>
-              <a:t>Third, and this is where the day actually went: the wall was in the supply chain.</a:t>
-            </a:r>
-          </a:p>
-          <a:p>
-            <a:r>
-              <a:t>The GH200 sat idle while we worked through an ARM64 host, a segfaulting</a:t>
-            </a:r>
-          </a:p>
-          <a:p>
-            <a:r>
-              <a:t>cross-build, a missing wheel, absent credentials and a registry rejection.</a:t>
-            </a:r>
-          </a:p>
-          <a:p>
-            <a:r>
-              <a:t>Exactly one of the framework's thirty-six dependencies is TPU-bound. Swapping</a:t>
-            </a:r>
-          </a:p>
-          <a:p>
-            <a:r>
-              <a:t>that one is the entire port.</a:t>
+              <a:t>[third card]</a:t>
+            </a:r>
+          </a:p>
+          <a:p>
+            <a:r>
+              <a:t>Third, and this is where the days actually went: the wall was in the supply</a:t>
+            </a:r>
+          </a:p>
+          <a:p>
+            <a:r>
+              <a:t>chain, not the silicon. The GH200 sat idle while we worked through an ARM64 host,</a:t>
+            </a:r>
+          </a:p>
+          <a:p>
+            <a:r>
+              <a:t>a segfaulting cross-build, a missing aarch64 wheel, absent credentials and a</a:t>
+            </a:r>
+          </a:p>
+          <a:p>
+            <a:r>
+              <a:t>registry rejection. Exactly one of the framework's thirty-six dependencies is</a:t>
+            </a:r>
+          </a:p>
+          <a:p>
+            <a:r>
+              <a:t>TPU-bound. Swapping that one pin is the entire port.</a:t>
             </a:r>
           </a:p>
           <a:p/>
           <a:p>
             <a:r>
-              <a:t>So the recommendation is not to scale out, it is to amortise. Raise the batch</a:t>
-            </a:r>
-          </a:p>
-          <a:p>
-            <a:r>
-              <a:t>only until the chip is occupied, then attack fixed cost.</a:t>
+              <a:t>[point at the recommendation, bottom left]</a:t>
+            </a:r>
+          </a:p>
+          <a:p>
+            <a:r>
+              <a:t>[cut if slide 4 landed it] So the recommendation is not to scale out, it is to</a:t>
+            </a:r>
+          </a:p>
+          <a:p>
+            <a:r>
+              <a:t>amortise. Raise the batch only</a:t>
+            </a:r>
+          </a:p>
+          <a:p>
+            <a:r>
+              <a:t>until the chip is occupied, then attack fixed cost: cache the compilation, keep</a:t>
+            </a:r>
+          </a:p>
+          <a:p>
+            <a:r>
+              <a:t>workers warm instead of one pod per job, and turn on the file cache anywhere you</a:t>
+            </a:r>
+          </a:p>
+          <a:p>
+            <a:r>
+              <a:t>read a checkpoint.</a:t>
             </a:r>
           </a:p>
           <a:p/>
           <a:p>
             <a:r>
-              <a:t>And for our startup, that is the answer we came for. Thirteen cents per thousand</a:t>
-            </a:r>
-          </a:p>
-          <a:p>
-            <a:r>
-              <a:t>steps on a single GH200, eight times cheaper than the TPU slice at the same</a:t>
-            </a:r>
-          </a:p>
-          <a:p>
-            <a:r>
-              <a:t>speed. Self-hosting is not the cost problem we assumed it was. The real cost is</a:t>
-            </a:r>
-          </a:p>
-          <a:p>
-            <a:r>
-              <a:t>fixed overhead per job, and that is an architecture decision, not a hardware</a:t>
-            </a:r>
-          </a:p>
-          <a:p>
-            <a:r>
-              <a:t>purchase.</a:t>
+              <a:t>[point at the orange box, bottom right]</a:t>
+            </a:r>
+          </a:p>
+          <a:p>
+            <a:r>
+              <a:t>And for our startup, that is the answer we came for. Note the batch this is quoted</a:t>
+            </a:r>
+          </a:p>
+          <a:p>
+            <a:r>
+              <a:t>at: batch eight, which is the slice's own best operating point, not the one where</a:t>
+            </a:r>
+          </a:p>
+          <a:p>
+            <a:r>
+              <a:t>it looks worst. Even there, one GH200 is 2.5 times faster than the eight</a:t>
+            </a:r>
+          </a:p>
+          <a:p>
+            <a:r>
+              <a:t>chips and costs 10 times less per thousand steps, $0.56</a:t>
+            </a:r>
+          </a:p>
+          <a:p>
+            <a:r>
+              <a:t>against $5.72. One caveat we want to state ourselves: the TPU rate is what we were</a:t>
+            </a:r>
+          </a:p>
+          <a:p>
+            <a:r>
+              <a:t>actually billed, the GH200 rate is a market proxy because the hardware is</a:t>
+            </a:r>
+          </a:p>
+          <a:p>
+            <a:r>
+              <a:t>on-premises and Google does not sell one. We checked the ordering across the whole</a:t>
+            </a:r>
+          </a:p>
+          <a:p>
+            <a:r>
+              <a:t>published price range for that chip and it does not flip.</a:t>
+            </a:r>
+          </a:p>
+          <a:p/>
+          <a:p>
+            <a:r>
+              <a:t>Self-hosting is not the cost problem we assumed it was. The real cost is fixed</a:t>
+            </a:r>
+          </a:p>
+          <a:p>
+            <a:r>
+              <a:t>overhead per job, and that is an architecture decision, not a hardware purchase.</a:t>
             </a:r>
           </a:p>
           <a:p/>
@@ -4396,7 +4720,7 @@
                 </a:solidFill>
                 <a:latin typeface="Helvetica Neue"/>
               </a:rPr>
-              <a:t>Can a clinic afford to run its own coding model?</a:t>
+              <a:t>Can a clinic afford to run its own ICD-10 model?</a:t>
             </a:r>
           </a:p>
         </p:txBody>
@@ -4409,8 +4733,8 @@
         </p:nvSpPr>
         <p:spPr>
           <a:xfrm>
-            <a:off x="566928" y="1645920"/>
-            <a:ext cx="5394960" cy="2103120"/>
+            <a:off x="566928" y="1664208"/>
+            <a:ext cx="5120640" cy="1966955"/>
           </a:xfrm>
           <a:prstGeom prst="roundRect">
             <a:avLst>
@@ -4457,8 +4781,8 @@
         </p:nvSpPr>
         <p:spPr>
           <a:xfrm>
-            <a:off x="868680" y="1874519"/>
-            <a:ext cx="4846320" cy="320040"/>
+            <a:off x="822960" y="1901952"/>
+            <a:ext cx="4645152" cy="251460"/>
           </a:xfrm>
           <a:prstGeom prst="rect">
             <a:avLst/>
@@ -4496,8 +4820,8 @@
         </p:nvSpPr>
         <p:spPr>
           <a:xfrm>
-            <a:off x="868680" y="2304288"/>
-            <a:ext cx="4846320" cy="1371600"/>
+            <a:off x="822960" y="2244852"/>
+            <a:ext cx="4645152" cy="1215136"/>
           </a:xfrm>
           <a:prstGeom prst="rect">
             <a:avLst/>
@@ -4583,8 +4907,8 @@
         </p:nvSpPr>
         <p:spPr>
           <a:xfrm>
-            <a:off x="6400800" y="1874519"/>
-            <a:ext cx="5212080" cy="914400"/>
+            <a:off x="5989320" y="1755648"/>
+            <a:ext cx="5623560" cy="914400"/>
           </a:xfrm>
           <a:prstGeom prst="rect">
             <a:avLst/>
@@ -4638,8 +4962,8 @@
         </p:nvSpPr>
         <p:spPr>
           <a:xfrm>
-            <a:off x="6400800" y="3063240"/>
-            <a:ext cx="5212080" cy="731520"/>
+            <a:off x="5989320" y="2761488"/>
+            <a:ext cx="5623560" cy="731520"/>
           </a:xfrm>
           <a:prstGeom prst="rect">
             <a:avLst/>
@@ -4664,7 +4988,7 @@
                 </a:solidFill>
                 <a:latin typeface="Helvetica Neue"/>
               </a:rPr>
-              <a:t>Qwen3 + LoRA on CodiEsp.</a:t>
+              <a:t>Qwen3-4B + LoRA on CodiEsp: 500 train / 250 dev</a:t>
             </a:r>
           </a:p>
           <a:p>
@@ -4680,7 +5004,7 @@
                 </a:solidFill>
                 <a:latin typeface="Helvetica Neue"/>
               </a:rPr>
-              <a:t>1 000 clinical case reports, ICD-10, CC-BY 4.0.</a:t>
+              <a:t>Spanish case reports, ICD-10 coded, CC-BY 4.0.</a:t>
             </a:r>
           </a:p>
         </p:txBody>
@@ -4693,8 +5017,8 @@
         </p:nvSpPr>
         <p:spPr>
           <a:xfrm>
-            <a:off x="566928" y="4160520"/>
-            <a:ext cx="10972800" cy="320040"/>
+            <a:off x="566928" y="3730752"/>
+            <a:ext cx="5394960" cy="320040"/>
           </a:xfrm>
           <a:prstGeom prst="rect">
             <a:avLst/>
@@ -4732,8 +5056,8 @@
         </p:nvSpPr>
         <p:spPr>
           <a:xfrm>
-            <a:off x="566928" y="4526280"/>
-            <a:ext cx="10972800" cy="1005840"/>
+            <a:off x="566928" y="4096512"/>
+            <a:ext cx="5394960" cy="1280160"/>
           </a:xfrm>
           <a:prstGeom prst="rect">
             <a:avLst/>
@@ -4748,27 +5072,43 @@
           <a:p>
             <a:pPr algn="l">
               <a:spcAft>
-                <a:spcPts val="800"/>
+                <a:spcPts val="900"/>
               </a:spcAft>
             </a:pPr>
             <a:r>
-              <a:rPr sz="1700" b="0" i="0">
+              <a:rPr sz="1500" b="0" i="0">
                 <a:solidFill>
                   <a:srgbClr val="15171A"/>
                 </a:solidFill>
                 <a:latin typeface="Helvetica Neue"/>
               </a:rPr>
-              <a:t>8 GB of weights at 4B before a single activation.  Cases up to 2 489 tokens.</a:t>
+              <a:t>8 GB of weights at 4B before a single activation.</a:t>
             </a:r>
           </a:p>
           <a:p>
             <a:pPr algn="l">
               <a:spcAft>
-                <a:spcPts val="800"/>
+                <a:spcPts val="900"/>
               </a:spcAft>
             </a:pPr>
             <a:r>
-              <a:rPr sz="1700" b="0" i="0">
+              <a:rPr sz="1500" b="0" i="0">
+                <a:solidFill>
+                  <a:srgbClr val="15171A"/>
+                </a:solidFill>
+                <a:latin typeface="Helvetica Neue"/>
+              </a:rPr>
+              <a:t>Median case 802 tokens, longest 2,489.</a:t>
+            </a:r>
+          </a:p>
+          <a:p>
+            <a:pPr algn="l">
+              <a:spcAft>
+                <a:spcPts val="900"/>
+              </a:spcAft>
+            </a:pPr>
+            <a:r>
+              <a:rPr sz="1500" b="0" i="0">
                 <a:solidFill>
                   <a:srgbClr val="15171A"/>
                 </a:solidFill>
@@ -4779,15 +5119,39 @@
           </a:p>
         </p:txBody>
       </p:sp>
-      <p:sp>
-        <p:nvSpPr>
-          <p:cNvPr id="13" name="TextBox 12"/>
+      <p:pic>
+        <p:nvPicPr>
+          <p:cNvPr id="13" name="Picture 12" descr="slide1-coverage.png"/>
+          <p:cNvPicPr>
+            <a:picLocks noChangeAspect="1"/>
+          </p:cNvPicPr>
+          <p:nvPr/>
+        </p:nvPicPr>
+        <p:blipFill>
+          <a:blip r:embed="rId2"/>
+          <a:stretch>
+            <a:fillRect/>
+          </a:stretch>
+        </p:blipFill>
+        <p:spPr>
+          <a:xfrm>
+            <a:off x="5989320" y="3675887"/>
+            <a:ext cx="5669280" cy="1639947"/>
+          </a:xfrm>
+          <a:prstGeom prst="rect">
+            <a:avLst/>
+          </a:prstGeom>
+        </p:spPr>
+      </p:pic>
+      <p:sp>
+        <p:nvSpPr>
+          <p:cNvPr id="14" name="TextBox 13"/>
           <p:cNvSpPr txBox="1"/>
           <p:nvPr/>
         </p:nvSpPr>
         <p:spPr>
           <a:xfrm>
-            <a:off x="566928" y="5897880"/>
+            <a:off x="566928" y="5870448"/>
             <a:ext cx="10972800" cy="640080"/>
           </a:xfrm>
           <a:prstGeom prst="rect">
@@ -5001,8 +5365,8 @@
         </p:nvSpPr>
         <p:spPr>
           <a:xfrm>
-            <a:off x="566928" y="1783080"/>
-            <a:ext cx="3520440" cy="1691640"/>
+            <a:off x="566928" y="1645920"/>
+            <a:ext cx="3520440" cy="1669267"/>
           </a:xfrm>
           <a:prstGeom prst="roundRect">
             <a:avLst>
@@ -5049,8 +5413,8 @@
         </p:nvSpPr>
         <p:spPr>
           <a:xfrm>
-            <a:off x="822960" y="1965960"/>
-            <a:ext cx="3017520" cy="365760"/>
+            <a:off x="822960" y="1883664"/>
+            <a:ext cx="3044952" cy="268224"/>
           </a:xfrm>
           <a:prstGeom prst="rect">
             <a:avLst/>
@@ -5088,8 +5452,8 @@
         </p:nvSpPr>
         <p:spPr>
           <a:xfrm>
-            <a:off x="822960" y="2377440"/>
-            <a:ext cx="3108960" cy="1097280"/>
+            <a:off x="822960" y="2243328"/>
+            <a:ext cx="3044952" cy="900683"/>
           </a:xfrm>
           <a:prstGeom prst="rect">
             <a:avLst/>
@@ -5159,8 +5523,8 @@
         </p:nvSpPr>
         <p:spPr>
           <a:xfrm>
-            <a:off x="4361688" y="1783080"/>
-            <a:ext cx="3520440" cy="1691640"/>
+            <a:off x="4361688" y="1645920"/>
+            <a:ext cx="3520440" cy="1669267"/>
           </a:xfrm>
           <a:prstGeom prst="roundRect">
             <a:avLst>
@@ -5207,8 +5571,8 @@
         </p:nvSpPr>
         <p:spPr>
           <a:xfrm>
-            <a:off x="4617720" y="1965960"/>
-            <a:ext cx="3017520" cy="365760"/>
+            <a:off x="4617720" y="1883664"/>
+            <a:ext cx="3044952" cy="268224"/>
           </a:xfrm>
           <a:prstGeom prst="rect">
             <a:avLst/>
@@ -5246,8 +5610,8 @@
         </p:nvSpPr>
         <p:spPr>
           <a:xfrm>
-            <a:off x="4617720" y="2377440"/>
-            <a:ext cx="3108960" cy="1097280"/>
+            <a:off x="4617720" y="2243328"/>
+            <a:ext cx="3044952" cy="900683"/>
           </a:xfrm>
           <a:prstGeom prst="rect">
             <a:avLst/>
@@ -5317,8 +5681,8 @@
         </p:nvSpPr>
         <p:spPr>
           <a:xfrm>
-            <a:off x="8156448" y="1783080"/>
-            <a:ext cx="3520440" cy="1691640"/>
+            <a:off x="8156448" y="1645920"/>
+            <a:ext cx="3520440" cy="1669267"/>
           </a:xfrm>
           <a:prstGeom prst="roundRect">
             <a:avLst>
@@ -5365,8 +5729,8 @@
         </p:nvSpPr>
         <p:spPr>
           <a:xfrm>
-            <a:off x="8412480" y="1965960"/>
-            <a:ext cx="3017520" cy="365760"/>
+            <a:off x="8412480" y="1883664"/>
+            <a:ext cx="3044952" cy="268224"/>
           </a:xfrm>
           <a:prstGeom prst="rect">
             <a:avLst/>
@@ -5404,8 +5768,8 @@
         </p:nvSpPr>
         <p:spPr>
           <a:xfrm>
-            <a:off x="8412480" y="2377440"/>
-            <a:ext cx="3108960" cy="1097280"/>
+            <a:off x="8412480" y="2243328"/>
+            <a:ext cx="3044952" cy="900683"/>
           </a:xfrm>
           <a:prstGeom prst="rect">
             <a:avLst/>
@@ -5467,17 +5831,104 @@
           </a:p>
         </p:txBody>
       </p:sp>
+      <p:sp>
+        <p:nvSpPr>
+          <p:cNvPr id="15" name="Rounded Rectangle 14"/>
+          <p:cNvSpPr/>
+          <p:nvPr/>
+        </p:nvSpPr>
+        <p:spPr>
+          <a:xfrm>
+            <a:off x="566928" y="3493008"/>
+            <a:ext cx="11064240" cy="603504"/>
+          </a:xfrm>
+          <a:prstGeom prst="roundRect">
+            <a:avLst>
+              <a:gd name="adj" fmla="val 4000"/>
+            </a:avLst>
+          </a:prstGeom>
+          <a:solidFill>
+            <a:srgbClr val="FFFFFF"/>
+          </a:solidFill>
+          <a:ln w="9525">
+            <a:solidFill>
+              <a:srgbClr val="FB923C"/>
+            </a:solidFill>
+          </a:ln>
+          <a:effectLst/>
+        </p:spPr>
+        <p:style>
+          <a:lnRef idx="1">
+            <a:schemeClr val="accent1"/>
+          </a:lnRef>
+          <a:fillRef idx="3">
+            <a:schemeClr val="accent1"/>
+          </a:fillRef>
+          <a:effectRef idx="2">
+            <a:schemeClr val="accent1"/>
+          </a:effectRef>
+          <a:fontRef idx="minor">
+            <a:schemeClr val="lt1"/>
+          </a:fontRef>
+        </p:style>
+        <p:txBody>
+          <a:bodyPr rtlCol="0" anchor="ctr"/>
+          <a:lstStyle/>
+          <a:p>
+            <a:pPr algn="ctr"/>
+          </a:p>
+        </p:txBody>
+      </p:sp>
+      <p:sp>
+        <p:nvSpPr>
+          <p:cNvPr id="16" name="TextBox 15"/>
+          <p:cNvSpPr txBox="1"/>
+          <p:nvPr/>
+        </p:nvSpPr>
+        <p:spPr>
+          <a:xfrm>
+            <a:off x="566928" y="3639312"/>
+            <a:ext cx="11064240" cy="320040"/>
+          </a:xfrm>
+          <a:prstGeom prst="rect">
+            <a:avLst/>
+          </a:prstGeom>
+          <a:noFill/>
+        </p:spPr>
+        <p:txBody>
+          <a:bodyPr wrap="square" anchor="t">
+            <a:spAutoFit/>
+          </a:bodyPr>
+          <a:lstStyle/>
+          <a:p>
+            <a:pPr algn="ctr">
+              <a:spcAft>
+                <a:spcPts val="0"/>
+              </a:spcAft>
+            </a:pPr>
+            <a:r>
+              <a:rPr sz="1350" b="1" i="0">
+                <a:solidFill>
+                  <a:srgbClr val="15171A"/>
+                </a:solidFill>
+                <a:latin typeface="Helvetica Neue"/>
+              </a:rPr>
+              <a:t>gs://me344-tpu-labs-west4   →   gcsfuse CSI sidecar   →   /gcs in the pod   →   8 GB checkpoint   →   HBM</a:t>
+            </a:r>
+          </a:p>
+        </p:txBody>
+      </p:sp>
       <p:graphicFrame>
         <p:nvGraphicFramePr>
-          <p:cNvPr id="15" name="Table 14"/>
+          <p:cNvPr id="17" name="Table 16"/>
           <p:cNvGraphicFramePr>
             <a:graphicFrameLocks noGrp="1"/>
           </p:cNvGraphicFramePr>
           <p:nvPr/>
         </p:nvGraphicFramePr>
         <p:xfrm>
-          <a:off x="566928" y="3977639"/>
-          <a:ext cx="11064238" cy="1463040"/>
+          <a:off x="566928" y="4315968"/>
+          <a:ext cx="11064238" cy="1499616"/>
         </p:xfrm>
         <a:graphic>
           <a:graphicData uri="http://schemas.openxmlformats.org/drawingml/2006/table">
@@ -5491,7 +5942,7 @@
                 <a:gridCol w="2194560"/>
                 <a:gridCol w="3749039"/>
               </a:tblGrid>
-              <a:tr h="365760">
+              <a:tr h="374904">
                 <a:tc>
                   <a:txBody>
                     <a:bodyPr/>
@@ -5585,7 +6036,7 @@
                   </a:tcPr>
                 </a:tc>
               </a:tr>
-              <a:tr h="365760">
+              <a:tr h="374904">
                 <a:tc>
                   <a:txBody>
                     <a:bodyPr/>
@@ -5668,7 +6119,7 @@
                           </a:solidFill>
                           <a:latin typeface="Helvetica Neue"/>
                         </a:rPr>
-                        <a:t>bare node</a:t>
+                        <a:t>bare node, podman</a:t>
                       </a:r>
                     </a:p>
                   </a:txBody>
@@ -5679,7 +6130,7 @@
                   </a:tcPr>
                 </a:tc>
               </a:tr>
-              <a:tr h="365760">
+              <a:tr h="374904">
                 <a:tc>
                   <a:txBody>
                     <a:bodyPr/>
@@ -5773,7 +6224,7 @@
                   </a:tcPr>
                 </a:tc>
               </a:tr>
-              <a:tr h="365760">
+              <a:tr h="374904">
                 <a:tc>
                   <a:txBody>
                     <a:bodyPr/>
@@ -5873,13 +6324,13 @@
       </p:graphicFrame>
       <p:sp>
         <p:nvSpPr>
-          <p:cNvPr id="16" name="TextBox 15"/>
+          <p:cNvPr id="18" name="TextBox 17"/>
           <p:cNvSpPr txBox="1"/>
           <p:nvPr/>
         </p:nvSpPr>
         <p:spPr>
           <a:xfrm>
-            <a:off x="566928" y="5623560"/>
+            <a:off x="566928" y="5989320"/>
             <a:ext cx="10972800" cy="457200"/>
           </a:xfrm>
           <a:prstGeom prst="rect">
@@ -5899,7 +6350,7 @@
               </a:spcAft>
             </a:pPr>
             <a:r>
-              <a:rPr sz="1500" b="1" i="0">
+              <a:rPr sz="1600" b="1" i="0">
                 <a:solidFill>
                   <a:srgbClr val="E8590C"/>
                 </a:solidFill>
@@ -6085,16 +6536,282 @@
           </a:p>
         </p:txBody>
       </p:sp>
-      <p:sp>
-        <p:nvSpPr>
-          <p:cNvPr id="6" name="TextBox 5"/>
+      <p:graphicFrame>
+        <p:nvGraphicFramePr>
+          <p:cNvPr id="6" name="Table 5"/>
+          <p:cNvGraphicFramePr>
+            <a:graphicFrameLocks noGrp="1"/>
+          </p:cNvGraphicFramePr>
+          <p:nvPr/>
+        </p:nvGraphicFramePr>
+        <p:xfrm>
+          <a:off x="566928" y="1664208"/>
+          <a:ext cx="5029200" cy="1828800"/>
+        </p:xfrm>
+        <a:graphic>
+          <a:graphicData uri="http://schemas.openxmlformats.org/drawingml/2006/table">
+            <a:tbl>
+              <a:tblPr firstRow="1" bandRow="1">
+                <a:tableStyleId>{5C22544A-7EE6-4342-B048-85BDC9FD1C3A}</a:tableStyleId>
+              </a:tblPr>
+              <a:tblGrid>
+                <a:gridCol w="1965960"/>
+                <a:gridCol w="3063240"/>
+              </a:tblGrid>
+              <a:tr h="365760">
+                <a:tc>
+                  <a:txBody>
+                    <a:bodyPr/>
+                    <a:lstStyle/>
+                    <a:p>
+                      <a:pPr algn="l"/>
+                      <a:r>
+                        <a:rPr sz="1250" b="1">
+                          <a:solidFill>
+                            <a:srgbClr val="FFFFFF"/>
+                          </a:solidFill>
+                          <a:latin typeface="Helvetica Neue"/>
+                        </a:rPr>
+                        <a:t>What we sample</a:t>
+                      </a:r>
+                    </a:p>
+                  </a:txBody>
+                  <a:tcPr anchor="ctr" marL="82296" marR="82296" marT="9144" marB="9144">
+                    <a:solidFill>
+                      <a:srgbClr val="15171A"/>
+                    </a:solidFill>
+                  </a:tcPr>
+                </a:tc>
+                <a:tc>
+                  <a:txBody>
+                    <a:bodyPr/>
+                    <a:lstStyle/>
+                    <a:p>
+                      <a:pPr algn="l"/>
+                      <a:r>
+                        <a:rPr sz="1250" b="1">
+                          <a:solidFill>
+                            <a:srgbClr val="FFFFFF"/>
+                          </a:solidFill>
+                          <a:latin typeface="Helvetica Neue"/>
+                        </a:rPr>
+                        <a:t>Instrument</a:t>
+                      </a:r>
+                    </a:p>
+                  </a:txBody>
+                  <a:tcPr anchor="ctr" marL="82296" marR="82296" marT="9144" marB="9144">
+                    <a:solidFill>
+                      <a:srgbClr val="15171A"/>
+                    </a:solidFill>
+                  </a:tcPr>
+                </a:tc>
+              </a:tr>
+              <a:tr h="365760">
+                <a:tc>
+                  <a:txBody>
+                    <a:bodyPr/>
+                    <a:lstStyle/>
+                    <a:p>
+                      <a:pPr algn="l"/>
+                      <a:r>
+                        <a:rPr sz="1250">
+                          <a:solidFill>
+                            <a:srgbClr val="15171A"/>
+                          </a:solidFill>
+                          <a:latin typeface="Helvetica Neue"/>
+                        </a:rPr>
+                        <a:t>Chip utilisation</a:t>
+                      </a:r>
+                    </a:p>
+                  </a:txBody>
+                  <a:tcPr anchor="ctr" marL="82296" marR="82296" marT="9144" marB="9144">
+                    <a:solidFill>
+                      <a:srgbClr val="FFFFFF"/>
+                    </a:solidFill>
+                  </a:tcPr>
+                </a:tc>
+                <a:tc>
+                  <a:txBody>
+                    <a:bodyPr/>
+                    <a:lstStyle/>
+                    <a:p>
+                      <a:pPr algn="l"/>
+                      <a:r>
+                        <a:rPr sz="1250">
+                          <a:solidFill>
+                            <a:srgbClr val="15171A"/>
+                          </a:solidFill>
+                          <a:latin typeface="Helvetica Neue"/>
+                        </a:rPr>
+                        <a:t>nvidia-smi 1 Hz · psutil on CPU</a:t>
+                      </a:r>
+                    </a:p>
+                  </a:txBody>
+                  <a:tcPr anchor="ctr" marL="82296" marR="82296" marT="9144" marB="9144">
+                    <a:solidFill>
+                      <a:srgbClr val="FFFFFF"/>
+                    </a:solidFill>
+                  </a:tcPr>
+                </a:tc>
+              </a:tr>
+              <a:tr h="365760">
+                <a:tc>
+                  <a:txBody>
+                    <a:bodyPr/>
+                    <a:lstStyle/>
+                    <a:p>
+                      <a:pPr algn="l"/>
+                      <a:r>
+                        <a:rPr sz="1250">
+                          <a:solidFill>
+                            <a:srgbClr val="15171A"/>
+                          </a:solidFill>
+                          <a:latin typeface="Helvetica Neue"/>
+                        </a:rPr>
+                        <a:t>Peak memory</a:t>
+                      </a:r>
+                    </a:p>
+                  </a:txBody>
+                  <a:tcPr anchor="ctr" marL="82296" marR="82296" marT="9144" marB="9144">
+                    <a:solidFill>
+                      <a:srgbClr val="FFFFFF"/>
+                    </a:solidFill>
+                  </a:tcPr>
+                </a:tc>
+                <a:tc>
+                  <a:txBody>
+                    <a:bodyPr/>
+                    <a:lstStyle/>
+                    <a:p>
+                      <a:pPr algn="l"/>
+                      <a:r>
+                        <a:rPr sz="1250">
+                          <a:solidFill>
+                            <a:srgbClr val="15171A"/>
+                          </a:solidFill>
+                          <a:latin typeface="Helvetica Neue"/>
+                        </a:rPr>
+                        <a:t>jax memory_stats() · peak RSS</a:t>
+                      </a:r>
+                    </a:p>
+                  </a:txBody>
+                  <a:tcPr anchor="ctr" marL="82296" marR="82296" marT="9144" marB="9144">
+                    <a:solidFill>
+                      <a:srgbClr val="FFFFFF"/>
+                    </a:solidFill>
+                  </a:tcPr>
+                </a:tc>
+              </a:tr>
+              <a:tr h="365760">
+                <a:tc>
+                  <a:txBody>
+                    <a:bodyPr/>
+                    <a:lstStyle/>
+                    <a:p>
+                      <a:pPr algn="l"/>
+                      <a:r>
+                        <a:rPr sz="1250">
+                          <a:solidFill>
+                            <a:srgbClr val="15171A"/>
+                          </a:solidFill>
+                          <a:latin typeface="Helvetica Neue"/>
+                        </a:rPr>
+                        <a:t>Step time</a:t>
+                      </a:r>
+                    </a:p>
+                  </a:txBody>
+                  <a:tcPr anchor="ctr" marL="82296" marR="82296" marT="9144" marB="9144">
+                    <a:solidFill>
+                      <a:srgbClr val="FFFFFF"/>
+                    </a:solidFill>
+                  </a:tcPr>
+                </a:tc>
+                <a:tc>
+                  <a:txBody>
+                    <a:bodyPr/>
+                    <a:lstStyle/>
+                    <a:p>
+                      <a:pPr algn="l"/>
+                      <a:r>
+                        <a:rPr sz="1250">
+                          <a:solidFill>
+                            <a:srgbClr val="15171A"/>
+                          </a:solidFill>
+                          <a:latin typeface="Helvetica Neue"/>
+                        </a:rPr>
+                        <a:t>median, p10, p90, warmup excluded</a:t>
+                      </a:r>
+                    </a:p>
+                  </a:txBody>
+                  <a:tcPr anchor="ctr" marL="82296" marR="82296" marT="9144" marB="9144">
+                    <a:solidFill>
+                      <a:srgbClr val="FFFFFF"/>
+                    </a:solidFill>
+                  </a:tcPr>
+                </a:tc>
+              </a:tr>
+              <a:tr h="365760">
+                <a:tc>
+                  <a:txBody>
+                    <a:bodyPr/>
+                    <a:lstStyle/>
+                    <a:p>
+                      <a:pPr algn="l"/>
+                      <a:r>
+                        <a:rPr sz="1250">
+                          <a:solidFill>
+                            <a:srgbClr val="15171A"/>
+                          </a:solidFill>
+                          <a:latin typeface="Helvetica Neue"/>
+                        </a:rPr>
+                        <a:t>Wall clock</a:t>
+                      </a:r>
+                    </a:p>
+                  </a:txBody>
+                  <a:tcPr anchor="ctr" marL="82296" marR="82296" marT="9144" marB="9144">
+                    <a:solidFill>
+                      <a:srgbClr val="FFFFFF"/>
+                    </a:solidFill>
+                  </a:tcPr>
+                </a:tc>
+                <a:tc>
+                  <a:txBody>
+                    <a:bodyPr/>
+                    <a:lstStyle/>
+                    <a:p>
+                      <a:pPr algn="l"/>
+                      <a:r>
+                        <a:rPr sz="1250">
+                          <a:solidFill>
+                            <a:srgbClr val="15171A"/>
+                          </a:solidFill>
+                          <a:latin typeface="Helvetica Neue"/>
+                        </a:rPr>
+                        <a:t>six phases, must sum to total</a:t>
+                      </a:r>
+                    </a:p>
+                  </a:txBody>
+                  <a:tcPr anchor="ctr" marL="82296" marR="82296" marT="9144" marB="9144">
+                    <a:solidFill>
+                      <a:srgbClr val="FFFFFF"/>
+                    </a:solidFill>
+                  </a:tcPr>
+                </a:tc>
+              </a:tr>
+            </a:tbl>
+          </a:graphicData>
+        </a:graphic>
+      </p:graphicFrame>
+      <p:sp>
+        <p:nvSpPr>
+          <p:cNvPr id="7" name="TextBox 6"/>
           <p:cNvSpPr txBox="1"/>
           <p:nvPr/>
         </p:nvSpPr>
         <p:spPr>
           <a:xfrm>
-            <a:off x="566928" y="1874519"/>
-            <a:ext cx="4937760" cy="2194560"/>
+            <a:off x="566928" y="3639312"/>
+            <a:ext cx="5029200" cy="640080"/>
           </a:xfrm>
           <a:prstGeom prst="rect">
             <a:avLst/>
@@ -6109,93 +6826,37 @@
           <a:p>
             <a:pPr algn="l">
               <a:spcAft>
-                <a:spcPts val="1800"/>
+                <a:spcPts val="200"/>
               </a:spcAft>
             </a:pPr>
             <a:r>
-              <a:rPr sz="1600" b="0" i="0">
-                <a:solidFill>
-                  <a:srgbClr val="15171A"/>
+              <a:rPr sz="1200" b="0" i="0">
+                <a:solidFill>
+                  <a:srgbClr val="717A85"/>
                 </a:solidFill>
                 <a:latin typeface="Helvetica Neue"/>
               </a:rPr>
-              <a:t>Six phases per run, not one total</a:t>
+              <a:t>One schema, one JSON per run. Every figure in this</a:t>
             </a:r>
           </a:p>
           <a:p>
             <a:pPr algn="l">
               <a:spcAft>
-                <a:spcPts val="1800"/>
+                <a:spcPts val="200"/>
               </a:spcAft>
             </a:pPr>
             <a:r>
-              <a:rPr sz="1600" b="0" i="0">
-                <a:solidFill>
-                  <a:srgbClr val="15171A"/>
+              <a:rPr sz="1200" b="0" i="0">
+                <a:solidFill>
+                  <a:srgbClr val="717A85"/>
                 </a:solidFill>
                 <a:latin typeface="Helvetica Neue"/>
               </a:rPr>
-              <a:t>Sweeps walked into OOM, failed cells kept</a:t>
-            </a:r>
-          </a:p>
-          <a:p>
-            <a:pPr algn="l">
-              <a:spcAft>
-                <a:spcPts val="1800"/>
-              </a:spcAft>
-            </a:pPr>
-            <a:r>
-              <a:rPr sz="1600" b="0" i="0">
-                <a:solidFill>
-                  <a:srgbClr val="15171A"/>
-                </a:solidFill>
-                <a:latin typeface="Helvetica Neue"/>
-              </a:rPr>
-              <a:t>One schema, one JSON per run</a:t>
-            </a:r>
-          </a:p>
-          <a:p>
-            <a:pPr algn="l">
-              <a:spcAft>
-                <a:spcPts val="1800"/>
-              </a:spcAft>
-            </a:pPr>
-            <a:r>
-              <a:rPr sz="1600" b="0" i="0">
-                <a:solidFill>
-                  <a:srgbClr val="15171A"/>
-                </a:solidFill>
-                <a:latin typeface="Helvetica Neue"/>
-              </a:rPr>
-              <a:t>Every figure reads only those files</a:t>
-            </a:r>
-          </a:p>
-        </p:txBody>
-      </p:sp>
-      <p:pic>
-        <p:nvPicPr>
-          <p:cNvPr id="7" name="Picture 6" descr="slide3-walltime.png"/>
-          <p:cNvPicPr>
-            <a:picLocks noChangeAspect="1"/>
-          </p:cNvPicPr>
-          <p:nvPr/>
-        </p:nvPicPr>
-        <p:blipFill>
-          <a:blip r:embed="rId2"/>
-          <a:stretch>
-            <a:fillRect/>
-          </a:stretch>
-        </p:blipFill>
-        <p:spPr>
-          <a:xfrm>
-            <a:off x="5852160" y="1828800"/>
-            <a:ext cx="5760720" cy="1228350"/>
-          </a:xfrm>
-          <a:prstGeom prst="rect">
-            <a:avLst/>
-          </a:prstGeom>
-        </p:spPr>
-      </p:pic>
+              <a:t>deck reads those files and nothing else.</a:t>
+            </a:r>
+          </a:p>
+        </p:txBody>
+      </p:sp>
       <p:sp>
         <p:nvSpPr>
           <p:cNvPr id="8" name="Rounded Rectangle 7"/>
@@ -6204,8 +6865,8 @@
         </p:nvSpPr>
         <p:spPr>
           <a:xfrm>
-            <a:off x="5852160" y="3520440"/>
-            <a:ext cx="5760720" cy="2148840"/>
+            <a:off x="566928" y="4133087"/>
+            <a:ext cx="5029200" cy="2021819"/>
           </a:xfrm>
           <a:prstGeom prst="roundRect">
             <a:avLst>
@@ -6252,8 +6913,8 @@
         </p:nvSpPr>
         <p:spPr>
           <a:xfrm>
-            <a:off x="6144768" y="3730752"/>
-            <a:ext cx="5212080" cy="320040"/>
+            <a:off x="822960" y="4370831"/>
+            <a:ext cx="4553712" cy="251460"/>
           </a:xfrm>
           <a:prstGeom prst="rect">
             <a:avLst/>
@@ -6291,8 +6952,8 @@
         </p:nvSpPr>
         <p:spPr>
           <a:xfrm>
-            <a:off x="6144768" y="4114800"/>
-            <a:ext cx="5212080" cy="1463040"/>
+            <a:off x="822960" y="4713731"/>
+            <a:ext cx="4553712" cy="1270000"/>
           </a:xfrm>
           <a:prstGeom prst="rect">
             <a:avLst/>
@@ -6311,7 +6972,7 @@
               </a:spcAft>
             </a:pPr>
             <a:r>
-              <a:rPr sz="1300" b="0" i="0">
+              <a:rPr sz="1250" b="0" i="0">
                 <a:solidFill>
                   <a:srgbClr val="15171A"/>
                 </a:solidFill>
@@ -6327,7 +6988,7 @@
               </a:spcAft>
             </a:pPr>
             <a:r>
-              <a:rPr sz="1300" b="0" i="0">
+              <a:rPr sz="1250" b="0" i="0">
                 <a:solidFill>
                   <a:srgbClr val="15171A"/>
                 </a:solidFill>
@@ -6343,7 +7004,7 @@
               </a:spcAft>
             </a:pPr>
             <a:r>
-              <a:rPr sz="1300" b="0" i="0">
+              <a:rPr sz="1250" b="0" i="0">
                 <a:solidFill>
                   <a:srgbClr val="15171A"/>
                 </a:solidFill>
@@ -6359,7 +7020,7 @@
               </a:spcAft>
             </a:pPr>
             <a:r>
-              <a:rPr sz="1300" b="0" i="0">
+              <a:rPr sz="1250" b="0" i="0">
                 <a:solidFill>
                   <a:srgbClr val="15171A"/>
                 </a:solidFill>
@@ -6375,13 +7036,403 @@
               </a:spcAft>
             </a:pPr>
             <a:r>
-              <a:rPr sz="1300" b="0" i="0">
+              <a:rPr sz="1250" b="0" i="0">
                 <a:solidFill>
                   <a:srgbClr val="15171A"/>
                 </a:solidFill>
                 <a:latin typeface="Helvetica Neue"/>
               </a:rPr>
-              <a:t>dispatch, not completion. Discarded.</a:t>
+              <a:t>dispatch, not completion. Discarded and re-run.</a:t>
+            </a:r>
+          </a:p>
+        </p:txBody>
+      </p:sp>
+      <p:pic>
+        <p:nvPicPr>
+          <p:cNvPr id="11" name="Picture 10" descr="slide3-walltime.png"/>
+          <p:cNvPicPr>
+            <a:picLocks noChangeAspect="1"/>
+          </p:cNvPicPr>
+          <p:nvPr/>
+        </p:nvPicPr>
+        <p:blipFill>
+          <a:blip r:embed="rId2"/>
+          <a:stretch>
+            <a:fillRect/>
+          </a:stretch>
+        </p:blipFill>
+        <p:spPr>
+          <a:xfrm>
+            <a:off x="5852160" y="1627632"/>
+            <a:ext cx="5760720" cy="1827189"/>
+          </a:xfrm>
+          <a:prstGeom prst="rect">
+            <a:avLst/>
+          </a:prstGeom>
+        </p:spPr>
+      </p:pic>
+      <p:graphicFrame>
+        <p:nvGraphicFramePr>
+          <p:cNvPr id="12" name="Table 11"/>
+          <p:cNvGraphicFramePr>
+            <a:graphicFrameLocks noGrp="1"/>
+          </p:cNvGraphicFramePr>
+          <p:nvPr/>
+        </p:nvGraphicFramePr>
+        <p:xfrm>
+          <a:off x="5852160" y="3710852"/>
+          <a:ext cx="5760720" cy="1463040"/>
+        </p:xfrm>
+        <a:graphic>
+          <a:graphicData uri="http://schemas.openxmlformats.org/drawingml/2006/table">
+            <a:tbl>
+              <a:tblPr firstRow="1" bandRow="1">
+                <a:tableStyleId>{5C22544A-7EE6-4342-B048-85BDC9FD1C3A}</a:tableStyleId>
+              </a:tblPr>
+              <a:tblGrid>
+                <a:gridCol w="1463040"/>
+                <a:gridCol w="2788920"/>
+                <a:gridCol w="1508760"/>
+              </a:tblGrid>
+              <a:tr h="365760">
+                <a:tc>
+                  <a:txBody>
+                    <a:bodyPr/>
+                    <a:lstStyle/>
+                    <a:p>
+                      <a:pPr algn="l"/>
+                      <a:r>
+                        <a:rPr sz="1200" b="1">
+                          <a:solidFill>
+                            <a:srgbClr val="FFFFFF"/>
+                          </a:solidFill>
+                          <a:latin typeface="Helvetica Neue"/>
+                        </a:rPr>
+                        <a:t>Backend</a:t>
+                      </a:r>
+                    </a:p>
+                  </a:txBody>
+                  <a:tcPr anchor="ctr" marL="82296" marR="82296" marT="9144" marB="9144">
+                    <a:solidFill>
+                      <a:srgbClr val="15171A"/>
+                    </a:solidFill>
+                  </a:tcPr>
+                </a:tc>
+                <a:tc>
+                  <a:txBody>
+                    <a:bodyPr/>
+                    <a:lstStyle/>
+                    <a:p>
+                      <a:pPr algn="l"/>
+                      <a:r>
+                        <a:rPr sz="1200" b="1">
+                          <a:solidFill>
+                            <a:srgbClr val="FFFFFF"/>
+                          </a:solidFill>
+                          <a:latin typeface="Helvetica Neue"/>
+                        </a:rPr>
+                        <a:t>Peak memory, largest fitting run</a:t>
+                      </a:r>
+                    </a:p>
+                  </a:txBody>
+                  <a:tcPr anchor="ctr" marL="82296" marR="82296" marT="9144" marB="9144">
+                    <a:solidFill>
+                      <a:srgbClr val="15171A"/>
+                    </a:solidFill>
+                  </a:tcPr>
+                </a:tc>
+                <a:tc>
+                  <a:txBody>
+                    <a:bodyPr/>
+                    <a:lstStyle/>
+                    <a:p>
+                      <a:pPr algn="l"/>
+                      <a:r>
+                        <a:rPr sz="1200" b="1">
+                          <a:solidFill>
+                            <a:srgbClr val="FFFFFF"/>
+                          </a:solidFill>
+                          <a:latin typeface="Helvetica Neue"/>
+                        </a:rPr>
+                        <a:t>Next step up</a:t>
+                      </a:r>
+                    </a:p>
+                  </a:txBody>
+                  <a:tcPr anchor="ctr" marL="82296" marR="82296" marT="9144" marB="9144">
+                    <a:solidFill>
+                      <a:srgbClr val="15171A"/>
+                    </a:solidFill>
+                  </a:tcPr>
+                </a:tc>
+              </a:tr>
+              <a:tr h="365760">
+                <a:tc>
+                  <a:txBody>
+                    <a:bodyPr/>
+                    <a:lstStyle/>
+                    <a:p>
+                      <a:pPr algn="l"/>
+                      <a:r>
+                        <a:rPr sz="1200">
+                          <a:solidFill>
+                            <a:srgbClr val="15171A"/>
+                          </a:solidFill>
+                          <a:latin typeface="Helvetica Neue"/>
+                        </a:rPr>
+                        <a:t>CPU 32-core</a:t>
+                      </a:r>
+                    </a:p>
+                  </a:txBody>
+                  <a:tcPr anchor="ctr" marL="82296" marR="82296" marT="9144" marB="9144">
+                    <a:solidFill>
+                      <a:srgbClr val="FFFFFF"/>
+                    </a:solidFill>
+                  </a:tcPr>
+                </a:tc>
+                <a:tc>
+                  <a:txBody>
+                    <a:bodyPr/>
+                    <a:lstStyle/>
+                    <a:p>
+                      <a:pPr algn="l"/>
+                      <a:r>
+                        <a:rPr sz="1200">
+                          <a:solidFill>
+                            <a:srgbClr val="15171A"/>
+                          </a:solidFill>
+                          <a:latin typeface="Helvetica Neue"/>
+                        </a:rPr>
+                        <a:t>66.1 % of 31 GiB (RSS)</a:t>
+                      </a:r>
+                    </a:p>
+                  </a:txBody>
+                  <a:tcPr anchor="ctr" marL="82296" marR="82296" marT="9144" marB="9144">
+                    <a:solidFill>
+                      <a:srgbClr val="FFFFFF"/>
+                    </a:solidFill>
+                  </a:tcPr>
+                </a:tc>
+                <a:tc>
+                  <a:txBody>
+                    <a:bodyPr/>
+                    <a:lstStyle/>
+                    <a:p>
+                      <a:pPr algn="l"/>
+                      <a:r>
+                        <a:rPr sz="1200">
+                          <a:solidFill>
+                            <a:srgbClr val="15171A"/>
+                          </a:solidFill>
+                          <a:latin typeface="Helvetica Neue"/>
+                        </a:rPr>
+                        <a:t>4B never ran</a:t>
+                      </a:r>
+                    </a:p>
+                  </a:txBody>
+                  <a:tcPr anchor="ctr" marL="82296" marR="82296" marT="9144" marB="9144">
+                    <a:solidFill>
+                      <a:srgbClr val="FFFFFF"/>
+                    </a:solidFill>
+                  </a:tcPr>
+                </a:tc>
+              </a:tr>
+              <a:tr h="365760">
+                <a:tc>
+                  <a:txBody>
+                    <a:bodyPr/>
+                    <a:lstStyle/>
+                    <a:p>
+                      <a:pPr algn="l"/>
+                      <a:r>
+                        <a:rPr sz="1200">
+                          <a:solidFill>
+                            <a:srgbClr val="15171A"/>
+                          </a:solidFill>
+                          <a:latin typeface="Helvetica Neue"/>
+                        </a:rPr>
+                        <a:t>GH200</a:t>
+                      </a:r>
+                    </a:p>
+                  </a:txBody>
+                  <a:tcPr anchor="ctr" marL="82296" marR="82296" marT="9144" marB="9144">
+                    <a:solidFill>
+                      <a:srgbClr val="FFFFFF"/>
+                    </a:solidFill>
+                  </a:tcPr>
+                </a:tc>
+                <a:tc>
+                  <a:txBody>
+                    <a:bodyPr/>
+                    <a:lstStyle/>
+                    <a:p>
+                      <a:pPr algn="l"/>
+                      <a:r>
+                        <a:rPr sz="1200">
+                          <a:solidFill>
+                            <a:srgbClr val="15171A"/>
+                          </a:solidFill>
+                          <a:latin typeface="Helvetica Neue"/>
+                        </a:rPr>
+                        <a:t>67.8 % of 96 GiB HBM</a:t>
+                      </a:r>
+                    </a:p>
+                  </a:txBody>
+                  <a:tcPr anchor="ctr" marL="82296" marR="82296" marT="9144" marB="9144">
+                    <a:solidFill>
+                      <a:srgbClr val="FFFFFF"/>
+                    </a:solidFill>
+                  </a:tcPr>
+                </a:tc>
+                <a:tc>
+                  <a:txBody>
+                    <a:bodyPr/>
+                    <a:lstStyle/>
+                    <a:p>
+                      <a:pPr algn="l"/>
+                      <a:r>
+                        <a:rPr sz="1200">
+                          <a:solidFill>
+                            <a:srgbClr val="15171A"/>
+                          </a:solidFill>
+                          <a:latin typeface="Helvetica Neue"/>
+                        </a:rPr>
+                        <a:t>batch 64 OOM</a:t>
+                      </a:r>
+                    </a:p>
+                  </a:txBody>
+                  <a:tcPr anchor="ctr" marL="82296" marR="82296" marT="9144" marB="9144">
+                    <a:solidFill>
+                      <a:srgbClr val="FFFFFF"/>
+                    </a:solidFill>
+                  </a:tcPr>
+                </a:tc>
+              </a:tr>
+              <a:tr h="365760">
+                <a:tc>
+                  <a:txBody>
+                    <a:bodyPr/>
+                    <a:lstStyle/>
+                    <a:p>
+                      <a:pPr algn="l"/>
+                      <a:r>
+                        <a:rPr sz="1200">
+                          <a:solidFill>
+                            <a:srgbClr val="15171A"/>
+                          </a:solidFill>
+                          <a:latin typeface="Helvetica Neue"/>
+                        </a:rPr>
+                        <a:t>v5e, 8 chips</a:t>
+                      </a:r>
+                    </a:p>
+                  </a:txBody>
+                  <a:tcPr anchor="ctr" marL="82296" marR="82296" marT="9144" marB="9144">
+                    <a:solidFill>
+                      <a:srgbClr val="FFFFFF"/>
+                    </a:solidFill>
+                  </a:tcPr>
+                </a:tc>
+                <a:tc>
+                  <a:txBody>
+                    <a:bodyPr/>
+                    <a:lstStyle/>
+                    <a:p>
+                      <a:pPr algn="l"/>
+                      <a:r>
+                        <a:rPr sz="1200">
+                          <a:solidFill>
+                            <a:srgbClr val="15171A"/>
+                          </a:solidFill>
+                          <a:latin typeface="Helvetica Neue"/>
+                        </a:rPr>
+                        <a:t>65.5 % of 16 GiB/chip</a:t>
+                      </a:r>
+                    </a:p>
+                  </a:txBody>
+                  <a:tcPr anchor="ctr" marL="82296" marR="82296" marT="9144" marB="9144">
+                    <a:solidFill>
+                      <a:srgbClr val="FFFFFF"/>
+                    </a:solidFill>
+                  </a:tcPr>
+                </a:tc>
+                <a:tc>
+                  <a:txBody>
+                    <a:bodyPr/>
+                    <a:lstStyle/>
+                    <a:p>
+                      <a:pPr algn="l"/>
+                      <a:r>
+                        <a:rPr sz="1200">
+                          <a:solidFill>
+                            <a:srgbClr val="15171A"/>
+                          </a:solidFill>
+                          <a:latin typeface="Helvetica Neue"/>
+                        </a:rPr>
+                        <a:t>batch 32 OOM</a:t>
+                      </a:r>
+                    </a:p>
+                  </a:txBody>
+                  <a:tcPr anchor="ctr" marL="82296" marR="82296" marT="9144" marB="9144">
+                    <a:solidFill>
+                      <a:srgbClr val="FFFFFF"/>
+                    </a:solidFill>
+                  </a:tcPr>
+                </a:tc>
+              </a:tr>
+            </a:tbl>
+          </a:graphicData>
+        </a:graphic>
+      </p:graphicFrame>
+      <p:sp>
+        <p:nvSpPr>
+          <p:cNvPr id="13" name="TextBox 12"/>
+          <p:cNvSpPr txBox="1"/>
+          <p:nvPr/>
+        </p:nvSpPr>
+        <p:spPr>
+          <a:xfrm>
+            <a:off x="5852160" y="5301908"/>
+            <a:ext cx="5760720" cy="548640"/>
+          </a:xfrm>
+          <a:prstGeom prst="rect">
+            <a:avLst/>
+          </a:prstGeom>
+          <a:noFill/>
+        </p:spPr>
+        <p:txBody>
+          <a:bodyPr wrap="square" anchor="t">
+            <a:spAutoFit/>
+          </a:bodyPr>
+          <a:lstStyle/>
+          <a:p>
+            <a:pPr algn="l">
+              <a:spcAft>
+                <a:spcPts val="200"/>
+              </a:spcAft>
+            </a:pPr>
+            <a:r>
+              <a:rPr sz="1350" b="1" i="0">
+                <a:solidFill>
+                  <a:srgbClr val="E8590C"/>
+                </a:solidFill>
+                <a:latin typeface="Helvetica Neue"/>
+              </a:rPr>
+              <a:t>Memory is what ends every sweep. One batch step past</a:t>
+            </a:r>
+          </a:p>
+          <a:p>
+            <a:pPr algn="l">
+              <a:spcAft>
+                <a:spcPts val="200"/>
+              </a:spcAft>
+            </a:pPr>
+            <a:r>
+              <a:rPr sz="1350" b="1" i="0">
+                <a:solidFill>
+                  <a:srgbClr val="E8590C"/>
+                </a:solidFill>
+                <a:latin typeface="Helvetica Neue"/>
+              </a:rPr>
+              <a:t>these numbers, all three fail.</a:t>
             </a:r>
           </a:p>
         </p:txBody>
@@ -6570,8 +7621,8 @@
           <p:nvPr/>
         </p:nvGraphicFramePr>
         <p:xfrm>
-          <a:off x="566928" y="1691640"/>
-          <a:ext cx="7040880" cy="1920240"/>
+          <a:off x="566928" y="1591056"/>
+          <a:ext cx="6903720" cy="1714500"/>
         </p:xfrm>
         <a:graphic>
           <a:graphicData uri="http://schemas.openxmlformats.org/drawingml/2006/table">
@@ -6580,12 +7631,12 @@
                 <a:tableStyleId>{5C22544A-7EE6-4342-B048-85BDC9FD1C3A}</a:tableStyleId>
               </a:tblPr>
               <a:tblGrid>
-                <a:gridCol w="2286000"/>
-                <a:gridCol w="1828800"/>
-                <a:gridCol w="1828800"/>
-                <a:gridCol w="1097280"/>
+                <a:gridCol w="2240280"/>
+                <a:gridCol w="1554480"/>
+                <a:gridCol w="1554480"/>
+                <a:gridCol w="1554480"/>
               </a:tblGrid>
-              <a:tr h="384048">
+              <a:tr h="342900">
                 <a:tc>
                   <a:txBody>
                     <a:bodyPr/>
@@ -6593,13 +7644,13 @@
                     <a:p>
                       <a:pPr algn="l"/>
                       <a:r>
-                        <a:rPr sz="1300" b="1">
+                        <a:rPr sz="1250" b="1">
                           <a:solidFill>
                             <a:srgbClr val="FFFFFF"/>
                           </a:solidFill>
                           <a:latin typeface="Helvetica Neue"/>
                         </a:rPr>
-                        <a:t>Qwen3-4B, seq 1024</a:t>
+                        <a:t>Qwen3-0.6B, batch 1</a:t>
                       </a:r>
                     </a:p>
                   </a:txBody>
@@ -6616,7 +7667,30 @@
                     <a:p>
                       <a:pPr algn="r"/>
                       <a:r>
-                        <a:rPr sz="1300" b="1">
+                        <a:rPr sz="1250" b="1">
+                          <a:solidFill>
+                            <a:srgbClr val="FFFFFF"/>
+                          </a:solidFill>
+                          <a:latin typeface="Helvetica Neue"/>
+                        </a:rPr>
+                        <a:t>CPU 32-core</a:t>
+                      </a:r>
+                    </a:p>
+                  </a:txBody>
+                  <a:tcPr anchor="ctr" marL="82296" marR="82296" marT="9144" marB="9144">
+                    <a:solidFill>
+                      <a:srgbClr val="15171A"/>
+                    </a:solidFill>
+                  </a:tcPr>
+                </a:tc>
+                <a:tc>
+                  <a:txBody>
+                    <a:bodyPr/>
+                    <a:lstStyle/>
+                    <a:p>
+                      <a:pPr algn="r"/>
+                      <a:r>
+                        <a:rPr sz="1250" b="1">
                           <a:solidFill>
                             <a:srgbClr val="FFFFFF"/>
                           </a:solidFill>
@@ -6639,7 +7713,7 @@
                     <a:p>
                       <a:pPr algn="r"/>
                       <a:r>
-                        <a:rPr sz="1300" b="1">
+                        <a:rPr sz="1250" b="1">
                           <a:solidFill>
                             <a:srgbClr val="FFFFFF"/>
                           </a:solidFill>
@@ -6655,31 +7729,8 @@
                     </a:solidFill>
                   </a:tcPr>
                 </a:tc>
-                <a:tc>
-                  <a:txBody>
-                    <a:bodyPr/>
-                    <a:lstStyle/>
-                    <a:p>
-                      <a:pPr algn="r"/>
-                      <a:r>
-                        <a:rPr sz="1300" b="1">
-                          <a:solidFill>
-                            <a:srgbClr val="FFFFFF"/>
-                          </a:solidFill>
-                          <a:latin typeface="Helvetica Neue"/>
-                        </a:rPr>
-                        <a:t>ratio</a:t>
-                      </a:r>
-                    </a:p>
-                  </a:txBody>
-                  <a:tcPr anchor="ctr" marL="82296" marR="82296" marT="9144" marB="9144">
-                    <a:solidFill>
-                      <a:srgbClr val="15171A"/>
-                    </a:solidFill>
-                  </a:tcPr>
-                </a:tc>
               </a:tr>
-              <a:tr h="384048">
+              <a:tr h="342900">
                 <a:tc>
                   <a:txBody>
                     <a:bodyPr/>
@@ -6687,13 +7738,13 @@
                     <a:p>
                       <a:pPr algn="l"/>
                       <a:r>
-                        <a:rPr sz="1300">
+                        <a:rPr sz="1250">
                           <a:solidFill>
                             <a:srgbClr val="15171A"/>
                           </a:solidFill>
                           <a:latin typeface="Helvetica Neue"/>
                         </a:rPr>
-                        <a:t>batch 8</a:t>
+                        <a:t>Median step time</a:t>
                       </a:r>
                     </a:p>
                   </a:txBody>
@@ -6710,13 +7761,84 @@
                     <a:p>
                       <a:pPr algn="r"/>
                       <a:r>
-                        <a:rPr sz="1300" b="1">
+                        <a:rPr sz="1250">
                           <a:solidFill>
-                            <a:srgbClr val="E8590C"/>
+                            <a:srgbClr val="15171A"/>
                           </a:solidFill>
                           <a:latin typeface="Helvetica Neue"/>
                         </a:rPr>
-                        <a:t>11,557 tok/s</a:t>
+                        <a:t>18.99 s</a:t>
+                      </a:r>
+                    </a:p>
+                  </a:txBody>
+                  <a:tcPr anchor="ctr" marL="82296" marR="82296" marT="9144" marB="9144">
+                    <a:solidFill>
+                      <a:srgbClr val="FFFFFF"/>
+                    </a:solidFill>
+                  </a:tcPr>
+                </a:tc>
+                <a:tc>
+                  <a:txBody>
+                    <a:bodyPr/>
+                    <a:lstStyle/>
+                    <a:p>
+                      <a:pPr algn="r"/>
+                      <a:r>
+                        <a:rPr sz="1250">
+                          <a:solidFill>
+                            <a:srgbClr val="15171A"/>
+                          </a:solidFill>
+                          <a:latin typeface="Helvetica Neue"/>
+                        </a:rPr>
+                        <a:t>0.0798 s</a:t>
+                      </a:r>
+                    </a:p>
+                  </a:txBody>
+                  <a:tcPr anchor="ctr" marL="82296" marR="82296" marT="9144" marB="9144">
+                    <a:solidFill>
+                      <a:srgbClr val="FFFFFF"/>
+                    </a:solidFill>
+                  </a:tcPr>
+                </a:tc>
+                <a:tc>
+                  <a:txBody>
+                    <a:bodyPr/>
+                    <a:lstStyle/>
+                    <a:p>
+                      <a:pPr algn="r"/>
+                      <a:r>
+                        <a:rPr sz="1250">
+                          <a:solidFill>
+                            <a:srgbClr val="15171A"/>
+                          </a:solidFill>
+                          <a:latin typeface="Helvetica Neue"/>
+                        </a:rPr>
+                        <a:t>0.0800 s</a:t>
+                      </a:r>
+                    </a:p>
+                  </a:txBody>
+                  <a:tcPr anchor="ctr" marL="82296" marR="82296" marT="9144" marB="9144">
+                    <a:solidFill>
+                      <a:srgbClr val="FFFFFF"/>
+                    </a:solidFill>
+                  </a:tcPr>
+                </a:tc>
+              </a:tr>
+              <a:tr h="342900">
+                <a:tc>
+                  <a:txBody>
+                    <a:bodyPr/>
+                    <a:lstStyle/>
+                    <a:p>
+                      <a:pPr algn="l"/>
+                      <a:r>
+                        <a:rPr sz="1250">
+                          <a:solidFill>
+                            <a:srgbClr val="15171A"/>
+                          </a:solidFill>
+                          <a:latin typeface="Helvetica Neue"/>
+                        </a:rPr>
+                        <a:t>Speedup vs CPU</a:t>
                       </a:r>
                     </a:p>
                   </a:txBody>
@@ -6733,13 +7855,84 @@
                     <a:p>
                       <a:pPr algn="r"/>
                       <a:r>
-                        <a:rPr sz="1300">
+                        <a:rPr sz="1250">
                           <a:solidFill>
                             <a:srgbClr val="15171A"/>
                           </a:solidFill>
                           <a:latin typeface="Helvetica Neue"/>
                         </a:rPr>
-                        <a:t>4,678 tok/s</a:t>
+                        <a:t>1.0×</a:t>
+                      </a:r>
+                    </a:p>
+                  </a:txBody>
+                  <a:tcPr anchor="ctr" marL="82296" marR="82296" marT="9144" marB="9144">
+                    <a:solidFill>
+                      <a:srgbClr val="FEF3EA"/>
+                    </a:solidFill>
+                  </a:tcPr>
+                </a:tc>
+                <a:tc>
+                  <a:txBody>
+                    <a:bodyPr/>
+                    <a:lstStyle/>
+                    <a:p>
+                      <a:pPr algn="r"/>
+                      <a:r>
+                        <a:rPr sz="1250">
+                          <a:solidFill>
+                            <a:srgbClr val="15171A"/>
+                          </a:solidFill>
+                          <a:latin typeface="Helvetica Neue"/>
+                        </a:rPr>
+                        <a:t>238×</a:t>
+                      </a:r>
+                    </a:p>
+                  </a:txBody>
+                  <a:tcPr anchor="ctr" marL="82296" marR="82296" marT="9144" marB="9144">
+                    <a:solidFill>
+                      <a:srgbClr val="FEF3EA"/>
+                    </a:solidFill>
+                  </a:tcPr>
+                </a:tc>
+                <a:tc>
+                  <a:txBody>
+                    <a:bodyPr/>
+                    <a:lstStyle/>
+                    <a:p>
+                      <a:pPr algn="r"/>
+                      <a:r>
+                        <a:rPr sz="1250">
+                          <a:solidFill>
+                            <a:srgbClr val="15171A"/>
+                          </a:solidFill>
+                          <a:latin typeface="Helvetica Neue"/>
+                        </a:rPr>
+                        <a:t>237×</a:t>
+                      </a:r>
+                    </a:p>
+                  </a:txBody>
+                  <a:tcPr anchor="ctr" marL="82296" marR="82296" marT="9144" marB="9144">
+                    <a:solidFill>
+                      <a:srgbClr val="FEF3EA"/>
+                    </a:solidFill>
+                  </a:tcPr>
+                </a:tc>
+              </a:tr>
+              <a:tr h="342900">
+                <a:tc>
+                  <a:txBody>
+                    <a:bodyPr/>
+                    <a:lstStyle/>
+                    <a:p>
+                      <a:pPr algn="l"/>
+                      <a:r>
+                        <a:rPr sz="1250">
+                          <a:solidFill>
+                            <a:srgbClr val="15171A"/>
+                          </a:solidFill>
+                          <a:latin typeface="Helvetica Neue"/>
+                        </a:rPr>
+                        <a:t>Mean chip utilisation</a:t>
                       </a:r>
                     </a:p>
                   </a:txBody>
@@ -6756,38 +7949,13 @@
                     <a:p>
                       <a:pPr algn="r"/>
                       <a:r>
-                        <a:rPr sz="1300">
+                        <a:rPr sz="1250">
                           <a:solidFill>
                             <a:srgbClr val="15171A"/>
                           </a:solidFill>
                           <a:latin typeface="Helvetica Neue"/>
                         </a:rPr>
-                        <a:t>2.5x</a:t>
-                      </a:r>
-                    </a:p>
-                  </a:txBody>
-                  <a:tcPr anchor="ctr" marL="82296" marR="82296" marT="9144" marB="9144">
-                    <a:solidFill>
-                      <a:srgbClr val="FFFFFF"/>
-                    </a:solidFill>
-                  </a:tcPr>
-                </a:tc>
-              </a:tr>
-              <a:tr h="384048">
-                <a:tc>
-                  <a:txBody>
-                    <a:bodyPr/>
-                    <a:lstStyle/>
-                    <a:p>
-                      <a:pPr algn="l"/>
-                      <a:r>
-                        <a:rPr sz="1300">
-                          <a:solidFill>
-                            <a:srgbClr val="15171A"/>
-                          </a:solidFill>
-                          <a:latin typeface="Helvetica Neue"/>
-                        </a:rPr>
-                        <a:t>batch 16</a:t>
+                        <a:t>44.3 %</a:t>
                       </a:r>
                     </a:p>
                   </a:txBody>
@@ -6804,36 +7972,13 @@
                     <a:p>
                       <a:pPr algn="r"/>
                       <a:r>
-                        <a:rPr sz="1300" b="1">
-                          <a:solidFill>
-                            <a:srgbClr val="E8590C"/>
-                          </a:solidFill>
-                          <a:latin typeface="Helvetica Neue"/>
-                        </a:rPr>
-                        <a:t>12,504 tok/s</a:t>
-                      </a:r>
-                    </a:p>
-                  </a:txBody>
-                  <a:tcPr anchor="ctr" marL="82296" marR="82296" marT="9144" marB="9144">
-                    <a:solidFill>
-                      <a:srgbClr val="FEF3EA"/>
-                    </a:solidFill>
-                  </a:tcPr>
-                </a:tc>
-                <a:tc>
-                  <a:txBody>
-                    <a:bodyPr/>
-                    <a:lstStyle/>
-                    <a:p>
-                      <a:pPr algn="r"/>
-                      <a:r>
-                        <a:rPr sz="1300">
+                        <a:rPr sz="1250">
                           <a:solidFill>
                             <a:srgbClr val="15171A"/>
                           </a:solidFill>
                           <a:latin typeface="Helvetica Neue"/>
                         </a:rPr>
-                        <a:t>4,596 tok/s</a:t>
+                        <a:t>1.59 %</a:t>
                       </a:r>
                     </a:p>
                   </a:txBody>
@@ -6850,13 +7995,13 @@
                     <a:p>
                       <a:pPr algn="r"/>
                       <a:r>
-                        <a:rPr sz="1300">
+                        <a:rPr sz="1250">
                           <a:solidFill>
                             <a:srgbClr val="15171A"/>
                           </a:solidFill>
                           <a:latin typeface="Helvetica Neue"/>
                         </a:rPr>
-                        <a:t>2.7x</a:t>
+                        <a:t>no counter exists</a:t>
                       </a:r>
                     </a:p>
                   </a:txBody>
@@ -6867,7 +8012,7 @@
                   </a:tcPr>
                 </a:tc>
               </a:tr>
-              <a:tr h="384048">
+              <a:tr h="342900">
                 <a:tc>
                   <a:txBody>
                     <a:bodyPr/>
@@ -6875,13 +8020,13 @@
                     <a:p>
                       <a:pPr algn="l"/>
                       <a:r>
-                        <a:rPr sz="1300">
+                        <a:rPr sz="1250">
                           <a:solidFill>
                             <a:srgbClr val="15171A"/>
                           </a:solidFill>
                           <a:latin typeface="Helvetica Neue"/>
                         </a:rPr>
-                        <a:t>batch 32</a:t>
+                        <a:t>Peak memory</a:t>
                       </a:r>
                     </a:p>
                   </a:txBody>
@@ -6898,36 +8043,13 @@
                     <a:p>
                       <a:pPr algn="r"/>
                       <a:r>
-                        <a:rPr sz="1300" b="1">
-                          <a:solidFill>
-                            <a:srgbClr val="E8590C"/>
-                          </a:solidFill>
-                          <a:latin typeface="Helvetica Neue"/>
-                        </a:rPr>
-                        <a:t>13,218 tok/s</a:t>
-                      </a:r>
-                    </a:p>
-                  </a:txBody>
-                  <a:tcPr anchor="ctr" marL="82296" marR="82296" marT="9144" marB="9144">
-                    <a:solidFill>
-                      <a:srgbClr val="FEF3EA"/>
-                    </a:solidFill>
-                  </a:tcPr>
-                </a:tc>
-                <a:tc>
-                  <a:txBody>
-                    <a:bodyPr/>
-                    <a:lstStyle/>
-                    <a:p>
-                      <a:pPr algn="r"/>
-                      <a:r>
-                        <a:rPr sz="1300">
+                        <a:rPr sz="1250">
                           <a:solidFill>
                             <a:srgbClr val="15171A"/>
                           </a:solidFill>
                           <a:latin typeface="Helvetica Neue"/>
                         </a:rPr>
-                        <a:t>out of memory</a:t>
+                        <a:t>66.1 %</a:t>
                       </a:r>
                     </a:p>
                   </a:txBody>
@@ -6944,38 +8066,13 @@
                     <a:p>
                       <a:pPr algn="r"/>
                       <a:r>
-                        <a:rPr sz="1300">
+                        <a:rPr sz="1250">
                           <a:solidFill>
                             <a:srgbClr val="15171A"/>
                           </a:solidFill>
                           <a:latin typeface="Helvetica Neue"/>
                         </a:rPr>
-                        <a:t/>
-                      </a:r>
-                    </a:p>
-                  </a:txBody>
-                  <a:tcPr anchor="ctr" marL="82296" marR="82296" marT="9144" marB="9144">
-                    <a:solidFill>
-                      <a:srgbClr val="FFFFFF"/>
-                    </a:solidFill>
-                  </a:tcPr>
-                </a:tc>
-              </a:tr>
-              <a:tr h="384048">
-                <a:tc>
-                  <a:txBody>
-                    <a:bodyPr/>
-                    <a:lstStyle/>
-                    <a:p>
-                      <a:pPr algn="l"/>
-                      <a:r>
-                        <a:rPr sz="1300">
-                          <a:solidFill>
-                            <a:srgbClr val="15171A"/>
-                          </a:solidFill>
-                          <a:latin typeface="Helvetica Neue"/>
-                        </a:rPr>
-                        <a:t>batch 64</a:t>
+                        <a:t>5.0 %</a:t>
                       </a:r>
                     </a:p>
                   </a:txBody>
@@ -6992,59 +8089,13 @@
                     <a:p>
                       <a:pPr algn="r"/>
                       <a:r>
-                        <a:rPr sz="1300" b="1">
-                          <a:solidFill>
-                            <a:srgbClr val="E8590C"/>
-                          </a:solidFill>
-                          <a:latin typeface="Helvetica Neue"/>
-                        </a:rPr>
-                        <a:t>out of memory</a:t>
-                      </a:r>
-                    </a:p>
-                  </a:txBody>
-                  <a:tcPr anchor="ctr" marL="82296" marR="82296" marT="9144" marB="9144">
-                    <a:solidFill>
-                      <a:srgbClr val="FEF3EA"/>
-                    </a:solidFill>
-                  </a:tcPr>
-                </a:tc>
-                <a:tc>
-                  <a:txBody>
-                    <a:bodyPr/>
-                    <a:lstStyle/>
-                    <a:p>
-                      <a:pPr algn="r"/>
-                      <a:r>
-                        <a:rPr sz="1300">
+                        <a:rPr sz="1250">
                           <a:solidFill>
                             <a:srgbClr val="15171A"/>
                           </a:solidFill>
                           <a:latin typeface="Helvetica Neue"/>
                         </a:rPr>
-                        <a:t/>
-                      </a:r>
-                    </a:p>
-                  </a:txBody>
-                  <a:tcPr anchor="ctr" marL="82296" marR="82296" marT="9144" marB="9144">
-                    <a:solidFill>
-                      <a:srgbClr val="FFFFFF"/>
-                    </a:solidFill>
-                  </a:tcPr>
-                </a:tc>
-                <a:tc>
-                  <a:txBody>
-                    <a:bodyPr/>
-                    <a:lstStyle/>
-                    <a:p>
-                      <a:pPr algn="r"/>
-                      <a:r>
-                        <a:rPr sz="1300">
-                          <a:solidFill>
-                            <a:srgbClr val="15171A"/>
-                          </a:solidFill>
-                          <a:latin typeface="Helvetica Neue"/>
-                        </a:rPr>
-                        <a:t/>
+                        <a:t>7.3 %</a:t>
                       </a:r>
                     </a:p>
                   </a:txBody>
@@ -7067,8 +8118,8 @@
         </p:nvSpPr>
         <p:spPr>
           <a:xfrm>
-            <a:off x="566928" y="3794760"/>
-            <a:ext cx="6858000" cy="685800"/>
+            <a:off x="566928" y="3433572"/>
+            <a:ext cx="6903720" cy="640080"/>
           </a:xfrm>
           <a:prstGeom prst="rect">
             <a:avLst/>
@@ -7087,13 +8138,29 @@
               </a:spcAft>
             </a:pPr>
             <a:r>
-              <a:rPr sz="1500" b="1" i="0">
+              <a:rPr sz="1450" b="1" i="0">
                 <a:solidFill>
                   <a:srgbClr val="15171A"/>
                 </a:solidFill>
                 <a:latin typeface="Helvetica Neue"/>
               </a:rPr>
-              <a:t>At batch 1 both chips idle and tie to within 0.23 %. That tie was an artefact.</a:t>
+              <a:t>Both accelerators are ~238× the CPU and tie with each other to 0.23 %.</a:t>
+            </a:r>
+          </a:p>
+          <a:p>
+            <a:pPr algn="l">
+              <a:spcAft>
+                <a:spcPts val="300"/>
+              </a:spcAft>
+            </a:pPr>
+            <a:r>
+              <a:rPr sz="1450" b="1" i="0">
+                <a:solidFill>
+                  <a:srgbClr val="15171A"/>
+                </a:solidFill>
+                <a:latin typeface="Helvetica Neue"/>
+              </a:rPr>
+              <a:t>At batch 1 neither is busy. That tie is an artefact.</a:t>
             </a:r>
           </a:p>
         </p:txBody>
@@ -7114,8 +8181,8 @@
         </p:blipFill>
         <p:spPr>
           <a:xfrm>
-            <a:off x="566928" y="4526280"/>
-            <a:ext cx="6858000" cy="1769806"/>
+            <a:off x="566928" y="4041648"/>
+            <a:ext cx="6903720" cy="1877182"/>
           </a:xfrm>
           <a:prstGeom prst="rect">
             <a:avLst/>
@@ -7130,8 +8197,8 @@
         </p:nvSpPr>
         <p:spPr>
           <a:xfrm>
-            <a:off x="7955279" y="1691640"/>
-            <a:ext cx="3657600" cy="777240"/>
+            <a:off x="7726679" y="1591056"/>
+            <a:ext cx="3886200" cy="777240"/>
           </a:xfrm>
           <a:prstGeom prst="rect">
             <a:avLst/>
@@ -7169,8 +8236,8 @@
         </p:nvSpPr>
         <p:spPr>
           <a:xfrm>
-            <a:off x="7955279" y="2350008"/>
-            <a:ext cx="3657600" cy="822960"/>
+            <a:off x="7744967" y="2249424"/>
+            <a:ext cx="3886200" cy="822960"/>
           </a:xfrm>
           <a:prstGeom prst="rect">
             <a:avLst/>
@@ -7224,8 +8291,8 @@
         </p:nvSpPr>
         <p:spPr>
           <a:xfrm>
-            <a:off x="7955279" y="3291840"/>
-            <a:ext cx="3657600" cy="1371600"/>
+            <a:off x="7726679" y="3218688"/>
+            <a:ext cx="3886200" cy="1275567"/>
           </a:xfrm>
           <a:prstGeom prst="roundRect">
             <a:avLst>
@@ -7272,8 +8339,8 @@
         </p:nvSpPr>
         <p:spPr>
           <a:xfrm>
-            <a:off x="8229600" y="3474720"/>
-            <a:ext cx="3200400" cy="274320"/>
+            <a:off x="7982711" y="3456432"/>
+            <a:ext cx="3410712" cy="234696"/>
           </a:xfrm>
           <a:prstGeom prst="rect">
             <a:avLst/>
@@ -7311,8 +8378,8 @@
         </p:nvSpPr>
         <p:spPr>
           <a:xfrm>
-            <a:off x="8229600" y="3794760"/>
-            <a:ext cx="3200400" cy="822960"/>
+            <a:off x="7982711" y="3782568"/>
+            <a:ext cx="3410712" cy="540512"/>
           </a:xfrm>
           <a:prstGeom prst="rect">
             <a:avLst/>
@@ -7331,7 +8398,7 @@
               </a:spcAft>
             </a:pPr>
             <a:r>
-              <a:rPr sz="1400" b="0" i="0">
+              <a:rPr sz="1350" b="0" i="0">
                 <a:solidFill>
                   <a:srgbClr val="15171A"/>
                 </a:solidFill>
@@ -7347,7 +8414,7 @@
               </a:spcAft>
             </a:pPr>
             <a:r>
-              <a:rPr sz="1400" b="0" i="0">
+              <a:rPr sz="1350" b="0" i="0">
                 <a:solidFill>
                   <a:srgbClr val="15171A"/>
                 </a:solidFill>
@@ -7366,8 +8433,8 @@
         </p:nvSpPr>
         <p:spPr>
           <a:xfrm>
-            <a:off x="7955279" y="4846320"/>
-            <a:ext cx="3657600" cy="1417320"/>
+            <a:off x="7726679" y="4590288"/>
+            <a:ext cx="3886200" cy="1732767"/>
           </a:xfrm>
           <a:prstGeom prst="roundRect">
             <a:avLst>
@@ -7414,8 +8481,8 @@
         </p:nvSpPr>
         <p:spPr>
           <a:xfrm>
-            <a:off x="8229600" y="5029200"/>
-            <a:ext cx="3200400" cy="274320"/>
+            <a:off x="7982711" y="4828032"/>
+            <a:ext cx="3410712" cy="234696"/>
           </a:xfrm>
           <a:prstGeom prst="rect">
             <a:avLst/>
@@ -7453,8 +8520,8 @@
         </p:nvSpPr>
         <p:spPr>
           <a:xfrm>
-            <a:off x="8229600" y="5349240"/>
-            <a:ext cx="3200400" cy="914400"/>
+            <a:off x="7982711" y="5154168"/>
+            <a:ext cx="3410712" cy="997712"/>
           </a:xfrm>
           <a:prstGeom prst="rect">
             <a:avLst/>
@@ -7479,7 +8546,7 @@
                 </a:solidFill>
                 <a:latin typeface="Helvetica Neue"/>
               </a:rPr>
-              <a:t>File cache: load 14.6x faster,</a:t>
+              <a:t>File cache on: checkpoint load</a:t>
             </a:r>
           </a:p>
           <a:p>
@@ -7495,7 +8562,7 @@
                 </a:solidFill>
                 <a:latin typeface="Helvetica Neue"/>
               </a:rPr>
-              <a:t>31 % off wall clock.</a:t>
+              <a:t>14.6× faster, 31 % off wall clock.</a:t>
             </a:r>
           </a:p>
           <a:p>
@@ -7511,7 +8578,7 @@
                 </a:solidFill>
                 <a:latin typeface="Helvetica Neue"/>
               </a:rPr>
-              <a:t>Step time unchanged to the</a:t>
+              <a:t>Median step time unchanged to</a:t>
             </a:r>
           </a:p>
           <a:p>
@@ -7527,7 +8594,7 @@
                 </a:solidFill>
                 <a:latin typeface="Helvetica Neue"/>
               </a:rPr>
-              <a:t>fourth decimal.</a:t>
+              <a:t>the fourth decimal.</a:t>
             </a:r>
           </a:p>
         </p:txBody>
@@ -7715,8 +8782,8 @@
         </p:nvSpPr>
         <p:spPr>
           <a:xfrm>
-            <a:off x="566928" y="1737360"/>
-            <a:ext cx="3520440" cy="2423160"/>
+            <a:off x="566928" y="1645920"/>
+            <a:ext cx="3520440" cy="2286000"/>
           </a:xfrm>
           <a:prstGeom prst="roundRect">
             <a:avLst>
@@ -7763,7 +8830,7 @@
         </p:nvSpPr>
         <p:spPr>
           <a:xfrm>
-            <a:off x="822960" y="1874519"/>
+            <a:off x="822960" y="1773936"/>
             <a:ext cx="3017520" cy="640080"/>
           </a:xfrm>
           <a:prstGeom prst="rect">
@@ -7802,7 +8869,7 @@
         </p:nvSpPr>
         <p:spPr>
           <a:xfrm>
-            <a:off x="822960" y="2450592"/>
+            <a:off x="822960" y="2340864"/>
             <a:ext cx="3063240" cy="411480"/>
           </a:xfrm>
           <a:prstGeom prst="rect">
@@ -7841,7 +8908,7 @@
         </p:nvSpPr>
         <p:spPr>
           <a:xfrm>
-            <a:off x="822960" y="2880360"/>
+            <a:off x="822960" y="2770632"/>
             <a:ext cx="3063240" cy="1188720"/>
           </a:xfrm>
           <a:prstGeom prst="rect">
@@ -7899,7 +8966,7 @@
                 </a:solidFill>
                 <a:latin typeface="Helvetica Neue"/>
               </a:rPr>
-              <a:t>reading the checkpoint.</a:t>
+              <a:t>reading the checkpoint: 32 %.</a:t>
             </a:r>
           </a:p>
         </p:txBody>
@@ -7912,8 +8979,8 @@
         </p:nvSpPr>
         <p:spPr>
           <a:xfrm>
-            <a:off x="4361688" y="1737360"/>
-            <a:ext cx="3520440" cy="2423160"/>
+            <a:off x="4361688" y="1645920"/>
+            <a:ext cx="3520440" cy="2286000"/>
           </a:xfrm>
           <a:prstGeom prst="roundRect">
             <a:avLst>
@@ -7960,7 +9027,7 @@
         </p:nvSpPr>
         <p:spPr>
           <a:xfrm>
-            <a:off x="4617720" y="1874519"/>
+            <a:off x="4617720" y="1773936"/>
             <a:ext cx="3017520" cy="640080"/>
           </a:xfrm>
           <a:prstGeom prst="rect">
@@ -7999,7 +9066,7 @@
         </p:nvSpPr>
         <p:spPr>
           <a:xfrm>
-            <a:off x="4617720" y="2450592"/>
+            <a:off x="4617720" y="2340864"/>
             <a:ext cx="3063240" cy="411480"/>
           </a:xfrm>
           <a:prstGeom prst="rect">
@@ -8038,7 +9105,7 @@
         </p:nvSpPr>
         <p:spPr>
           <a:xfrm>
-            <a:off x="4617720" y="2880360"/>
+            <a:off x="4617720" y="2770632"/>
             <a:ext cx="3063240" cy="1188720"/>
           </a:xfrm>
           <a:prstGeom prst="rect">
@@ -8125,8 +9192,8 @@
         </p:nvSpPr>
         <p:spPr>
           <a:xfrm>
-            <a:off x="8156448" y="1737360"/>
-            <a:ext cx="3520440" cy="2423160"/>
+            <a:off x="8156448" y="1645920"/>
+            <a:ext cx="3520440" cy="2286000"/>
           </a:xfrm>
           <a:prstGeom prst="roundRect">
             <a:avLst>
@@ -8173,7 +9240,7 @@
         </p:nvSpPr>
         <p:spPr>
           <a:xfrm>
-            <a:off x="8412480" y="1874519"/>
+            <a:off x="8412480" y="1773936"/>
             <a:ext cx="3017520" cy="640080"/>
           </a:xfrm>
           <a:prstGeom prst="rect">
@@ -8212,7 +9279,7 @@
         </p:nvSpPr>
         <p:spPr>
           <a:xfrm>
-            <a:off x="8412480" y="2450592"/>
+            <a:off x="8412480" y="2340864"/>
             <a:ext cx="3063240" cy="411480"/>
           </a:xfrm>
           <a:prstGeom prst="rect">
@@ -8251,7 +9318,7 @@
         </p:nvSpPr>
         <p:spPr>
           <a:xfrm>
-            <a:off x="8412480" y="2880360"/>
+            <a:off x="8412480" y="2770632"/>
             <a:ext cx="3063240" cy="1188720"/>
           </a:xfrm>
           <a:prstGeom prst="rect">
@@ -8338,7 +9405,7 @@
         </p:nvSpPr>
         <p:spPr>
           <a:xfrm>
-            <a:off x="566928" y="4389120"/>
+            <a:off x="566928" y="4224528"/>
             <a:ext cx="5394960" cy="320040"/>
           </a:xfrm>
           <a:prstGeom prst="rect">
@@ -8377,7 +9444,7 @@
         </p:nvSpPr>
         <p:spPr>
           <a:xfrm>
-            <a:off x="566928" y="4736592"/>
+            <a:off x="566928" y="4572000"/>
             <a:ext cx="5394960" cy="1280160"/>
           </a:xfrm>
           <a:prstGeom prst="rect">
@@ -8480,8 +9547,8 @@
         </p:nvSpPr>
         <p:spPr>
           <a:xfrm>
-            <a:off x="6217920" y="4261104"/>
-            <a:ext cx="5394960" cy="1874519"/>
+            <a:off x="6217920" y="4078224"/>
+            <a:ext cx="5394960" cy="2392659"/>
           </a:xfrm>
           <a:prstGeom prst="roundRect">
             <a:avLst>
@@ -8528,8 +9595,8 @@
         </p:nvSpPr>
         <p:spPr>
           <a:xfrm>
-            <a:off x="6492240" y="4425696"/>
-            <a:ext cx="4937760" cy="320040"/>
+            <a:off x="6473952" y="4315968"/>
+            <a:ext cx="4919472" cy="251460"/>
           </a:xfrm>
           <a:prstGeom prst="rect">
             <a:avLst/>
@@ -8567,8 +9634,8 @@
         </p:nvSpPr>
         <p:spPr>
           <a:xfrm>
-            <a:off x="6492240" y="4773168"/>
-            <a:ext cx="4937760" cy="1280160"/>
+            <a:off x="6473952" y="4658868"/>
+            <a:ext cx="4919472" cy="1371600"/>
           </a:xfrm>
           <a:prstGeom prst="rect">
             <a:avLst/>
@@ -8593,7 +9660,7 @@
                 </a:solidFill>
                 <a:latin typeface="Helvetica Neue"/>
               </a:rPr>
-              <a:t>On the real 4B workload one GH200 runs 2.7x faster</a:t>
+              <a:t>At batch 8, the slice's own best point: one GH200 runs</a:t>
             </a:r>
           </a:p>
           <a:p>
@@ -8609,7 +9676,7 @@
                 </a:solidFill>
                 <a:latin typeface="Helvetica Neue"/>
               </a:rPr>
-              <a:t>than eight TPU chips and costs 10x less:</a:t>
+              <a:t>2.5× faster than eight TPU chips and costs 10× less,</a:t>
             </a:r>
           </a:p>
           <a:p>
@@ -8625,7 +9692,7 @@
                 </a:solidFill>
                 <a:latin typeface="Helvetica Neue"/>
               </a:rPr>
-              <a:t>$0.56 against $5.72 per 1 000 steps.</a:t>
+              <a:t>$0.56 against $5.72 per 1,000 steps.</a:t>
             </a:r>
           </a:p>
           <a:p>
@@ -8686,8 +9753,47 @@
         </p:nvSpPr>
         <p:spPr>
           <a:xfrm>
-            <a:off x="566928" y="6172200"/>
-            <a:ext cx="11064240" cy="365760"/>
+            <a:off x="6473952" y="6103620"/>
+            <a:ext cx="4919472" cy="269240"/>
+          </a:xfrm>
+          <a:prstGeom prst="rect">
+            <a:avLst/>
+          </a:prstGeom>
+          <a:noFill/>
+        </p:spPr>
+        <p:txBody>
+          <a:bodyPr wrap="square" anchor="t">
+            <a:spAutoFit/>
+          </a:bodyPr>
+          <a:lstStyle/>
+          <a:p>
+            <a:pPr algn="l">
+              <a:spcAft>
+                <a:spcPts val="200"/>
+              </a:spcAft>
+            </a:pPr>
+            <a:r>
+              <a:rPr sz="1050" b="0" i="0">
+                <a:solidFill>
+                  <a:srgbClr val="717A85"/>
+                </a:solidFill>
+                <a:latin typeface="Helvetica Neue"/>
+              </a:rPr>
+              <a:t>TPU rate billed; the GH200 rate is a market proxy.</a:t>
+            </a:r>
+          </a:p>
+        </p:txBody>
+      </p:sp>
+      <p:sp>
+        <p:nvSpPr>
+          <p:cNvPr id="24" name="TextBox 23"/>
+          <p:cNvSpPr txBox="1"/>
+          <p:nvPr/>
+        </p:nvSpPr>
+        <p:spPr>
+          <a:xfrm>
+            <a:off x="566928" y="6382512"/>
+            <a:ext cx="11064240" cy="274320"/>
           </a:xfrm>
           <a:prstGeom prst="rect">
             <a:avLst/>

--- a/slides/ME344_Final_Arnold_Hambuch.pptx
+++ b/slides/ME344_Final_Arnold_Hambuch.pptx
@@ -506,148 +506,101 @@
           <a:lstStyle/>
           <a:p>
             <a:r>
-              <a:t>LEONARD  ~2:15   ·   full deck runs ~12 min; the [cut] blocks take it to ~8</a:t>
+              <a:t>LEONARD  ~55 s   ·   deck is budgeted to 6:00, see the timing note on slide 5</a:t>
             </a:r>
           </a:p>
           <a:p/>
           <a:p>
             <a:r>
-              <a:t>"Some context first, because it explains why we picked this workload.</a:t>
+              <a:t>"We run Dr. Findus, a startup in Berlin. German GPs have to attach ICD-10 codes to</a:t>
+            </a:r>
+          </a:p>
+          <a:p>
+            <a:r>
+              <a:t>every consultation. We propose the codes, the physician confirms each one. Today</a:t>
+            </a:r>
+          </a:p>
+          <a:p>
+            <a:r>
+              <a:t>that runs on hosted APIs, and the question we could not answer was whether it could</a:t>
+            </a:r>
+          </a:p>
+          <a:p>
+            <a:r>
+              <a:t>run on our own hardware.</a:t>
             </a:r>
           </a:p>
           <a:p/>
           <a:p>
             <a:r>
-              <a:t>We run a startup called Dr. Findus. German GPs have to attach billing and ICD-10</a:t>
-            </a:r>
-          </a:p>
-          <a:p>
-            <a:r>
-              <a:t>codes to every single consultation. We read the clinical note and propose the</a:t>
-            </a:r>
-          </a:p>
-          <a:p>
-            <a:r>
-              <a:t>codes, the physician confirms each one before anything is written, which is a</a:t>
-            </a:r>
-          </a:p>
-          <a:p>
-            <a:r>
-              <a:t>legal requirement here. For us reliability is the product: over-coding is not a</a:t>
-            </a:r>
-          </a:p>
-          <a:p>
-            <a:r>
-              <a:t>bug, it is fraud exposure. [cut]</a:t>
+              <a:t>[left card, then the grey line right]</a:t>
+            </a:r>
+          </a:p>
+          <a:p>
+            <a:r>
+              <a:t>So we built it and measured it: a LoRA fine-tune of Qwen3-4B on CodiEsp, 500 Spanish</a:t>
+            </a:r>
+          </a:p>
+          <a:p>
+            <a:r>
+              <a:t>clinical case reports with ICD-10 codes attached, eight gigabytes of weights before</a:t>
+            </a:r>
+          </a:p>
+          <a:p>
+            <a:r>
+              <a:t>a single activation.</a:t>
             </a:r>
           </a:p>
           <a:p/>
           <a:p>
             <a:r>
-              <a:t>Today that runs on hosted APIs. The question we could not answer was whether it</a:t>
-            </a:r>
-          </a:p>
-          <a:p>
-            <a:r>
-              <a:t>could run on our own hardware, and what that would cost. That is an</a:t>
-            </a:r>
-          </a:p>
-          <a:p>
-            <a:r>
-              <a:t>infrastructure question, not a model question, so we built the workload and</a:t>
-            </a:r>
-          </a:p>
-          <a:p>
-            <a:r>
-              <a:t>measured it instead of guessing.</a:t>
+              <a:t>[the bars]</a:t>
+            </a:r>
+          </a:p>
+          <a:p>
+            <a:r>
+              <a:t>And the data sets the first constraint. At 512 tokens only 15 percent of cases fit</a:t>
+            </a:r>
+          </a:p>
+          <a:p>
+            <a:r>
+              <a:t>uncut. We benchmark at 1024, the orange bar, where 73 percent fit. Doubling the</a:t>
+            </a:r>
+          </a:p>
+          <a:p>
+            <a:r>
+              <a:t>window fixes the rest and costs memory and time. That trade-off is slide four."</a:t>
             </a:r>
           </a:p>
           <a:p/>
           <a:p>
             <a:r>
-              <a:t>[point at the left card, then the grey line on the right]</a:t>
-            </a:r>
-          </a:p>
-          <a:p>
-            <a:r>
-              <a:t>The workload is a LoRA fine-tune of Qwen3-4B on CodiEsp: 500 training and</a:t>
-            </a:r>
-          </a:p>
-          <a:p>
-            <a:r>
-              <a:t>250 development case reports, real Spanish clinical text with ICD-10 codes</a:t>
-            </a:r>
-          </a:p>
-          <a:p>
-            <a:r>
-              <a:t>attached. Eight gigabytes of weights before a single activation.</a:t>
-            </a:r>
-          </a:p>
-          <a:p/>
-          <a:p>
-            <a:r>
-              <a:t>[point at the bar chart, bottom right]</a:t>
-            </a:r>
-          </a:p>
-          <a:p>
-            <a:r>
-              <a:t>And this is the first infrastructure decision the data forces on us. The bars are</a:t>
-            </a:r>
-          </a:p>
-          <a:p>
-            <a:r>
-              <a:t>how much of the corpus survives uncut at each context window. At 512 tokens only</a:t>
-            </a:r>
-          </a:p>
-          <a:p>
-            <a:r>
-              <a:t>15 percent of cases fit, so most of</a:t>
-            </a:r>
-          </a:p>
-          <a:p>
-            <a:r>
-              <a:t>the labels are simply cut off. At 2048 almost everything fits. We benchmark at</a:t>
-            </a:r>
-          </a:p>
-          <a:p>
-            <a:r>
-              <a:t>1024, the orange bar, where about</a:t>
-            </a:r>
-          </a:p>
-          <a:p>
-            <a:r>
-              <a:t>73 percent fits, because that is the</a:t>
-            </a:r>
-          </a:p>
-          <a:p>
-            <a:r>
-              <a:t>honest middle: 27 percent of cases still get truncated, and doubling</a:t>
-            </a:r>
-          </a:p>
-          <a:p>
-            <a:r>
-              <a:t>the window to fix it is exactly the kind of choice that costs memory and time.</a:t>
-            </a:r>
-          </a:p>
-          <a:p>
-            <a:r>
-              <a:t>Slide four shows what it costs.</a:t>
-            </a:r>
-          </a:p>
-          <a:p/>
-          <a:p>
-            <a:r>
-              <a:t>To be clear about what is being graded: accuracy earns no marks and we report</a:t>
-            </a:r>
-          </a:p>
-          <a:p>
-            <a:r>
-              <a:t>none. What we studied is where the time goes, and what it takes to run the job at</a:t>
-            </a:r>
-          </a:p>
-          <a:p>
-            <a:r>
-              <a:t>all."</a:t>
+              <a:t>IF ASKED</a:t>
+            </a:r>
+          </a:p>
+          <a:p>
+            <a:r>
+              <a:t>· Why this dataset: reliability is the product for us, over-coding is fraud</a:t>
+            </a:r>
+          </a:p>
+          <a:p>
+            <a:r>
+              <a:t>  exposure, so a self-hosted model is a compliance question as much as a cost one.</a:t>
+            </a:r>
+          </a:p>
+          <a:p>
+            <a:r>
+              <a:t>· Accuracy: none is claimed or measured. 250 dev documents exist and evaluate.py was</a:t>
+            </a:r>
+          </a:p>
+          <a:p>
+            <a:r>
+              <a:t>  never run. The rubric awards nothing for it and neither do we.</a:t>
+            </a:r>
+          </a:p>
+          <a:p>
+            <a:r>
+              <a:t>· CodiEsp is CC-BY 4.0, real clinical text, de-identified at source.</a:t>
             </a:r>
           </a:p>
         </p:txBody>
@@ -717,117 +670,123 @@
           <a:lstStyle/>
           <a:p>
             <a:r>
-              <a:t>LEONARD  ~1:45</a:t>
+              <a:t>LEONARD  ~55 s</a:t>
             </a:r>
           </a:p>
           <a:p/>
           <a:p>
             <a:r>
-              <a:t>"The architecture is deliberately one code path. A single JAX program, and XLA</a:t>
-            </a:r>
-          </a:p>
-          <a:p>
-            <a:r>
-              <a:t>lowers it to three different backends. No per-backend reimplementation, which is</a:t>
-            </a:r>
-          </a:p>
-          <a:p>
-            <a:r>
-              <a:t>what makes the comparison honest, because all three run literally the same code.</a:t>
+              <a:t>"One code path. A single JAX program, and XLA lowers it to all three backends.</a:t>
+            </a:r>
+          </a:p>
+          <a:p>
+            <a:r>
+              <a:t>Nothing branches on hardware, which is what makes the comparison honest.</a:t>
             </a:r>
           </a:p>
           <a:p/>
           <a:p>
             <a:r>
-              <a:t>[walk the three cards left to right]</a:t>
-            </a:r>
-          </a:p>
-          <a:p>
-            <a:r>
-              <a:t>[cut] Compilation: one program, LoRA applied with qwix, trained through Tunix.</a:t>
-            </a:r>
-          </a:p>
-          <a:p>
-            <a:r>
-              <a:t>Orchestration: three pinned Docker images, Kubernetes Jobs across two clusters,</a:t>
-            </a:r>
-          </a:p>
-          <a:p>
-            <a:r>
-              <a:t>and Kueue for admission on the TPU pool. Every manifest states its CPU, memory</a:t>
-            </a:r>
-          </a:p>
-          <a:p>
-            <a:r>
-              <a:t>and accelerator limits explicitly, so nothing gets scheduled by accident.</a:t>
+              <a:t>[the three cards]</a:t>
+            </a:r>
+          </a:p>
+          <a:p>
+            <a:r>
+              <a:t>Three pinned Docker images, Kubernetes Jobs across two clusters, Kueue for admission</a:t>
+            </a:r>
+          </a:p>
+          <a:p>
+            <a:r>
+              <a:t>on the TPU pool, and every manifest states its limits explicitly.</a:t>
             </a:r>
           </a:p>
           <a:p/>
           <a:p>
             <a:r>
-              <a:t>[point at the orange strip across the middle]</a:t>
-            </a:r>
-          </a:p>
-          <a:p>
-            <a:r>
-              <a:t>This strip is the data path, and it is where one of our two headline results</a:t>
-            </a:r>
-          </a:p>
-          <a:p>
-            <a:r>
-              <a:t>comes from. The eight-gigabyte checkpoint lives in a bucket in the same region,</a:t>
-            </a:r>
-          </a:p>
-          <a:p>
-            <a:r>
-              <a:t>gets mounted into the pod by the gcsfuse CSI driver, and is read from /gcs at</a:t>
-            </a:r>
-          </a:p>
-          <a:p>
-            <a:r>
-              <a:t>startup. We deliberately left the file cache on that mount as a knob instead of</a:t>
-            </a:r>
-          </a:p>
-          <a:p>
-            <a:r>
-              <a:t>fixing it, because that knob turned out to be the experiment. Luis comes back to</a:t>
-            </a:r>
-          </a:p>
-          <a:p>
-            <a:r>
-              <a:t>it on slide four.</a:t>
+              <a:t>[the strip across the middle]</a:t>
+            </a:r>
+          </a:p>
+          <a:p>
+            <a:r>
+              <a:t>This is the data path. An eight-gigabyte checkpoint in a bucket, mounted into the</a:t>
+            </a:r>
+          </a:p>
+          <a:p>
+            <a:r>
+              <a:t>pod by the gcsfuse CSI driver, read from /gcs at startup. We left the file cache on</a:t>
+            </a:r>
+          </a:p>
+          <a:p>
+            <a:r>
+              <a:t>that mount as a knob rather than fixing it, and that knob became the experiment.</a:t>
+            </a:r>
+          </a:p>
+          <a:p>
+            <a:r>
+              <a:t>Luis comes back to it.</a:t>
             </a:r>
           </a:p>
           <a:p/>
           <a:p>
             <a:r>
-              <a:t>[point at the table, GPU row]</a:t>
-            </a:r>
-          </a:p>
-          <a:p>
-            <a:r>
-              <a:t>One line to flag before I hand over. The GH200's host processor is ARM64, not</a:t>
-            </a:r>
-          </a:p>
-          <a:p>
-            <a:r>
-              <a:t>x86. That single fact cost us five separate blockers, and it is why the GPU row</a:t>
-            </a:r>
-          </a:p>
-          <a:p>
-            <a:r>
-              <a:t>reads 'public image plus ConfigMap' where the TPU row reads 'private registry'.</a:t>
-            </a:r>
-          </a:p>
-          <a:p>
-            <a:r>
-              <a:t>I will come back to it at the end."</a:t>
+              <a:t>[table, GPU row]</a:t>
+            </a:r>
+          </a:p>
+          <a:p>
+            <a:r>
+              <a:t>One line before I hand over. The GH200's host processor is ARM64, not x86. That</a:t>
+            </a:r>
+          </a:p>
+          <a:p>
+            <a:r>
+              <a:t>single fact cost us five separate blockers."</a:t>
             </a:r>
           </a:p>
           <a:p/>
           <a:p>
             <a:r>
               <a:t>→ hand over to Luis.</a:t>
+            </a:r>
+          </a:p>
+          <a:p/>
+          <a:p>
+            <a:r>
+              <a:t>IF ASKED</a:t>
+            </a:r>
+          </a:p>
+          <a:p>
+            <a:r>
+              <a:t>· The five blockers: no aarch64 libtpu wheel, a segfaulting QEMU cross-build, no</a:t>
+            </a:r>
+          </a:p>
+          <a:p>
+            <a:r>
+              <a:t>  credentials for the private registry, a 403 from it, and a base image that was</a:t>
+            </a:r>
+          </a:p>
+          <a:p>
+            <a:r>
+              <a:t>  amd64-only. Fix was to delete the registry from the design: public base image,</a:t>
+            </a:r>
+          </a:p>
+          <a:p>
+            <a:r>
+              <a:t>  source from a ConfigMap, dependencies from PyPI, HF and Zenodo.</a:t>
+            </a:r>
+          </a:p>
+          <a:p>
+            <a:r>
+              <a:t>· Why two clusters: the TPU pool is GKE in us-west4, the GH200 is on-prem at</a:t>
+            </a:r>
+          </a:p>
+          <a:p>
+            <a:r>
+              <a:t>  Stanford. Same manifests, different admission.</a:t>
+            </a:r>
+          </a:p>
+          <a:p>
+            <a:r>
+              <a:t>· Kueue LocalQueue is student-queue; the CPU plane is bare podman, no scheduler.</a:t>
             </a:r>
           </a:p>
         </p:txBody>
@@ -897,177 +856,138 @@
           <a:lstStyle/>
           <a:p>
             <a:r>
-              <a:t>LUIS  ~2:30</a:t>
+              <a:t>LUIS  ~65 s</a:t>
             </a:r>
           </a:p>
           <a:p/>
           <a:p>
             <a:r>
-              <a:t>"We did not measure total runtime and divide by steps.</a:t>
+              <a:t>"We did not time the job and divide by steps.</a:t>
             </a:r>
           </a:p>
           <a:p/>
           <a:p>
             <a:r>
-              <a:t>[point at the left table, top to bottom]</a:t>
-            </a:r>
-          </a:p>
-          <a:p>
-            <a:r>
-              <a:t>Four quantities, each with a named instrument. Chip utilisation is sampled from</a:t>
-            </a:r>
-          </a:p>
-          <a:p>
-            <a:r>
-              <a:t>nvidia-smi inside the pod once a second, 111 samples on the run you are</a:t>
-            </a:r>
-          </a:p>
-          <a:p>
-            <a:r>
-              <a:t>looking at, and from psutil on the CPU node. Peak memory comes from JAX's own</a:t>
-            </a:r>
-          </a:p>
-          <a:p>
-            <a:r>
-              <a:t>memory_stats on the accelerators and from peak resident set size on the CPU. The</a:t>
-            </a:r>
-          </a:p>
-          <a:p>
-            <a:r>
-              <a:t>TPU is the honest gap here: JAX gives us its memory statistics but exposes no core</a:t>
-            </a:r>
-          </a:p>
-          <a:p>
-            <a:r>
-              <a:t>utilisation counter at all, which is why that cell on the next slide says so</a:t>
-            </a:r>
-          </a:p>
-          <a:p>
-            <a:r>
-              <a:t>instead of showing a number that would mean something else.</a:t>
-            </a:r>
-          </a:p>
-          <a:p>
-            <a:r>
-              <a:t>[cut] Step times are reported as median, p10 and p90</a:t>
-            </a:r>
-          </a:p>
-          <a:p>
-            <a:r>
-              <a:t>with the warmup steps excluded, 10 of them on this run, never as a mean,</a:t>
-            </a:r>
-          </a:p>
-          <a:p>
-            <a:r>
-              <a:t>because the first step carries the compile and would poison the average. And the</a:t>
-            </a:r>
-          </a:p>
-          <a:p>
-            <a:r>
-              <a:t>wall clock is decomposed into six phases that are required to sum</a:t>
-            </a:r>
-          </a:p>
-          <a:p>
-            <a:r>
-              <a:t>back to the total; whatever is left over is written to a field called 'other'</a:t>
-            </a:r>
-          </a:p>
-          <a:p>
-            <a:r>
-              <a:t>rather than quietly dropped.</a:t>
+              <a:t>[left table]</a:t>
+            </a:r>
+          </a:p>
+          <a:p>
+            <a:r>
+              <a:t>Four quantities, each with a named instrument. Utilisation from nvidia-smi once a</a:t>
+            </a:r>
+          </a:p>
+          <a:p>
+            <a:r>
+              <a:t>second inside the pod, psutil on the CPU node. Peak memory from JAX's own</a:t>
+            </a:r>
+          </a:p>
+          <a:p>
+            <a:r>
+              <a:t>memory_stats, peak RSS on the CPU. Step times as median and percentiles, warmup</a:t>
+            </a:r>
+          </a:p>
+          <a:p>
+            <a:r>
+              <a:t>excluded. And the wall clock split into six phases that are required to sum back to</a:t>
+            </a:r>
+          </a:p>
+          <a:p>
+            <a:r>
+              <a:t>the total.</a:t>
             </a:r>
           </a:p>
           <a:p/>
           <a:p>
             <a:r>
-              <a:t>[point at the bar at the top right]</a:t>
-            </a:r>
-          </a:p>
-          <a:p>
-            <a:r>
-              <a:t>That decomposition is this bar, for one real run: 733 seconds</a:t>
-            </a:r>
-          </a:p>
-          <a:p>
-            <a:r>
-              <a:t>of wall clock, left to right. Scheduling, then the big grey block, which is</a:t>
-            </a:r>
-          </a:p>
-          <a:p>
-            <a:r>
-              <a:t>32 percent of the run just reading the checkpoint. Then XLA compile</a:t>
-            </a:r>
-          </a:p>
-          <a:p>
-            <a:r>
-              <a:t>above the bar. The orange block, 28 percent, is the only part that</a:t>
-            </a:r>
-          </a:p>
-          <a:p>
-            <a:r>
-              <a:t>is arithmetic. That single picture is the whole finding of this project.</a:t>
+              <a:t>[the bar]</a:t>
+            </a:r>
+          </a:p>
+          <a:p>
+            <a:r>
+              <a:t>That is this bar: 733 seconds, left to right. 32 percent of it is just reading the</a:t>
+            </a:r>
+          </a:p>
+          <a:p>
+            <a:r>
+              <a:t>checkpoint. Only the orange block, 28 percent, is arithmetic.</a:t>
             </a:r>
           </a:p>
           <a:p/>
           <a:p>
             <a:r>
-              <a:t>[point at the table underneath]</a:t>
-            </a:r>
-          </a:p>
-          <a:p>
-            <a:r>
-              <a:t>Memory: for each backend, the largest configuration that fitted and the one that</a:t>
-            </a:r>
-          </a:p>
-          <a:p>
-            <a:r>
-              <a:t>did not. Two thirds occupancy on all three, and one batch step later, all three</a:t>
-            </a:r>
-          </a:p>
-          <a:p>
-            <a:r>
-              <a:t>are dead. We keep those failed cells rather than dropping them, because the</a:t>
-            </a:r>
-          </a:p>
-          <a:p>
-            <a:r>
-              <a:t>failure boundary is exactly what a memory chart needs.</a:t>
+              <a:t>[table underneath]</a:t>
+            </a:r>
+          </a:p>
+          <a:p>
+            <a:r>
+              <a:t>And memory is what ends every sweep: the largest configuration that fitted, and the</a:t>
+            </a:r>
+          </a:p>
+          <a:p>
+            <a:r>
+              <a:t>batch that killed it. We keep the failed cells.</a:t>
             </a:r>
           </a:p>
           <a:p/>
           <a:p>
             <a:r>
-              <a:t>[point at the red box, left]</a:t>
-            </a:r>
-          </a:p>
-          <a:p>
-            <a:r>
-              <a:t>Last, the part I would defend hardest. One run came back at ninety-three</a:t>
-            </a:r>
-          </a:p>
-          <a:p>
-            <a:r>
-              <a:t>microseconds per step, eleven million tokens a second. Physically impossible, and</a:t>
-            </a:r>
-          </a:p>
-          <a:p>
-            <a:r>
-              <a:t>it carried a passing status. What caught it was that the telemetry module had</a:t>
-            </a:r>
-          </a:p>
-          <a:p>
-            <a:r>
-              <a:t>written into its own notes field that it might have timed dispatch instead of</a:t>
-            </a:r>
-          </a:p>
-          <a:p>
-            <a:r>
-              <a:t>completion. We threw the run away and repeated it. A passing status is not</a:t>
-            </a:r>
-          </a:p>
-          <a:p>
-            <a:r>
-              <a:t>sufficient to trust a record."</a:t>
+              <a:t>[red box]</a:t>
+            </a:r>
+          </a:p>
+          <a:p>
+            <a:r>
+              <a:t>One run came back at eleven million tokens a second carrying a passing status. Its</a:t>
+            </a:r>
+          </a:p>
+          <a:p>
+            <a:r>
+              <a:t>own notes field caught it. A passing status is not enough to trust a record."</a:t>
+            </a:r>
+          </a:p>
+          <a:p/>
+          <a:p>
+            <a:r>
+              <a:t>IF ASKED</a:t>
+            </a:r>
+          </a:p>
+          <a:p>
+            <a:r>
+              <a:t>· The lie in detail: 93 µs per step, which is dispatch time, not completion. The</a:t>
+            </a:r>
+          </a:p>
+          <a:p>
+            <a:r>
+              <a:t>  telemetry module had written the suspicion into notes itself. Discarded, re-run.</a:t>
+            </a:r>
+          </a:p>
+          <a:p>
+            <a:r>
+              <a:t>· No TPU utilisation counter exists in JAX, only memory statistics. That is why the</a:t>
+            </a:r>
+          </a:p>
+          <a:p>
+            <a:r>
+              <a:t>  cell on slide 4 says so rather than showing a different quantity.</a:t>
+            </a:r>
+          </a:p>
+          <a:p>
+            <a:r>
+              <a:t>· Warmup excluded is 10 steps on this run, 2 on the CPU, 5 on the GPU. Never a mean,</a:t>
+            </a:r>
+          </a:p>
+          <a:p>
+            <a:r>
+              <a:t>  because the first step carries the compile.</a:t>
+            </a:r>
+          </a:p>
+          <a:p>
+            <a:r>
+              <a:t>· Unattributed time goes to an 'other' field rather than being dropped. Residual</a:t>
+            </a:r>
+          </a:p>
+          <a:p>
+            <a:r>
+              <a:t>  after reassembly is under 1.1e-13 s on all 8 records.</a:t>
             </a:r>
           </a:p>
         </p:txBody>
@@ -1137,169 +1057,170 @@
           <a:lstStyle/>
           <a:p>
             <a:r>
-              <a:t>LUIS  ~2:40   ·   the slide to spend time on, do not cut here</a:t>
+              <a:t>LUIS  ~90 s   ·   the slide to spend time on</a:t>
             </a:r>
           </a:p>
           <a:p/>
           <a:p>
             <a:r>
-              <a:t>"Two comparisons here, and the second one contradicts the first. That is the</a:t>
-            </a:r>
-          </a:p>
-          <a:p>
-            <a:r>
-              <a:t>point of the slide.</a:t>
+              <a:t>"Two comparisons, and the second contradicts the first.</a:t>
             </a:r>
           </a:p>
           <a:p/>
           <a:p>
             <a:r>
-              <a:t>[point at the top table, row by row]</a:t>
-            </a:r>
-          </a:p>
-          <a:p>
-            <a:r>
-              <a:t>The table is all three backends on identical code, identical model, identical</a:t>
-            </a:r>
-          </a:p>
-          <a:p>
-            <a:r>
-              <a:t>batch. Median step time: nineteen seconds on the CPU, eighty milliseconds on each</a:t>
-            </a:r>
-          </a:p>
-          <a:p>
-            <a:r>
-              <a:t>accelerator. That is 238 times on the GPU and 237 times on the TPU</a:t>
-            </a:r>
-          </a:p>
-          <a:p>
-            <a:r>
-              <a:t>slice, third row. Now look at the fourth row, because that is the row that</a:t>
-            </a:r>
-          </a:p>
-          <a:p>
-            <a:r>
-              <a:t>actually matters. Mean chip utilisation: 1.6 percent on the GH200. The</a:t>
-            </a:r>
-          </a:p>
-          <a:p>
-            <a:r>
-              <a:t>accelerator is idle for essentially the whole run. Peak memory, bottom row, is</a:t>
-            </a:r>
-          </a:p>
-          <a:p>
-            <a:r>
-              <a:t>5 and 7 percent. Neither chip is doing anything.</a:t>
+              <a:t>[top table]</a:t>
+            </a:r>
+          </a:p>
+          <a:p>
+            <a:r>
+              <a:t>All three backends, identical code, identical batch. Nineteen seconds a step on the</a:t>
+            </a:r>
+          </a:p>
+          <a:p>
+            <a:r>
+              <a:t>CPU, eighty milliseconds on both accelerators. That is 238 times.</a:t>
             </a:r>
           </a:p>
           <a:p/>
           <a:p>
             <a:r>
-              <a:t>[point at the bold line under the table]</a:t>
-            </a:r>
-          </a:p>
-          <a:p>
-            <a:r>
-              <a:t>So the two accelerators tie to within a quarter of a percent, and for a while we</a:t>
-            </a:r>
-          </a:p>
-          <a:p>
-            <a:r>
-              <a:t>thought that tie was the headline. It was an artefact. At batch one what we were</a:t>
-            </a:r>
-          </a:p>
-          <a:p>
-            <a:r>
-              <a:t>comparing was launch latency, not compute.</a:t>
+              <a:t>[fourth row]</a:t>
+            </a:r>
+          </a:p>
+          <a:p>
+            <a:r>
+              <a:t>But look at utilisation: 1.6 percent on the GH200. And peak memory, 5 and 7 percent.</a:t>
+            </a:r>
+          </a:p>
+          <a:p>
+            <a:r>
+              <a:t>Neither chip is doing anything. The two tie to within a quarter of a percent, and</a:t>
+            </a:r>
+          </a:p>
+          <a:p>
+            <a:r>
+              <a:t>that tie is an artefact: at batch one we were comparing launch latency, not compute.</a:t>
             </a:r>
           </a:p>
           <a:p/>
           <a:p>
             <a:r>
-              <a:t>[point at the chart]</a:t>
-            </a:r>
-          </a:p>
-          <a:p>
-            <a:r>
-              <a:t>This is the same two chips at four billion parameters, with the batch size swept</a:t>
-            </a:r>
-          </a:p>
-          <a:p>
-            <a:r>
-              <a:t>until they died. Orange is one GH200, blue is eight TPU chips. The Hopper climbs</a:t>
-            </a:r>
-          </a:p>
-          <a:p>
-            <a:r>
-              <a:t>from 11,557 to 13,218 tokens a second. The blue line is flat at about</a:t>
-            </a:r>
-          </a:p>
-          <a:p>
-            <a:r>
-              <a:t>4,678, which means the slice saturated at batch eight and the extra work</a:t>
-            </a:r>
-          </a:p>
-          <a:p>
-            <a:r>
-              <a:t>bought nothing at all. At batch 32 the blue line stops, because the slice runs out</a:t>
-            </a:r>
-          </a:p>
-          <a:p>
-            <a:r>
-              <a:t>of memory a full step before the GPU does.</a:t>
+              <a:t>[the chart]</a:t>
+            </a:r>
+          </a:p>
+          <a:p>
+            <a:r>
+              <a:t>Same two chips at four billion parameters, batch swept until they died. Orange, one</a:t>
+            </a:r>
+          </a:p>
+          <a:p>
+            <a:r>
+              <a:t>GH200, climbs from 11,557 to 13,218 tokens a second. Blue, eight TPU chips, is flat</a:t>
+            </a:r>
+          </a:p>
+          <a:p>
+            <a:r>
+              <a:t>at 4,678: saturated at batch eight, the extra work bought nothing. And it runs out</a:t>
+            </a:r>
+          </a:p>
+          <a:p>
+            <a:r>
+              <a:t>of memory a full step before the GPU.</a:t>
             </a:r>
           </a:p>
           <a:p/>
           <a:p>
             <a:r>
-              <a:t>So: 2.7 times the throughput of eight TPU chips, from one Hopper chip,</a:t>
-            </a:r>
-          </a:p>
-          <a:p>
-            <a:r>
-              <a:t>big number top right. The batch-one tie was not wrong, it was measured at an</a:t>
-            </a:r>
-          </a:p>
-          <a:p>
-            <a:r>
-              <a:t>operating point where the answer is meaningless.</a:t>
+              <a:t>So 2.7 times the throughput of eight TPU chips, from one Hopper chip. Same hardware,</a:t>
+            </a:r>
+          </a:p>
+          <a:p>
+            <a:r>
+              <a:t>opposite conclusion, because the first measurement was taken where the answer is</a:t>
+            </a:r>
+          </a:p>
+          <a:p>
+            <a:r>
+              <a:t>meaningless.</a:t>
             </a:r>
           </a:p>
           <a:p/>
           <a:p>
             <a:r>
-              <a:t>[point at the bottom right card]</a:t>
-            </a:r>
-          </a:p>
-          <a:p>
-            <a:r>
-              <a:t>And the controlled experiment. We had identified checkpoint load as the largest</a:t>
-            </a:r>
-          </a:p>
-          <a:p>
-            <a:r>
-              <a:t>phase, so we turned on the gcsfuse file cache and re-ran the identical job. Load</a:t>
-            </a:r>
-          </a:p>
-          <a:p>
-            <a:r>
-              <a:t>got 14.6 times faster, total wall clock fell 31 percent. The</a:t>
-            </a:r>
-          </a:p>
-          <a:p>
-            <a:r>
-              <a:t>control is the last line: median step time is unchanged to the fourth decimal.</a:t>
-            </a:r>
-          </a:p>
-          <a:p>
-            <a:r>
-              <a:t>Nothing about the computation moved. Only I/O did."</a:t>
+              <a:t>[bottom right]</a:t>
+            </a:r>
+          </a:p>
+          <a:p>
+            <a:r>
+              <a:t>And the controlled experiment. Checkpoint load was the largest phase, so we turned</a:t>
+            </a:r>
+          </a:p>
+          <a:p>
+            <a:r>
+              <a:t>on the gcsfuse file cache and re-ran. Load 14.6 times faster, wall clock down 31</a:t>
+            </a:r>
+          </a:p>
+          <a:p>
+            <a:r>
+              <a:t>percent. The control: median step time unchanged to the fourth decimal. Only I/O</a:t>
+            </a:r>
+          </a:p>
+          <a:p>
+            <a:r>
+              <a:t>moved."</a:t>
             </a:r>
           </a:p>
           <a:p/>
           <a:p>
             <a:r>
               <a:t>Hand back to Leonard.</a:t>
+            </a:r>
+          </a:p>
+          <a:p/>
+          <a:p>
+            <a:r>
+              <a:t>IF ASKED</a:t>
+            </a:r>
+          </a:p>
+          <a:p>
+            <a:r>
+              <a:t>· Why the GH200 wins under load: identical step speed at batch 1, but the slice</a:t>
+            </a:r>
+          </a:p>
+          <a:p>
+            <a:r>
+              <a:t>  stops scaling at batch 8 while the Hopper keeps going, and the slice pays 8 chips</a:t>
+            </a:r>
+          </a:p>
+          <a:p>
+            <a:r>
+              <a:t>  for it.</a:t>
+            </a:r>
+          </a:p>
+          <a:p>
+            <a:r>
+              <a:t>· Sequence length: 512 to 2048 grows step time as seq^1.30 with peak HBM flat. Remat</a:t>
+            </a:r>
+          </a:p>
+          <a:p>
+            <a:r>
+              <a:t>  trades capacity for time.</a:t>
+            </a:r>
+          </a:p>
+          <a:p>
+            <a:r>
+              <a:t>· Batch 16 on the TPU is 1.8 % slower per token than batch 8, so the batch the HBM</a:t>
+            </a:r>
+          </a:p>
+          <a:p>
+            <a:r>
+              <a:t>  ceiling forbids was not worth having anyway.</a:t>
+            </a:r>
+          </a:p>
+          <a:p>
+            <a:r>
+              <a:t>· File cache: fileCacheCapacity 0 to 20Gi on the gcsfuse mount, range reads cached.</a:t>
             </a:r>
           </a:p>
         </p:txBody>
@@ -1369,39 +1290,29 @@
           <a:lstStyle/>
           <a:p>
             <a:r>
-              <a:t>LEONARD  ~2:50</a:t>
+              <a:t>LEONARD  ~85 s</a:t>
             </a:r>
           </a:p>
           <a:p/>
           <a:p>
             <a:r>
-              <a:t>"Three findings, and then what it means for us.</a:t>
+              <a:t>"Three findings.</a:t>
             </a:r>
           </a:p>
           <a:p/>
           <a:p>
             <a:r>
-              <a:t>[point at the first card]</a:t>
-            </a:r>
-          </a:p>
-          <a:p>
-            <a:r>
-              <a:t>First, the chip was never the bottleneck. Of 733 seconds of</a:t>
-            </a:r>
-          </a:p>
-          <a:p>
-            <a:r>
-              <a:t>wall clock, only 28 percent is arithmetic, and the single largest</a:t>
-            </a:r>
-          </a:p>
-          <a:p>
-            <a:r>
-              <a:t>phase, 32 percent, is reading the checkpoint. We spent most of our</a:t>
-            </a:r>
-          </a:p>
-          <a:p>
-            <a:r>
-              <a:t>time not computing.</a:t>
+              <a:t>[first card]</a:t>
+            </a:r>
+          </a:p>
+          <a:p>
+            <a:r>
+              <a:t>The chip was never the bottleneck. Of 733 seconds, 28 percent is arithmetic. The</a:t>
+            </a:r>
+          </a:p>
+          <a:p>
+            <a:r>
+              <a:t>largest single phase is reading a checkpoint.</a:t>
             </a:r>
           </a:p>
           <a:p/>
@@ -1412,32 +1323,22 @@
           </a:p>
           <a:p>
             <a:r>
-              <a:t>Second, and this genuinely surprised us: scaling the model did not scale the</a:t>
-            </a:r>
-          </a:p>
-          <a:p>
-            <a:r>
-              <a:t>cost. Going from 0.6 to 4 billion parameters, under seven times, did not make the</a:t>
-            </a:r>
-          </a:p>
-          <a:p>
-            <a:r>
-              <a:t>CPU seven times slower. It made it impossible. The compiler never finished with</a:t>
-            </a:r>
-          </a:p>
-          <a:p>
-            <a:r>
-              <a:t>rematerialisation on, and the kernel killed the process without it, at 31.5</a:t>
-            </a:r>
-          </a:p>
-          <a:p>
-            <a:r>
-              <a:t>gigabytes against a 31 gibibyte machine. A speedup chart would have drawn a bar</a:t>
-            </a:r>
-          </a:p>
-          <a:p>
-            <a:r>
-              <a:t>there. The truth is there is no bar, and that discontinuity is the result.</a:t>
+              <a:t>Scaling the model did not scale the cost. Under seven times more parameters did not</a:t>
+            </a:r>
+          </a:p>
+          <a:p>
+            <a:r>
+              <a:t>make the CPU seven times slower, it made it impossible: the compiler never finished,</a:t>
+            </a:r>
+          </a:p>
+          <a:p>
+            <a:r>
+              <a:t>and without rematerialisation the kernel killed it at 31.5 gigabytes. A speedup</a:t>
+            </a:r>
+          </a:p>
+          <a:p>
+            <a:r>
+              <a:t>chart would have drawn a bar there. There is no bar.</a:t>
             </a:r>
           </a:p>
           <a:p/>
@@ -1448,121 +1349,127 @@
           </a:p>
           <a:p>
             <a:r>
-              <a:t>Third, and this is where the days actually went: the wall was in the supply</a:t>
-            </a:r>
-          </a:p>
-          <a:p>
-            <a:r>
-              <a:t>chain, not the silicon. The GH200 sat idle while we worked through an ARM64 host,</a:t>
-            </a:r>
-          </a:p>
-          <a:p>
-            <a:r>
-              <a:t>a segfaulting cross-build, a missing aarch64 wheel, absent credentials and a</a:t>
-            </a:r>
-          </a:p>
-          <a:p>
-            <a:r>
-              <a:t>registry rejection. Exactly one of the framework's thirty-six dependencies is</a:t>
-            </a:r>
-          </a:p>
-          <a:p>
-            <a:r>
-              <a:t>TPU-bound. Swapping that one pin is the entire port.</a:t>
+              <a:t>And the wall was in the supply chain, not the silicon. Exactly one of the</a:t>
+            </a:r>
+          </a:p>
+          <a:p>
+            <a:r>
+              <a:t>framework's thirty-six dependencies is TPU-bound. Swapping that one pin is the whole</a:t>
+            </a:r>
+          </a:p>
+          <a:p>
+            <a:r>
+              <a:t>port.</a:t>
             </a:r>
           </a:p>
           <a:p/>
           <a:p>
             <a:r>
-              <a:t>[point at the recommendation, bottom left]</a:t>
-            </a:r>
-          </a:p>
-          <a:p>
-            <a:r>
-              <a:t>[cut if slide 4 landed it] So the recommendation is not to scale out, it is to</a:t>
-            </a:r>
-          </a:p>
-          <a:p>
-            <a:r>
-              <a:t>amortise. Raise the batch only</a:t>
-            </a:r>
-          </a:p>
-          <a:p>
-            <a:r>
-              <a:t>until the chip is occupied, then attack fixed cost: cache the compilation, keep</a:t>
-            </a:r>
-          </a:p>
-          <a:p>
-            <a:r>
-              <a:t>workers warm instead of one pod per job, and turn on the file cache anywhere you</a:t>
-            </a:r>
-          </a:p>
-          <a:p>
-            <a:r>
-              <a:t>read a checkpoint.</a:t>
+              <a:t>[bottom left]</a:t>
+            </a:r>
+          </a:p>
+          <a:p>
+            <a:r>
+              <a:t>So: do not scale out, amortise. Raise the batch until the chip is occupied, then</a:t>
+            </a:r>
+          </a:p>
+          <a:p>
+            <a:r>
+              <a:t>attack fixed cost.</a:t>
             </a:r>
           </a:p>
           <a:p/>
           <a:p>
             <a:r>
-              <a:t>[point at the orange box, bottom right]</a:t>
-            </a:r>
-          </a:p>
-          <a:p>
-            <a:r>
-              <a:t>And for our startup, that is the answer we came for. Note the batch this is quoted</a:t>
-            </a:r>
-          </a:p>
-          <a:p>
-            <a:r>
-              <a:t>at: batch eight, which is the slice's own best operating point, not the one where</a:t>
-            </a:r>
-          </a:p>
-          <a:p>
-            <a:r>
-              <a:t>it looks worst. Even there, one GH200 is 2.5 times faster than the eight</a:t>
-            </a:r>
-          </a:p>
-          <a:p>
-            <a:r>
-              <a:t>chips and costs 10 times less per thousand steps, $0.56</a:t>
-            </a:r>
-          </a:p>
-          <a:p>
-            <a:r>
-              <a:t>against $5.72. One caveat we want to state ourselves: the TPU rate is what we were</a:t>
-            </a:r>
-          </a:p>
-          <a:p>
-            <a:r>
-              <a:t>actually billed, the GH200 rate is a market proxy because the hardware is</a:t>
-            </a:r>
-          </a:p>
-          <a:p>
-            <a:r>
-              <a:t>on-premises and Google does not sell one. We checked the ordering across the whole</a:t>
-            </a:r>
-          </a:p>
-          <a:p>
-            <a:r>
-              <a:t>published price range for that chip and it does not flip.</a:t>
+              <a:t>[orange box]</a:t>
+            </a:r>
+          </a:p>
+          <a:p>
+            <a:r>
+              <a:t>For us, that is the answer. At batch eight, the slice's own best point, one GH200 is</a:t>
+            </a:r>
+          </a:p>
+          <a:p>
+            <a:r>
+              <a:t>2.5 times faster and 10 times cheaper. The TPU rate is what we were billed, the</a:t>
+            </a:r>
+          </a:p>
+          <a:p>
+            <a:r>
+              <a:t>GH200 is a market proxy, and the ordering holds across its whole published price</a:t>
+            </a:r>
+          </a:p>
+          <a:p>
+            <a:r>
+              <a:t>range.</a:t>
             </a:r>
           </a:p>
           <a:p/>
           <a:p>
             <a:r>
-              <a:t>Self-hosting is not the cost problem we assumed it was. The real cost is fixed</a:t>
-            </a:r>
-          </a:p>
-          <a:p>
-            <a:r>
-              <a:t>overhead per job, and that is an architecture decision, not a hardware purchase.</a:t>
+              <a:t>Self-hosting was not the cost problem. Fixed overhead per job is. Thank you."</a:t>
             </a:r>
           </a:p>
           <a:p/>
           <a:p>
             <a:r>
-              <a:t>Happy to take questions."</a:t>
+              <a:t>TIMING   55 s · 55 s · 65 s · 90 s · 85 s   =   5:50 spoken, ~6:00 with handovers.</a:t>
+            </a:r>
+          </a:p>
+          <a:p>
+            <a:r>
+              <a:t>Read at ~135 words a minute. The IF ASKED blocks are not part of the 6 minutes.</a:t>
+            </a:r>
+          </a:p>
+          <a:p/>
+          <a:p>
+            <a:r>
+              <a:t>IF ASKED</a:t>
+            </a:r>
+          </a:p>
+          <a:p>
+            <a:r>
+              <a:t>· Biggest remaining win: a persistent XLA compile cache. Already plumbed and</a:t>
+            </a:r>
+          </a:p>
+          <a:p>
+            <a:r>
+              <a:t>  deliberately left off so the compile cost stays visible. Targets 26 to 32 % of</a:t>
+            </a:r>
+          </a:p>
+          <a:p>
+            <a:r>
+              <a:t>  wall clock across the runs we have.</a:t>
+            </a:r>
+          </a:p>
+          <a:p>
+            <a:r>
+              <a:t>· Why not more nodes: at 1.6 % utilisation there is nothing to parallelise. Scaling</a:t>
+            </a:r>
+          </a:p>
+          <a:p>
+            <a:r>
+              <a:t>  out multiplies the fixed cost we just identified.</a:t>
+            </a:r>
+          </a:p>
+          <a:p>
+            <a:r>
+              <a:t>· What we would do differently: check egress from inside the cluster, not from the</a:t>
+            </a:r>
+          </a:p>
+          <a:p>
+            <a:r>
+              <a:t>  node. That one unchecked inference nearly cost us the GPU row entirely.</a:t>
+            </a:r>
+          </a:p>
+          <a:p>
+            <a:r>
+              <a:t>· 4B on CPU: keep remat and XLA never finishes compiling, over 64 minutes single</a:t>
+            </a:r>
+          </a:p>
+          <a:p>
+            <a:r>
+              <a:t>  threaded. Drop it and the kernel OOM-kills at 31.5 GB against 31 GiB.</a:t>
             </a:r>
           </a:p>
         </p:txBody>
